--- a/data/archive/pulse_2026-03-12.pptx
+++ b/data/archive/pulse_2026-03-12.pptx
@@ -15,6 +15,15 @@
     <p:sldId id="263" r:id="rId14"/>
     <p:sldId id="264" r:id="rId15"/>
     <p:sldId id="265" r:id="rId16"/>
+    <p:sldId id="266" r:id="rId17"/>
+    <p:sldId id="267" r:id="rId18"/>
+    <p:sldId id="268" r:id="rId19"/>
+    <p:sldId id="269" r:id="rId20"/>
+    <p:sldId id="270" r:id="rId21"/>
+    <p:sldId id="271" r:id="rId22"/>
+    <p:sldId id="272" r:id="rId23"/>
+    <p:sldId id="273" r:id="rId24"/>
+    <p:sldId id="274" r:id="rId25"/>
   </p:sldIdLst>
   <p:sldSz cx="12191695" cy="6858000" type="screen4x3"/>
   <p:notesSz cx="6858000" cy="9144000"/>
@@ -3297,7 +3306,7 @@
             <a:avLst/>
           </a:prstGeom>
           <a:solidFill>
-            <a:srgbClr val="FF6B35"/>
+            <a:srgbClr val="E74C3C"/>
           </a:solidFill>
           <a:ln>
             <a:noFill/>
@@ -3350,13 +3359,13 @@
             <a:pPr algn="l">
               <a:defRPr sz="1000" b="1">
                 <a:solidFill>
-                  <a:srgbClr val="FF6B35"/>
-                </a:solidFill>
-                <a:latin typeface="Calibri"/>
-              </a:defRPr>
-            </a:pPr>
-            <a:r>
-              <a:t>🎊  WEEKLY RITUAL</a:t>
+                  <a:srgbClr val="E74C3C"/>
+                </a:solidFill>
+                <a:latin typeface="Calibri"/>
+              </a:defRPr>
+            </a:pPr>
+            <a:r>
+              <a:t>💪  CLAPS</a:t>
             </a:r>
           </a:p>
         </p:txBody>
@@ -3386,13 +3395,2581 @@
             <a:pPr algn="l">
               <a:defRPr sz="3200" b="1" i="0">
                 <a:solidFill>
-                  <a:srgbClr val="FF6B35"/>
-                </a:solidFill>
-                <a:latin typeface="Calibri"/>
-              </a:defRPr>
-            </a:pPr>
-            <a:r>
-              <a:t>Recognition Wave</a:t>
+                  <a:srgbClr val="E74C3C"/>
+                </a:solidFill>
+                <a:latin typeface="Calibri"/>
+              </a:defRPr>
+            </a:pPr>
+            <a:r>
+              <a:t>Multi-Team Recognition</a:t>
+            </a:r>
+          </a:p>
+        </p:txBody>
+      </p:sp>
+      <p:sp>
+        <p:nvSpPr>
+          <p:cNvPr id="5" name="TextBox 4"/>
+          <p:cNvSpPr txBox="1"/>
+          <p:nvPr/>
+        </p:nvSpPr>
+        <p:spPr>
+          <a:xfrm>
+            <a:off x="1097280" y="2103120"/>
+            <a:ext cx="2743200" cy="548640"/>
+          </a:xfrm>
+          <a:prstGeom prst="rect">
+            <a:avLst/>
+          </a:prstGeom>
+          <a:noFill/>
+        </p:spPr>
+        <p:txBody>
+          <a:bodyPr wrap="square">
+            <a:spAutoFit/>
+          </a:bodyPr>
+          <a:lstStyle/>
+          <a:p>
+            <a:pPr algn="l">
+              <a:defRPr sz="2800" b="1" i="0">
+                <a:solidFill>
+                  <a:srgbClr val="E74C3C"/>
+                </a:solidFill>
+                <a:latin typeface="Calibri"/>
+              </a:defRPr>
+            </a:pPr>
+            <a:r>
+              <a:t>8</a:t>
+            </a:r>
+          </a:p>
+        </p:txBody>
+      </p:sp>
+      <p:sp>
+        <p:nvSpPr>
+          <p:cNvPr id="6" name="TextBox 5"/>
+          <p:cNvSpPr txBox="1"/>
+          <p:nvPr/>
+        </p:nvSpPr>
+        <p:spPr>
+          <a:xfrm>
+            <a:off x="1097280" y="2651760"/>
+            <a:ext cx="9966960" cy="365760"/>
+          </a:xfrm>
+          <a:prstGeom prst="rect">
+            <a:avLst/>
+          </a:prstGeom>
+          <a:noFill/>
+        </p:spPr>
+        <p:txBody>
+          <a:bodyPr wrap="square">
+            <a:spAutoFit/>
+          </a:bodyPr>
+          <a:lstStyle/>
+          <a:p>
+            <a:pPr algn="l">
+              <a:defRPr sz="1400" b="0" i="0">
+                <a:solidFill>
+                  <a:srgbClr val="E2E2EA"/>
+                </a:solidFill>
+                <a:latin typeface="Calibri"/>
+              </a:defRPr>
+            </a:pPr>
+            <a:r>
+              <a:t>from Alexandr Zhitlukhin</a:t>
+            </a:r>
+          </a:p>
+        </p:txBody>
+      </p:sp>
+      <p:sp>
+        <p:nvSpPr>
+          <p:cNvPr id="7" name="TextBox 6"/>
+          <p:cNvSpPr txBox="1"/>
+          <p:nvPr/>
+        </p:nvSpPr>
+        <p:spPr>
+          <a:xfrm>
+            <a:off x="1097280" y="3108960"/>
+            <a:ext cx="9966960" cy="365760"/>
+          </a:xfrm>
+          <a:prstGeom prst="rect">
+            <a:avLst/>
+          </a:prstGeom>
+          <a:noFill/>
+        </p:spPr>
+        <p:txBody>
+          <a:bodyPr wrap="square">
+            <a:spAutoFit/>
+          </a:bodyPr>
+          <a:lstStyle/>
+          <a:p>
+            <a:pPr algn="l">
+              <a:defRPr sz="1400" b="1" i="0">
+                <a:solidFill>
+                  <a:srgbClr val="FFFFFF"/>
+                </a:solidFill>
+                <a:latin typeface="Calibri"/>
+              </a:defRPr>
+            </a:pPr>
+            <a:r>
+              <a:t>to: ArtKip, Taha, Agustin, Francesco, Alessandro, Anna Timoshenko</a:t>
+            </a:r>
+          </a:p>
+        </p:txBody>
+      </p:sp>
+      <p:sp>
+        <p:nvSpPr>
+          <p:cNvPr id="8" name="TextBox 7"/>
+          <p:cNvSpPr txBox="1"/>
+          <p:nvPr/>
+        </p:nvSpPr>
+        <p:spPr>
+          <a:xfrm>
+            <a:off x="1097280" y="3749039"/>
+            <a:ext cx="9966960" cy="1097280"/>
+          </a:xfrm>
+          <a:prstGeom prst="rect">
+            <a:avLst/>
+          </a:prstGeom>
+          <a:noFill/>
+        </p:spPr>
+        <p:txBody>
+          <a:bodyPr wrap="square">
+            <a:spAutoFit/>
+          </a:bodyPr>
+          <a:lstStyle/>
+          <a:p>
+            <a:pPr algn="l">
+              <a:defRPr sz="1500" b="0" i="1">
+                <a:solidFill>
+                  <a:srgbClr val="E2E2EA"/>
+                </a:solidFill>
+                <a:latin typeface="Calibri"/>
+              </a:defRPr>
+            </a:pPr>
+            <a:r>
+              <a:t>"Incredible cross-functional collaboration"</a:t>
+            </a:r>
+          </a:p>
+        </p:txBody>
+      </p:sp>
+      <p:sp>
+        <p:nvSpPr>
+          <p:cNvPr id="9" name="TextBox 8"/>
+          <p:cNvSpPr txBox="1"/>
+          <p:nvPr/>
+        </p:nvSpPr>
+        <p:spPr>
+          <a:xfrm>
+            <a:off x="1097280" y="5120640"/>
+            <a:ext cx="9966960" cy="457200"/>
+          </a:xfrm>
+          <a:prstGeom prst="rect">
+            <a:avLst/>
+          </a:prstGeom>
+          <a:noFill/>
+        </p:spPr>
+        <p:txBody>
+          <a:bodyPr wrap="square">
+            <a:spAutoFit/>
+          </a:bodyPr>
+          <a:lstStyle/>
+          <a:p>
+            <a:pPr algn="l">
+              <a:defRPr sz="1200" b="1" i="0">
+                <a:solidFill>
+                  <a:srgbClr val="E74C3C"/>
+                </a:solidFill>
+                <a:latin typeface="Calibri"/>
+              </a:defRPr>
+            </a:pPr>
+            <a:r>
+              <a:t>TEAMWORK · COLLABORATION</a:t>
+            </a:r>
+          </a:p>
+        </p:txBody>
+      </p:sp>
+    </p:spTree>
+  </p:cSld>
+  <p:clrMapOvr>
+    <a:masterClrMapping/>
+  </p:clrMapOvr>
+</p:sld>
+</file>
+
+<file path=ppt/slides/slide11.xml><?xml version="1.0" encoding="utf-8"?>
+<p:sld xmlns:a="http://schemas.openxmlformats.org/drawingml/2006/main" xmlns:p="http://schemas.openxmlformats.org/presentationml/2006/main" xmlns:r="http://schemas.openxmlformats.org/officeDocument/2006/relationships">
+  <p:cSld>
+    <p:bg>
+      <p:bgPr>
+        <a:solidFill>
+          <a:srgbClr val="08080C"/>
+        </a:solidFill>
+        <a:effectLst/>
+      </p:bgPr>
+    </p:bg>
+    <p:spTree>
+      <p:nvGrpSpPr>
+        <p:cNvPr id="1" name=""/>
+        <p:cNvGrpSpPr/>
+        <p:nvPr/>
+      </p:nvGrpSpPr>
+      <p:grpSpPr/>
+      <p:sp>
+        <p:nvSpPr>
+          <p:cNvPr id="2" name="Rectangle 1"/>
+          <p:cNvSpPr/>
+          <p:nvPr/>
+        </p:nvSpPr>
+        <p:spPr>
+          <a:xfrm>
+            <a:off x="0" y="365760"/>
+            <a:ext cx="12191695" cy="54864"/>
+          </a:xfrm>
+          <a:prstGeom prst="rect">
+            <a:avLst/>
+          </a:prstGeom>
+          <a:solidFill>
+            <a:srgbClr val="16A085"/>
+          </a:solidFill>
+          <a:ln>
+            <a:noFill/>
+          </a:ln>
+        </p:spPr>
+        <p:style>
+          <a:lnRef idx="1">
+            <a:schemeClr val="accent1"/>
+          </a:lnRef>
+          <a:fillRef idx="3">
+            <a:schemeClr val="accent1"/>
+          </a:fillRef>
+          <a:effectRef idx="2">
+            <a:schemeClr val="accent1"/>
+          </a:effectRef>
+          <a:fontRef idx="minor">
+            <a:schemeClr val="lt1"/>
+          </a:fontRef>
+        </p:style>
+        <p:txBody>
+          <a:bodyPr rtlCol="0" anchor="ctr"/>
+          <a:lstStyle/>
+          <a:p>
+            <a:pPr algn="ctr"/>
+          </a:p>
+        </p:txBody>
+      </p:sp>
+      <p:sp>
+        <p:nvSpPr>
+          <p:cNvPr id="3" name="TextBox 2"/>
+          <p:cNvSpPr txBox="1"/>
+          <p:nvPr/>
+        </p:nvSpPr>
+        <p:spPr>
+          <a:xfrm>
+            <a:off x="1097280" y="731520"/>
+            <a:ext cx="3657600" cy="365760"/>
+          </a:xfrm>
+          <a:prstGeom prst="rect">
+            <a:avLst/>
+          </a:prstGeom>
+          <a:noFill/>
+        </p:spPr>
+        <p:txBody>
+          <a:bodyPr wrap="none">
+            <a:spAutoFit/>
+          </a:bodyPr>
+          <a:lstStyle/>
+          <a:p>
+            <a:pPr algn="l">
+              <a:defRPr sz="1000" b="1">
+                <a:solidFill>
+                  <a:srgbClr val="16A085"/>
+                </a:solidFill>
+                <a:latin typeface="Calibri"/>
+              </a:defRPr>
+            </a:pPr>
+            <a:r>
+              <a:t>💰  MILESTONE</a:t>
+            </a:r>
+          </a:p>
+        </p:txBody>
+      </p:sp>
+      <p:sp>
+        <p:nvSpPr>
+          <p:cNvPr id="4" name="TextBox 3"/>
+          <p:cNvSpPr txBox="1"/>
+          <p:nvPr/>
+        </p:nvSpPr>
+        <p:spPr>
+          <a:xfrm>
+            <a:off x="1097280" y="1188720"/>
+            <a:ext cx="9966960" cy="731520"/>
+          </a:xfrm>
+          <a:prstGeom prst="rect">
+            <a:avLst/>
+          </a:prstGeom>
+          <a:noFill/>
+        </p:spPr>
+        <p:txBody>
+          <a:bodyPr wrap="square">
+            <a:spAutoFit/>
+          </a:bodyPr>
+          <a:lstStyle/>
+          <a:p>
+            <a:pPr algn="l">
+              <a:defRPr sz="3200" b="1" i="0">
+                <a:solidFill>
+                  <a:srgbClr val="16A085"/>
+                </a:solidFill>
+                <a:latin typeface="Calibri"/>
+              </a:defRPr>
+            </a:pPr>
+            <a:r>
+              <a:t>Revenue Milestone</a:t>
+            </a:r>
+          </a:p>
+        </p:txBody>
+      </p:sp>
+      <p:sp>
+        <p:nvSpPr>
+          <p:cNvPr id="5" name="TextBox 4"/>
+          <p:cNvSpPr txBox="1"/>
+          <p:nvPr/>
+        </p:nvSpPr>
+        <p:spPr>
+          <a:xfrm>
+            <a:off x="1097280" y="2103120"/>
+            <a:ext cx="4572000" cy="822960"/>
+          </a:xfrm>
+          <a:prstGeom prst="rect">
+            <a:avLst/>
+          </a:prstGeom>
+          <a:noFill/>
+        </p:spPr>
+        <p:txBody>
+          <a:bodyPr wrap="square">
+            <a:spAutoFit/>
+          </a:bodyPr>
+          <a:lstStyle/>
+          <a:p>
+            <a:pPr algn="l">
+              <a:defRPr sz="5200" b="1" i="0">
+                <a:solidFill>
+                  <a:srgbClr val="16A085"/>
+                </a:solidFill>
+                <a:latin typeface="Calibri"/>
+              </a:defRPr>
+            </a:pPr>
+            <a:r>
+              <a:t>$390k</a:t>
+            </a:r>
+          </a:p>
+        </p:txBody>
+      </p:sp>
+      <p:sp>
+        <p:nvSpPr>
+          <p:cNvPr id="6" name="TextBox 5"/>
+          <p:cNvSpPr txBox="1"/>
+          <p:nvPr/>
+        </p:nvSpPr>
+        <p:spPr>
+          <a:xfrm>
+            <a:off x="1097280" y="2926080"/>
+            <a:ext cx="4572000" cy="365760"/>
+          </a:xfrm>
+          <a:prstGeom prst="rect">
+            <a:avLst/>
+          </a:prstGeom>
+          <a:noFill/>
+        </p:spPr>
+        <p:txBody>
+          <a:bodyPr wrap="square">
+            <a:spAutoFit/>
+          </a:bodyPr>
+          <a:lstStyle/>
+          <a:p>
+            <a:pPr algn="l">
+              <a:defRPr sz="1100" b="0" i="0">
+                <a:solidFill>
+                  <a:srgbClr val="8F95A3"/>
+                </a:solidFill>
+                <a:latin typeface="Calibri"/>
+              </a:defRPr>
+            </a:pPr>
+            <a:r>
+              <a:t>Net Revenue (One Week)</a:t>
+            </a:r>
+          </a:p>
+        </p:txBody>
+      </p:sp>
+      <p:sp>
+        <p:nvSpPr>
+          <p:cNvPr id="7" name="TextBox 6"/>
+          <p:cNvSpPr txBox="1"/>
+          <p:nvPr/>
+        </p:nvSpPr>
+        <p:spPr>
+          <a:xfrm>
+            <a:off x="1097280" y="3566160"/>
+            <a:ext cx="9966960" cy="457200"/>
+          </a:xfrm>
+          <a:prstGeom prst="rect">
+            <a:avLst/>
+          </a:prstGeom>
+          <a:noFill/>
+        </p:spPr>
+        <p:txBody>
+          <a:bodyPr wrap="square">
+            <a:spAutoFit/>
+          </a:bodyPr>
+          <a:lstStyle/>
+          <a:p>
+            <a:pPr algn="l">
+              <a:defRPr sz="1800" b="1" i="0">
+                <a:solidFill>
+                  <a:srgbClr val="FFFFFF"/>
+                </a:solidFill>
+                <a:latin typeface="Calibri"/>
+              </a:defRPr>
+            </a:pPr>
+            <a:r>
+              <a:t>Weekly Sales Achievement</a:t>
+            </a:r>
+          </a:p>
+        </p:txBody>
+      </p:sp>
+      <p:sp>
+        <p:nvSpPr>
+          <p:cNvPr id="8" name="TextBox 7"/>
+          <p:cNvSpPr txBox="1"/>
+          <p:nvPr/>
+        </p:nvSpPr>
+        <p:spPr>
+          <a:xfrm>
+            <a:off x="1097280" y="4206240"/>
+            <a:ext cx="9966960" cy="1371600"/>
+          </a:xfrm>
+          <a:prstGeom prst="rect">
+            <a:avLst/>
+          </a:prstGeom>
+          <a:noFill/>
+        </p:spPr>
+        <p:txBody>
+          <a:bodyPr wrap="square">
+            <a:spAutoFit/>
+          </a:bodyPr>
+          <a:lstStyle/>
+          <a:p>
+            <a:pPr algn="l">
+              <a:defRPr sz="1500" b="0" i="0">
+                <a:solidFill>
+                  <a:srgbClr val="E2E2EA"/>
+                </a:solidFill>
+                <a:latin typeface="Calibri"/>
+              </a:defRPr>
+            </a:pPr>
+            <a:r>
+              <a:t>Exceptional performance across all revenue streams</a:t>
+            </a:r>
+          </a:p>
+        </p:txBody>
+      </p:sp>
+    </p:spTree>
+  </p:cSld>
+  <p:clrMapOvr>
+    <a:masterClrMapping/>
+  </p:clrMapOvr>
+</p:sld>
+</file>
+
+<file path=ppt/slides/slide12.xml><?xml version="1.0" encoding="utf-8"?>
+<p:sld xmlns:a="http://schemas.openxmlformats.org/drawingml/2006/main" xmlns:p="http://schemas.openxmlformats.org/presentationml/2006/main" xmlns:r="http://schemas.openxmlformats.org/officeDocument/2006/relationships">
+  <p:cSld>
+    <p:bg>
+      <p:bgPr>
+        <a:solidFill>
+          <a:srgbClr val="08080C"/>
+        </a:solidFill>
+        <a:effectLst/>
+      </p:bgPr>
+    </p:bg>
+    <p:spTree>
+      <p:nvGrpSpPr>
+        <p:cNvPr id="1" name=""/>
+        <p:cNvGrpSpPr/>
+        <p:nvPr/>
+      </p:nvGrpSpPr>
+      <p:grpSpPr/>
+      <p:sp>
+        <p:nvSpPr>
+          <p:cNvPr id="2" name="Rectangle 1"/>
+          <p:cNvSpPr/>
+          <p:nvPr/>
+        </p:nvSpPr>
+        <p:spPr>
+          <a:xfrm>
+            <a:off x="0" y="365760"/>
+            <a:ext cx="12191695" cy="54864"/>
+          </a:xfrm>
+          <a:prstGeom prst="rect">
+            <a:avLst/>
+          </a:prstGeom>
+          <a:solidFill>
+            <a:srgbClr val="C0392B"/>
+          </a:solidFill>
+          <a:ln>
+            <a:noFill/>
+          </a:ln>
+        </p:spPr>
+        <p:style>
+          <a:lnRef idx="1">
+            <a:schemeClr val="accent1"/>
+          </a:lnRef>
+          <a:fillRef idx="3">
+            <a:schemeClr val="accent1"/>
+          </a:fillRef>
+          <a:effectRef idx="2">
+            <a:schemeClr val="accent1"/>
+          </a:effectRef>
+          <a:fontRef idx="minor">
+            <a:schemeClr val="lt1"/>
+          </a:fontRef>
+        </p:style>
+        <p:txBody>
+          <a:bodyPr rtlCol="0" anchor="ctr"/>
+          <a:lstStyle/>
+          <a:p>
+            <a:pPr algn="ctr"/>
+          </a:p>
+        </p:txBody>
+      </p:sp>
+      <p:sp>
+        <p:nvSpPr>
+          <p:cNvPr id="3" name="TextBox 2"/>
+          <p:cNvSpPr txBox="1"/>
+          <p:nvPr/>
+        </p:nvSpPr>
+        <p:spPr>
+          <a:xfrm>
+            <a:off x="1097280" y="731520"/>
+            <a:ext cx="3657600" cy="365760"/>
+          </a:xfrm>
+          <a:prstGeom prst="rect">
+            <a:avLst/>
+          </a:prstGeom>
+          <a:noFill/>
+        </p:spPr>
+        <p:txBody>
+          <a:bodyPr wrap="none">
+            <a:spAutoFit/>
+          </a:bodyPr>
+          <a:lstStyle/>
+          <a:p>
+            <a:pPr algn="l">
+              <a:defRPr sz="1000" b="1">
+                <a:solidFill>
+                  <a:srgbClr val="C0392B"/>
+                </a:solidFill>
+                <a:latin typeface="Calibri"/>
+              </a:defRPr>
+            </a:pPr>
+            <a:r>
+              <a:t>🛡️  WIN</a:t>
+            </a:r>
+          </a:p>
+        </p:txBody>
+      </p:sp>
+      <p:sp>
+        <p:nvSpPr>
+          <p:cNvPr id="4" name="TextBox 3"/>
+          <p:cNvSpPr txBox="1"/>
+          <p:nvPr/>
+        </p:nvSpPr>
+        <p:spPr>
+          <a:xfrm>
+            <a:off x="1097280" y="1188720"/>
+            <a:ext cx="9966960" cy="731520"/>
+          </a:xfrm>
+          <a:prstGeom prst="rect">
+            <a:avLst/>
+          </a:prstGeom>
+          <a:noFill/>
+        </p:spPr>
+        <p:txBody>
+          <a:bodyPr wrap="square">
+            <a:spAutoFit/>
+          </a:bodyPr>
+          <a:lstStyle/>
+          <a:p>
+            <a:pPr algn="l">
+              <a:defRPr sz="3200" b="1" i="0">
+                <a:solidFill>
+                  <a:srgbClr val="C0392B"/>
+                </a:solidFill>
+                <a:latin typeface="Calibri"/>
+              </a:defRPr>
+            </a:pPr>
+            <a:r>
+              <a:t>Security Victory</a:t>
+            </a:r>
+          </a:p>
+        </p:txBody>
+      </p:sp>
+      <p:sp>
+        <p:nvSpPr>
+          <p:cNvPr id="5" name="TextBox 4"/>
+          <p:cNvSpPr txBox="1"/>
+          <p:nvPr/>
+        </p:nvSpPr>
+        <p:spPr>
+          <a:xfrm>
+            <a:off x="1097280" y="2103120"/>
+            <a:ext cx="4572000" cy="822960"/>
+          </a:xfrm>
+          <a:prstGeom prst="rect">
+            <a:avLst/>
+          </a:prstGeom>
+          <a:noFill/>
+        </p:spPr>
+        <p:txBody>
+          <a:bodyPr wrap="square">
+            <a:spAutoFit/>
+          </a:bodyPr>
+          <a:lstStyle/>
+          <a:p>
+            <a:pPr algn="l">
+              <a:defRPr sz="4800" b="1" i="0">
+                <a:solidFill>
+                  <a:srgbClr val="C0392B"/>
+                </a:solidFill>
+                <a:latin typeface="Calibri"/>
+              </a:defRPr>
+            </a:pPr>
+            <a:r>
+              <a:t>4</a:t>
+            </a:r>
+          </a:p>
+        </p:txBody>
+      </p:sp>
+      <p:sp>
+        <p:nvSpPr>
+          <p:cNvPr id="6" name="TextBox 5"/>
+          <p:cNvSpPr txBox="1"/>
+          <p:nvPr/>
+        </p:nvSpPr>
+        <p:spPr>
+          <a:xfrm>
+            <a:off x="1097280" y="2834640"/>
+            <a:ext cx="4572000" cy="365760"/>
+          </a:xfrm>
+          <a:prstGeom prst="rect">
+            <a:avLst/>
+          </a:prstGeom>
+          <a:noFill/>
+        </p:spPr>
+        <p:txBody>
+          <a:bodyPr wrap="square">
+            <a:spAutoFit/>
+          </a:bodyPr>
+          <a:lstStyle/>
+          <a:p>
+            <a:pPr algn="l">
+              <a:defRPr sz="1200" b="0" i="0">
+                <a:solidFill>
+                  <a:srgbClr val="8F95A3"/>
+                </a:solidFill>
+                <a:latin typeface="Calibri"/>
+              </a:defRPr>
+            </a:pPr>
+            <a:r>
+              <a:t>% fraud rate</a:t>
+            </a:r>
+          </a:p>
+        </p:txBody>
+      </p:sp>
+      <p:sp>
+        <p:nvSpPr>
+          <p:cNvPr id="7" name="TextBox 6"/>
+          <p:cNvSpPr txBox="1"/>
+          <p:nvPr/>
+        </p:nvSpPr>
+        <p:spPr>
+          <a:xfrm>
+            <a:off x="1097280" y="3291840"/>
+            <a:ext cx="9966960" cy="365760"/>
+          </a:xfrm>
+          <a:prstGeom prst="rect">
+            <a:avLst/>
+          </a:prstGeom>
+          <a:noFill/>
+        </p:spPr>
+        <p:txBody>
+          <a:bodyPr wrap="square">
+            <a:spAutoFit/>
+          </a:bodyPr>
+          <a:lstStyle/>
+          <a:p>
+            <a:pPr algn="l">
+              <a:defRPr sz="1400" b="0" i="0">
+                <a:solidFill>
+                  <a:srgbClr val="E2E2EA"/>
+                </a:solidFill>
+                <a:latin typeface="Calibri"/>
+              </a:defRPr>
+            </a:pPr>
+            <a:r>
+              <a:t>by Security Team</a:t>
+            </a:r>
+          </a:p>
+        </p:txBody>
+      </p:sp>
+      <p:sp>
+        <p:nvSpPr>
+          <p:cNvPr id="8" name="TextBox 7"/>
+          <p:cNvSpPr txBox="1"/>
+          <p:nvPr/>
+        </p:nvSpPr>
+        <p:spPr>
+          <a:xfrm>
+            <a:off x="1097280" y="3840480"/>
+            <a:ext cx="9966960" cy="457200"/>
+          </a:xfrm>
+          <a:prstGeom prst="rect">
+            <a:avLst/>
+          </a:prstGeom>
+          <a:noFill/>
+        </p:spPr>
+        <p:txBody>
+          <a:bodyPr wrap="square">
+            <a:spAutoFit/>
+          </a:bodyPr>
+          <a:lstStyle/>
+          <a:p>
+            <a:pPr algn="l">
+              <a:defRPr sz="1800" b="1" i="0">
+                <a:solidFill>
+                  <a:srgbClr val="FFFFFF"/>
+                </a:solidFill>
+                <a:latin typeface="Calibri"/>
+              </a:defRPr>
+            </a:pPr>
+            <a:r>
+              <a:t>Fraud Rate Dramatically Reduced</a:t>
+            </a:r>
+          </a:p>
+        </p:txBody>
+      </p:sp>
+      <p:sp>
+        <p:nvSpPr>
+          <p:cNvPr id="9" name="TextBox 8"/>
+          <p:cNvSpPr txBox="1"/>
+          <p:nvPr/>
+        </p:nvSpPr>
+        <p:spPr>
+          <a:xfrm>
+            <a:off x="1097280" y="4389120"/>
+            <a:ext cx="9966960" cy="914400"/>
+          </a:xfrm>
+          <a:prstGeom prst="rect">
+            <a:avLst/>
+          </a:prstGeom>
+          <a:noFill/>
+        </p:spPr>
+        <p:txBody>
+          <a:bodyPr wrap="square">
+            <a:spAutoFit/>
+          </a:bodyPr>
+          <a:lstStyle/>
+          <a:p>
+            <a:pPr algn="l">
+              <a:defRPr sz="1400" b="0" i="0">
+                <a:solidFill>
+                  <a:srgbClr val="E2E2EA"/>
+                </a:solidFill>
+                <a:latin typeface="Calibri"/>
+              </a:defRPr>
+            </a:pPr>
+            <a:r>
+              <a:t>Dynamic SDK signatures cut fraud from 22% to under 4%</a:t>
+            </a:r>
+          </a:p>
+        </p:txBody>
+      </p:sp>
+      <p:sp>
+        <p:nvSpPr>
+          <p:cNvPr id="10" name="TextBox 9"/>
+          <p:cNvSpPr txBox="1"/>
+          <p:nvPr/>
+        </p:nvSpPr>
+        <p:spPr>
+          <a:xfrm>
+            <a:off x="1097280" y="5486400"/>
+            <a:ext cx="9966960" cy="457200"/>
+          </a:xfrm>
+          <a:prstGeom prst="rect">
+            <a:avLst/>
+          </a:prstGeom>
+          <a:noFill/>
+        </p:spPr>
+        <p:txBody>
+          <a:bodyPr wrap="square">
+            <a:spAutoFit/>
+          </a:bodyPr>
+          <a:lstStyle/>
+          <a:p>
+            <a:pPr algn="l">
+              <a:defRPr sz="1300" b="0" i="1">
+                <a:solidFill>
+                  <a:srgbClr val="8F95A3"/>
+                </a:solidFill>
+                <a:latin typeface="Calibri"/>
+              </a:defRPr>
+            </a:pPr>
+            <a:r>
+              <a:t>💬 "Revolutionary security improvements protecting our ecosystem"</a:t>
+            </a:r>
+          </a:p>
+        </p:txBody>
+      </p:sp>
+    </p:spTree>
+  </p:cSld>
+  <p:clrMapOvr>
+    <a:masterClrMapping/>
+  </p:clrMapOvr>
+</p:sld>
+</file>
+
+<file path=ppt/slides/slide13.xml><?xml version="1.0" encoding="utf-8"?>
+<p:sld xmlns:a="http://schemas.openxmlformats.org/drawingml/2006/main" xmlns:p="http://schemas.openxmlformats.org/presentationml/2006/main" xmlns:r="http://schemas.openxmlformats.org/officeDocument/2006/relationships">
+  <p:cSld>
+    <p:bg>
+      <p:bgPr>
+        <a:solidFill>
+          <a:srgbClr val="08080C"/>
+        </a:solidFill>
+        <a:effectLst/>
+      </p:bgPr>
+    </p:bg>
+    <p:spTree>
+      <p:nvGrpSpPr>
+        <p:cNvPr id="1" name=""/>
+        <p:cNvGrpSpPr/>
+        <p:nvPr/>
+      </p:nvGrpSpPr>
+      <p:grpSpPr/>
+      <p:sp>
+        <p:nvSpPr>
+          <p:cNvPr id="2" name="Rectangle 1"/>
+          <p:cNvSpPr/>
+          <p:nvPr/>
+        </p:nvSpPr>
+        <p:spPr>
+          <a:xfrm>
+            <a:off x="0" y="365760"/>
+            <a:ext cx="12191695" cy="54864"/>
+          </a:xfrm>
+          <a:prstGeom prst="rect">
+            <a:avLst/>
+          </a:prstGeom>
+          <a:solidFill>
+            <a:srgbClr val="8E44AD"/>
+          </a:solidFill>
+          <a:ln>
+            <a:noFill/>
+          </a:ln>
+        </p:spPr>
+        <p:style>
+          <a:lnRef idx="1">
+            <a:schemeClr val="accent1"/>
+          </a:lnRef>
+          <a:fillRef idx="3">
+            <a:schemeClr val="accent1"/>
+          </a:fillRef>
+          <a:effectRef idx="2">
+            <a:schemeClr val="accent1"/>
+          </a:effectRef>
+          <a:fontRef idx="minor">
+            <a:schemeClr val="lt1"/>
+          </a:fontRef>
+        </p:style>
+        <p:txBody>
+          <a:bodyPr rtlCol="0" anchor="ctr"/>
+          <a:lstStyle/>
+          <a:p>
+            <a:pPr algn="ctr"/>
+          </a:p>
+        </p:txBody>
+      </p:sp>
+      <p:sp>
+        <p:nvSpPr>
+          <p:cNvPr id="3" name="TextBox 2"/>
+          <p:cNvSpPr txBox="1"/>
+          <p:nvPr/>
+        </p:nvSpPr>
+        <p:spPr>
+          <a:xfrm>
+            <a:off x="1097280" y="731520"/>
+            <a:ext cx="3657600" cy="365760"/>
+          </a:xfrm>
+          <a:prstGeom prst="rect">
+            <a:avLst/>
+          </a:prstGeom>
+          <a:noFill/>
+        </p:spPr>
+        <p:txBody>
+          <a:bodyPr wrap="none">
+            <a:spAutoFit/>
+          </a:bodyPr>
+          <a:lstStyle/>
+          <a:p>
+            <a:pPr algn="l">
+              <a:defRPr sz="1000" b="1">
+                <a:solidFill>
+                  <a:srgbClr val="8E44AD"/>
+                </a:solidFill>
+                <a:latin typeface="Calibri"/>
+              </a:defRPr>
+            </a:pPr>
+            <a:r>
+              <a:t>🎮  MILESTONE</a:t>
+            </a:r>
+          </a:p>
+        </p:txBody>
+      </p:sp>
+      <p:sp>
+        <p:nvSpPr>
+          <p:cNvPr id="4" name="TextBox 3"/>
+          <p:cNvSpPr txBox="1"/>
+          <p:nvPr/>
+        </p:nvSpPr>
+        <p:spPr>
+          <a:xfrm>
+            <a:off x="1097280" y="1188720"/>
+            <a:ext cx="9966960" cy="731520"/>
+          </a:xfrm>
+          <a:prstGeom prst="rect">
+            <a:avLst/>
+          </a:prstGeom>
+          <a:noFill/>
+        </p:spPr>
+        <p:txBody>
+          <a:bodyPr wrap="square">
+            <a:spAutoFit/>
+          </a:bodyPr>
+          <a:lstStyle/>
+          <a:p>
+            <a:pPr algn="l">
+              <a:defRPr sz="3200" b="1" i="0">
+                <a:solidFill>
+                  <a:srgbClr val="8E44AD"/>
+                </a:solidFill>
+                <a:latin typeface="Calibri"/>
+              </a:defRPr>
+            </a:pPr>
+            <a:r>
+              <a:t>Gaming Profitability</a:t>
+            </a:r>
+          </a:p>
+        </p:txBody>
+      </p:sp>
+      <p:sp>
+        <p:nvSpPr>
+          <p:cNvPr id="5" name="TextBox 4"/>
+          <p:cNvSpPr txBox="1"/>
+          <p:nvPr/>
+        </p:nvSpPr>
+        <p:spPr>
+          <a:xfrm>
+            <a:off x="1097280" y="2103120"/>
+            <a:ext cx="4572000" cy="822960"/>
+          </a:xfrm>
+          <a:prstGeom prst="rect">
+            <a:avLst/>
+          </a:prstGeom>
+          <a:noFill/>
+        </p:spPr>
+        <p:txBody>
+          <a:bodyPr wrap="square">
+            <a:spAutoFit/>
+          </a:bodyPr>
+          <a:lstStyle/>
+          <a:p>
+            <a:pPr algn="l">
+              <a:defRPr sz="5200" b="1" i="0">
+                <a:solidFill>
+                  <a:srgbClr val="8E44AD"/>
+                </a:solidFill>
+                <a:latin typeface="Calibri"/>
+              </a:defRPr>
+            </a:pPr>
+            <a:r>
+              <a:t>2025</a:t>
+            </a:r>
+          </a:p>
+        </p:txBody>
+      </p:sp>
+      <p:sp>
+        <p:nvSpPr>
+          <p:cNvPr id="6" name="TextBox 5"/>
+          <p:cNvSpPr txBox="1"/>
+          <p:nvPr/>
+        </p:nvSpPr>
+        <p:spPr>
+          <a:xfrm>
+            <a:off x="1097280" y="2926080"/>
+            <a:ext cx="4572000" cy="365760"/>
+          </a:xfrm>
+          <a:prstGeom prst="rect">
+            <a:avLst/>
+          </a:prstGeom>
+          <a:noFill/>
+        </p:spPr>
+        <p:txBody>
+          <a:bodyPr wrap="square">
+            <a:spAutoFit/>
+          </a:bodyPr>
+          <a:lstStyle/>
+          <a:p>
+            <a:pPr algn="l">
+              <a:defRPr sz="1100" b="0" i="0">
+                <a:solidFill>
+                  <a:srgbClr val="8F95A3"/>
+                </a:solidFill>
+                <a:latin typeface="Calibri"/>
+              </a:defRPr>
+            </a:pPr>
+            <a:r>
+              <a:t>Year Gaming Became Profitable</a:t>
+            </a:r>
+          </a:p>
+        </p:txBody>
+      </p:sp>
+      <p:sp>
+        <p:nvSpPr>
+          <p:cNvPr id="7" name="TextBox 6"/>
+          <p:cNvSpPr txBox="1"/>
+          <p:nvPr/>
+        </p:nvSpPr>
+        <p:spPr>
+          <a:xfrm>
+            <a:off x="1097280" y="3566160"/>
+            <a:ext cx="9966960" cy="457200"/>
+          </a:xfrm>
+          <a:prstGeom prst="rect">
+            <a:avLst/>
+          </a:prstGeom>
+          <a:noFill/>
+        </p:spPr>
+        <p:txBody>
+          <a:bodyPr wrap="square">
+            <a:spAutoFit/>
+          </a:bodyPr>
+          <a:lstStyle/>
+          <a:p>
+            <a:pPr algn="l">
+              <a:defRPr sz="1800" b="1" i="0">
+                <a:solidFill>
+                  <a:srgbClr val="FFFFFF"/>
+                </a:solidFill>
+                <a:latin typeface="Calibri"/>
+              </a:defRPr>
+            </a:pPr>
+            <a:r>
+              <a:t>Gaming Division Success</a:t>
+            </a:r>
+          </a:p>
+        </p:txBody>
+      </p:sp>
+      <p:sp>
+        <p:nvSpPr>
+          <p:cNvPr id="8" name="TextBox 7"/>
+          <p:cNvSpPr txBox="1"/>
+          <p:nvPr/>
+        </p:nvSpPr>
+        <p:spPr>
+          <a:xfrm>
+            <a:off x="1097280" y="4206240"/>
+            <a:ext cx="9966960" cy="1371600"/>
+          </a:xfrm>
+          <a:prstGeom prst="rect">
+            <a:avLst/>
+          </a:prstGeom>
+          <a:noFill/>
+        </p:spPr>
+        <p:txBody>
+          <a:bodyPr wrap="square">
+            <a:spAutoFit/>
+          </a:bodyPr>
+          <a:lstStyle/>
+          <a:p>
+            <a:pPr algn="l">
+              <a:defRPr sz="1500" b="0" i="0">
+                <a:solidFill>
+                  <a:srgbClr val="E2E2EA"/>
+                </a:solidFill>
+                <a:latin typeface="Calibri"/>
+              </a:defRPr>
+            </a:pPr>
+            <a:r>
+              <a:t>Strategic pivot delivers sustainable profitability</a:t>
+            </a:r>
+          </a:p>
+        </p:txBody>
+      </p:sp>
+    </p:spTree>
+  </p:cSld>
+  <p:clrMapOvr>
+    <a:masterClrMapping/>
+  </p:clrMapOvr>
+</p:sld>
+</file>
+
+<file path=ppt/slides/slide14.xml><?xml version="1.0" encoding="utf-8"?>
+<p:sld xmlns:a="http://schemas.openxmlformats.org/drawingml/2006/main" xmlns:p="http://schemas.openxmlformats.org/presentationml/2006/main" xmlns:r="http://schemas.openxmlformats.org/officeDocument/2006/relationships">
+  <p:cSld>
+    <p:bg>
+      <p:bgPr>
+        <a:solidFill>
+          <a:srgbClr val="08080C"/>
+        </a:solidFill>
+        <a:effectLst/>
+      </p:bgPr>
+    </p:bg>
+    <p:spTree>
+      <p:nvGrpSpPr>
+        <p:cNvPr id="1" name=""/>
+        <p:cNvGrpSpPr/>
+        <p:nvPr/>
+      </p:nvGrpSpPr>
+      <p:grpSpPr/>
+      <p:sp>
+        <p:nvSpPr>
+          <p:cNvPr id="2" name="Rectangle 1"/>
+          <p:cNvSpPr/>
+          <p:nvPr/>
+        </p:nvSpPr>
+        <p:spPr>
+          <a:xfrm>
+            <a:off x="0" y="365760"/>
+            <a:ext cx="12191695" cy="54864"/>
+          </a:xfrm>
+          <a:prstGeom prst="rect">
+            <a:avLst/>
+          </a:prstGeom>
+          <a:solidFill>
+            <a:srgbClr val="2ECC71"/>
+          </a:solidFill>
+          <a:ln>
+            <a:noFill/>
+          </a:ln>
+        </p:spPr>
+        <p:style>
+          <a:lnRef idx="1">
+            <a:schemeClr val="accent1"/>
+          </a:lnRef>
+          <a:fillRef idx="3">
+            <a:schemeClr val="accent1"/>
+          </a:fillRef>
+          <a:effectRef idx="2">
+            <a:schemeClr val="accent1"/>
+          </a:effectRef>
+          <a:fontRef idx="minor">
+            <a:schemeClr val="lt1"/>
+          </a:fontRef>
+        </p:style>
+        <p:txBody>
+          <a:bodyPr rtlCol="0" anchor="ctr"/>
+          <a:lstStyle/>
+          <a:p>
+            <a:pPr algn="ctr"/>
+          </a:p>
+        </p:txBody>
+      </p:sp>
+      <p:sp>
+        <p:nvSpPr>
+          <p:cNvPr id="3" name="TextBox 2"/>
+          <p:cNvSpPr txBox="1"/>
+          <p:nvPr/>
+        </p:nvSpPr>
+        <p:spPr>
+          <a:xfrm>
+            <a:off x="1097280" y="731520"/>
+            <a:ext cx="3657600" cy="365760"/>
+          </a:xfrm>
+          <a:prstGeom prst="rect">
+            <a:avLst/>
+          </a:prstGeom>
+          <a:noFill/>
+        </p:spPr>
+        <p:txBody>
+          <a:bodyPr wrap="none">
+            <a:spAutoFit/>
+          </a:bodyPr>
+          <a:lstStyle/>
+          <a:p>
+            <a:pPr algn="l">
+              <a:defRPr sz="1000" b="1">
+                <a:solidFill>
+                  <a:srgbClr val="2ECC71"/>
+                </a:solidFill>
+                <a:latin typeface="Calibri"/>
+              </a:defRPr>
+            </a:pPr>
+            <a:r>
+              <a:t>🎯  WIN</a:t>
+            </a:r>
+          </a:p>
+        </p:txBody>
+      </p:sp>
+      <p:sp>
+        <p:nvSpPr>
+          <p:cNvPr id="4" name="TextBox 3"/>
+          <p:cNvSpPr txBox="1"/>
+          <p:nvPr/>
+        </p:nvSpPr>
+        <p:spPr>
+          <a:xfrm>
+            <a:off x="1097280" y="1188720"/>
+            <a:ext cx="9966960" cy="731520"/>
+          </a:xfrm>
+          <a:prstGeom prst="rect">
+            <a:avLst/>
+          </a:prstGeom>
+          <a:noFill/>
+        </p:spPr>
+        <p:txBody>
+          <a:bodyPr wrap="square">
+            <a:spAutoFit/>
+          </a:bodyPr>
+          <a:lstStyle/>
+          <a:p>
+            <a:pPr algn="l">
+              <a:defRPr sz="3200" b="1" i="0">
+                <a:solidFill>
+                  <a:srgbClr val="2ECC71"/>
+                </a:solidFill>
+                <a:latin typeface="Calibri"/>
+              </a:defRPr>
+            </a:pPr>
+            <a:r>
+              <a:t>Retention Excellence</a:t>
+            </a:r>
+          </a:p>
+        </p:txBody>
+      </p:sp>
+      <p:sp>
+        <p:nvSpPr>
+          <p:cNvPr id="5" name="TextBox 4"/>
+          <p:cNvSpPr txBox="1"/>
+          <p:nvPr/>
+        </p:nvSpPr>
+        <p:spPr>
+          <a:xfrm>
+            <a:off x="1097280" y="2103120"/>
+            <a:ext cx="4572000" cy="822960"/>
+          </a:xfrm>
+          <a:prstGeom prst="rect">
+            <a:avLst/>
+          </a:prstGeom>
+          <a:noFill/>
+        </p:spPr>
+        <p:txBody>
+          <a:bodyPr wrap="square">
+            <a:spAutoFit/>
+          </a:bodyPr>
+          <a:lstStyle/>
+          <a:p>
+            <a:pPr algn="l">
+              <a:defRPr sz="4800" b="1" i="0">
+                <a:solidFill>
+                  <a:srgbClr val="2ECC71"/>
+                </a:solidFill>
+                <a:latin typeface="Calibri"/>
+              </a:defRPr>
+            </a:pPr>
+            <a:r>
+              <a:t>61</a:t>
+            </a:r>
+          </a:p>
+        </p:txBody>
+      </p:sp>
+      <p:sp>
+        <p:nvSpPr>
+          <p:cNvPr id="6" name="TextBox 5"/>
+          <p:cNvSpPr txBox="1"/>
+          <p:nvPr/>
+        </p:nvSpPr>
+        <p:spPr>
+          <a:xfrm>
+            <a:off x="1097280" y="2834640"/>
+            <a:ext cx="4572000" cy="365760"/>
+          </a:xfrm>
+          <a:prstGeom prst="rect">
+            <a:avLst/>
+          </a:prstGeom>
+          <a:noFill/>
+        </p:spPr>
+        <p:txBody>
+          <a:bodyPr wrap="square">
+            <a:spAutoFit/>
+          </a:bodyPr>
+          <a:lstStyle/>
+          <a:p>
+            <a:pPr algn="l">
+              <a:defRPr sz="1200" b="0" i="0">
+                <a:solidFill>
+                  <a:srgbClr val="8F95A3"/>
+                </a:solidFill>
+                <a:latin typeface="Calibri"/>
+              </a:defRPr>
+            </a:pPr>
+            <a:r>
+              <a:t>% retention</a:t>
+            </a:r>
+          </a:p>
+        </p:txBody>
+      </p:sp>
+      <p:sp>
+        <p:nvSpPr>
+          <p:cNvPr id="7" name="TextBox 6"/>
+          <p:cNvSpPr txBox="1"/>
+          <p:nvPr/>
+        </p:nvSpPr>
+        <p:spPr>
+          <a:xfrm>
+            <a:off x="1097280" y="3291840"/>
+            <a:ext cx="9966960" cy="365760"/>
+          </a:xfrm>
+          <a:prstGeom prst="rect">
+            <a:avLst/>
+          </a:prstGeom>
+          <a:noFill/>
+        </p:spPr>
+        <p:txBody>
+          <a:bodyPr wrap="square">
+            <a:spAutoFit/>
+          </a:bodyPr>
+          <a:lstStyle/>
+          <a:p>
+            <a:pPr algn="l">
+              <a:defRPr sz="1400" b="0" i="0">
+                <a:solidFill>
+                  <a:srgbClr val="E2E2EA"/>
+                </a:solidFill>
+                <a:latin typeface="Calibri"/>
+              </a:defRPr>
+            </a:pPr>
+            <a:r>
+              <a:t>by Game Development Team</a:t>
+            </a:r>
+          </a:p>
+        </p:txBody>
+      </p:sp>
+      <p:sp>
+        <p:nvSpPr>
+          <p:cNvPr id="8" name="TextBox 7"/>
+          <p:cNvSpPr txBox="1"/>
+          <p:nvPr/>
+        </p:nvSpPr>
+        <p:spPr>
+          <a:xfrm>
+            <a:off x="1097280" y="3840480"/>
+            <a:ext cx="9966960" cy="457200"/>
+          </a:xfrm>
+          <a:prstGeom prst="rect">
+            <a:avLst/>
+          </a:prstGeom>
+          <a:noFill/>
+        </p:spPr>
+        <p:txBody>
+          <a:bodyPr wrap="square">
+            <a:spAutoFit/>
+          </a:bodyPr>
+          <a:lstStyle/>
+          <a:p>
+            <a:pPr algn="l">
+              <a:defRPr sz="1800" b="1" i="0">
+                <a:solidFill>
+                  <a:srgbClr val="FFFFFF"/>
+                </a:solidFill>
+                <a:latin typeface="Calibri"/>
+              </a:defRPr>
+            </a:pPr>
+            <a:r>
+              <a:t>Infinite Minesweeper Crushing Benchmarks</a:t>
+            </a:r>
+          </a:p>
+        </p:txBody>
+      </p:sp>
+      <p:sp>
+        <p:nvSpPr>
+          <p:cNvPr id="9" name="TextBox 8"/>
+          <p:cNvSpPr txBox="1"/>
+          <p:nvPr/>
+        </p:nvSpPr>
+        <p:spPr>
+          <a:xfrm>
+            <a:off x="1097280" y="4389120"/>
+            <a:ext cx="9966960" cy="914400"/>
+          </a:xfrm>
+          <a:prstGeom prst="rect">
+            <a:avLst/>
+          </a:prstGeom>
+          <a:noFill/>
+        </p:spPr>
+        <p:txBody>
+          <a:bodyPr wrap="square">
+            <a:spAutoFit/>
+          </a:bodyPr>
+          <a:lstStyle/>
+          <a:p>
+            <a:pPr algn="l">
+              <a:defRPr sz="1400" b="0" i="0">
+                <a:solidFill>
+                  <a:srgbClr val="E2E2EA"/>
+                </a:solidFill>
+                <a:latin typeface="Calibri"/>
+              </a:defRPr>
+            </a:pPr>
+            <a:r>
+              <a:t>Exceeding Apple benchmark retention rates consistently</a:t>
+            </a:r>
+          </a:p>
+        </p:txBody>
+      </p:sp>
+      <p:sp>
+        <p:nvSpPr>
+          <p:cNvPr id="10" name="TextBox 9"/>
+          <p:cNvSpPr txBox="1"/>
+          <p:nvPr/>
+        </p:nvSpPr>
+        <p:spPr>
+          <a:xfrm>
+            <a:off x="1097280" y="5486400"/>
+            <a:ext cx="9966960" cy="457200"/>
+          </a:xfrm>
+          <a:prstGeom prst="rect">
+            <a:avLst/>
+          </a:prstGeom>
+          <a:noFill/>
+        </p:spPr>
+        <p:txBody>
+          <a:bodyPr wrap="square">
+            <a:spAutoFit/>
+          </a:bodyPr>
+          <a:lstStyle/>
+          <a:p>
+            <a:pPr algn="l">
+              <a:defRPr sz="1300" b="0" i="1">
+                <a:solidFill>
+                  <a:srgbClr val="8F95A3"/>
+                </a:solidFill>
+                <a:latin typeface="Calibri"/>
+              </a:defRPr>
+            </a:pPr>
+            <a:r>
+              <a:t>💬 "Player engagement strategies delivering exceptional results"</a:t>
+            </a:r>
+          </a:p>
+        </p:txBody>
+      </p:sp>
+    </p:spTree>
+  </p:cSld>
+  <p:clrMapOvr>
+    <a:masterClrMapping/>
+  </p:clrMapOvr>
+</p:sld>
+</file>
+
+<file path=ppt/slides/slide15.xml><?xml version="1.0" encoding="utf-8"?>
+<p:sld xmlns:a="http://schemas.openxmlformats.org/drawingml/2006/main" xmlns:p="http://schemas.openxmlformats.org/presentationml/2006/main" xmlns:r="http://schemas.openxmlformats.org/officeDocument/2006/relationships">
+  <p:cSld>
+    <p:bg>
+      <p:bgPr>
+        <a:solidFill>
+          <a:srgbClr val="08080C"/>
+        </a:solidFill>
+        <a:effectLst/>
+      </p:bgPr>
+    </p:bg>
+    <p:spTree>
+      <p:nvGrpSpPr>
+        <p:cNvPr id="1" name=""/>
+        <p:cNvGrpSpPr/>
+        <p:nvPr/>
+      </p:nvGrpSpPr>
+      <p:grpSpPr/>
+      <p:sp>
+        <p:nvSpPr>
+          <p:cNvPr id="2" name="Rectangle 1"/>
+          <p:cNvSpPr/>
+          <p:nvPr/>
+        </p:nvSpPr>
+        <p:spPr>
+          <a:xfrm>
+            <a:off x="0" y="365760"/>
+            <a:ext cx="12191695" cy="54864"/>
+          </a:xfrm>
+          <a:prstGeom prst="rect">
+            <a:avLst/>
+          </a:prstGeom>
+          <a:solidFill>
+            <a:srgbClr val="3498DB"/>
+          </a:solidFill>
+          <a:ln>
+            <a:noFill/>
+          </a:ln>
+        </p:spPr>
+        <p:style>
+          <a:lnRef idx="1">
+            <a:schemeClr val="accent1"/>
+          </a:lnRef>
+          <a:fillRef idx="3">
+            <a:schemeClr val="accent1"/>
+          </a:fillRef>
+          <a:effectRef idx="2">
+            <a:schemeClr val="accent1"/>
+          </a:effectRef>
+          <a:fontRef idx="minor">
+            <a:schemeClr val="lt1"/>
+          </a:fontRef>
+        </p:style>
+        <p:txBody>
+          <a:bodyPr rtlCol="0" anchor="ctr"/>
+          <a:lstStyle/>
+          <a:p>
+            <a:pPr algn="ctr"/>
+          </a:p>
+        </p:txBody>
+      </p:sp>
+      <p:sp>
+        <p:nvSpPr>
+          <p:cNvPr id="3" name="TextBox 2"/>
+          <p:cNvSpPr txBox="1"/>
+          <p:nvPr/>
+        </p:nvSpPr>
+        <p:spPr>
+          <a:xfrm>
+            <a:off x="1097280" y="731520"/>
+            <a:ext cx="3657600" cy="365760"/>
+          </a:xfrm>
+          <a:prstGeom prst="rect">
+            <a:avLst/>
+          </a:prstGeom>
+          <a:noFill/>
+        </p:spPr>
+        <p:txBody>
+          <a:bodyPr wrap="none">
+            <a:spAutoFit/>
+          </a:bodyPr>
+          <a:lstStyle/>
+          <a:p>
+            <a:pPr algn="l">
+              <a:defRPr sz="1000" b="1">
+                <a:solidFill>
+                  <a:srgbClr val="3498DB"/>
+                </a:solidFill>
+                <a:latin typeface="Calibri"/>
+              </a:defRPr>
+            </a:pPr>
+            <a:r>
+              <a:t>🤖  WIN</a:t>
+            </a:r>
+          </a:p>
+        </p:txBody>
+      </p:sp>
+      <p:sp>
+        <p:nvSpPr>
+          <p:cNvPr id="4" name="TextBox 3"/>
+          <p:cNvSpPr txBox="1"/>
+          <p:nvPr/>
+        </p:nvSpPr>
+        <p:spPr>
+          <a:xfrm>
+            <a:off x="1097280" y="1188720"/>
+            <a:ext cx="9966960" cy="731520"/>
+          </a:xfrm>
+          <a:prstGeom prst="rect">
+            <a:avLst/>
+          </a:prstGeom>
+          <a:noFill/>
+        </p:spPr>
+        <p:txBody>
+          <a:bodyPr wrap="square">
+            <a:spAutoFit/>
+          </a:bodyPr>
+          <a:lstStyle/>
+          <a:p>
+            <a:pPr algn="l">
+              <a:defRPr sz="3200" b="1" i="0">
+                <a:solidFill>
+                  <a:srgbClr val="3498DB"/>
+                </a:solidFill>
+                <a:latin typeface="Calibri"/>
+              </a:defRPr>
+            </a:pPr>
+            <a:r>
+              <a:t>AI Automation Win</a:t>
+            </a:r>
+          </a:p>
+        </p:txBody>
+      </p:sp>
+      <p:sp>
+        <p:nvSpPr>
+          <p:cNvPr id="5" name="TextBox 4"/>
+          <p:cNvSpPr txBox="1"/>
+          <p:nvPr/>
+        </p:nvSpPr>
+        <p:spPr>
+          <a:xfrm>
+            <a:off x="1097280" y="2103120"/>
+            <a:ext cx="4572000" cy="822960"/>
+          </a:xfrm>
+          <a:prstGeom prst="rect">
+            <a:avLst/>
+          </a:prstGeom>
+          <a:noFill/>
+        </p:spPr>
+        <p:txBody>
+          <a:bodyPr wrap="square">
+            <a:spAutoFit/>
+          </a:bodyPr>
+          <a:lstStyle/>
+          <a:p>
+            <a:pPr algn="l">
+              <a:defRPr sz="4800" b="1" i="0">
+                <a:solidFill>
+                  <a:srgbClr val="3498DB"/>
+                </a:solidFill>
+                <a:latin typeface="Calibri"/>
+              </a:defRPr>
+            </a:pPr>
+            <a:r>
+              <a:t>$4k</a:t>
+            </a:r>
+          </a:p>
+        </p:txBody>
+      </p:sp>
+      <p:sp>
+        <p:nvSpPr>
+          <p:cNvPr id="6" name="TextBox 5"/>
+          <p:cNvSpPr txBox="1"/>
+          <p:nvPr/>
+        </p:nvSpPr>
+        <p:spPr>
+          <a:xfrm>
+            <a:off x="1097280" y="2834640"/>
+            <a:ext cx="4572000" cy="365760"/>
+          </a:xfrm>
+          <a:prstGeom prst="rect">
+            <a:avLst/>
+          </a:prstGeom>
+          <a:noFill/>
+        </p:spPr>
+        <p:txBody>
+          <a:bodyPr wrap="square">
+            <a:spAutoFit/>
+          </a:bodyPr>
+          <a:lstStyle/>
+          <a:p>
+            <a:pPr algn="l">
+              <a:defRPr sz="1200" b="0" i="0">
+                <a:solidFill>
+                  <a:srgbClr val="8F95A3"/>
+                </a:solidFill>
+                <a:latin typeface="Calibri"/>
+              </a:defRPr>
+            </a:pPr>
+            <a:r>
+              <a:t>saved per week</a:t>
+            </a:r>
+          </a:p>
+        </p:txBody>
+      </p:sp>
+      <p:sp>
+        <p:nvSpPr>
+          <p:cNvPr id="7" name="TextBox 6"/>
+          <p:cNvSpPr txBox="1"/>
+          <p:nvPr/>
+        </p:nvSpPr>
+        <p:spPr>
+          <a:xfrm>
+            <a:off x="1097280" y="3291840"/>
+            <a:ext cx="9966960" cy="365760"/>
+          </a:xfrm>
+          <a:prstGeom prst="rect">
+            <a:avLst/>
+          </a:prstGeom>
+          <a:noFill/>
+        </p:spPr>
+        <p:txBody>
+          <a:bodyPr wrap="square">
+            <a:spAutoFit/>
+          </a:bodyPr>
+          <a:lstStyle/>
+          <a:p>
+            <a:pPr algn="l">
+              <a:defRPr sz="1400" b="0" i="0">
+                <a:solidFill>
+                  <a:srgbClr val="E2E2EA"/>
+                </a:solidFill>
+                <a:latin typeface="Calibri"/>
+              </a:defRPr>
+            </a:pPr>
+            <a:r>
+              <a:t>by AI Development Team</a:t>
+            </a:r>
+          </a:p>
+        </p:txBody>
+      </p:sp>
+      <p:sp>
+        <p:nvSpPr>
+          <p:cNvPr id="8" name="TextBox 7"/>
+          <p:cNvSpPr txBox="1"/>
+          <p:nvPr/>
+        </p:nvSpPr>
+        <p:spPr>
+          <a:xfrm>
+            <a:off x="1097280" y="3840480"/>
+            <a:ext cx="9966960" cy="457200"/>
+          </a:xfrm>
+          <a:prstGeom prst="rect">
+            <a:avLst/>
+          </a:prstGeom>
+          <a:noFill/>
+        </p:spPr>
+        <p:txBody>
+          <a:bodyPr wrap="square">
+            <a:spAutoFit/>
+          </a:bodyPr>
+          <a:lstStyle/>
+          <a:p>
+            <a:pPr algn="l">
+              <a:defRPr sz="1800" b="1" i="0">
+                <a:solidFill>
+                  <a:srgbClr val="FFFFFF"/>
+                </a:solidFill>
+                <a:latin typeface="Calibri"/>
+              </a:defRPr>
+            </a:pPr>
+            <a:r>
+              <a:t>Daria AI Bot Delivering ROI</a:t>
+            </a:r>
+          </a:p>
+        </p:txBody>
+      </p:sp>
+      <p:sp>
+        <p:nvSpPr>
+          <p:cNvPr id="9" name="TextBox 8"/>
+          <p:cNvSpPr txBox="1"/>
+          <p:nvPr/>
+        </p:nvSpPr>
+        <p:spPr>
+          <a:xfrm>
+            <a:off x="1097280" y="4389120"/>
+            <a:ext cx="9966960" cy="914400"/>
+          </a:xfrm>
+          <a:prstGeom prst="rect">
+            <a:avLst/>
+          </a:prstGeom>
+          <a:noFill/>
+        </p:spPr>
+        <p:txBody>
+          <a:bodyPr wrap="square">
+            <a:spAutoFit/>
+          </a:bodyPr>
+          <a:lstStyle/>
+          <a:p>
+            <a:pPr algn="l">
+              <a:defRPr sz="1400" b="0" i="0">
+                <a:solidFill>
+                  <a:srgbClr val="E2E2EA"/>
+                </a:solidFill>
+                <a:latin typeface="Calibri"/>
+              </a:defRPr>
+            </a:pPr>
+            <a:r>
+              <a:t>Automated app review analysis saving significant resources</a:t>
+            </a:r>
+          </a:p>
+        </p:txBody>
+      </p:sp>
+      <p:sp>
+        <p:nvSpPr>
+          <p:cNvPr id="10" name="TextBox 9"/>
+          <p:cNvSpPr txBox="1"/>
+          <p:nvPr/>
+        </p:nvSpPr>
+        <p:spPr>
+          <a:xfrm>
+            <a:off x="1097280" y="5486400"/>
+            <a:ext cx="9966960" cy="457200"/>
+          </a:xfrm>
+          <a:prstGeom prst="rect">
+            <a:avLst/>
+          </a:prstGeom>
+          <a:noFill/>
+        </p:spPr>
+        <p:txBody>
+          <a:bodyPr wrap="square">
+            <a:spAutoFit/>
+          </a:bodyPr>
+          <a:lstStyle/>
+          <a:p>
+            <a:pPr algn="l">
+              <a:defRPr sz="1300" b="0" i="1">
+                <a:solidFill>
+                  <a:srgbClr val="8F95A3"/>
+                </a:solidFill>
+                <a:latin typeface="Calibri"/>
+              </a:defRPr>
+            </a:pPr>
+            <a:r>
+              <a:t>💬 "AI-first approach generating measurable business value"</a:t>
+            </a:r>
+          </a:p>
+        </p:txBody>
+      </p:sp>
+    </p:spTree>
+  </p:cSld>
+  <p:clrMapOvr>
+    <a:masterClrMapping/>
+  </p:clrMapOvr>
+</p:sld>
+</file>
+
+<file path=ppt/slides/slide16.xml><?xml version="1.0" encoding="utf-8"?>
+<p:sld xmlns:a="http://schemas.openxmlformats.org/drawingml/2006/main" xmlns:p="http://schemas.openxmlformats.org/presentationml/2006/main" xmlns:r="http://schemas.openxmlformats.org/officeDocument/2006/relationships">
+  <p:cSld>
+    <p:bg>
+      <p:bgPr>
+        <a:solidFill>
+          <a:srgbClr val="08080C"/>
+        </a:solidFill>
+        <a:effectLst/>
+      </p:bgPr>
+    </p:bg>
+    <p:spTree>
+      <p:nvGrpSpPr>
+        <p:cNvPr id="1" name=""/>
+        <p:cNvGrpSpPr/>
+        <p:nvPr/>
+      </p:nvGrpSpPr>
+      <p:grpSpPr/>
+      <p:sp>
+        <p:nvSpPr>
+          <p:cNvPr id="2" name="Rectangle 1"/>
+          <p:cNvSpPr/>
+          <p:nvPr/>
+        </p:nvSpPr>
+        <p:spPr>
+          <a:xfrm>
+            <a:off x="0" y="365760"/>
+            <a:ext cx="12191695" cy="54864"/>
+          </a:xfrm>
+          <a:prstGeom prst="rect">
+            <a:avLst/>
+          </a:prstGeom>
+          <a:solidFill>
+            <a:srgbClr val="F1C40F"/>
+          </a:solidFill>
+          <a:ln>
+            <a:noFill/>
+          </a:ln>
+        </p:spPr>
+        <p:style>
+          <a:lnRef idx="1">
+            <a:schemeClr val="accent1"/>
+          </a:lnRef>
+          <a:fillRef idx="3">
+            <a:schemeClr val="accent1"/>
+          </a:fillRef>
+          <a:effectRef idx="2">
+            <a:schemeClr val="accent1"/>
+          </a:effectRef>
+          <a:fontRef idx="minor">
+            <a:schemeClr val="lt1"/>
+          </a:fontRef>
+        </p:style>
+        <p:txBody>
+          <a:bodyPr rtlCol="0" anchor="ctr"/>
+          <a:lstStyle/>
+          <a:p>
+            <a:pPr algn="ctr"/>
+          </a:p>
+        </p:txBody>
+      </p:sp>
+      <p:sp>
+        <p:nvSpPr>
+          <p:cNvPr id="3" name="TextBox 2"/>
+          <p:cNvSpPr txBox="1"/>
+          <p:nvPr/>
+        </p:nvSpPr>
+        <p:spPr>
+          <a:xfrm>
+            <a:off x="1097280" y="731520"/>
+            <a:ext cx="3657600" cy="365760"/>
+          </a:xfrm>
+          <a:prstGeom prst="rect">
+            <a:avLst/>
+          </a:prstGeom>
+          <a:noFill/>
+        </p:spPr>
+        <p:txBody>
+          <a:bodyPr wrap="none">
+            <a:spAutoFit/>
+          </a:bodyPr>
+          <a:lstStyle/>
+          <a:p>
+            <a:pPr algn="l">
+              <a:defRPr sz="1000" b="1">
+                <a:solidFill>
+                  <a:srgbClr val="F1C40F"/>
+                </a:solidFill>
+                <a:latin typeface="Calibri"/>
+              </a:defRPr>
+            </a:pPr>
+            <a:r>
+              <a:t>🏆  CLAPS</a:t>
+            </a:r>
+          </a:p>
+        </p:txBody>
+      </p:sp>
+      <p:sp>
+        <p:nvSpPr>
+          <p:cNvPr id="4" name="TextBox 3"/>
+          <p:cNvSpPr txBox="1"/>
+          <p:nvPr/>
+        </p:nvSpPr>
+        <p:spPr>
+          <a:xfrm>
+            <a:off x="1097280" y="1188720"/>
+            <a:ext cx="9966960" cy="731520"/>
+          </a:xfrm>
+          <a:prstGeom prst="rect">
+            <a:avLst/>
+          </a:prstGeom>
+          <a:noFill/>
+        </p:spPr>
+        <p:txBody>
+          <a:bodyPr wrap="square">
+            <a:spAutoFit/>
+          </a:bodyPr>
+          <a:lstStyle/>
+          <a:p>
+            <a:pPr algn="l">
+              <a:defRPr sz="3200" b="1" i="0">
+                <a:solidFill>
+                  <a:srgbClr val="F1C40F"/>
+                </a:solidFill>
+                <a:latin typeface="Calibri"/>
+              </a:defRPr>
+            </a:pPr>
+            <a:r>
+              <a:t>Marketing Excellence</a:t>
+            </a:r>
+          </a:p>
+        </p:txBody>
+      </p:sp>
+      <p:sp>
+        <p:nvSpPr>
+          <p:cNvPr id="5" name="TextBox 4"/>
+          <p:cNvSpPr txBox="1"/>
+          <p:nvPr/>
+        </p:nvSpPr>
+        <p:spPr>
+          <a:xfrm>
+            <a:off x="1097280" y="2103120"/>
+            <a:ext cx="2743200" cy="548640"/>
+          </a:xfrm>
+          <a:prstGeom prst="rect">
+            <a:avLst/>
+          </a:prstGeom>
+          <a:noFill/>
+        </p:spPr>
+        <p:txBody>
+          <a:bodyPr wrap="square">
+            <a:spAutoFit/>
+          </a:bodyPr>
+          <a:lstStyle/>
+          <a:p>
+            <a:pPr algn="l">
+              <a:defRPr sz="2800" b="1" i="0">
+                <a:solidFill>
+                  <a:srgbClr val="F1C40F"/>
+                </a:solidFill>
+                <a:latin typeface="Calibri"/>
+              </a:defRPr>
+            </a:pPr>
+            <a:r>
+              <a:t>30</a:t>
+            </a:r>
+          </a:p>
+        </p:txBody>
+      </p:sp>
+      <p:sp>
+        <p:nvSpPr>
+          <p:cNvPr id="6" name="TextBox 5"/>
+          <p:cNvSpPr txBox="1"/>
+          <p:nvPr/>
+        </p:nvSpPr>
+        <p:spPr>
+          <a:xfrm>
+            <a:off x="1097280" y="2651760"/>
+            <a:ext cx="9966960" cy="365760"/>
+          </a:xfrm>
+          <a:prstGeom prst="rect">
+            <a:avLst/>
+          </a:prstGeom>
+          <a:noFill/>
+        </p:spPr>
+        <p:txBody>
+          <a:bodyPr wrap="square">
+            <a:spAutoFit/>
+          </a:bodyPr>
+          <a:lstStyle/>
+          <a:p>
+            <a:pPr algn="l">
+              <a:defRPr sz="1400" b="0" i="0">
+                <a:solidFill>
+                  <a:srgbClr val="E2E2EA"/>
+                </a:solidFill>
+                <a:latin typeface="Calibri"/>
+              </a:defRPr>
+            </a:pPr>
+            <a:r>
+              <a:t>from Gleb Krahotkin</a:t>
+            </a:r>
+          </a:p>
+        </p:txBody>
+      </p:sp>
+      <p:sp>
+        <p:nvSpPr>
+          <p:cNvPr id="7" name="TextBox 6"/>
+          <p:cNvSpPr txBox="1"/>
+          <p:nvPr/>
+        </p:nvSpPr>
+        <p:spPr>
+          <a:xfrm>
+            <a:off x="1097280" y="3108960"/>
+            <a:ext cx="9966960" cy="365760"/>
+          </a:xfrm>
+          <a:prstGeom prst="rect">
+            <a:avLst/>
+          </a:prstGeom>
+          <a:noFill/>
+        </p:spPr>
+        <p:txBody>
+          <a:bodyPr wrap="square">
+            <a:spAutoFit/>
+          </a:bodyPr>
+          <a:lstStyle/>
+          <a:p>
+            <a:pPr algn="l">
+              <a:defRPr sz="1400" b="1" i="0">
+                <a:solidFill>
+                  <a:srgbClr val="FFFFFF"/>
+                </a:solidFill>
+                <a:latin typeface="Calibri"/>
+              </a:defRPr>
+            </a:pPr>
+            <a:r>
+              <a:t>to: Hierman Pelekh</a:t>
+            </a:r>
+          </a:p>
+        </p:txBody>
+      </p:sp>
+      <p:sp>
+        <p:nvSpPr>
+          <p:cNvPr id="8" name="TextBox 7"/>
+          <p:cNvSpPr txBox="1"/>
+          <p:nvPr/>
+        </p:nvSpPr>
+        <p:spPr>
+          <a:xfrm>
+            <a:off x="1097280" y="3749039"/>
+            <a:ext cx="9966960" cy="1097280"/>
+          </a:xfrm>
+          <a:prstGeom prst="rect">
+            <a:avLst/>
+          </a:prstGeom>
+          <a:noFill/>
+        </p:spPr>
+        <p:txBody>
+          <a:bodyPr wrap="square">
+            <a:spAutoFit/>
+          </a:bodyPr>
+          <a:lstStyle/>
+          <a:p>
+            <a:pPr algn="l">
+              <a:defRPr sz="1500" b="0" i="1">
+                <a:solidFill>
+                  <a:srgbClr val="E2E2EA"/>
+                </a:solidFill>
+                <a:latin typeface="Calibri"/>
+              </a:defRPr>
+            </a:pPr>
+            <a:r>
+              <a:t>"Outstanding marketing campaign performance"</a:t>
+            </a:r>
+          </a:p>
+        </p:txBody>
+      </p:sp>
+      <p:sp>
+        <p:nvSpPr>
+          <p:cNvPr id="9" name="TextBox 8"/>
+          <p:cNvSpPr txBox="1"/>
+          <p:nvPr/>
+        </p:nvSpPr>
+        <p:spPr>
+          <a:xfrm>
+            <a:off x="1097280" y="5120640"/>
+            <a:ext cx="9966960" cy="457200"/>
+          </a:xfrm>
+          <a:prstGeom prst="rect">
+            <a:avLst/>
+          </a:prstGeom>
+          <a:noFill/>
+        </p:spPr>
+        <p:txBody>
+          <a:bodyPr wrap="square">
+            <a:spAutoFit/>
+          </a:bodyPr>
+          <a:lstStyle/>
+          <a:p>
+            <a:pPr algn="l">
+              <a:defRPr sz="1200" b="1" i="0">
+                <a:solidFill>
+                  <a:srgbClr val="F1C40F"/>
+                </a:solidFill>
+                <a:latin typeface="Calibri"/>
+              </a:defRPr>
+            </a:pPr>
+            <a:r>
+              <a:t>EXCELLENCE · INNOVATION</a:t>
+            </a:r>
+          </a:p>
+        </p:txBody>
+      </p:sp>
+    </p:spTree>
+  </p:cSld>
+  <p:clrMapOvr>
+    <a:masterClrMapping/>
+  </p:clrMapOvr>
+</p:sld>
+</file>
+
+<file path=ppt/slides/slide17.xml><?xml version="1.0" encoding="utf-8"?>
+<p:sld xmlns:a="http://schemas.openxmlformats.org/drawingml/2006/main" xmlns:p="http://schemas.openxmlformats.org/presentationml/2006/main" xmlns:r="http://schemas.openxmlformats.org/officeDocument/2006/relationships">
+  <p:cSld>
+    <p:bg>
+      <p:bgPr>
+        <a:solidFill>
+          <a:srgbClr val="08080C"/>
+        </a:solidFill>
+        <a:effectLst/>
+      </p:bgPr>
+    </p:bg>
+    <p:spTree>
+      <p:nvGrpSpPr>
+        <p:cNvPr id="1" name=""/>
+        <p:cNvGrpSpPr/>
+        <p:nvPr/>
+      </p:nvGrpSpPr>
+      <p:grpSpPr/>
+      <p:sp>
+        <p:nvSpPr>
+          <p:cNvPr id="2" name="Rectangle 1"/>
+          <p:cNvSpPr/>
+          <p:nvPr/>
+        </p:nvSpPr>
+        <p:spPr>
+          <a:xfrm>
+            <a:off x="0" y="365760"/>
+            <a:ext cx="12191695" cy="54864"/>
+          </a:xfrm>
+          <a:prstGeom prst="rect">
+            <a:avLst/>
+          </a:prstGeom>
+          <a:solidFill>
+            <a:srgbClr val="34495E"/>
+          </a:solidFill>
+          <a:ln>
+            <a:noFill/>
+          </a:ln>
+        </p:spPr>
+        <p:style>
+          <a:lnRef idx="1">
+            <a:schemeClr val="accent1"/>
+          </a:lnRef>
+          <a:fillRef idx="3">
+            <a:schemeClr val="accent1"/>
+          </a:fillRef>
+          <a:effectRef idx="2">
+            <a:schemeClr val="accent1"/>
+          </a:effectRef>
+          <a:fontRef idx="minor">
+            <a:schemeClr val="lt1"/>
+          </a:fontRef>
+        </p:style>
+        <p:txBody>
+          <a:bodyPr rtlCol="0" anchor="ctr"/>
+          <a:lstStyle/>
+          <a:p>
+            <a:pPr algn="ctr"/>
+          </a:p>
+        </p:txBody>
+      </p:sp>
+      <p:sp>
+        <p:nvSpPr>
+          <p:cNvPr id="3" name="TextBox 2"/>
+          <p:cNvSpPr txBox="1"/>
+          <p:nvPr/>
+        </p:nvSpPr>
+        <p:spPr>
+          <a:xfrm>
+            <a:off x="1097280" y="731520"/>
+            <a:ext cx="3657600" cy="365760"/>
+          </a:xfrm>
+          <a:prstGeom prst="rect">
+            <a:avLst/>
+          </a:prstGeom>
+          <a:noFill/>
+        </p:spPr>
+        <p:txBody>
+          <a:bodyPr wrap="none">
+            <a:spAutoFit/>
+          </a:bodyPr>
+          <a:lstStyle/>
+          <a:p>
+            <a:pPr algn="l">
+              <a:defRPr sz="1000" b="1">
+                <a:solidFill>
+                  <a:srgbClr val="34495E"/>
+                </a:solidFill>
+                <a:latin typeface="Calibri"/>
+              </a:defRPr>
+            </a:pPr>
+            <a:r>
+              <a:t>📊  MILESTONE</a:t>
+            </a:r>
+          </a:p>
+        </p:txBody>
+      </p:sp>
+      <p:sp>
+        <p:nvSpPr>
+          <p:cNvPr id="4" name="TextBox 3"/>
+          <p:cNvSpPr txBox="1"/>
+          <p:nvPr/>
+        </p:nvSpPr>
+        <p:spPr>
+          <a:xfrm>
+            <a:off x="1097280" y="1188720"/>
+            <a:ext cx="9966960" cy="731520"/>
+          </a:xfrm>
+          <a:prstGeom prst="rect">
+            <a:avLst/>
+          </a:prstGeom>
+          <a:noFill/>
+        </p:spPr>
+        <p:txBody>
+          <a:bodyPr wrap="square">
+            <a:spAutoFit/>
+          </a:bodyPr>
+          <a:lstStyle/>
+          <a:p>
+            <a:pPr algn="l">
+              <a:defRPr sz="3200" b="1" i="0">
+                <a:solidFill>
+                  <a:srgbClr val="34495E"/>
+                </a:solidFill>
+                <a:latin typeface="Calibri"/>
+              </a:defRPr>
+            </a:pPr>
+            <a:r>
+              <a:t>AI Operations Scale</a:t>
+            </a:r>
+          </a:p>
+        </p:txBody>
+      </p:sp>
+      <p:sp>
+        <p:nvSpPr>
+          <p:cNvPr id="5" name="TextBox 4"/>
+          <p:cNvSpPr txBox="1"/>
+          <p:nvPr/>
+        </p:nvSpPr>
+        <p:spPr>
+          <a:xfrm>
+            <a:off x="1097280" y="2103120"/>
+            <a:ext cx="4572000" cy="822960"/>
+          </a:xfrm>
+          <a:prstGeom prst="rect">
+            <a:avLst/>
+          </a:prstGeom>
+          <a:noFill/>
+        </p:spPr>
+        <p:txBody>
+          <a:bodyPr wrap="square">
+            <a:spAutoFit/>
+          </a:bodyPr>
+          <a:lstStyle/>
+          <a:p>
+            <a:pPr algn="l">
+              <a:defRPr sz="5200" b="1" i="0">
+                <a:solidFill>
+                  <a:srgbClr val="34495E"/>
+                </a:solidFill>
+                <a:latin typeface="Calibri"/>
+              </a:defRPr>
+            </a:pPr>
+            <a:r>
+              <a:t>1,000+</a:t>
+            </a:r>
+          </a:p>
+        </p:txBody>
+      </p:sp>
+      <p:sp>
+        <p:nvSpPr>
+          <p:cNvPr id="6" name="TextBox 5"/>
+          <p:cNvSpPr txBox="1"/>
+          <p:nvPr/>
+        </p:nvSpPr>
+        <p:spPr>
+          <a:xfrm>
+            <a:off x="1097280" y="2926080"/>
+            <a:ext cx="4572000" cy="365760"/>
+          </a:xfrm>
+          <a:prstGeom prst="rect">
+            <a:avLst/>
+          </a:prstGeom>
+          <a:noFill/>
+        </p:spPr>
+        <p:txBody>
+          <a:bodyPr wrap="square">
+            <a:spAutoFit/>
+          </a:bodyPr>
+          <a:lstStyle/>
+          <a:p>
+            <a:pPr algn="l">
+              <a:defRPr sz="1100" b="0" i="0">
+                <a:solidFill>
+                  <a:srgbClr val="8F95A3"/>
+                </a:solidFill>
+                <a:latin typeface="Calibri"/>
+              </a:defRPr>
+            </a:pPr>
+            <a:r>
+              <a:t>OKRs Audited Daily</a:t>
+            </a:r>
+          </a:p>
+        </p:txBody>
+      </p:sp>
+      <p:sp>
+        <p:nvSpPr>
+          <p:cNvPr id="7" name="TextBox 6"/>
+          <p:cNvSpPr txBox="1"/>
+          <p:nvPr/>
+        </p:nvSpPr>
+        <p:spPr>
+          <a:xfrm>
+            <a:off x="1097280" y="3566160"/>
+            <a:ext cx="9966960" cy="457200"/>
+          </a:xfrm>
+          <a:prstGeom prst="rect">
+            <a:avLst/>
+          </a:prstGeom>
+          <a:noFill/>
+        </p:spPr>
+        <p:txBody>
+          <a:bodyPr wrap="square">
+            <a:spAutoFit/>
+          </a:bodyPr>
+          <a:lstStyle/>
+          <a:p>
+            <a:pPr algn="l">
+              <a:defRPr sz="1800" b="1" i="0">
+                <a:solidFill>
+                  <a:srgbClr val="FFFFFF"/>
+                </a:solidFill>
+                <a:latin typeface="Calibri"/>
+              </a:defRPr>
+            </a:pPr>
+            <a:r>
+              <a:t>OKR Auditor Achievement</a:t>
+            </a:r>
+          </a:p>
+        </p:txBody>
+      </p:sp>
+      <p:sp>
+        <p:nvSpPr>
+          <p:cNvPr id="8" name="TextBox 7"/>
+          <p:cNvSpPr txBox="1"/>
+          <p:nvPr/>
+        </p:nvSpPr>
+        <p:spPr>
+          <a:xfrm>
+            <a:off x="1097280" y="4206240"/>
+            <a:ext cx="9966960" cy="1371600"/>
+          </a:xfrm>
+          <a:prstGeom prst="rect">
+            <a:avLst/>
+          </a:prstGeom>
+          <a:noFill/>
+        </p:spPr>
+        <p:txBody>
+          <a:bodyPr wrap="square">
+            <a:spAutoFit/>
+          </a:bodyPr>
+          <a:lstStyle/>
+          <a:p>
+            <a:pPr algn="l">
+              <a:defRPr sz="1500" b="0" i="0">
+                <a:solidFill>
+                  <a:srgbClr val="E2E2EA"/>
+                </a:solidFill>
+                <a:latin typeface="Calibri"/>
+              </a:defRPr>
+            </a:pPr>
+            <a:r>
+              <a:t>AI system processing massive scale of individual objectives</a:t>
+            </a:r>
+          </a:p>
+        </p:txBody>
+      </p:sp>
+    </p:spTree>
+  </p:cSld>
+  <p:clrMapOvr>
+    <a:masterClrMapping/>
+  </p:clrMapOvr>
+</p:sld>
+</file>
+
+<file path=ppt/slides/slide18.xml><?xml version="1.0" encoding="utf-8"?>
+<p:sld xmlns:a="http://schemas.openxmlformats.org/drawingml/2006/main" xmlns:p="http://schemas.openxmlformats.org/presentationml/2006/main" xmlns:r="http://schemas.openxmlformats.org/officeDocument/2006/relationships">
+  <p:cSld>
+    <p:bg>
+      <p:bgPr>
+        <a:solidFill>
+          <a:srgbClr val="08080C"/>
+        </a:solidFill>
+        <a:effectLst/>
+      </p:bgPr>
+    </p:bg>
+    <p:spTree>
+      <p:nvGrpSpPr>
+        <p:cNvPr id="1" name=""/>
+        <p:cNvGrpSpPr/>
+        <p:nvPr/>
+      </p:nvGrpSpPr>
+      <p:grpSpPr/>
+      <p:sp>
+        <p:nvSpPr>
+          <p:cNvPr id="2" name="Rectangle 1"/>
+          <p:cNvSpPr/>
+          <p:nvPr/>
+        </p:nvSpPr>
+        <p:spPr>
+          <a:xfrm>
+            <a:off x="0" y="365760"/>
+            <a:ext cx="12191695" cy="54864"/>
+          </a:xfrm>
+          <a:prstGeom prst="rect">
+            <a:avLst/>
+          </a:prstGeom>
+          <a:solidFill>
+            <a:srgbClr val="9B59B6"/>
+          </a:solidFill>
+          <a:ln>
+            <a:noFill/>
+          </a:ln>
+        </p:spPr>
+        <p:style>
+          <a:lnRef idx="1">
+            <a:schemeClr val="accent1"/>
+          </a:lnRef>
+          <a:fillRef idx="3">
+            <a:schemeClr val="accent1"/>
+          </a:fillRef>
+          <a:effectRef idx="2">
+            <a:schemeClr val="accent1"/>
+          </a:effectRef>
+          <a:fontRef idx="minor">
+            <a:schemeClr val="lt1"/>
+          </a:fontRef>
+        </p:style>
+        <p:txBody>
+          <a:bodyPr rtlCol="0" anchor="ctr"/>
+          <a:lstStyle/>
+          <a:p>
+            <a:pPr algn="ctr"/>
+          </a:p>
+        </p:txBody>
+      </p:sp>
+      <p:sp>
+        <p:nvSpPr>
+          <p:cNvPr id="3" name="TextBox 2"/>
+          <p:cNvSpPr txBox="1"/>
+          <p:nvPr/>
+        </p:nvSpPr>
+        <p:spPr>
+          <a:xfrm>
+            <a:off x="1097280" y="731520"/>
+            <a:ext cx="3657600" cy="365760"/>
+          </a:xfrm>
+          <a:prstGeom prst="rect">
+            <a:avLst/>
+          </a:prstGeom>
+          <a:noFill/>
+        </p:spPr>
+        <p:txBody>
+          <a:bodyPr wrap="none">
+            <a:spAutoFit/>
+          </a:bodyPr>
+          <a:lstStyle/>
+          <a:p>
+            <a:pPr algn="l">
+              <a:defRPr sz="1000" b="1">
+                <a:solidFill>
+                  <a:srgbClr val="9B59B6"/>
+                </a:solidFill>
+                <a:latin typeface="Calibri"/>
+              </a:defRPr>
+            </a:pPr>
+            <a:r>
+              <a:t>🧘  OFFICE LIFE</a:t>
+            </a:r>
+          </a:p>
+        </p:txBody>
+      </p:sp>
+      <p:sp>
+        <p:nvSpPr>
+          <p:cNvPr id="4" name="TextBox 3"/>
+          <p:cNvSpPr txBox="1"/>
+          <p:nvPr/>
+        </p:nvSpPr>
+        <p:spPr>
+          <a:xfrm>
+            <a:off x="1097280" y="1188720"/>
+            <a:ext cx="9966960" cy="731520"/>
+          </a:xfrm>
+          <a:prstGeom prst="rect">
+            <a:avLst/>
+          </a:prstGeom>
+          <a:noFill/>
+        </p:spPr>
+        <p:txBody>
+          <a:bodyPr wrap="square">
+            <a:spAutoFit/>
+          </a:bodyPr>
+          <a:lstStyle/>
+          <a:p>
+            <a:pPr algn="l">
+              <a:defRPr sz="3200" b="1" i="0">
+                <a:solidFill>
+                  <a:srgbClr val="9B59B6"/>
+                </a:solidFill>
+                <a:latin typeface="Calibri"/>
+              </a:defRPr>
+            </a:pPr>
+            <a:r>
+              <a:t>Wellness Culture</a:t>
             </a:r>
           </a:p>
         </p:txBody>
@@ -3428,7 +6005,328 @@
               </a:defRPr>
             </a:pPr>
             <a:r>
-              <a:t>Team Appreciation Thursday</a:t>
+              <a:t>Daily Yoga Sessions</a:t>
+            </a:r>
+          </a:p>
+        </p:txBody>
+      </p:sp>
+      <p:sp>
+        <p:nvSpPr>
+          <p:cNvPr id="6" name="TextBox 5"/>
+          <p:cNvSpPr txBox="1"/>
+          <p:nvPr/>
+        </p:nvSpPr>
+        <p:spPr>
+          <a:xfrm>
+            <a:off x="1371600" y="2743200"/>
+            <a:ext cx="9692640" cy="1828800"/>
+          </a:xfrm>
+          <a:prstGeom prst="rect">
+            <a:avLst/>
+          </a:prstGeom>
+          <a:noFill/>
+        </p:spPr>
+        <p:txBody>
+          <a:bodyPr wrap="square">
+            <a:spAutoFit/>
+          </a:bodyPr>
+          <a:lstStyle/>
+          <a:p>
+            <a:pPr algn="l">
+              <a:defRPr sz="1500" b="0" i="1">
+                <a:solidFill>
+                  <a:srgbClr val="E2E2EA"/>
+                </a:solidFill>
+                <a:latin typeface="Calibri"/>
+              </a:defRPr>
+            </a:pPr>
+            <a:r>
+              <a:t>"Daily yoga at 13:10 CET - building healthy habits together"</a:t>
+            </a:r>
+          </a:p>
+        </p:txBody>
+      </p:sp>
+      <p:sp>
+        <p:nvSpPr>
+          <p:cNvPr id="7" name="TextBox 6"/>
+          <p:cNvSpPr txBox="1"/>
+          <p:nvPr/>
+        </p:nvSpPr>
+        <p:spPr>
+          <a:xfrm>
+            <a:off x="1097280" y="4754880"/>
+            <a:ext cx="9966960" cy="365760"/>
+          </a:xfrm>
+          <a:prstGeom prst="rect">
+            <a:avLst/>
+          </a:prstGeom>
+          <a:noFill/>
+        </p:spPr>
+        <p:txBody>
+          <a:bodyPr wrap="square">
+            <a:spAutoFit/>
+          </a:bodyPr>
+          <a:lstStyle/>
+          <a:p>
+            <a:pPr algn="l">
+              <a:defRPr sz="1400" b="0" i="0">
+                <a:solidFill>
+                  <a:srgbClr val="8F95A3"/>
+                </a:solidFill>
+                <a:latin typeface="Calibri"/>
+              </a:defRPr>
+            </a:pPr>
+            <a:r>
+              <a:t>— Anna Kolyada</a:t>
+            </a:r>
+          </a:p>
+        </p:txBody>
+      </p:sp>
+      <p:sp>
+        <p:nvSpPr>
+          <p:cNvPr id="8" name="TextBox 7"/>
+          <p:cNvSpPr txBox="1"/>
+          <p:nvPr/>
+        </p:nvSpPr>
+        <p:spPr>
+          <a:xfrm>
+            <a:off x="1097280" y="5212080"/>
+            <a:ext cx="9966960" cy="365760"/>
+          </a:xfrm>
+          <a:prstGeom prst="rect">
+            <a:avLst/>
+          </a:prstGeom>
+          <a:noFill/>
+        </p:spPr>
+        <p:txBody>
+          <a:bodyPr wrap="square">
+            <a:spAutoFit/>
+          </a:bodyPr>
+          <a:lstStyle/>
+          <a:p>
+            <a:pPr algn="l">
+              <a:defRPr sz="1400" b="1" i="0">
+                <a:solidFill>
+                  <a:srgbClr val="9B59B6"/>
+                </a:solidFill>
+                <a:latin typeface="Calibri"/>
+              </a:defRPr>
+            </a:pPr>
+            <a:r>
+              <a:t>positive</a:t>
+            </a:r>
+          </a:p>
+        </p:txBody>
+      </p:sp>
+      <p:sp>
+        <p:nvSpPr>
+          <p:cNvPr id="9" name="TextBox 8"/>
+          <p:cNvSpPr txBox="1"/>
+          <p:nvPr/>
+        </p:nvSpPr>
+        <p:spPr>
+          <a:xfrm>
+            <a:off x="1097280" y="5760720"/>
+            <a:ext cx="9966960" cy="274320"/>
+          </a:xfrm>
+          <a:prstGeom prst="rect">
+            <a:avLst/>
+          </a:prstGeom>
+          <a:noFill/>
+        </p:spPr>
+        <p:txBody>
+          <a:bodyPr wrap="square">
+            <a:spAutoFit/>
+          </a:bodyPr>
+          <a:lstStyle/>
+          <a:p>
+            <a:pPr algn="l">
+              <a:defRPr sz="1100" b="0" i="0">
+                <a:solidFill>
+                  <a:srgbClr val="5C6270"/>
+                </a:solidFill>
+                <a:latin typeface="Calibri"/>
+              </a:defRPr>
+            </a:pPr>
+            <a:r>
+              <a:t>office culture</a:t>
+            </a:r>
+          </a:p>
+        </p:txBody>
+      </p:sp>
+    </p:spTree>
+  </p:cSld>
+  <p:clrMapOvr>
+    <a:masterClrMapping/>
+  </p:clrMapOvr>
+</p:sld>
+</file>
+
+<file path=ppt/slides/slide19.xml><?xml version="1.0" encoding="utf-8"?>
+<p:sld xmlns:a="http://schemas.openxmlformats.org/drawingml/2006/main" xmlns:p="http://schemas.openxmlformats.org/presentationml/2006/main" xmlns:r="http://schemas.openxmlformats.org/officeDocument/2006/relationships">
+  <p:cSld>
+    <p:bg>
+      <p:bgPr>
+        <a:solidFill>
+          <a:srgbClr val="08080C"/>
+        </a:solidFill>
+        <a:effectLst/>
+      </p:bgPr>
+    </p:bg>
+    <p:spTree>
+      <p:nvGrpSpPr>
+        <p:cNvPr id="1" name=""/>
+        <p:cNvGrpSpPr/>
+        <p:nvPr/>
+      </p:nvGrpSpPr>
+      <p:grpSpPr/>
+      <p:sp>
+        <p:nvSpPr>
+          <p:cNvPr id="2" name="Rectangle 1"/>
+          <p:cNvSpPr/>
+          <p:nvPr/>
+        </p:nvSpPr>
+        <p:spPr>
+          <a:xfrm>
+            <a:off x="0" y="365760"/>
+            <a:ext cx="12191695" cy="54864"/>
+          </a:xfrm>
+          <a:prstGeom prst="rect">
+            <a:avLst/>
+          </a:prstGeom>
+          <a:solidFill>
+            <a:srgbClr val="E67E22"/>
+          </a:solidFill>
+          <a:ln>
+            <a:noFill/>
+          </a:ln>
+        </p:spPr>
+        <p:style>
+          <a:lnRef idx="1">
+            <a:schemeClr val="accent1"/>
+          </a:lnRef>
+          <a:fillRef idx="3">
+            <a:schemeClr val="accent1"/>
+          </a:fillRef>
+          <a:effectRef idx="2">
+            <a:schemeClr val="accent1"/>
+          </a:effectRef>
+          <a:fontRef idx="minor">
+            <a:schemeClr val="lt1"/>
+          </a:fontRef>
+        </p:style>
+        <p:txBody>
+          <a:bodyPr rtlCol="0" anchor="ctr"/>
+          <a:lstStyle/>
+          <a:p>
+            <a:pPr algn="ctr"/>
+          </a:p>
+        </p:txBody>
+      </p:sp>
+      <p:sp>
+        <p:nvSpPr>
+          <p:cNvPr id="3" name="TextBox 2"/>
+          <p:cNvSpPr txBox="1"/>
+          <p:nvPr/>
+        </p:nvSpPr>
+        <p:spPr>
+          <a:xfrm>
+            <a:off x="1097280" y="731520"/>
+            <a:ext cx="3657600" cy="365760"/>
+          </a:xfrm>
+          <a:prstGeom prst="rect">
+            <a:avLst/>
+          </a:prstGeom>
+          <a:noFill/>
+        </p:spPr>
+        <p:txBody>
+          <a:bodyPr wrap="none">
+            <a:spAutoFit/>
+          </a:bodyPr>
+          <a:lstStyle/>
+          <a:p>
+            <a:pPr algn="l">
+              <a:defRPr sz="1000" b="1">
+                <a:solidFill>
+                  <a:srgbClr val="E67E22"/>
+                </a:solidFill>
+                <a:latin typeface="Calibri"/>
+              </a:defRPr>
+            </a:pPr>
+            <a:r>
+              <a:t>🚢  WEEKLY RITUAL</a:t>
+            </a:r>
+          </a:p>
+        </p:txBody>
+      </p:sp>
+      <p:sp>
+        <p:nvSpPr>
+          <p:cNvPr id="4" name="TextBox 3"/>
+          <p:cNvSpPr txBox="1"/>
+          <p:nvPr/>
+        </p:nvSpPr>
+        <p:spPr>
+          <a:xfrm>
+            <a:off x="1097280" y="1188720"/>
+            <a:ext cx="9966960" cy="731520"/>
+          </a:xfrm>
+          <a:prstGeom prst="rect">
+            <a:avLst/>
+          </a:prstGeom>
+          <a:noFill/>
+        </p:spPr>
+        <p:txBody>
+          <a:bodyPr wrap="square">
+            <a:spAutoFit/>
+          </a:bodyPr>
+          <a:lstStyle/>
+          <a:p>
+            <a:pPr algn="l">
+              <a:defRPr sz="3200" b="1" i="0">
+                <a:solidFill>
+                  <a:srgbClr val="E67E22"/>
+                </a:solidFill>
+                <a:latin typeface="Calibri"/>
+              </a:defRPr>
+            </a:pPr>
+            <a:r>
+              <a:t>Build Culture</a:t>
+            </a:r>
+          </a:p>
+        </p:txBody>
+      </p:sp>
+      <p:sp>
+        <p:nvSpPr>
+          <p:cNvPr id="5" name="TextBox 4"/>
+          <p:cNvSpPr txBox="1"/>
+          <p:nvPr/>
+        </p:nvSpPr>
+        <p:spPr>
+          <a:xfrm>
+            <a:off x="1097280" y="2103120"/>
+            <a:ext cx="9966960" cy="457200"/>
+          </a:xfrm>
+          <a:prstGeom prst="rect">
+            <a:avLst/>
+          </a:prstGeom>
+          <a:noFill/>
+        </p:spPr>
+        <p:txBody>
+          <a:bodyPr wrap="square">
+            <a:spAutoFit/>
+          </a:bodyPr>
+          <a:lstStyle/>
+          <a:p>
+            <a:pPr algn="l">
+              <a:defRPr sz="1800" b="1" i="0">
+                <a:solidFill>
+                  <a:srgbClr val="FFFFFF"/>
+                </a:solidFill>
+                <a:latin typeface="Calibri"/>
+              </a:defRPr>
+            </a:pPr>
+            <a:r>
+              <a:t>Build. Ship. Improve.</a:t>
             </a:r>
           </a:p>
         </p:txBody>
@@ -3464,7 +6362,7 @@
               </a:defRPr>
             </a:pPr>
             <a:r>
-              <a:t>Who inspired you this week?</a:t>
+              <a:t>Shift from requirements to pull requests</a:t>
             </a:r>
           </a:p>
         </p:txBody>
@@ -3500,7 +6398,7 @@
               </a:defRPr>
             </a:pPr>
             <a:r>
-              <a:t>Share some claps in #claps!</a:t>
+              <a:t>Action over analysis paralysis</a:t>
             </a:r>
           </a:p>
         </p:txBody>
@@ -3536,7 +6434,7 @@
               </a:defRPr>
             </a:pPr>
             <a:r>
-              <a:t>We work TOGETHER to SERVE OTHERS</a:t>
+              <a:t>EXECUTION EXCELLENCE</a:t>
             </a:r>
           </a:p>
         </p:txBody>
@@ -3572,7 +6470,7 @@
               </a:defRPr>
             </a:pPr>
             <a:r>
-              <a:t>claps</a:t>
+              <a:t>company culture</a:t>
             </a:r>
           </a:p>
         </p:txBody>
@@ -3677,7 +6575,7 @@
               </a:defRPr>
             </a:pPr>
             <a:r>
-              <a:t>🎉  CELEBRATION</a:t>
+              <a:t>🎂  CELEBRATION</a:t>
             </a:r>
           </a:p>
         </p:txBody>
@@ -3713,7 +6611,7 @@
               </a:defRPr>
             </a:pPr>
             <a:r>
-              <a:t>Birthday Celebrations!</a:t>
+              <a:t>Birthday Celebration</a:t>
             </a:r>
           </a:p>
         </p:txBody>
@@ -3749,7 +6647,7 @@
               </a:defRPr>
             </a:pPr>
             <a:r>
-              <a:t>Team Members</a:t>
+              <a:t>Alexandr Sikorsky</a:t>
             </a:r>
           </a:p>
         </p:txBody>
@@ -3821,7 +6719,7 @@
               </a:defRPr>
             </a:pPr>
             <a:r>
-              <a:t>Happy Birthday to our amazing team members! 🎂</a:t>
+              <a:t>Celebrating another year of awesome! Thank you for being such a fantastic part of our team.</a:t>
             </a:r>
           </a:p>
         </p:txBody>
@@ -3857,7 +6755,7 @@
               </a:defRPr>
             </a:pPr>
             <a:r>
-              <a:t>Wishing you an incredible year ahead!</a:t>
+              <a:t>Making work brighter with ideas, humor, and dedication</a:t>
             </a:r>
           </a:p>
         </p:txBody>
@@ -3903,7 +6801,7 @@
             <a:avLst/>
           </a:prstGeom>
           <a:solidFill>
-            <a:srgbClr val="4CAF50"/>
+            <a:srgbClr val="4ECDC4"/>
           </a:solidFill>
           <a:ln>
             <a:noFill/>
@@ -3956,7 +6854,7 @@
             <a:pPr algn="l">
               <a:defRPr sz="1000" b="1">
                 <a:solidFill>
-                  <a:srgbClr val="4CAF50"/>
+                  <a:srgbClr val="4ECDC4"/>
                 </a:solidFill>
                 <a:latin typeface="Calibri"/>
               </a:defRPr>
@@ -3992,7 +6890,7 @@
             <a:pPr algn="l">
               <a:defRPr sz="3200" b="1" i="0">
                 <a:solidFill>
-                  <a:srgbClr val="4CAF50"/>
+                  <a:srgbClr val="4ECDC4"/>
                 </a:solidFill>
                 <a:latin typeface="Calibri"/>
               </a:defRPr>
@@ -4028,13 +6926,13 @@
             <a:pPr algn="l">
               <a:defRPr sz="4800" b="1" i="0">
                 <a:solidFill>
-                  <a:srgbClr val="4CAF50"/>
-                </a:solidFill>
-                <a:latin typeface="Calibri"/>
-              </a:defRPr>
-            </a:pPr>
-            <a:r>
-              <a:t>98</a:t>
+                  <a:srgbClr val="4ECDC4"/>
+                </a:solidFill>
+                <a:latin typeface="Calibri"/>
+              </a:defRPr>
+            </a:pPr>
+            <a:r>
+              <a:t>1</a:t>
             </a:r>
           </a:p>
         </p:txBody>
@@ -4070,7 +6968,7 @@
               </a:defRPr>
             </a:pPr>
             <a:r>
-              <a:t>reactions</a:t>
+              <a:t>click deployment</a:t>
             </a:r>
           </a:p>
         </p:txBody>
@@ -4106,7 +7004,7 @@
               </a:defRPr>
             </a:pPr>
             <a:r>
-              <a:t>by Gleb Krahotkin &amp; DevOps Team</a:t>
+              <a:t>by Gleb Krahotkin</a:t>
             </a:r>
           </a:p>
         </p:txBody>
@@ -4142,7 +7040,7 @@
               </a:defRPr>
             </a:pPr>
             <a:r>
-              <a:t>Coolify Platform Launch Success</a:t>
+              <a:t>Coolify Platform Launched</a:t>
             </a:r>
           </a:p>
         </p:txBody>
@@ -4178,7 +7076,7 @@
               </a:defRPr>
             </a:pPr>
             <a:r>
-              <a:t>Our DevOps team launched Coolify - a revolutionary one-click deployment service that makes app deployment effortless for everyone.</a:t>
+              <a:t>Revolutionary deployment service now live for all teams</a:t>
             </a:r>
           </a:p>
         </p:txBody>
@@ -4214,7 +7112,7 @@
               </a:defRPr>
             </a:pPr>
             <a:r>
-              <a:t>💬 "Innovation that empowers the entire team to deploy faster and easier!"</a:t>
+              <a:t>💬 "Deploy applications in just a few clicks with our new internal platform"</a:t>
             </a:r>
           </a:p>
         </p:txBody>
@@ -4260,7 +7158,7 @@
             <a:avLst/>
           </a:prstGeom>
           <a:solidFill>
-            <a:srgbClr val="9C27B0"/>
+            <a:srgbClr val="9B59B6"/>
           </a:solidFill>
           <a:ln>
             <a:noFill/>
@@ -4313,13 +7211,13 @@
             <a:pPr algn="l">
               <a:defRPr sz="1000" b="1">
                 <a:solidFill>
-                  <a:srgbClr val="9C27B0"/>
-                </a:solidFill>
-                <a:latin typeface="Calibri"/>
-              </a:defRPr>
-            </a:pPr>
-            <a:r>
-              <a:t>🎓  EVENT</a:t>
+                  <a:srgbClr val="9B59B6"/>
+                </a:solidFill>
+                <a:latin typeface="Calibri"/>
+              </a:defRPr>
+            </a:pPr>
+            <a:r>
+              <a:t>👏  CLAPS</a:t>
             </a:r>
           </a:p>
         </p:txBody>
@@ -4349,13 +7247,13 @@
             <a:pPr algn="l">
               <a:defRPr sz="3200" b="1" i="0">
                 <a:solidFill>
-                  <a:srgbClr val="9C27B0"/>
-                </a:solidFill>
-                <a:latin typeface="Calibri"/>
-              </a:defRPr>
-            </a:pPr>
-            <a:r>
-              <a:t>Knowledge Sharing Win</a:t>
+                  <a:srgbClr val="9B59B6"/>
+                </a:solidFill>
+                <a:latin typeface="Calibri"/>
+              </a:defRPr>
+            </a:pPr>
+            <a:r>
+              <a:t>Team Recognition</a:t>
             </a:r>
           </a:p>
         </p:txBody>
@@ -4369,21 +7267,93 @@
         <p:spPr>
           <a:xfrm>
             <a:off x="1097280" y="2103120"/>
-            <a:ext cx="9966960" cy="548640"/>
-          </a:xfrm>
-          <a:prstGeom prst="rect">
-            <a:avLst/>
-          </a:prstGeom>
-          <a:noFill/>
-        </p:spPr>
-        <p:txBody>
-          <a:bodyPr wrap="square">
-            <a:spAutoFit/>
-          </a:bodyPr>
-          <a:lstStyle/>
-          <a:p>
-            <a:pPr algn="l">
-              <a:defRPr sz="2200" b="1" i="0">
+            <a:ext cx="2743200" cy="548640"/>
+          </a:xfrm>
+          <a:prstGeom prst="rect">
+            <a:avLst/>
+          </a:prstGeom>
+          <a:noFill/>
+        </p:spPr>
+        <p:txBody>
+          <a:bodyPr wrap="square">
+            <a:spAutoFit/>
+          </a:bodyPr>
+          <a:lstStyle/>
+          <a:p>
+            <a:pPr algn="l">
+              <a:defRPr sz="2800" b="1" i="0">
+                <a:solidFill>
+                  <a:srgbClr val="9B59B6"/>
+                </a:solidFill>
+                <a:latin typeface="Calibri"/>
+              </a:defRPr>
+            </a:pPr>
+            <a:r>
+              <a:t>50</a:t>
+            </a:r>
+          </a:p>
+        </p:txBody>
+      </p:sp>
+      <p:sp>
+        <p:nvSpPr>
+          <p:cNvPr id="6" name="TextBox 5"/>
+          <p:cNvSpPr txBox="1"/>
+          <p:nvPr/>
+        </p:nvSpPr>
+        <p:spPr>
+          <a:xfrm>
+            <a:off x="1097280" y="2651760"/>
+            <a:ext cx="9966960" cy="365760"/>
+          </a:xfrm>
+          <a:prstGeom prst="rect">
+            <a:avLst/>
+          </a:prstGeom>
+          <a:noFill/>
+        </p:spPr>
+        <p:txBody>
+          <a:bodyPr wrap="square">
+            <a:spAutoFit/>
+          </a:bodyPr>
+          <a:lstStyle/>
+          <a:p>
+            <a:pPr algn="l">
+              <a:defRPr sz="1400" b="0" i="0">
+                <a:solidFill>
+                  <a:srgbClr val="E2E2EA"/>
+                </a:solidFill>
+                <a:latin typeface="Calibri"/>
+              </a:defRPr>
+            </a:pPr>
+            <a:r>
+              <a:t>from pavel.savinskiy</a:t>
+            </a:r>
+          </a:p>
+        </p:txBody>
+      </p:sp>
+      <p:sp>
+        <p:nvSpPr>
+          <p:cNvPr id="7" name="TextBox 6"/>
+          <p:cNvSpPr txBox="1"/>
+          <p:nvPr/>
+        </p:nvSpPr>
+        <p:spPr>
+          <a:xfrm>
+            <a:off x="1097280" y="3108960"/>
+            <a:ext cx="9966960" cy="365760"/>
+          </a:xfrm>
+          <a:prstGeom prst="rect">
+            <a:avLst/>
+          </a:prstGeom>
+          <a:noFill/>
+        </p:spPr>
+        <p:txBody>
+          <a:bodyPr wrap="square">
+            <a:spAutoFit/>
+          </a:bodyPr>
+          <a:lstStyle/>
+          <a:p>
+            <a:pPr algn="l">
+              <a:defRPr sz="1400" b="1" i="0">
                 <a:solidFill>
                   <a:srgbClr val="FFFFFF"/>
                 </a:solidFill>
@@ -4391,71 +7361,35 @@
               </a:defRPr>
             </a:pPr>
             <a:r>
-              <a:t>11th Lunch &amp; Learn Session</a:t>
-            </a:r>
-          </a:p>
-        </p:txBody>
-      </p:sp>
-      <p:sp>
-        <p:nvSpPr>
-          <p:cNvPr id="6" name="TextBox 5"/>
-          <p:cNvSpPr txBox="1"/>
-          <p:nvPr/>
-        </p:nvSpPr>
-        <p:spPr>
-          <a:xfrm>
-            <a:off x="1097280" y="2743200"/>
-            <a:ext cx="9966960" cy="365760"/>
-          </a:xfrm>
-          <a:prstGeom prst="rect">
-            <a:avLst/>
-          </a:prstGeom>
-          <a:noFill/>
-        </p:spPr>
-        <p:txBody>
-          <a:bodyPr wrap="square">
-            <a:spAutoFit/>
-          </a:bodyPr>
-          <a:lstStyle/>
-          <a:p>
-            <a:pPr algn="l">
-              <a:defRPr sz="1400" b="1" i="0">
-                <a:solidFill>
-                  <a:srgbClr val="9C27B0"/>
-                </a:solidFill>
-                <a:latin typeface="Calibri"/>
-              </a:defRPr>
-            </a:pPr>
-            <a:r>
-              <a:t>Recently Completed</a:t>
-            </a:r>
-          </a:p>
-        </p:txBody>
-      </p:sp>
-      <p:sp>
-        <p:nvSpPr>
-          <p:cNvPr id="7" name="TextBox 6"/>
-          <p:cNvSpPr txBox="1"/>
-          <p:nvPr/>
-        </p:nvSpPr>
-        <p:spPr>
-          <a:xfrm>
-            <a:off x="1097280" y="3291840"/>
-            <a:ext cx="9966960" cy="1371600"/>
-          </a:xfrm>
-          <a:prstGeom prst="rect">
-            <a:avLst/>
-          </a:prstGeom>
-          <a:noFill/>
-        </p:spPr>
-        <p:txBody>
-          <a:bodyPr wrap="square">
-            <a:spAutoFit/>
-          </a:bodyPr>
-          <a:lstStyle/>
-          <a:p>
-            <a:pPr algn="l">
-              <a:defRPr sz="1500" b="0" i="0">
+              <a:t>to: sergeydesigner</a:t>
+            </a:r>
+          </a:p>
+        </p:txBody>
+      </p:sp>
+      <p:sp>
+        <p:nvSpPr>
+          <p:cNvPr id="8" name="TextBox 7"/>
+          <p:cNvSpPr txBox="1"/>
+          <p:nvPr/>
+        </p:nvSpPr>
+        <p:spPr>
+          <a:xfrm>
+            <a:off x="1097280" y="3749039"/>
+            <a:ext cx="9966960" cy="1097280"/>
+          </a:xfrm>
+          <a:prstGeom prst="rect">
+            <a:avLst/>
+          </a:prstGeom>
+          <a:noFill/>
+        </p:spPr>
+        <p:txBody>
+          <a:bodyPr wrap="square">
+            <a:spAutoFit/>
+          </a:bodyPr>
+          <a:lstStyle/>
+          <a:p>
+            <a:pPr algn="l">
+              <a:defRPr sz="1500" b="0" i="1">
                 <a:solidFill>
                   <a:srgbClr val="E2E2EA"/>
                 </a:solidFill>
@@ -4463,43 +7397,43 @@
               </a:defRPr>
             </a:pPr>
             <a:r>
-              <a:t>Timofey Levanov delivered an engaging presentation on fraud traffic detection, with recording and slides now available for all team members.</a:t>
-            </a:r>
-          </a:p>
-        </p:txBody>
-      </p:sp>
-      <p:sp>
-        <p:nvSpPr>
-          <p:cNvPr id="8" name="TextBox 7"/>
-          <p:cNvSpPr txBox="1"/>
-          <p:nvPr/>
-        </p:nvSpPr>
-        <p:spPr>
-          <a:xfrm>
-            <a:off x="1097280" y="5029200"/>
-            <a:ext cx="9966960" cy="365760"/>
-          </a:xfrm>
-          <a:prstGeom prst="rect">
-            <a:avLst/>
-          </a:prstGeom>
-          <a:noFill/>
-        </p:spPr>
-        <p:txBody>
-          <a:bodyPr wrap="square">
-            <a:spAutoFit/>
-          </a:bodyPr>
-          <a:lstStyle/>
-          <a:p>
-            <a:pPr algn="l">
-              <a:defRPr sz="1300" b="0" i="0">
-                <a:solidFill>
-                  <a:srgbClr val="8F95A3"/>
-                </a:solidFill>
-                <a:latin typeface="Calibri"/>
-              </a:defRPr>
-            </a:pPr>
-            <a:r>
-              <a:t>Organized by Katarzyna Raniszewska</a:t>
+              <a:t>"Outstanding design work and creative excellence"</a:t>
+            </a:r>
+          </a:p>
+        </p:txBody>
+      </p:sp>
+      <p:sp>
+        <p:nvSpPr>
+          <p:cNvPr id="9" name="TextBox 8"/>
+          <p:cNvSpPr txBox="1"/>
+          <p:nvPr/>
+        </p:nvSpPr>
+        <p:spPr>
+          <a:xfrm>
+            <a:off x="1097280" y="5120640"/>
+            <a:ext cx="9966960" cy="457200"/>
+          </a:xfrm>
+          <a:prstGeom prst="rect">
+            <a:avLst/>
+          </a:prstGeom>
+          <a:noFill/>
+        </p:spPr>
+        <p:txBody>
+          <a:bodyPr wrap="square">
+            <a:spAutoFit/>
+          </a:bodyPr>
+          <a:lstStyle/>
+          <a:p>
+            <a:pPr algn="l">
+              <a:defRPr sz="1200" b="1" i="0">
+                <a:solidFill>
+                  <a:srgbClr val="9B59B6"/>
+                </a:solidFill>
+                <a:latin typeface="Calibri"/>
+              </a:defRPr>
+            </a:pPr>
+            <a:r>
+              <a:t>EXCELLENCE · CREATIVITY</a:t>
             </a:r>
           </a:p>
         </p:txBody>
@@ -4545,7 +7479,7 @@
             <a:avLst/>
           </a:prstGeom>
           <a:solidFill>
-            <a:srgbClr val="FF9800"/>
+            <a:srgbClr val="E67E22"/>
           </a:solidFill>
           <a:ln>
             <a:noFill/>
@@ -4598,13 +7532,13 @@
             <a:pPr algn="l">
               <a:defRPr sz="1000" b="1">
                 <a:solidFill>
-                  <a:srgbClr val="FF9800"/>
-                </a:solidFill>
-                <a:latin typeface="Calibri"/>
-              </a:defRPr>
-            </a:pPr>
-            <a:r>
-              <a:t>👏  CLAPS</a:t>
+                  <a:srgbClr val="E67E22"/>
+                </a:solidFill>
+                <a:latin typeface="Calibri"/>
+              </a:defRPr>
+            </a:pPr>
+            <a:r>
+              <a:t>🔥  EVENT</a:t>
             </a:r>
           </a:p>
         </p:txBody>
@@ -4634,13 +7568,13 @@
             <a:pPr algn="l">
               <a:defRPr sz="3200" b="1" i="0">
                 <a:solidFill>
-                  <a:srgbClr val="FF9800"/>
-                </a:solidFill>
-                <a:latin typeface="Calibri"/>
-              </a:defRPr>
-            </a:pPr>
-            <a:r>
-              <a:t>Recognition Champions</a:t>
+                  <a:srgbClr val="E67E22"/>
+                </a:solidFill>
+                <a:latin typeface="Calibri"/>
+              </a:defRPr>
+            </a:pPr>
+            <a:r>
+              <a:t>Lunch &amp; Learn Success</a:t>
             </a:r>
           </a:p>
         </p:txBody>
@@ -4654,29 +7588,29 @@
         <p:spPr>
           <a:xfrm>
             <a:off x="1097280" y="2103120"/>
-            <a:ext cx="2743200" cy="548640"/>
-          </a:xfrm>
-          <a:prstGeom prst="rect">
-            <a:avLst/>
-          </a:prstGeom>
-          <a:noFill/>
-        </p:spPr>
-        <p:txBody>
-          <a:bodyPr wrap="square">
-            <a:spAutoFit/>
-          </a:bodyPr>
-          <a:lstStyle/>
-          <a:p>
-            <a:pPr algn="l">
-              <a:defRPr sz="2800" b="1" i="0">
-                <a:solidFill>
-                  <a:srgbClr val="FF9800"/>
-                </a:solidFill>
-                <a:latin typeface="Calibri"/>
-              </a:defRPr>
-            </a:pPr>
-            <a:r>
-              <a:t>50</a:t>
+            <a:ext cx="9966960" cy="548640"/>
+          </a:xfrm>
+          <a:prstGeom prst="rect">
+            <a:avLst/>
+          </a:prstGeom>
+          <a:noFill/>
+        </p:spPr>
+        <p:txBody>
+          <a:bodyPr wrap="square">
+            <a:spAutoFit/>
+          </a:bodyPr>
+          <a:lstStyle/>
+          <a:p>
+            <a:pPr algn="l">
+              <a:defRPr sz="2200" b="1" i="0">
+                <a:solidFill>
+                  <a:srgbClr val="FFFFFF"/>
+                </a:solidFill>
+                <a:latin typeface="Calibri"/>
+              </a:defRPr>
+            </a:pPr>
+            <a:r>
+              <a:t>11th Lunch &amp; Learn Session</a:t>
             </a:r>
           </a:p>
         </p:txBody>
@@ -4689,7 +7623,7 @@
         </p:nvSpPr>
         <p:spPr>
           <a:xfrm>
-            <a:off x="1097280" y="2651760"/>
+            <a:off x="1097280" y="2743200"/>
             <a:ext cx="9966960" cy="365760"/>
           </a:xfrm>
           <a:prstGeom prst="rect">
@@ -4704,7 +7638,43 @@
           <a:lstStyle/>
           <a:p>
             <a:pPr algn="l">
-              <a:defRPr sz="1400" b="0" i="0">
+              <a:defRPr sz="1400" b="1" i="0">
+                <a:solidFill>
+                  <a:srgbClr val="E67E22"/>
+                </a:solidFill>
+                <a:latin typeface="Calibri"/>
+              </a:defRPr>
+            </a:pPr>
+            <a:r>
+              <a:t>This Week</a:t>
+            </a:r>
+          </a:p>
+        </p:txBody>
+      </p:sp>
+      <p:sp>
+        <p:nvSpPr>
+          <p:cNvPr id="7" name="TextBox 6"/>
+          <p:cNvSpPr txBox="1"/>
+          <p:nvPr/>
+        </p:nvSpPr>
+        <p:spPr>
+          <a:xfrm>
+            <a:off x="1097280" y="3291840"/>
+            <a:ext cx="9966960" cy="1371600"/>
+          </a:xfrm>
+          <a:prstGeom prst="rect">
+            <a:avLst/>
+          </a:prstGeom>
+          <a:noFill/>
+        </p:spPr>
+        <p:txBody>
+          <a:bodyPr wrap="square">
+            <a:spAutoFit/>
+          </a:bodyPr>
+          <a:lstStyle/>
+          <a:p>
+            <a:pPr algn="l">
+              <a:defRPr sz="1500" b="0" i="0">
                 <a:solidFill>
                   <a:srgbClr val="E2E2EA"/>
                 </a:solidFill>
@@ -4712,20 +7682,20 @@
               </a:defRPr>
             </a:pPr>
             <a:r>
-              <a:t>from pavel.savinskiy</a:t>
-            </a:r>
-          </a:p>
-        </p:txBody>
-      </p:sp>
-      <p:sp>
-        <p:nvSpPr>
-          <p:cNvPr id="7" name="TextBox 6"/>
-          <p:cNvSpPr txBox="1"/>
-          <p:nvPr/>
-        </p:nvSpPr>
-        <p:spPr>
-          <a:xfrm>
-            <a:off x="1097280" y="3108960"/>
+              <a:t>Timofey Levanov presented on fraud traffic detection</a:t>
+            </a:r>
+          </a:p>
+        </p:txBody>
+      </p:sp>
+      <p:sp>
+        <p:nvSpPr>
+          <p:cNvPr id="8" name="TextBox 7"/>
+          <p:cNvSpPr txBox="1"/>
+          <p:nvPr/>
+        </p:nvSpPr>
+        <p:spPr>
+          <a:xfrm>
+            <a:off x="1097280" y="5029200"/>
             <a:ext cx="9966960" cy="365760"/>
           </a:xfrm>
           <a:prstGeom prst="rect">
@@ -4740,87 +7710,15 @@
           <a:lstStyle/>
           <a:p>
             <a:pPr algn="l">
-              <a:defRPr sz="1400" b="1" i="0">
-                <a:solidFill>
-                  <a:srgbClr val="FFFFFF"/>
-                </a:solidFill>
-                <a:latin typeface="Calibri"/>
-              </a:defRPr>
-            </a:pPr>
-            <a:r>
-              <a:t>to: sergeydesigner</a:t>
-            </a:r>
-          </a:p>
-        </p:txBody>
-      </p:sp>
-      <p:sp>
-        <p:nvSpPr>
-          <p:cNvPr id="8" name="TextBox 7"/>
-          <p:cNvSpPr txBox="1"/>
-          <p:nvPr/>
-        </p:nvSpPr>
-        <p:spPr>
-          <a:xfrm>
-            <a:off x="1097280" y="3749039"/>
-            <a:ext cx="9966960" cy="1097280"/>
-          </a:xfrm>
-          <a:prstGeom prst="rect">
-            <a:avLst/>
-          </a:prstGeom>
-          <a:noFill/>
-        </p:spPr>
-        <p:txBody>
-          <a:bodyPr wrap="square">
-            <a:spAutoFit/>
-          </a:bodyPr>
-          <a:lstStyle/>
-          <a:p>
-            <a:pPr algn="l">
-              <a:defRPr sz="1500" b="0" i="1">
-                <a:solidFill>
-                  <a:srgbClr val="E2E2EA"/>
-                </a:solidFill>
-                <a:latin typeface="Calibri"/>
-              </a:defRPr>
-            </a:pPr>
-            <a:r>
-              <a:t>"Outstanding design work and creative excellence"</a:t>
-            </a:r>
-          </a:p>
-        </p:txBody>
-      </p:sp>
-      <p:sp>
-        <p:nvSpPr>
-          <p:cNvPr id="9" name="TextBox 8"/>
-          <p:cNvSpPr txBox="1"/>
-          <p:nvPr/>
-        </p:nvSpPr>
-        <p:spPr>
-          <a:xfrm>
-            <a:off x="1097280" y="5120640"/>
-            <a:ext cx="9966960" cy="457200"/>
-          </a:xfrm>
-          <a:prstGeom prst="rect">
-            <a:avLst/>
-          </a:prstGeom>
-          <a:noFill/>
-        </p:spPr>
-        <p:txBody>
-          <a:bodyPr wrap="square">
-            <a:spAutoFit/>
-          </a:bodyPr>
-          <a:lstStyle/>
-          <a:p>
-            <a:pPr algn="l">
-              <a:defRPr sz="1200" b="1" i="0">
-                <a:solidFill>
-                  <a:srgbClr val="FF9800"/>
-                </a:solidFill>
-                <a:latin typeface="Calibri"/>
-              </a:defRPr>
-            </a:pPr>
-            <a:r>
-              <a:t>Excellence · Creativity</a:t>
+              <a:defRPr sz="1300" b="0" i="0">
+                <a:solidFill>
+                  <a:srgbClr val="8F95A3"/>
+                </a:solidFill>
+                <a:latin typeface="Calibri"/>
+              </a:defRPr>
+            </a:pPr>
+            <a:r>
+              <a:t>Organized by Katarzyna Raniszewska</a:t>
             </a:r>
           </a:p>
         </p:txBody>
@@ -4866,7 +7764,7 @@
             <a:avLst/>
           </a:prstGeom>
           <a:solidFill>
-            <a:srgbClr val="E91E63"/>
+            <a:srgbClr val="3498DB"/>
           </a:solidFill>
           <a:ln>
             <a:noFill/>
@@ -4919,7 +7817,7 @@
             <a:pPr algn="l">
               <a:defRPr sz="1000" b="1">
                 <a:solidFill>
-                  <a:srgbClr val="E91E63"/>
+                  <a:srgbClr val="3498DB"/>
                 </a:solidFill>
                 <a:latin typeface="Calibri"/>
               </a:defRPr>
@@ -4955,13 +7853,13 @@
             <a:pPr algn="l">
               <a:defRPr sz="3200" b="1" i="0">
                 <a:solidFill>
-                  <a:srgbClr val="E91E63"/>
-                </a:solidFill>
-                <a:latin typeface="Calibri"/>
-              </a:defRPr>
-            </a:pPr>
-            <a:r>
-              <a:t>Team Excellence</a:t>
+                  <a:srgbClr val="3498DB"/>
+                </a:solidFill>
+                <a:latin typeface="Calibri"/>
+              </a:defRPr>
+            </a:pPr>
+            <a:r>
+              <a:t>Individual Excellence</a:t>
             </a:r>
           </a:p>
         </p:txBody>
@@ -4991,7 +7889,7 @@
             <a:pPr algn="l">
               <a:defRPr sz="2800" b="1" i="0">
                 <a:solidFill>
-                  <a:srgbClr val="E91E63"/>
+                  <a:srgbClr val="3498DB"/>
                 </a:solidFill>
                 <a:latin typeface="Calibri"/>
               </a:defRPr>
@@ -5105,7 +8003,7 @@
               </a:defRPr>
             </a:pPr>
             <a:r>
-              <a:t>"Exceptional technical contributions and problem-solving"</a:t>
+              <a:t>"Exceptional performance and dedication"</a:t>
             </a:r>
           </a:p>
         </p:txBody>
@@ -5135,13 +8033,13 @@
             <a:pPr algn="l">
               <a:defRPr sz="1200" b="1" i="0">
                 <a:solidFill>
-                  <a:srgbClr val="E91E63"/>
-                </a:solidFill>
-                <a:latin typeface="Calibri"/>
-              </a:defRPr>
-            </a:pPr>
-            <a:r>
-              <a:t>Technical Excellence · Innovation</a:t>
+                  <a:srgbClr val="3498DB"/>
+                </a:solidFill>
+                <a:latin typeface="Calibri"/>
+              </a:defRPr>
+            </a:pPr>
+            <a:r>
+              <a:t>EXCELLENCE · DEDICATION</a:t>
             </a:r>
           </a:p>
         </p:txBody>
@@ -5187,7 +8085,7 @@
             <a:avLst/>
           </a:prstGeom>
           <a:solidFill>
-            <a:srgbClr val="2196F3"/>
+            <a:srgbClr val="27AE60"/>
           </a:solidFill>
           <a:ln>
             <a:noFill/>
@@ -5240,13 +8138,13 @@
             <a:pPr algn="l">
               <a:defRPr sz="1000" b="1">
                 <a:solidFill>
-                  <a:srgbClr val="2196F3"/>
-                </a:solidFill>
-                <a:latin typeface="Calibri"/>
-              </a:defRPr>
-            </a:pPr>
-            <a:r>
-              <a:t>🤝  CLAPS</a:t>
+                  <a:srgbClr val="27AE60"/>
+                </a:solidFill>
+                <a:latin typeface="Calibri"/>
+              </a:defRPr>
+            </a:pPr>
+            <a:r>
+              <a:t>📚  RECOMMENDED</a:t>
             </a:r>
           </a:p>
         </p:txBody>
@@ -5276,13 +8174,13 @@
             <a:pPr algn="l">
               <a:defRPr sz="3200" b="1" i="0">
                 <a:solidFill>
-                  <a:srgbClr val="2196F3"/>
-                </a:solidFill>
-                <a:latin typeface="Calibri"/>
-              </a:defRPr>
-            </a:pPr>
-            <a:r>
-              <a:t>Collaboration Power</a:t>
+                  <a:srgbClr val="27AE60"/>
+                </a:solidFill>
+                <a:latin typeface="Calibri"/>
+              </a:defRPr>
+            </a:pPr>
+            <a:r>
+              <a:t>Knowledge Sharing</a:t>
             </a:r>
           </a:p>
         </p:txBody>
@@ -5296,29 +8194,29 @@
         <p:spPr>
           <a:xfrm>
             <a:off x="1097280" y="2103120"/>
-            <a:ext cx="2743200" cy="548640"/>
-          </a:xfrm>
-          <a:prstGeom prst="rect">
-            <a:avLst/>
-          </a:prstGeom>
-          <a:noFill/>
-        </p:spPr>
-        <p:txBody>
-          <a:bodyPr wrap="square">
-            <a:spAutoFit/>
-          </a:bodyPr>
-          <a:lstStyle/>
-          <a:p>
-            <a:pPr algn="l">
-              <a:defRPr sz="2800" b="1" i="0">
-                <a:solidFill>
-                  <a:srgbClr val="2196F3"/>
-                </a:solidFill>
-                <a:latin typeface="Calibri"/>
-              </a:defRPr>
-            </a:pPr>
-            <a:r>
-              <a:t>30</a:t>
+            <a:ext cx="457200" cy="365760"/>
+          </a:xfrm>
+          <a:prstGeom prst="rect">
+            <a:avLst/>
+          </a:prstGeom>
+          <a:noFill/>
+        </p:spPr>
+        <p:txBody>
+          <a:bodyPr wrap="square">
+            <a:spAutoFit/>
+          </a:bodyPr>
+          <a:lstStyle/>
+          <a:p>
+            <a:pPr algn="l">
+              <a:defRPr sz="2200" b="1" i="0">
+                <a:solidFill>
+                  <a:srgbClr val="27AE60"/>
+                </a:solidFill>
+                <a:latin typeface="Calibri"/>
+              </a:defRPr>
+            </a:pPr>
+            <a:r>
+              <a:t>01</a:t>
             </a:r>
           </a:p>
         </p:txBody>
@@ -5331,22 +8229,58 @@
         </p:nvSpPr>
         <p:spPr>
           <a:xfrm>
-            <a:off x="1097280" y="2651760"/>
-            <a:ext cx="9966960" cy="365760"/>
-          </a:xfrm>
-          <a:prstGeom prst="rect">
-            <a:avLst/>
-          </a:prstGeom>
-          <a:noFill/>
-        </p:spPr>
-        <p:txBody>
-          <a:bodyPr wrap="square">
-            <a:spAutoFit/>
-          </a:bodyPr>
-          <a:lstStyle/>
-          <a:p>
-            <a:pPr algn="l">
-              <a:defRPr sz="1400" b="0" i="0">
+            <a:off x="1737360" y="2103120"/>
+            <a:ext cx="9326880" cy="365760"/>
+          </a:xfrm>
+          <a:prstGeom prst="rect">
+            <a:avLst/>
+          </a:prstGeom>
+          <a:noFill/>
+        </p:spPr>
+        <p:txBody>
+          <a:bodyPr wrap="square">
+            <a:spAutoFit/>
+          </a:bodyPr>
+          <a:lstStyle/>
+          <a:p>
+            <a:pPr algn="l">
+              <a:defRPr sz="1600" b="1" i="0">
+                <a:solidFill>
+                  <a:srgbClr val="FFFFFF"/>
+                </a:solidFill>
+                <a:latin typeface="Calibri"/>
+              </a:defRPr>
+            </a:pPr>
+            <a:r>
+              <a:t>The Speaking Coach: Communication Mastery</a:t>
+            </a:r>
+          </a:p>
+        </p:txBody>
+      </p:sp>
+      <p:sp>
+        <p:nvSpPr>
+          <p:cNvPr id="7" name="TextBox 6"/>
+          <p:cNvSpPr txBox="1"/>
+          <p:nvPr/>
+        </p:nvSpPr>
+        <p:spPr>
+          <a:xfrm>
+            <a:off x="1737360" y="2423160"/>
+            <a:ext cx="9326880" cy="365760"/>
+          </a:xfrm>
+          <a:prstGeom prst="rect">
+            <a:avLst/>
+          </a:prstGeom>
+          <a:noFill/>
+        </p:spPr>
+        <p:txBody>
+          <a:bodyPr wrap="square">
+            <a:spAutoFit/>
+          </a:bodyPr>
+          <a:lstStyle/>
+          <a:p>
+            <a:pPr algn="l">
+              <a:defRPr sz="1200" b="0" i="0">
                 <a:solidFill>
                   <a:srgbClr val="E2E2EA"/>
                 </a:solidFill>
@@ -5354,43 +8288,7 @@
               </a:defRPr>
             </a:pPr>
             <a:r>
-              <a:t>from Gleb Krahotkin</a:t>
-            </a:r>
-          </a:p>
-        </p:txBody>
-      </p:sp>
-      <p:sp>
-        <p:nvSpPr>
-          <p:cNvPr id="7" name="TextBox 6"/>
-          <p:cNvSpPr txBox="1"/>
-          <p:nvPr/>
-        </p:nvSpPr>
-        <p:spPr>
-          <a:xfrm>
-            <a:off x="1097280" y="3108960"/>
-            <a:ext cx="9966960" cy="365760"/>
-          </a:xfrm>
-          <a:prstGeom prst="rect">
-            <a:avLst/>
-          </a:prstGeom>
-          <a:noFill/>
-        </p:spPr>
-        <p:txBody>
-          <a:bodyPr wrap="square">
-            <a:spAutoFit/>
-          </a:bodyPr>
-          <a:lstStyle/>
-          <a:p>
-            <a:pPr algn="l">
-              <a:defRPr sz="1400" b="1" i="0">
-                <a:solidFill>
-                  <a:srgbClr val="FFFFFF"/>
-                </a:solidFill>
-                <a:latin typeface="Calibri"/>
-              </a:defRPr>
-            </a:pPr>
-            <a:r>
-              <a:t>to: Hierman Pelekh</a:t>
+              <a:t>Essential insights on powerful communication and avoiding weak language patterns</a:t>
             </a:r>
           </a:p>
         </p:txBody>
@@ -5403,30 +8301,30 @@
         </p:nvSpPr>
         <p:spPr>
           <a:xfrm>
-            <a:off x="1097280" y="3749039"/>
-            <a:ext cx="9966960" cy="1097280"/>
-          </a:xfrm>
-          <a:prstGeom prst="rect">
-            <a:avLst/>
-          </a:prstGeom>
-          <a:noFill/>
-        </p:spPr>
-        <p:txBody>
-          <a:bodyPr wrap="square">
-            <a:spAutoFit/>
-          </a:bodyPr>
-          <a:lstStyle/>
-          <a:p>
-            <a:pPr algn="l">
-              <a:defRPr sz="1500" b="0" i="1">
-                <a:solidFill>
-                  <a:srgbClr val="E2E2EA"/>
-                </a:solidFill>
-                <a:latin typeface="Calibri"/>
-              </a:defRPr>
-            </a:pPr>
-            <a:r>
-              <a:t>"Amazing teamwork and collaborative spirit"</a:t>
+            <a:off x="1737360" y="2743200"/>
+            <a:ext cx="9326880" cy="274320"/>
+          </a:xfrm>
+          <a:prstGeom prst="rect">
+            <a:avLst/>
+          </a:prstGeom>
+          <a:noFill/>
+        </p:spPr>
+        <p:txBody>
+          <a:bodyPr wrap="square">
+            <a:spAutoFit/>
+          </a:bodyPr>
+          <a:lstStyle/>
+          <a:p>
+            <a:pPr algn="l">
+              <a:defRPr sz="1100" b="0" i="0">
+                <a:solidFill>
+                  <a:srgbClr val="8F95A3"/>
+                </a:solidFill>
+                <a:latin typeface="Calibri"/>
+              </a:defRPr>
+            </a:pPr>
+            <a:r>
+              <a:t>Shared by Maria Plendukova · 2</a:t>
             </a:r>
           </a:p>
         </p:txBody>
@@ -5439,30 +8337,30 @@
         </p:nvSpPr>
         <p:spPr>
           <a:xfrm>
-            <a:off x="1097280" y="5120640"/>
-            <a:ext cx="9966960" cy="457200"/>
-          </a:xfrm>
-          <a:prstGeom prst="rect">
-            <a:avLst/>
-          </a:prstGeom>
-          <a:noFill/>
-        </p:spPr>
-        <p:txBody>
-          <a:bodyPr wrap="square">
-            <a:spAutoFit/>
-          </a:bodyPr>
-          <a:lstStyle/>
-          <a:p>
-            <a:pPr algn="l">
-              <a:defRPr sz="1200" b="1" i="0">
-                <a:solidFill>
-                  <a:srgbClr val="2196F3"/>
-                </a:solidFill>
-                <a:latin typeface="Calibri"/>
-              </a:defRPr>
-            </a:pPr>
-            <a:r>
-              <a:t>Teamwork · Collaboration</a:t>
+            <a:off x="1097280" y="5943600"/>
+            <a:ext cx="9966960" cy="274320"/>
+          </a:xfrm>
+          <a:prstGeom prst="rect">
+            <a:avLst/>
+          </a:prstGeom>
+          <a:noFill/>
+        </p:spPr>
+        <p:txBody>
+          <a:bodyPr wrap="square">
+            <a:spAutoFit/>
+          </a:bodyPr>
+          <a:lstStyle/>
+          <a:p>
+            <a:pPr algn="l">
+              <a:defRPr sz="1100" b="0" i="0">
+                <a:solidFill>
+                  <a:srgbClr val="5C6270"/>
+                </a:solidFill>
+                <a:latin typeface="Calibri"/>
+              </a:defRPr>
+            </a:pPr>
+            <a:r>
+              <a:t>#general-chat</a:t>
             </a:r>
           </a:p>
         </p:txBody>
@@ -5508,7 +8406,7 @@
             <a:avLst/>
           </a:prstGeom>
           <a:solidFill>
-            <a:srgbClr val="607D8B"/>
+            <a:srgbClr val="8E44AD"/>
           </a:solidFill>
           <a:ln>
             <a:noFill/>
@@ -5561,13 +8459,13 @@
             <a:pPr algn="l">
               <a:defRPr sz="1000" b="1">
                 <a:solidFill>
-                  <a:srgbClr val="607D8B"/>
-                </a:solidFill>
-                <a:latin typeface="Calibri"/>
-              </a:defRPr>
-            </a:pPr>
-            <a:r>
-              <a:t>📊  MILESTONE</a:t>
+                  <a:srgbClr val="8E44AD"/>
+                </a:solidFill>
+                <a:latin typeface="Calibri"/>
+              </a:defRPr>
+            </a:pPr>
+            <a:r>
+              <a:t>📖  WEEKLY RITUAL</a:t>
             </a:r>
           </a:p>
         </p:txBody>
@@ -5597,13 +8495,13 @@
             <a:pPr algn="l">
               <a:defRPr sz="3200" b="1" i="0">
                 <a:solidFill>
-                  <a:srgbClr val="607D8B"/>
-                </a:solidFill>
-                <a:latin typeface="Calibri"/>
-              </a:defRPr>
-            </a:pPr>
-            <a:r>
-              <a:t>Core Values Initiative</a:t>
+                  <a:srgbClr val="8E44AD"/>
+                </a:solidFill>
+                <a:latin typeface="Calibri"/>
+              </a:defRPr>
+            </a:pPr>
+            <a:r>
+              <a:t>Reading Club Launch</a:t>
             </a:r>
           </a:p>
         </p:txBody>
@@ -5617,29 +8515,29 @@
         <p:spPr>
           <a:xfrm>
             <a:off x="1097280" y="2103120"/>
-            <a:ext cx="4572000" cy="822960"/>
-          </a:xfrm>
-          <a:prstGeom prst="rect">
-            <a:avLst/>
-          </a:prstGeom>
-          <a:noFill/>
-        </p:spPr>
-        <p:txBody>
-          <a:bodyPr wrap="square">
-            <a:spAutoFit/>
-          </a:bodyPr>
-          <a:lstStyle/>
-          <a:p>
-            <a:pPr algn="l">
-              <a:defRPr sz="5200" b="1" i="0">
-                <a:solidFill>
-                  <a:srgbClr val="607D8B"/>
-                </a:solidFill>
-                <a:latin typeface="Calibri"/>
-              </a:defRPr>
-            </a:pPr>
-            <a:r>
-              <a:t>100</a:t>
+            <a:ext cx="9966960" cy="457200"/>
+          </a:xfrm>
+          <a:prstGeom prst="rect">
+            <a:avLst/>
+          </a:prstGeom>
+          <a:noFill/>
+        </p:spPr>
+        <p:txBody>
+          <a:bodyPr wrap="square">
+            <a:spAutoFit/>
+          </a:bodyPr>
+          <a:lstStyle/>
+          <a:p>
+            <a:pPr algn="l">
+              <a:defRPr sz="1800" b="1" i="0">
+                <a:solidFill>
+                  <a:srgbClr val="FFFFFF"/>
+                </a:solidFill>
+                <a:latin typeface="Calibri"/>
+              </a:defRPr>
+            </a:pPr>
+            <a:r>
+              <a:t>The 4 Disciplines of Execution</a:t>
             </a:r>
           </a:p>
         </p:txBody>
@@ -5652,8 +8550,116 @@
         </p:nvSpPr>
         <p:spPr>
           <a:xfrm>
-            <a:off x="1097280" y="2926080"/>
-            <a:ext cx="4572000" cy="365760"/>
+            <a:off x="1371600" y="2926080"/>
+            <a:ext cx="9418320" cy="548640"/>
+          </a:xfrm>
+          <a:prstGeom prst="rect">
+            <a:avLst/>
+          </a:prstGeom>
+          <a:noFill/>
+        </p:spPr>
+        <p:txBody>
+          <a:bodyPr wrap="square">
+            <a:spAutoFit/>
+          </a:bodyPr>
+          <a:lstStyle/>
+          <a:p>
+            <a:pPr algn="l">
+              <a:defRPr sz="1400" b="0" i="0">
+                <a:solidFill>
+                  <a:srgbClr val="E2E2EA"/>
+                </a:solidFill>
+                <a:latin typeface="Calibri"/>
+              </a:defRPr>
+            </a:pPr>
+            <a:r>
+              <a:t>Join Anna's new reading club</a:t>
+            </a:r>
+          </a:p>
+        </p:txBody>
+      </p:sp>
+      <p:sp>
+        <p:nvSpPr>
+          <p:cNvPr id="7" name="TextBox 6"/>
+          <p:cNvSpPr txBox="1"/>
+          <p:nvPr/>
+        </p:nvSpPr>
+        <p:spPr>
+          <a:xfrm>
+            <a:off x="1371600" y="3657600"/>
+            <a:ext cx="9418320" cy="548640"/>
+          </a:xfrm>
+          <a:prstGeom prst="rect">
+            <a:avLst/>
+          </a:prstGeom>
+          <a:noFill/>
+        </p:spPr>
+        <p:txBody>
+          <a:bodyPr wrap="square">
+            <a:spAutoFit/>
+          </a:bodyPr>
+          <a:lstStyle/>
+          <a:p>
+            <a:pPr algn="l">
+              <a:defRPr sz="1400" b="0" i="0">
+                <a:solidFill>
+                  <a:srgbClr val="E2E2EA"/>
+                </a:solidFill>
+                <a:latin typeface="Calibri"/>
+              </a:defRPr>
+            </a:pPr>
+            <a:r>
+              <a:t>Focus on execution excellence this quarter</a:t>
+            </a:r>
+          </a:p>
+        </p:txBody>
+      </p:sp>
+      <p:sp>
+        <p:nvSpPr>
+          <p:cNvPr id="8" name="TextBox 7"/>
+          <p:cNvSpPr txBox="1"/>
+          <p:nvPr/>
+        </p:nvSpPr>
+        <p:spPr>
+          <a:xfrm>
+            <a:off x="1097280" y="4754880"/>
+            <a:ext cx="9966960" cy="731520"/>
+          </a:xfrm>
+          <a:prstGeom prst="rect">
+            <a:avLst/>
+          </a:prstGeom>
+          <a:noFill/>
+        </p:spPr>
+        <p:txBody>
+          <a:bodyPr wrap="square">
+            <a:spAutoFit/>
+          </a:bodyPr>
+          <a:lstStyle/>
+          <a:p>
+            <a:pPr algn="l">
+              <a:defRPr sz="1500" b="0" i="1">
+                <a:solidFill>
+                  <a:srgbClr val="E2E2EA"/>
+                </a:solidFill>
+                <a:latin typeface="Calibri"/>
+              </a:defRPr>
+            </a:pPr>
+            <a:r>
+              <a:t>CONTINUOUS LEARNING</a:t>
+            </a:r>
+          </a:p>
+        </p:txBody>
+      </p:sp>
+      <p:sp>
+        <p:nvSpPr>
+          <p:cNvPr id="9" name="TextBox 8"/>
+          <p:cNvSpPr txBox="1"/>
+          <p:nvPr/>
+        </p:nvSpPr>
+        <p:spPr>
+          <a:xfrm>
+            <a:off x="1097280" y="5760720"/>
+            <a:ext cx="9966960" cy="274320"/>
           </a:xfrm>
           <a:prstGeom prst="rect">
             <a:avLst/>
@@ -5669,85 +8675,13 @@
             <a:pPr algn="l">
               <a:defRPr sz="1100" b="0" i="0">
                 <a:solidFill>
-                  <a:srgbClr val="8F95A3"/>
-                </a:solidFill>
-                <a:latin typeface="Calibri"/>
-              </a:defRPr>
-            </a:pPr>
-            <a:r>
-              <a:t>% commitment to values-driven decisions</a:t>
-            </a:r>
-          </a:p>
-        </p:txBody>
-      </p:sp>
-      <p:sp>
-        <p:nvSpPr>
-          <p:cNvPr id="7" name="TextBox 6"/>
-          <p:cNvSpPr txBox="1"/>
-          <p:nvPr/>
-        </p:nvSpPr>
-        <p:spPr>
-          <a:xfrm>
-            <a:off x="1097280" y="3566160"/>
-            <a:ext cx="9966960" cy="457200"/>
-          </a:xfrm>
-          <a:prstGeom prst="rect">
-            <a:avLst/>
-          </a:prstGeom>
-          <a:noFill/>
-        </p:spPr>
-        <p:txBody>
-          <a:bodyPr wrap="square">
-            <a:spAutoFit/>
-          </a:bodyPr>
-          <a:lstStyle/>
-          <a:p>
-            <a:pPr algn="l">
-              <a:defRPr sz="1800" b="1" i="0">
-                <a:solidFill>
-                  <a:srgbClr val="FFFFFF"/>
-                </a:solidFill>
-                <a:latin typeface="Calibri"/>
-              </a:defRPr>
-            </a:pPr>
-            <a:r>
-              <a:t>CV Health Rate Implementation</a:t>
-            </a:r>
-          </a:p>
-        </p:txBody>
-      </p:sp>
-      <p:sp>
-        <p:nvSpPr>
-          <p:cNvPr id="8" name="TextBox 7"/>
-          <p:cNvSpPr txBox="1"/>
-          <p:nvPr/>
-        </p:nvSpPr>
-        <p:spPr>
-          <a:xfrm>
-            <a:off x="1097280" y="4206240"/>
-            <a:ext cx="9966960" cy="1371600"/>
-          </a:xfrm>
-          <a:prstGeom prst="rect">
-            <a:avLst/>
-          </a:prstGeom>
-          <a:noFill/>
-        </p:spPr>
-        <p:txBody>
-          <a:bodyPr wrap="square">
-            <a:spAutoFit/>
-          </a:bodyPr>
-          <a:lstStyle/>
-          <a:p>
-            <a:pPr algn="l">
-              <a:defRPr sz="1500" b="0" i="0">
-                <a:solidFill>
-                  <a:srgbClr val="E2E2EA"/>
-                </a:solidFill>
-                <a:latin typeface="Calibri"/>
-              </a:defRPr>
-            </a:pPr>
-            <a:r>
-              <a:t>Pavel Golubev outlined our strategic initiative to transform Core Values and Leadership Principles into operational constraints and decision-making guardrails.</a:t>
+                  <a:srgbClr val="5C6270"/>
+                </a:solidFill>
+                <a:latin typeface="Calibri"/>
+              </a:defRPr>
+            </a:pPr>
+            <a:r>
+              <a:t>#general</a:t>
             </a:r>
           </a:p>
         </p:txBody>
@@ -5793,7 +8727,7 @@
             <a:avLst/>
           </a:prstGeom>
           <a:solidFill>
-            <a:srgbClr val="795548"/>
+            <a:srgbClr val="F39C12"/>
           </a:solidFill>
           <a:ln>
             <a:noFill/>
@@ -5846,13 +8780,13 @@
             <a:pPr algn="l">
               <a:defRPr sz="1000" b="1">
                 <a:solidFill>
-                  <a:srgbClr val="795548"/>
-                </a:solidFill>
-                <a:latin typeface="Calibri"/>
-              </a:defRPr>
-            </a:pPr>
-            <a:r>
-              <a:t>📚  RECOMMENDED</a:t>
+                  <a:srgbClr val="F39C12"/>
+                </a:solidFill>
+                <a:latin typeface="Calibri"/>
+              </a:defRPr>
+            </a:pPr>
+            <a:r>
+              <a:t>🎯  CLAPS</a:t>
             </a:r>
           </a:p>
         </p:txBody>
@@ -5882,13 +8816,13 @@
             <a:pPr algn="l">
               <a:defRPr sz="3200" b="1" i="0">
                 <a:solidFill>
-                  <a:srgbClr val="795548"/>
-                </a:solidFill>
-                <a:latin typeface="Calibri"/>
-              </a:defRPr>
-            </a:pPr>
-            <a:r>
-              <a:t>Learn &amp; Grow</a:t>
+                  <a:srgbClr val="F39C12"/>
+                </a:solidFill>
+                <a:latin typeface="Calibri"/>
+              </a:defRPr>
+            </a:pPr>
+            <a:r>
+              <a:t>Team Collaboration</a:t>
             </a:r>
           </a:p>
         </p:txBody>
@@ -5902,29 +8836,29 @@
         <p:spPr>
           <a:xfrm>
             <a:off x="1097280" y="2103120"/>
-            <a:ext cx="457200" cy="365760"/>
-          </a:xfrm>
-          <a:prstGeom prst="rect">
-            <a:avLst/>
-          </a:prstGeom>
-          <a:noFill/>
-        </p:spPr>
-        <p:txBody>
-          <a:bodyPr wrap="square">
-            <a:spAutoFit/>
-          </a:bodyPr>
-          <a:lstStyle/>
-          <a:p>
-            <a:pPr algn="l">
-              <a:defRPr sz="2200" b="1" i="0">
-                <a:solidFill>
-                  <a:srgbClr val="795548"/>
-                </a:solidFill>
-                <a:latin typeface="Calibri"/>
-              </a:defRPr>
-            </a:pPr>
-            <a:r>
-              <a:t>01</a:t>
+            <a:ext cx="2743200" cy="548640"/>
+          </a:xfrm>
+          <a:prstGeom prst="rect">
+            <a:avLst/>
+          </a:prstGeom>
+          <a:noFill/>
+        </p:spPr>
+        <p:txBody>
+          <a:bodyPr wrap="square">
+            <a:spAutoFit/>
+          </a:bodyPr>
+          <a:lstStyle/>
+          <a:p>
+            <a:pPr algn="l">
+              <a:defRPr sz="2800" b="1" i="0">
+                <a:solidFill>
+                  <a:srgbClr val="F39C12"/>
+                </a:solidFill>
+                <a:latin typeface="Calibri"/>
+              </a:defRPr>
+            </a:pPr>
+            <a:r>
+              <a:t>40</a:t>
             </a:r>
           </a:p>
         </p:txBody>
@@ -5937,22 +8871,58 @@
         </p:nvSpPr>
         <p:spPr>
           <a:xfrm>
-            <a:off x="1737360" y="2103120"/>
-            <a:ext cx="9326880" cy="365760"/>
-          </a:xfrm>
-          <a:prstGeom prst="rect">
-            <a:avLst/>
-          </a:prstGeom>
-          <a:noFill/>
-        </p:spPr>
-        <p:txBody>
-          <a:bodyPr wrap="square">
-            <a:spAutoFit/>
-          </a:bodyPr>
-          <a:lstStyle/>
-          <a:p>
-            <a:pPr algn="l">
-              <a:defRPr sz="1600" b="1" i="0">
+            <a:off x="1097280" y="2651760"/>
+            <a:ext cx="9966960" cy="365760"/>
+          </a:xfrm>
+          <a:prstGeom prst="rect">
+            <a:avLst/>
+          </a:prstGeom>
+          <a:noFill/>
+        </p:spPr>
+        <p:txBody>
+          <a:bodyPr wrap="square">
+            <a:spAutoFit/>
+          </a:bodyPr>
+          <a:lstStyle/>
+          <a:p>
+            <a:pPr algn="l">
+              <a:defRPr sz="1400" b="0" i="0">
+                <a:solidFill>
+                  <a:srgbClr val="E2E2EA"/>
+                </a:solidFill>
+                <a:latin typeface="Calibri"/>
+              </a:defRPr>
+            </a:pPr>
+            <a:r>
+              <a:t>from Anastasia Sokolova</a:t>
+            </a:r>
+          </a:p>
+        </p:txBody>
+      </p:sp>
+      <p:sp>
+        <p:nvSpPr>
+          <p:cNvPr id="7" name="TextBox 6"/>
+          <p:cNvSpPr txBox="1"/>
+          <p:nvPr/>
+        </p:nvSpPr>
+        <p:spPr>
+          <a:xfrm>
+            <a:off x="1097280" y="3108960"/>
+            <a:ext cx="9966960" cy="365760"/>
+          </a:xfrm>
+          <a:prstGeom prst="rect">
+            <a:avLst/>
+          </a:prstGeom>
+          <a:noFill/>
+        </p:spPr>
+        <p:txBody>
+          <a:bodyPr wrap="square">
+            <a:spAutoFit/>
+          </a:bodyPr>
+          <a:lstStyle/>
+          <a:p>
+            <a:pPr algn="l">
+              <a:defRPr sz="1400" b="1" i="0">
                 <a:solidFill>
                   <a:srgbClr val="FFFFFF"/>
                 </a:solidFill>
@@ -5960,35 +8930,35 @@
               </a:defRPr>
             </a:pPr>
             <a:r>
-              <a:t>Coolify Deployment Guide</a:t>
-            </a:r>
-          </a:p>
-        </p:txBody>
-      </p:sp>
-      <p:sp>
-        <p:nvSpPr>
-          <p:cNvPr id="7" name="TextBox 6"/>
-          <p:cNvSpPr txBox="1"/>
-          <p:nvPr/>
-        </p:nvSpPr>
-        <p:spPr>
-          <a:xfrm>
-            <a:off x="1737360" y="2423160"/>
-            <a:ext cx="9326880" cy="365760"/>
-          </a:xfrm>
-          <a:prstGeom prst="rect">
-            <a:avLst/>
-          </a:prstGeom>
-          <a:noFill/>
-        </p:spPr>
-        <p:txBody>
-          <a:bodyPr wrap="square">
-            <a:spAutoFit/>
-          </a:bodyPr>
-          <a:lstStyle/>
-          <a:p>
-            <a:pPr algn="l">
-              <a:defRPr sz="1200" b="0" i="0">
+              <a:t>to: Sasha Sakovich</a:t>
+            </a:r>
+          </a:p>
+        </p:txBody>
+      </p:sp>
+      <p:sp>
+        <p:nvSpPr>
+          <p:cNvPr id="8" name="TextBox 7"/>
+          <p:cNvSpPr txBox="1"/>
+          <p:nvPr/>
+        </p:nvSpPr>
+        <p:spPr>
+          <a:xfrm>
+            <a:off x="1097280" y="3749039"/>
+            <a:ext cx="9966960" cy="1097280"/>
+          </a:xfrm>
+          <a:prstGeom prst="rect">
+            <a:avLst/>
+          </a:prstGeom>
+          <a:noFill/>
+        </p:spPr>
+        <p:txBody>
+          <a:bodyPr wrap="square">
+            <a:spAutoFit/>
+          </a:bodyPr>
+          <a:lstStyle/>
+          <a:p>
+            <a:pPr algn="l">
+              <a:defRPr sz="1500" b="0" i="1">
                 <a:solidFill>
                   <a:srgbClr val="E2E2EA"/>
                 </a:solidFill>
@@ -5996,43 +8966,7 @@
               </a:defRPr>
             </a:pPr>
             <a:r>
-              <a:t>Complete guide on using our new one-click deployment service</a:t>
-            </a:r>
-          </a:p>
-        </p:txBody>
-      </p:sp>
-      <p:sp>
-        <p:nvSpPr>
-          <p:cNvPr id="8" name="TextBox 7"/>
-          <p:cNvSpPr txBox="1"/>
-          <p:nvPr/>
-        </p:nvSpPr>
-        <p:spPr>
-          <a:xfrm>
-            <a:off x="1737360" y="2743200"/>
-            <a:ext cx="9326880" cy="274320"/>
-          </a:xfrm>
-          <a:prstGeom prst="rect">
-            <a:avLst/>
-          </a:prstGeom>
-          <a:noFill/>
-        </p:spPr>
-        <p:txBody>
-          <a:bodyPr wrap="square">
-            <a:spAutoFit/>
-          </a:bodyPr>
-          <a:lstStyle/>
-          <a:p>
-            <a:pPr algn="l">
-              <a:defRPr sz="1100" b="0" i="0">
-                <a:solidFill>
-                  <a:srgbClr val="8F95A3"/>
-                </a:solidFill>
-                <a:latin typeface="Calibri"/>
-              </a:defRPr>
-            </a:pPr>
-            <a:r>
-              <a:t>Shared by Gleb Krahotkin · 98</a:t>
+              <a:t>"Outstanding teamwork and results delivery"</a:t>
             </a:r>
           </a:p>
         </p:txBody>
@@ -6045,174 +8979,30 @@
         </p:nvSpPr>
         <p:spPr>
           <a:xfrm>
-            <a:off x="1097280" y="3291839"/>
-            <a:ext cx="457200" cy="365760"/>
-          </a:xfrm>
-          <a:prstGeom prst="rect">
-            <a:avLst/>
-          </a:prstGeom>
-          <a:noFill/>
-        </p:spPr>
-        <p:txBody>
-          <a:bodyPr wrap="square">
-            <a:spAutoFit/>
-          </a:bodyPr>
-          <a:lstStyle/>
-          <a:p>
-            <a:pPr algn="l">
-              <a:defRPr sz="2200" b="1" i="0">
-                <a:solidFill>
-                  <a:srgbClr val="795548"/>
-                </a:solidFill>
-                <a:latin typeface="Calibri"/>
-              </a:defRPr>
-            </a:pPr>
-            <a:r>
-              <a:t>02</a:t>
-            </a:r>
-          </a:p>
-        </p:txBody>
-      </p:sp>
-      <p:sp>
-        <p:nvSpPr>
-          <p:cNvPr id="10" name="TextBox 9"/>
-          <p:cNvSpPr txBox="1"/>
-          <p:nvPr/>
-        </p:nvSpPr>
-        <p:spPr>
-          <a:xfrm>
-            <a:off x="1737360" y="3291839"/>
-            <a:ext cx="9326880" cy="365760"/>
-          </a:xfrm>
-          <a:prstGeom prst="rect">
-            <a:avLst/>
-          </a:prstGeom>
-          <a:noFill/>
-        </p:spPr>
-        <p:txBody>
-          <a:bodyPr wrap="square">
-            <a:spAutoFit/>
-          </a:bodyPr>
-          <a:lstStyle/>
-          <a:p>
-            <a:pPr algn="l">
-              <a:defRPr sz="1600" b="1" i="0">
-                <a:solidFill>
-                  <a:srgbClr val="FFFFFF"/>
-                </a:solidFill>
-                <a:latin typeface="Calibri"/>
-              </a:defRPr>
-            </a:pPr>
-            <a:r>
-              <a:t>Fraud Detection Deep Dive</a:t>
-            </a:r>
-          </a:p>
-        </p:txBody>
-      </p:sp>
-      <p:sp>
-        <p:nvSpPr>
-          <p:cNvPr id="11" name="TextBox 10"/>
-          <p:cNvSpPr txBox="1"/>
-          <p:nvPr/>
-        </p:nvSpPr>
-        <p:spPr>
-          <a:xfrm>
-            <a:off x="1737360" y="3611879"/>
-            <a:ext cx="9326880" cy="365760"/>
-          </a:xfrm>
-          <a:prstGeom prst="rect">
-            <a:avLst/>
-          </a:prstGeom>
-          <a:noFill/>
-        </p:spPr>
-        <p:txBody>
-          <a:bodyPr wrap="square">
-            <a:spAutoFit/>
-          </a:bodyPr>
-          <a:lstStyle/>
-          <a:p>
-            <a:pPr algn="l">
-              <a:defRPr sz="1200" b="0" i="0">
-                <a:solidFill>
-                  <a:srgbClr val="E2E2EA"/>
-                </a:solidFill>
-                <a:latin typeface="Calibri"/>
-              </a:defRPr>
-            </a:pPr>
-            <a:r>
-              <a:t>Technical insights from our 11th Lunch &amp; Learn session</a:t>
-            </a:r>
-          </a:p>
-        </p:txBody>
-      </p:sp>
-      <p:sp>
-        <p:nvSpPr>
-          <p:cNvPr id="12" name="TextBox 11"/>
-          <p:cNvSpPr txBox="1"/>
-          <p:nvPr/>
-        </p:nvSpPr>
-        <p:spPr>
-          <a:xfrm>
-            <a:off x="1737360" y="3931920"/>
-            <a:ext cx="9326880" cy="274320"/>
-          </a:xfrm>
-          <a:prstGeom prst="rect">
-            <a:avLst/>
-          </a:prstGeom>
-          <a:noFill/>
-        </p:spPr>
-        <p:txBody>
-          <a:bodyPr wrap="square">
-            <a:spAutoFit/>
-          </a:bodyPr>
-          <a:lstStyle/>
-          <a:p>
-            <a:pPr algn="l">
-              <a:defRPr sz="1100" b="0" i="0">
-                <a:solidFill>
-                  <a:srgbClr val="8F95A3"/>
-                </a:solidFill>
-                <a:latin typeface="Calibri"/>
-              </a:defRPr>
-            </a:pPr>
-            <a:r>
-              <a:t>Shared by Timofey Levanov · 28</a:t>
-            </a:r>
-          </a:p>
-        </p:txBody>
-      </p:sp>
-      <p:sp>
-        <p:nvSpPr>
-          <p:cNvPr id="13" name="TextBox 12"/>
-          <p:cNvSpPr txBox="1"/>
-          <p:nvPr/>
-        </p:nvSpPr>
-        <p:spPr>
-          <a:xfrm>
-            <a:off x="1097280" y="5943600"/>
-            <a:ext cx="9966960" cy="274320"/>
-          </a:xfrm>
-          <a:prstGeom prst="rect">
-            <a:avLst/>
-          </a:prstGeom>
-          <a:noFill/>
-        </p:spPr>
-        <p:txBody>
-          <a:bodyPr wrap="square">
-            <a:spAutoFit/>
-          </a:bodyPr>
-          <a:lstStyle/>
-          <a:p>
-            <a:pPr algn="l">
-              <a:defRPr sz="1100" b="0" i="0">
-                <a:solidFill>
-                  <a:srgbClr val="5C6270"/>
-                </a:solidFill>
-                <a:latin typeface="Calibri"/>
-              </a:defRPr>
-            </a:pPr>
-            <a:r>
-              <a:t>general</a:t>
+            <a:off x="1097280" y="5120640"/>
+            <a:ext cx="9966960" cy="457200"/>
+          </a:xfrm>
+          <a:prstGeom prst="rect">
+            <a:avLst/>
+          </a:prstGeom>
+          <a:noFill/>
+        </p:spPr>
+        <p:txBody>
+          <a:bodyPr wrap="square">
+            <a:spAutoFit/>
+          </a:bodyPr>
+          <a:lstStyle/>
+          <a:p>
+            <a:pPr algn="l">
+              <a:defRPr sz="1200" b="1" i="0">
+                <a:solidFill>
+                  <a:srgbClr val="F39C12"/>
+                </a:solidFill>
+                <a:latin typeface="Calibri"/>
+              </a:defRPr>
+            </a:pPr>
+            <a:r>
+              <a:t>TEAMWORK · RESULTS</a:t>
             </a:r>
           </a:p>
         </p:txBody>

--- a/data/archive/pulse_2026-03-12.pptx
+++ b/data/archive/pulse_2026-03-12.pptx
@@ -3306,7 +3306,7 @@
             <a:avLst/>
           </a:prstGeom>
           <a:solidFill>
-            <a:srgbClr val="E74C3C"/>
+            <a:srgbClr val="9B59B6"/>
           </a:solidFill>
           <a:ln>
             <a:noFill/>
@@ -3359,13 +3359,13 @@
             <a:pPr algn="l">
               <a:defRPr sz="1000" b="1">
                 <a:solidFill>
-                  <a:srgbClr val="E74C3C"/>
-                </a:solidFill>
-                <a:latin typeface="Calibri"/>
-              </a:defRPr>
-            </a:pPr>
-            <a:r>
-              <a:t>💪  CLAPS</a:t>
+                  <a:srgbClr val="9B59B6"/>
+                </a:solidFill>
+                <a:latin typeface="Calibri"/>
+              </a:defRPr>
+            </a:pPr>
+            <a:r>
+              <a:t>📚  RECOMMENDED</a:t>
             </a:r>
           </a:p>
         </p:txBody>
@@ -3395,13 +3395,13 @@
             <a:pPr algn="l">
               <a:defRPr sz="3200" b="1" i="0">
                 <a:solidFill>
-                  <a:srgbClr val="E74C3C"/>
-                </a:solidFill>
-                <a:latin typeface="Calibri"/>
-              </a:defRPr>
-            </a:pPr>
-            <a:r>
-              <a:t>Multi-Team Recognition</a:t>
+                  <a:srgbClr val="9B59B6"/>
+                </a:solidFill>
+                <a:latin typeface="Calibri"/>
+              </a:defRPr>
+            </a:pPr>
+            <a:r>
+              <a:t>Knowledge Sharing</a:t>
             </a:r>
           </a:p>
         </p:txBody>
@@ -3415,29 +3415,29 @@
         <p:spPr>
           <a:xfrm>
             <a:off x="1097280" y="2103120"/>
-            <a:ext cx="2743200" cy="548640"/>
-          </a:xfrm>
-          <a:prstGeom prst="rect">
-            <a:avLst/>
-          </a:prstGeom>
-          <a:noFill/>
-        </p:spPr>
-        <p:txBody>
-          <a:bodyPr wrap="square">
-            <a:spAutoFit/>
-          </a:bodyPr>
-          <a:lstStyle/>
-          <a:p>
-            <a:pPr algn="l">
-              <a:defRPr sz="2800" b="1" i="0">
-                <a:solidFill>
-                  <a:srgbClr val="E74C3C"/>
-                </a:solidFill>
-                <a:latin typeface="Calibri"/>
-              </a:defRPr>
-            </a:pPr>
-            <a:r>
-              <a:t>8</a:t>
+            <a:ext cx="457200" cy="365760"/>
+          </a:xfrm>
+          <a:prstGeom prst="rect">
+            <a:avLst/>
+          </a:prstGeom>
+          <a:noFill/>
+        </p:spPr>
+        <p:txBody>
+          <a:bodyPr wrap="square">
+            <a:spAutoFit/>
+          </a:bodyPr>
+          <a:lstStyle/>
+          <a:p>
+            <a:pPr algn="l">
+              <a:defRPr sz="2200" b="1" i="0">
+                <a:solidFill>
+                  <a:srgbClr val="9B59B6"/>
+                </a:solidFill>
+                <a:latin typeface="Calibri"/>
+              </a:defRPr>
+            </a:pPr>
+            <a:r>
+              <a:t>01</a:t>
             </a:r>
           </a:p>
         </p:txBody>
@@ -3450,22 +3450,58 @@
         </p:nvSpPr>
         <p:spPr>
           <a:xfrm>
-            <a:off x="1097280" y="2651760"/>
-            <a:ext cx="9966960" cy="365760"/>
-          </a:xfrm>
-          <a:prstGeom prst="rect">
-            <a:avLst/>
-          </a:prstGeom>
-          <a:noFill/>
-        </p:spPr>
-        <p:txBody>
-          <a:bodyPr wrap="square">
-            <a:spAutoFit/>
-          </a:bodyPr>
-          <a:lstStyle/>
-          <a:p>
-            <a:pPr algn="l">
-              <a:defRPr sz="1400" b="0" i="0">
+            <a:off x="1737360" y="2103120"/>
+            <a:ext cx="9326880" cy="365760"/>
+          </a:xfrm>
+          <a:prstGeom prst="rect">
+            <a:avLst/>
+          </a:prstGeom>
+          <a:noFill/>
+        </p:spPr>
+        <p:txBody>
+          <a:bodyPr wrap="square">
+            <a:spAutoFit/>
+          </a:bodyPr>
+          <a:lstStyle/>
+          <a:p>
+            <a:pPr algn="l">
+              <a:defRPr sz="1600" b="1" i="0">
+                <a:solidFill>
+                  <a:srgbClr val="FFFFFF"/>
+                </a:solidFill>
+                <a:latin typeface="Calibri"/>
+              </a:defRPr>
+            </a:pPr>
+            <a:r>
+              <a:t>The Speaking Coach: Stop Saying This Word!</a:t>
+            </a:r>
+          </a:p>
+        </p:txBody>
+      </p:sp>
+      <p:sp>
+        <p:nvSpPr>
+          <p:cNvPr id="7" name="TextBox 6"/>
+          <p:cNvSpPr txBox="1"/>
+          <p:nvPr/>
+        </p:nvSpPr>
+        <p:spPr>
+          <a:xfrm>
+            <a:off x="1737360" y="2423160"/>
+            <a:ext cx="9326880" cy="365760"/>
+          </a:xfrm>
+          <a:prstGeom prst="rect">
+            <a:avLst/>
+          </a:prstGeom>
+          <a:noFill/>
+        </p:spPr>
+        <p:txBody>
+          <a:bodyPr wrap="square">
+            <a:spAutoFit/>
+          </a:bodyPr>
+          <a:lstStyle/>
+          <a:p>
+            <a:pPr algn="l">
+              <a:defRPr sz="1200" b="0" i="0">
                 <a:solidFill>
                   <a:srgbClr val="E2E2EA"/>
                 </a:solidFill>
@@ -3473,43 +3509,7 @@
               </a:defRPr>
             </a:pPr>
             <a:r>
-              <a:t>from Alexandr Zhitlukhin</a:t>
-            </a:r>
-          </a:p>
-        </p:txBody>
-      </p:sp>
-      <p:sp>
-        <p:nvSpPr>
-          <p:cNvPr id="7" name="TextBox 6"/>
-          <p:cNvSpPr txBox="1"/>
-          <p:nvPr/>
-        </p:nvSpPr>
-        <p:spPr>
-          <a:xfrm>
-            <a:off x="1097280" y="3108960"/>
-            <a:ext cx="9966960" cy="365760"/>
-          </a:xfrm>
-          <a:prstGeom prst="rect">
-            <a:avLst/>
-          </a:prstGeom>
-          <a:noFill/>
-        </p:spPr>
-        <p:txBody>
-          <a:bodyPr wrap="square">
-            <a:spAutoFit/>
-          </a:bodyPr>
-          <a:lstStyle/>
-          <a:p>
-            <a:pPr algn="l">
-              <a:defRPr sz="1400" b="1" i="0">
-                <a:solidFill>
-                  <a:srgbClr val="FFFFFF"/>
-                </a:solidFill>
-                <a:latin typeface="Calibri"/>
-              </a:defRPr>
-            </a:pPr>
-            <a:r>
-              <a:t>to: ArtKip, Taha, Agustin, Francesco, Alessandro, Anna Timoshenko</a:t>
+              <a:t>Genuinely great content on communication skills</a:t>
             </a:r>
           </a:p>
         </p:txBody>
@@ -3522,30 +3522,30 @@
         </p:nvSpPr>
         <p:spPr>
           <a:xfrm>
-            <a:off x="1097280" y="3749039"/>
-            <a:ext cx="9966960" cy="1097280"/>
-          </a:xfrm>
-          <a:prstGeom prst="rect">
-            <a:avLst/>
-          </a:prstGeom>
-          <a:noFill/>
-        </p:spPr>
-        <p:txBody>
-          <a:bodyPr wrap="square">
-            <a:spAutoFit/>
-          </a:bodyPr>
-          <a:lstStyle/>
-          <a:p>
-            <a:pPr algn="l">
-              <a:defRPr sz="1500" b="0" i="1">
-                <a:solidFill>
-                  <a:srgbClr val="E2E2EA"/>
-                </a:solidFill>
-                <a:latin typeface="Calibri"/>
-              </a:defRPr>
-            </a:pPr>
-            <a:r>
-              <a:t>"Incredible cross-functional collaboration"</a:t>
+            <a:off x="1737360" y="2743200"/>
+            <a:ext cx="9326880" cy="274320"/>
+          </a:xfrm>
+          <a:prstGeom prst="rect">
+            <a:avLst/>
+          </a:prstGeom>
+          <a:noFill/>
+        </p:spPr>
+        <p:txBody>
+          <a:bodyPr wrap="square">
+            <a:spAutoFit/>
+          </a:bodyPr>
+          <a:lstStyle/>
+          <a:p>
+            <a:pPr algn="l">
+              <a:defRPr sz="1100" b="0" i="0">
+                <a:solidFill>
+                  <a:srgbClr val="8F95A3"/>
+                </a:solidFill>
+                <a:latin typeface="Calibri"/>
+              </a:defRPr>
+            </a:pPr>
+            <a:r>
+              <a:t>Shared by Maria Plendukova · 💛</a:t>
             </a:r>
           </a:p>
         </p:txBody>
@@ -3558,30 +3558,30 @@
         </p:nvSpPr>
         <p:spPr>
           <a:xfrm>
-            <a:off x="1097280" y="5120640"/>
-            <a:ext cx="9966960" cy="457200"/>
-          </a:xfrm>
-          <a:prstGeom prst="rect">
-            <a:avLst/>
-          </a:prstGeom>
-          <a:noFill/>
-        </p:spPr>
-        <p:txBody>
-          <a:bodyPr wrap="square">
-            <a:spAutoFit/>
-          </a:bodyPr>
-          <a:lstStyle/>
-          <a:p>
-            <a:pPr algn="l">
-              <a:defRPr sz="1200" b="1" i="0">
-                <a:solidFill>
-                  <a:srgbClr val="E74C3C"/>
-                </a:solidFill>
-                <a:latin typeface="Calibri"/>
-              </a:defRPr>
-            </a:pPr>
-            <a:r>
-              <a:t>TEAMWORK · COLLABORATION</a:t>
+            <a:off x="1097280" y="5943600"/>
+            <a:ext cx="9966960" cy="274320"/>
+          </a:xfrm>
+          <a:prstGeom prst="rect">
+            <a:avLst/>
+          </a:prstGeom>
+          <a:noFill/>
+        </p:spPr>
+        <p:txBody>
+          <a:bodyPr wrap="square">
+            <a:spAutoFit/>
+          </a:bodyPr>
+          <a:lstStyle/>
+          <a:p>
+            <a:pPr algn="l">
+              <a:defRPr sz="1100" b="0" i="0">
+                <a:solidFill>
+                  <a:srgbClr val="5C6270"/>
+                </a:solidFill>
+                <a:latin typeface="Calibri"/>
+              </a:defRPr>
+            </a:pPr>
+            <a:r>
+              <a:t>#general-chat</a:t>
             </a:r>
           </a:p>
         </p:txBody>
@@ -3627,7 +3627,7 @@
             <a:avLst/>
           </a:prstGeom>
           <a:solidFill>
-            <a:srgbClr val="16A085"/>
+            <a:srgbClr val="27AE60"/>
           </a:solidFill>
           <a:ln>
             <a:noFill/>
@@ -3680,13 +3680,13 @@
             <a:pPr algn="l">
               <a:defRPr sz="1000" b="1">
                 <a:solidFill>
-                  <a:srgbClr val="16A085"/>
-                </a:solidFill>
-                <a:latin typeface="Calibri"/>
-              </a:defRPr>
-            </a:pPr>
-            <a:r>
-              <a:t>💰  MILESTONE</a:t>
+                  <a:srgbClr val="27AE60"/>
+                </a:solidFill>
+                <a:latin typeface="Calibri"/>
+              </a:defRPr>
+            </a:pPr>
+            <a:r>
+              <a:t>📖  OFFICE LIFE</a:t>
             </a:r>
           </a:p>
         </p:txBody>
@@ -3716,13 +3716,13 @@
             <a:pPr algn="l">
               <a:defRPr sz="3200" b="1" i="0">
                 <a:solidFill>
-                  <a:srgbClr val="16A085"/>
-                </a:solidFill>
-                <a:latin typeface="Calibri"/>
-              </a:defRPr>
-            </a:pPr>
-            <a:r>
-              <a:t>Revenue Milestone</a:t>
+                  <a:srgbClr val="27AE60"/>
+                </a:solidFill>
+                <a:latin typeface="Calibri"/>
+              </a:defRPr>
+            </a:pPr>
+            <a:r>
+              <a:t>Book Club Launch</a:t>
             </a:r>
           </a:p>
         </p:txBody>
@@ -3736,29 +3736,29 @@
         <p:spPr>
           <a:xfrm>
             <a:off x="1097280" y="2103120"/>
-            <a:ext cx="4572000" cy="822960"/>
-          </a:xfrm>
-          <a:prstGeom prst="rect">
-            <a:avLst/>
-          </a:prstGeom>
-          <a:noFill/>
-        </p:spPr>
-        <p:txBody>
-          <a:bodyPr wrap="square">
-            <a:spAutoFit/>
-          </a:bodyPr>
-          <a:lstStyle/>
-          <a:p>
-            <a:pPr algn="l">
-              <a:defRPr sz="5200" b="1" i="0">
-                <a:solidFill>
-                  <a:srgbClr val="16A085"/>
-                </a:solidFill>
-                <a:latin typeface="Calibri"/>
-              </a:defRPr>
-            </a:pPr>
-            <a:r>
-              <a:t>$390k</a:t>
+            <a:ext cx="9966960" cy="457200"/>
+          </a:xfrm>
+          <a:prstGeom prst="rect">
+            <a:avLst/>
+          </a:prstGeom>
+          <a:noFill/>
+        </p:spPr>
+        <p:txBody>
+          <a:bodyPr wrap="square">
+            <a:spAutoFit/>
+          </a:bodyPr>
+          <a:lstStyle/>
+          <a:p>
+            <a:pPr algn="l">
+              <a:defRPr sz="1800" b="1" i="0">
+                <a:solidFill>
+                  <a:srgbClr val="FFFFFF"/>
+                </a:solidFill>
+                <a:latin typeface="Calibri"/>
+              </a:defRPr>
+            </a:pPr>
+            <a:r>
+              <a:t>The 4 Disciplines of Execution</a:t>
             </a:r>
           </a:p>
         </p:txBody>
@@ -3771,8 +3771,116 @@
         </p:nvSpPr>
         <p:spPr>
           <a:xfrm>
-            <a:off x="1097280" y="2926080"/>
-            <a:ext cx="4572000" cy="365760"/>
+            <a:off x="1371600" y="2743200"/>
+            <a:ext cx="9692640" cy="1828800"/>
+          </a:xfrm>
+          <a:prstGeom prst="rect">
+            <a:avLst/>
+          </a:prstGeom>
+          <a:noFill/>
+        </p:spPr>
+        <p:txBody>
+          <a:bodyPr wrap="square">
+            <a:spAutoFit/>
+          </a:bodyPr>
+          <a:lstStyle/>
+          <a:p>
+            <a:pPr algn="l">
+              <a:defRPr sz="1500" b="0" i="1">
+                <a:solidFill>
+                  <a:srgbClr val="E2E2EA"/>
+                </a:solidFill>
+                <a:latin typeface="Calibri"/>
+              </a:defRPr>
+            </a:pPr>
+            <a:r>
+              <a:t>"This book focuses on Wildly Important Goals, Leading and Lagging Metrics, Scorecards, and Follow-through discipline"</a:t>
+            </a:r>
+          </a:p>
+        </p:txBody>
+      </p:sp>
+      <p:sp>
+        <p:nvSpPr>
+          <p:cNvPr id="7" name="TextBox 6"/>
+          <p:cNvSpPr txBox="1"/>
+          <p:nvPr/>
+        </p:nvSpPr>
+        <p:spPr>
+          <a:xfrm>
+            <a:off x="1097280" y="4754880"/>
+            <a:ext cx="9966960" cy="365760"/>
+          </a:xfrm>
+          <a:prstGeom prst="rect">
+            <a:avLst/>
+          </a:prstGeom>
+          <a:noFill/>
+        </p:spPr>
+        <p:txBody>
+          <a:bodyPr wrap="square">
+            <a:spAutoFit/>
+          </a:bodyPr>
+          <a:lstStyle/>
+          <a:p>
+            <a:pPr algn="l">
+              <a:defRPr sz="1400" b="0" i="0">
+                <a:solidFill>
+                  <a:srgbClr val="8F95A3"/>
+                </a:solidFill>
+                <a:latin typeface="Calibri"/>
+              </a:defRPr>
+            </a:pPr>
+            <a:r>
+              <a:t>— Pavel Golubev</a:t>
+            </a:r>
+          </a:p>
+        </p:txBody>
+      </p:sp>
+      <p:sp>
+        <p:nvSpPr>
+          <p:cNvPr id="8" name="TextBox 7"/>
+          <p:cNvSpPr txBox="1"/>
+          <p:nvPr/>
+        </p:nvSpPr>
+        <p:spPr>
+          <a:xfrm>
+            <a:off x="1097280" y="5212080"/>
+            <a:ext cx="9966960" cy="365760"/>
+          </a:xfrm>
+          <a:prstGeom prst="rect">
+            <a:avLst/>
+          </a:prstGeom>
+          <a:noFill/>
+        </p:spPr>
+        <p:txBody>
+          <a:bodyPr wrap="square">
+            <a:spAutoFit/>
+          </a:bodyPr>
+          <a:lstStyle/>
+          <a:p>
+            <a:pPr algn="l">
+              <a:defRPr sz="1400" b="1" i="0">
+                <a:solidFill>
+                  <a:srgbClr val="27AE60"/>
+                </a:solidFill>
+                <a:latin typeface="Calibri"/>
+              </a:defRPr>
+            </a:pPr>
+            <a:r>
+              <a:t>🧠×7</a:t>
+            </a:r>
+          </a:p>
+        </p:txBody>
+      </p:sp>
+      <p:sp>
+        <p:nvSpPr>
+          <p:cNvPr id="9" name="TextBox 8"/>
+          <p:cNvSpPr txBox="1"/>
+          <p:nvPr/>
+        </p:nvSpPr>
+        <p:spPr>
+          <a:xfrm>
+            <a:off x="1097280" y="5760720"/>
+            <a:ext cx="9966960" cy="274320"/>
           </a:xfrm>
           <a:prstGeom prst="rect">
             <a:avLst/>
@@ -3788,85 +3896,13 @@
             <a:pPr algn="l">
               <a:defRPr sz="1100" b="0" i="0">
                 <a:solidFill>
-                  <a:srgbClr val="8F95A3"/>
-                </a:solidFill>
-                <a:latin typeface="Calibri"/>
-              </a:defRPr>
-            </a:pPr>
-            <a:r>
-              <a:t>Net Revenue (One Week)</a:t>
-            </a:r>
-          </a:p>
-        </p:txBody>
-      </p:sp>
-      <p:sp>
-        <p:nvSpPr>
-          <p:cNvPr id="7" name="TextBox 6"/>
-          <p:cNvSpPr txBox="1"/>
-          <p:nvPr/>
-        </p:nvSpPr>
-        <p:spPr>
-          <a:xfrm>
-            <a:off x="1097280" y="3566160"/>
-            <a:ext cx="9966960" cy="457200"/>
-          </a:xfrm>
-          <a:prstGeom prst="rect">
-            <a:avLst/>
-          </a:prstGeom>
-          <a:noFill/>
-        </p:spPr>
-        <p:txBody>
-          <a:bodyPr wrap="square">
-            <a:spAutoFit/>
-          </a:bodyPr>
-          <a:lstStyle/>
-          <a:p>
-            <a:pPr algn="l">
-              <a:defRPr sz="1800" b="1" i="0">
-                <a:solidFill>
-                  <a:srgbClr val="FFFFFF"/>
-                </a:solidFill>
-                <a:latin typeface="Calibri"/>
-              </a:defRPr>
-            </a:pPr>
-            <a:r>
-              <a:t>Weekly Sales Achievement</a:t>
-            </a:r>
-          </a:p>
-        </p:txBody>
-      </p:sp>
-      <p:sp>
-        <p:nvSpPr>
-          <p:cNvPr id="8" name="TextBox 7"/>
-          <p:cNvSpPr txBox="1"/>
-          <p:nvPr/>
-        </p:nvSpPr>
-        <p:spPr>
-          <a:xfrm>
-            <a:off x="1097280" y="4206240"/>
-            <a:ext cx="9966960" cy="1371600"/>
-          </a:xfrm>
-          <a:prstGeom prst="rect">
-            <a:avLst/>
-          </a:prstGeom>
-          <a:noFill/>
-        </p:spPr>
-        <p:txBody>
-          <a:bodyPr wrap="square">
-            <a:spAutoFit/>
-          </a:bodyPr>
-          <a:lstStyle/>
-          <a:p>
-            <a:pPr algn="l">
-              <a:defRPr sz="1500" b="0" i="0">
-                <a:solidFill>
-                  <a:srgbClr val="E2E2EA"/>
-                </a:solidFill>
-                <a:latin typeface="Calibri"/>
-              </a:defRPr>
-            </a:pPr>
-            <a:r>
-              <a:t>Exceptional performance across all revenue streams</a:t>
+                  <a:srgbClr val="5C6270"/>
+                </a:solidFill>
+                <a:latin typeface="Calibri"/>
+              </a:defRPr>
+            </a:pPr>
+            <a:r>
+              <a:t>#general</a:t>
             </a:r>
           </a:p>
         </p:txBody>
@@ -3912,7 +3948,7 @@
             <a:avLst/>
           </a:prstGeom>
           <a:solidFill>
-            <a:srgbClr val="C0392B"/>
+            <a:srgbClr val="E74C3C"/>
           </a:solidFill>
           <a:ln>
             <a:noFill/>
@@ -3965,13 +4001,13 @@
             <a:pPr algn="l">
               <a:defRPr sz="1000" b="1">
                 <a:solidFill>
-                  <a:srgbClr val="C0392B"/>
-                </a:solidFill>
-                <a:latin typeface="Calibri"/>
-              </a:defRPr>
-            </a:pPr>
-            <a:r>
-              <a:t>🛡️  WIN</a:t>
+                  <a:srgbClr val="E74C3C"/>
+                </a:solidFill>
+                <a:latin typeface="Calibri"/>
+              </a:defRPr>
+            </a:pPr>
+            <a:r>
+              <a:t>👥  CLAPS</a:t>
             </a:r>
           </a:p>
         </p:txBody>
@@ -4001,13 +4037,13 @@
             <a:pPr algn="l">
               <a:defRPr sz="3200" b="1" i="0">
                 <a:solidFill>
-                  <a:srgbClr val="C0392B"/>
-                </a:solidFill>
-                <a:latin typeface="Calibri"/>
-              </a:defRPr>
-            </a:pPr>
-            <a:r>
-              <a:t>Security Victory</a:t>
+                  <a:srgbClr val="E74C3C"/>
+                </a:solidFill>
+                <a:latin typeface="Calibri"/>
+              </a:defRPr>
+            </a:pPr>
+            <a:r>
+              <a:t>Marketing Team Power</a:t>
             </a:r>
           </a:p>
         </p:txBody>
@@ -4021,29 +4057,29 @@
         <p:spPr>
           <a:xfrm>
             <a:off x="1097280" y="2103120"/>
-            <a:ext cx="4572000" cy="822960"/>
-          </a:xfrm>
-          <a:prstGeom prst="rect">
-            <a:avLst/>
-          </a:prstGeom>
-          <a:noFill/>
-        </p:spPr>
-        <p:txBody>
-          <a:bodyPr wrap="square">
-            <a:spAutoFit/>
-          </a:bodyPr>
-          <a:lstStyle/>
-          <a:p>
-            <a:pPr algn="l">
-              <a:defRPr sz="4800" b="1" i="0">
-                <a:solidFill>
-                  <a:srgbClr val="C0392B"/>
-                </a:solidFill>
-                <a:latin typeface="Calibri"/>
-              </a:defRPr>
-            </a:pPr>
-            <a:r>
-              <a:t>4</a:t>
+            <a:ext cx="2743200" cy="548640"/>
+          </a:xfrm>
+          <a:prstGeom prst="rect">
+            <a:avLst/>
+          </a:prstGeom>
+          <a:noFill/>
+        </p:spPr>
+        <p:txBody>
+          <a:bodyPr wrap="square">
+            <a:spAutoFit/>
+          </a:bodyPr>
+          <a:lstStyle/>
+          <a:p>
+            <a:pPr algn="l">
+              <a:defRPr sz="2800" b="1" i="0">
+                <a:solidFill>
+                  <a:srgbClr val="E74C3C"/>
+                </a:solidFill>
+                <a:latin typeface="Calibri"/>
+              </a:defRPr>
+            </a:pPr>
+            <a:r>
+              <a:t>8</a:t>
             </a:r>
           </a:p>
         </p:txBody>
@@ -4056,30 +4092,30 @@
         </p:nvSpPr>
         <p:spPr>
           <a:xfrm>
-            <a:off x="1097280" y="2834640"/>
-            <a:ext cx="4572000" cy="365760"/>
-          </a:xfrm>
-          <a:prstGeom prst="rect">
-            <a:avLst/>
-          </a:prstGeom>
-          <a:noFill/>
-        </p:spPr>
-        <p:txBody>
-          <a:bodyPr wrap="square">
-            <a:spAutoFit/>
-          </a:bodyPr>
-          <a:lstStyle/>
-          <a:p>
-            <a:pPr algn="l">
-              <a:defRPr sz="1200" b="0" i="0">
-                <a:solidFill>
-                  <a:srgbClr val="8F95A3"/>
-                </a:solidFill>
-                <a:latin typeface="Calibri"/>
-              </a:defRPr>
-            </a:pPr>
-            <a:r>
-              <a:t>% fraud rate</a:t>
+            <a:off x="1097280" y="2651760"/>
+            <a:ext cx="9966960" cy="365760"/>
+          </a:xfrm>
+          <a:prstGeom prst="rect">
+            <a:avLst/>
+          </a:prstGeom>
+          <a:noFill/>
+        </p:spPr>
+        <p:txBody>
+          <a:bodyPr wrap="square">
+            <a:spAutoFit/>
+          </a:bodyPr>
+          <a:lstStyle/>
+          <a:p>
+            <a:pPr algn="l">
+              <a:defRPr sz="1400" b="0" i="0">
+                <a:solidFill>
+                  <a:srgbClr val="E2E2EA"/>
+                </a:solidFill>
+                <a:latin typeface="Calibri"/>
+              </a:defRPr>
+            </a:pPr>
+            <a:r>
+              <a:t>from Maria Plendukova</a:t>
             </a:r>
           </a:p>
         </p:txBody>
@@ -4092,7 +4128,7 @@
         </p:nvSpPr>
         <p:spPr>
           <a:xfrm>
-            <a:off x="1097280" y="3291840"/>
+            <a:off x="1097280" y="3108960"/>
             <a:ext cx="9966960" cy="365760"/>
           </a:xfrm>
           <a:prstGeom prst="rect">
@@ -4107,7 +4143,43 @@
           <a:lstStyle/>
           <a:p>
             <a:pPr algn="l">
-              <a:defRPr sz="1400" b="0" i="0">
+              <a:defRPr sz="1400" b="1" i="0">
+                <a:solidFill>
+                  <a:srgbClr val="FFFFFF"/>
+                </a:solidFill>
+                <a:latin typeface="Calibri"/>
+              </a:defRPr>
+            </a:pPr>
+            <a:r>
+              <a:t>to: evgeny.garlukovich, Berta, Hanna Minko, Mikita Sinkevich, Tatiana Rokhlova, tomiris</a:t>
+            </a:r>
+          </a:p>
+        </p:txBody>
+      </p:sp>
+      <p:sp>
+        <p:nvSpPr>
+          <p:cNvPr id="8" name="TextBox 7"/>
+          <p:cNvSpPr txBox="1"/>
+          <p:nvPr/>
+        </p:nvSpPr>
+        <p:spPr>
+          <a:xfrm>
+            <a:off x="1097280" y="3749039"/>
+            <a:ext cx="9966960" cy="1097280"/>
+          </a:xfrm>
+          <a:prstGeom prst="rect">
+            <a:avLst/>
+          </a:prstGeom>
+          <a:noFill/>
+        </p:spPr>
+        <p:txBody>
+          <a:bodyPr wrap="square">
+            <a:spAutoFit/>
+          </a:bodyPr>
+          <a:lstStyle/>
+          <a:p>
+            <a:pPr algn="l">
+              <a:defRPr sz="1500" b="0" i="1">
                 <a:solidFill>
                   <a:srgbClr val="E2E2EA"/>
                 </a:solidFill>
@@ -4115,20 +4187,20 @@
               </a:defRPr>
             </a:pPr>
             <a:r>
-              <a:t>by Security Team</a:t>
-            </a:r>
-          </a:p>
-        </p:txBody>
-      </p:sp>
-      <p:sp>
-        <p:nvSpPr>
-          <p:cNvPr id="8" name="TextBox 7"/>
-          <p:cNvSpPr txBox="1"/>
-          <p:nvPr/>
-        </p:nvSpPr>
-        <p:spPr>
-          <a:xfrm>
-            <a:off x="1097280" y="3840480"/>
+              <a:t>"Incredible teamwork and mutual support across the marketing team"</a:t>
+            </a:r>
+          </a:p>
+        </p:txBody>
+      </p:sp>
+      <p:sp>
+        <p:nvSpPr>
+          <p:cNvPr id="9" name="TextBox 8"/>
+          <p:cNvSpPr txBox="1"/>
+          <p:nvPr/>
+        </p:nvSpPr>
+        <p:spPr>
+          <a:xfrm>
+            <a:off x="1097280" y="5120640"/>
             <a:ext cx="9966960" cy="457200"/>
           </a:xfrm>
           <a:prstGeom prst="rect">
@@ -4143,87 +4215,15 @@
           <a:lstStyle/>
           <a:p>
             <a:pPr algn="l">
-              <a:defRPr sz="1800" b="1" i="0">
-                <a:solidFill>
-                  <a:srgbClr val="FFFFFF"/>
-                </a:solidFill>
-                <a:latin typeface="Calibri"/>
-              </a:defRPr>
-            </a:pPr>
-            <a:r>
-              <a:t>Fraud Rate Dramatically Reduced</a:t>
-            </a:r>
-          </a:p>
-        </p:txBody>
-      </p:sp>
-      <p:sp>
-        <p:nvSpPr>
-          <p:cNvPr id="9" name="TextBox 8"/>
-          <p:cNvSpPr txBox="1"/>
-          <p:nvPr/>
-        </p:nvSpPr>
-        <p:spPr>
-          <a:xfrm>
-            <a:off x="1097280" y="4389120"/>
-            <a:ext cx="9966960" cy="914400"/>
-          </a:xfrm>
-          <a:prstGeom prst="rect">
-            <a:avLst/>
-          </a:prstGeom>
-          <a:noFill/>
-        </p:spPr>
-        <p:txBody>
-          <a:bodyPr wrap="square">
-            <a:spAutoFit/>
-          </a:bodyPr>
-          <a:lstStyle/>
-          <a:p>
-            <a:pPr algn="l">
-              <a:defRPr sz="1400" b="0" i="0">
-                <a:solidFill>
-                  <a:srgbClr val="E2E2EA"/>
-                </a:solidFill>
-                <a:latin typeface="Calibri"/>
-              </a:defRPr>
-            </a:pPr>
-            <a:r>
-              <a:t>Dynamic SDK signatures cut fraud from 22% to under 4%</a:t>
-            </a:r>
-          </a:p>
-        </p:txBody>
-      </p:sp>
-      <p:sp>
-        <p:nvSpPr>
-          <p:cNvPr id="10" name="TextBox 9"/>
-          <p:cNvSpPr txBox="1"/>
-          <p:nvPr/>
-        </p:nvSpPr>
-        <p:spPr>
-          <a:xfrm>
-            <a:off x="1097280" y="5486400"/>
-            <a:ext cx="9966960" cy="457200"/>
-          </a:xfrm>
-          <a:prstGeom prst="rect">
-            <a:avLst/>
-          </a:prstGeom>
-          <a:noFill/>
-        </p:spPr>
-        <p:txBody>
-          <a:bodyPr wrap="square">
-            <a:spAutoFit/>
-          </a:bodyPr>
-          <a:lstStyle/>
-          <a:p>
-            <a:pPr algn="l">
-              <a:defRPr sz="1300" b="0" i="1">
-                <a:solidFill>
-                  <a:srgbClr val="8F95A3"/>
-                </a:solidFill>
-                <a:latin typeface="Calibri"/>
-              </a:defRPr>
-            </a:pPr>
-            <a:r>
-              <a:t>💬 "Revolutionary security improvements protecting our ecosystem"</a:t>
+              <a:defRPr sz="1200" b="1" i="0">
+                <a:solidFill>
+                  <a:srgbClr val="E74C3C"/>
+                </a:solidFill>
+                <a:latin typeface="Calibri"/>
+              </a:defRPr>
+            </a:pPr>
+            <a:r>
+              <a:t>TOGETHER · SUPPORT</a:t>
             </a:r>
           </a:p>
         </p:txBody>
@@ -4269,7 +4269,7 @@
             <a:avLst/>
           </a:prstGeom>
           <a:solidFill>
-            <a:srgbClr val="8E44AD"/>
+            <a:srgbClr val="1ABC9C"/>
           </a:solidFill>
           <a:ln>
             <a:noFill/>
@@ -4322,13 +4322,13 @@
             <a:pPr algn="l">
               <a:defRPr sz="1000" b="1">
                 <a:solidFill>
-                  <a:srgbClr val="8E44AD"/>
-                </a:solidFill>
-                <a:latin typeface="Calibri"/>
-              </a:defRPr>
-            </a:pPr>
-            <a:r>
-              <a:t>🎮  MILESTONE</a:t>
+                  <a:srgbClr val="1ABC9C"/>
+                </a:solidFill>
+                <a:latin typeface="Calibri"/>
+              </a:defRPr>
+            </a:pPr>
+            <a:r>
+              <a:t>💎  CLAPS</a:t>
             </a:r>
           </a:p>
         </p:txBody>
@@ -4358,13 +4358,13 @@
             <a:pPr algn="l">
               <a:defRPr sz="3200" b="1" i="0">
                 <a:solidFill>
-                  <a:srgbClr val="8E44AD"/>
-                </a:solidFill>
-                <a:latin typeface="Calibri"/>
-              </a:defRPr>
-            </a:pPr>
-            <a:r>
-              <a:t>Gaming Profitability</a:t>
+                  <a:srgbClr val="1ABC9C"/>
+                </a:solidFill>
+                <a:latin typeface="Calibri"/>
+              </a:defRPr>
+            </a:pPr>
+            <a:r>
+              <a:t>Quality Excellence</a:t>
             </a:r>
           </a:p>
         </p:txBody>
@@ -4378,29 +4378,29 @@
         <p:spPr>
           <a:xfrm>
             <a:off x="1097280" y="2103120"/>
-            <a:ext cx="4572000" cy="822960"/>
-          </a:xfrm>
-          <a:prstGeom prst="rect">
-            <a:avLst/>
-          </a:prstGeom>
-          <a:noFill/>
-        </p:spPr>
-        <p:txBody>
-          <a:bodyPr wrap="square">
-            <a:spAutoFit/>
-          </a:bodyPr>
-          <a:lstStyle/>
-          <a:p>
-            <a:pPr algn="l">
-              <a:defRPr sz="5200" b="1" i="0">
-                <a:solidFill>
-                  <a:srgbClr val="8E44AD"/>
-                </a:solidFill>
-                <a:latin typeface="Calibri"/>
-              </a:defRPr>
-            </a:pPr>
-            <a:r>
-              <a:t>2025</a:t>
+            <a:ext cx="2743200" cy="548640"/>
+          </a:xfrm>
+          <a:prstGeom prst="rect">
+            <a:avLst/>
+          </a:prstGeom>
+          <a:noFill/>
+        </p:spPr>
+        <p:txBody>
+          <a:bodyPr wrap="square">
+            <a:spAutoFit/>
+          </a:bodyPr>
+          <a:lstStyle/>
+          <a:p>
+            <a:pPr algn="l">
+              <a:defRPr sz="2800" b="1" i="0">
+                <a:solidFill>
+                  <a:srgbClr val="1ABC9C"/>
+                </a:solidFill>
+                <a:latin typeface="Calibri"/>
+              </a:defRPr>
+            </a:pPr>
+            <a:r>
+              <a:t>25</a:t>
             </a:r>
           </a:p>
         </p:txBody>
@@ -4413,30 +4413,30 @@
         </p:nvSpPr>
         <p:spPr>
           <a:xfrm>
-            <a:off x="1097280" y="2926080"/>
-            <a:ext cx="4572000" cy="365760"/>
-          </a:xfrm>
-          <a:prstGeom prst="rect">
-            <a:avLst/>
-          </a:prstGeom>
-          <a:noFill/>
-        </p:spPr>
-        <p:txBody>
-          <a:bodyPr wrap="square">
-            <a:spAutoFit/>
-          </a:bodyPr>
-          <a:lstStyle/>
-          <a:p>
-            <a:pPr algn="l">
-              <a:defRPr sz="1100" b="0" i="0">
-                <a:solidFill>
-                  <a:srgbClr val="8F95A3"/>
-                </a:solidFill>
-                <a:latin typeface="Calibri"/>
-              </a:defRPr>
-            </a:pPr>
-            <a:r>
-              <a:t>Year Gaming Became Profitable</a:t>
+            <a:off x="1097280" y="2651760"/>
+            <a:ext cx="9966960" cy="365760"/>
+          </a:xfrm>
+          <a:prstGeom prst="rect">
+            <a:avLst/>
+          </a:prstGeom>
+          <a:noFill/>
+        </p:spPr>
+        <p:txBody>
+          <a:bodyPr wrap="square">
+            <a:spAutoFit/>
+          </a:bodyPr>
+          <a:lstStyle/>
+          <a:p>
+            <a:pPr algn="l">
+              <a:defRPr sz="1400" b="0" i="0">
+                <a:solidFill>
+                  <a:srgbClr val="E2E2EA"/>
+                </a:solidFill>
+                <a:latin typeface="Calibri"/>
+              </a:defRPr>
+            </a:pPr>
+            <a:r>
+              <a:t>from Roman Rinchinov</a:t>
             </a:r>
           </a:p>
         </p:txBody>
@@ -4449,7 +4449,79 @@
         </p:nvSpPr>
         <p:spPr>
           <a:xfrm>
-            <a:off x="1097280" y="3566160"/>
+            <a:off x="1097280" y="3108960"/>
+            <a:ext cx="9966960" cy="365760"/>
+          </a:xfrm>
+          <a:prstGeom prst="rect">
+            <a:avLst/>
+          </a:prstGeom>
+          <a:noFill/>
+        </p:spPr>
+        <p:txBody>
+          <a:bodyPr wrap="square">
+            <a:spAutoFit/>
+          </a:bodyPr>
+          <a:lstStyle/>
+          <a:p>
+            <a:pPr algn="l">
+              <a:defRPr sz="1400" b="1" i="0">
+                <a:solidFill>
+                  <a:srgbClr val="FFFFFF"/>
+                </a:solidFill>
+                <a:latin typeface="Calibri"/>
+              </a:defRPr>
+            </a:pPr>
+            <a:r>
+              <a:t>to: Vasyl Plesiuk</a:t>
+            </a:r>
+          </a:p>
+        </p:txBody>
+      </p:sp>
+      <p:sp>
+        <p:nvSpPr>
+          <p:cNvPr id="8" name="TextBox 7"/>
+          <p:cNvSpPr txBox="1"/>
+          <p:nvPr/>
+        </p:nvSpPr>
+        <p:spPr>
+          <a:xfrm>
+            <a:off x="1097280" y="3749039"/>
+            <a:ext cx="9966960" cy="1097280"/>
+          </a:xfrm>
+          <a:prstGeom prst="rect">
+            <a:avLst/>
+          </a:prstGeom>
+          <a:noFill/>
+        </p:spPr>
+        <p:txBody>
+          <a:bodyPr wrap="square">
+            <a:spAutoFit/>
+          </a:bodyPr>
+          <a:lstStyle/>
+          <a:p>
+            <a:pPr algn="l">
+              <a:defRPr sz="1500" b="0" i="1">
+                <a:solidFill>
+                  <a:srgbClr val="E2E2EA"/>
+                </a:solidFill>
+                <a:latin typeface="Calibri"/>
+              </a:defRPr>
+            </a:pPr>
+            <a:r>
+              <a:t>"Exceptional quality and attention to detail"</a:t>
+            </a:r>
+          </a:p>
+        </p:txBody>
+      </p:sp>
+      <p:sp>
+        <p:nvSpPr>
+          <p:cNvPr id="9" name="TextBox 8"/>
+          <p:cNvSpPr txBox="1"/>
+          <p:nvPr/>
+        </p:nvSpPr>
+        <p:spPr>
+          <a:xfrm>
+            <a:off x="1097280" y="5120640"/>
             <a:ext cx="9966960" cy="457200"/>
           </a:xfrm>
           <a:prstGeom prst="rect">
@@ -4464,51 +4536,15 @@
           <a:lstStyle/>
           <a:p>
             <a:pPr algn="l">
-              <a:defRPr sz="1800" b="1" i="0">
-                <a:solidFill>
-                  <a:srgbClr val="FFFFFF"/>
-                </a:solidFill>
-                <a:latin typeface="Calibri"/>
-              </a:defRPr>
-            </a:pPr>
-            <a:r>
-              <a:t>Gaming Division Success</a:t>
-            </a:r>
-          </a:p>
-        </p:txBody>
-      </p:sp>
-      <p:sp>
-        <p:nvSpPr>
-          <p:cNvPr id="8" name="TextBox 7"/>
-          <p:cNvSpPr txBox="1"/>
-          <p:nvPr/>
-        </p:nvSpPr>
-        <p:spPr>
-          <a:xfrm>
-            <a:off x="1097280" y="4206240"/>
-            <a:ext cx="9966960" cy="1371600"/>
-          </a:xfrm>
-          <a:prstGeom prst="rect">
-            <a:avLst/>
-          </a:prstGeom>
-          <a:noFill/>
-        </p:spPr>
-        <p:txBody>
-          <a:bodyPr wrap="square">
-            <a:spAutoFit/>
-          </a:bodyPr>
-          <a:lstStyle/>
-          <a:p>
-            <a:pPr algn="l">
-              <a:defRPr sz="1500" b="0" i="0">
-                <a:solidFill>
-                  <a:srgbClr val="E2E2EA"/>
-                </a:solidFill>
-                <a:latin typeface="Calibri"/>
-              </a:defRPr>
-            </a:pPr>
-            <a:r>
-              <a:t>Strategic pivot delivers sustainable profitability</a:t>
+              <a:defRPr sz="1200" b="1" i="0">
+                <a:solidFill>
+                  <a:srgbClr val="1ABC9C"/>
+                </a:solidFill>
+                <a:latin typeface="Calibri"/>
+              </a:defRPr>
+            </a:pPr>
+            <a:r>
+              <a:t>CRAFT · EXCELLENCE</a:t>
             </a:r>
           </a:p>
         </p:txBody>
@@ -4554,7 +4590,7 @@
             <a:avLst/>
           </a:prstGeom>
           <a:solidFill>
-            <a:srgbClr val="2ECC71"/>
+            <a:srgbClr val="E67E22"/>
           </a:solidFill>
           <a:ln>
             <a:noFill/>
@@ -4607,13 +4643,13 @@
             <a:pPr algn="l">
               <a:defRPr sz="1000" b="1">
                 <a:solidFill>
-                  <a:srgbClr val="2ECC71"/>
-                </a:solidFill>
-                <a:latin typeface="Calibri"/>
-              </a:defRPr>
-            </a:pPr>
-            <a:r>
-              <a:t>🎯  WIN</a:t>
+                  <a:srgbClr val="E67E22"/>
+                </a:solidFill>
+                <a:latin typeface="Calibri"/>
+              </a:defRPr>
+            </a:pPr>
+            <a:r>
+              <a:t>🎯  MILESTONE</a:t>
             </a:r>
           </a:p>
         </p:txBody>
@@ -4643,13 +4679,13 @@
             <a:pPr algn="l">
               <a:defRPr sz="3200" b="1" i="0">
                 <a:solidFill>
-                  <a:srgbClr val="2ECC71"/>
-                </a:solidFill>
-                <a:latin typeface="Calibri"/>
-              </a:defRPr>
-            </a:pPr>
-            <a:r>
-              <a:t>Retention Excellence</a:t>
+                  <a:srgbClr val="E67E22"/>
+                </a:solidFill>
+                <a:latin typeface="Calibri"/>
+              </a:defRPr>
+            </a:pPr>
+            <a:r>
+              <a:t>Company Growth Milestone</a:t>
             </a:r>
           </a:p>
         </p:txBody>
@@ -4677,15 +4713,15 @@
           <a:lstStyle/>
           <a:p>
             <a:pPr algn="l">
-              <a:defRPr sz="4800" b="1" i="0">
-                <a:solidFill>
-                  <a:srgbClr val="2ECC71"/>
-                </a:solidFill>
-                <a:latin typeface="Calibri"/>
-              </a:defRPr>
-            </a:pPr>
-            <a:r>
-              <a:t>61</a:t>
+              <a:defRPr sz="5200" b="1" i="0">
+                <a:solidFill>
+                  <a:srgbClr val="E67E22"/>
+                </a:solidFill>
+                <a:latin typeface="Calibri"/>
+              </a:defRPr>
+            </a:pPr>
+            <a:r>
+              <a:t>40%</a:t>
             </a:r>
           </a:p>
         </p:txBody>
@@ -4698,7 +4734,7 @@
         </p:nvSpPr>
         <p:spPr>
           <a:xfrm>
-            <a:off x="1097280" y="2834640"/>
+            <a:off x="1097280" y="2926080"/>
             <a:ext cx="4572000" cy="365760"/>
           </a:xfrm>
           <a:prstGeom prst="rect">
@@ -4713,7 +4749,7 @@
           <a:lstStyle/>
           <a:p>
             <a:pPr algn="l">
-              <a:defRPr sz="1200" b="0" i="0">
+              <a:defRPr sz="1100" b="0" i="0">
                 <a:solidFill>
                   <a:srgbClr val="8F95A3"/>
                 </a:solidFill>
@@ -4721,7 +4757,7 @@
               </a:defRPr>
             </a:pPr>
             <a:r>
-              <a:t>% retention</a:t>
+              <a:t>YoY Growth</a:t>
             </a:r>
           </a:p>
         </p:txBody>
@@ -4734,22 +4770,58 @@
         </p:nvSpPr>
         <p:spPr>
           <a:xfrm>
-            <a:off x="1097280" y="3291840"/>
-            <a:ext cx="9966960" cy="365760"/>
-          </a:xfrm>
-          <a:prstGeom prst="rect">
-            <a:avLst/>
-          </a:prstGeom>
-          <a:noFill/>
-        </p:spPr>
-        <p:txBody>
-          <a:bodyPr wrap="square">
-            <a:spAutoFit/>
-          </a:bodyPr>
-          <a:lstStyle/>
-          <a:p>
-            <a:pPr algn="l">
-              <a:defRPr sz="1400" b="0" i="0">
+            <a:off x="1097280" y="3566160"/>
+            <a:ext cx="9966960" cy="457200"/>
+          </a:xfrm>
+          <a:prstGeom prst="rect">
+            <a:avLst/>
+          </a:prstGeom>
+          <a:noFill/>
+        </p:spPr>
+        <p:txBody>
+          <a:bodyPr wrap="square">
+            <a:spAutoFit/>
+          </a:bodyPr>
+          <a:lstStyle/>
+          <a:p>
+            <a:pPr algn="l">
+              <a:defRPr sz="1800" b="1" i="0">
+                <a:solidFill>
+                  <a:srgbClr val="FFFFFF"/>
+                </a:solidFill>
+                <a:latin typeface="Calibri"/>
+              </a:defRPr>
+            </a:pPr>
+            <a:r>
+              <a:t>$100M Gross Profit Achieved</a:t>
+            </a:r>
+          </a:p>
+        </p:txBody>
+      </p:sp>
+      <p:sp>
+        <p:nvSpPr>
+          <p:cNvPr id="8" name="TextBox 7"/>
+          <p:cNvSpPr txBox="1"/>
+          <p:nvPr/>
+        </p:nvSpPr>
+        <p:spPr>
+          <a:xfrm>
+            <a:off x="1097280" y="4206240"/>
+            <a:ext cx="9966960" cy="1371600"/>
+          </a:xfrm>
+          <a:prstGeom prst="rect">
+            <a:avLst/>
+          </a:prstGeom>
+          <a:noFill/>
+        </p:spPr>
+        <p:txBody>
+          <a:bodyPr wrap="square">
+            <a:spAutoFit/>
+          </a:bodyPr>
+          <a:lstStyle/>
+          <a:p>
+            <a:pPr algn="l">
+              <a:defRPr sz="1500" b="0" i="0">
                 <a:solidFill>
                   <a:srgbClr val="E2E2EA"/>
                 </a:solidFill>
@@ -4757,115 +4829,7 @@
               </a:defRPr>
             </a:pPr>
             <a:r>
-              <a:t>by Game Development Team</a:t>
-            </a:r>
-          </a:p>
-        </p:txBody>
-      </p:sp>
-      <p:sp>
-        <p:nvSpPr>
-          <p:cNvPr id="8" name="TextBox 7"/>
-          <p:cNvSpPr txBox="1"/>
-          <p:nvPr/>
-        </p:nvSpPr>
-        <p:spPr>
-          <a:xfrm>
-            <a:off x="1097280" y="3840480"/>
-            <a:ext cx="9966960" cy="457200"/>
-          </a:xfrm>
-          <a:prstGeom prst="rect">
-            <a:avLst/>
-          </a:prstGeom>
-          <a:noFill/>
-        </p:spPr>
-        <p:txBody>
-          <a:bodyPr wrap="square">
-            <a:spAutoFit/>
-          </a:bodyPr>
-          <a:lstStyle/>
-          <a:p>
-            <a:pPr algn="l">
-              <a:defRPr sz="1800" b="1" i="0">
-                <a:solidFill>
-                  <a:srgbClr val="FFFFFF"/>
-                </a:solidFill>
-                <a:latin typeface="Calibri"/>
-              </a:defRPr>
-            </a:pPr>
-            <a:r>
-              <a:t>Infinite Minesweeper Crushing Benchmarks</a:t>
-            </a:r>
-          </a:p>
-        </p:txBody>
-      </p:sp>
-      <p:sp>
-        <p:nvSpPr>
-          <p:cNvPr id="9" name="TextBox 8"/>
-          <p:cNvSpPr txBox="1"/>
-          <p:nvPr/>
-        </p:nvSpPr>
-        <p:spPr>
-          <a:xfrm>
-            <a:off x="1097280" y="4389120"/>
-            <a:ext cx="9966960" cy="914400"/>
-          </a:xfrm>
-          <a:prstGeom prst="rect">
-            <a:avLst/>
-          </a:prstGeom>
-          <a:noFill/>
-        </p:spPr>
-        <p:txBody>
-          <a:bodyPr wrap="square">
-            <a:spAutoFit/>
-          </a:bodyPr>
-          <a:lstStyle/>
-          <a:p>
-            <a:pPr algn="l">
-              <a:defRPr sz="1400" b="0" i="0">
-                <a:solidFill>
-                  <a:srgbClr val="E2E2EA"/>
-                </a:solidFill>
-                <a:latin typeface="Calibri"/>
-              </a:defRPr>
-            </a:pPr>
-            <a:r>
-              <a:t>Exceeding Apple benchmark retention rates consistently</a:t>
-            </a:r>
-          </a:p>
-        </p:txBody>
-      </p:sp>
-      <p:sp>
-        <p:nvSpPr>
-          <p:cNvPr id="10" name="TextBox 9"/>
-          <p:cNvSpPr txBox="1"/>
-          <p:nvPr/>
-        </p:nvSpPr>
-        <p:spPr>
-          <a:xfrm>
-            <a:off x="1097280" y="5486400"/>
-            <a:ext cx="9966960" cy="457200"/>
-          </a:xfrm>
-          <a:prstGeom prst="rect">
-            <a:avLst/>
-          </a:prstGeom>
-          <a:noFill/>
-        </p:spPr>
-        <p:txBody>
-          <a:bodyPr wrap="square">
-            <a:spAutoFit/>
-          </a:bodyPr>
-          <a:lstStyle/>
-          <a:p>
-            <a:pPr algn="l">
-              <a:defRPr sz="1300" b="0" i="1">
-                <a:solidFill>
-                  <a:srgbClr val="8F95A3"/>
-                </a:solidFill>
-                <a:latin typeface="Calibri"/>
-              </a:defRPr>
-            </a:pPr>
-            <a:r>
-              <a:t>💬 "Player engagement strategies delivering exceptional results"</a:t>
+              <a:t>We've reached an incredible milestone with $100M in gross profit and $20M EBITDA, projecting 40% YoY growth</a:t>
             </a:r>
           </a:p>
         </p:txBody>
@@ -4911,7 +4875,7 @@
             <a:avLst/>
           </a:prstGeom>
           <a:solidFill>
-            <a:srgbClr val="3498DB"/>
+            <a:srgbClr val="9B59B6"/>
           </a:solidFill>
           <a:ln>
             <a:noFill/>
@@ -4964,7 +4928,7 @@
             <a:pPr algn="l">
               <a:defRPr sz="1000" b="1">
                 <a:solidFill>
-                  <a:srgbClr val="3498DB"/>
+                  <a:srgbClr val="9B59B6"/>
                 </a:solidFill>
                 <a:latin typeface="Calibri"/>
               </a:defRPr>
@@ -5000,13 +4964,13 @@
             <a:pPr algn="l">
               <a:defRPr sz="3200" b="1" i="0">
                 <a:solidFill>
-                  <a:srgbClr val="3498DB"/>
-                </a:solidFill>
-                <a:latin typeface="Calibri"/>
-              </a:defRPr>
-            </a:pPr>
-            <a:r>
-              <a:t>AI Automation Win</a:t>
+                  <a:srgbClr val="9B59B6"/>
+                </a:solidFill>
+                <a:latin typeface="Calibri"/>
+              </a:defRPr>
+            </a:pPr>
+            <a:r>
+              <a:t>AI Revolution in Progress</a:t>
             </a:r>
           </a:p>
         </p:txBody>
@@ -5036,13 +5000,13 @@
             <a:pPr algn="l">
               <a:defRPr sz="4800" b="1" i="0">
                 <a:solidFill>
-                  <a:srgbClr val="3498DB"/>
-                </a:solidFill>
-                <a:latin typeface="Calibri"/>
-              </a:defRPr>
-            </a:pPr>
-            <a:r>
-              <a:t>$4k</a:t>
+                  <a:srgbClr val="9B59B6"/>
+                </a:solidFill>
+                <a:latin typeface="Calibri"/>
+              </a:defRPr>
+            </a:pPr>
+            <a:r>
+              <a:t>1,000+</a:t>
             </a:r>
           </a:p>
         </p:txBody>
@@ -5078,7 +5042,7 @@
               </a:defRPr>
             </a:pPr>
             <a:r>
-              <a:t>saved per week</a:t>
+              <a:t>OKRs checked daily</a:t>
             </a:r>
           </a:p>
         </p:txBody>
@@ -5114,7 +5078,7 @@
               </a:defRPr>
             </a:pPr>
             <a:r>
-              <a:t>by AI Development Team</a:t>
+              <a:t>by Appodeal Team</a:t>
             </a:r>
           </a:p>
         </p:txBody>
@@ -5150,7 +5114,7 @@
               </a:defRPr>
             </a:pPr>
             <a:r>
-              <a:t>Daria AI Bot Delivering ROI</a:t>
+              <a:t>AI Auditor Goes Full Scale</a:t>
             </a:r>
           </a:p>
         </p:txBody>
@@ -5186,7 +5150,7 @@
               </a:defRPr>
             </a:pPr>
             <a:r>
-              <a:t>Automated app review analysis saving significant resources</a:t>
+              <a:t>Our AI OKR Auditor is now checking over 1,000 individual OKRs daily, revolutionizing how we track progress</a:t>
             </a:r>
           </a:p>
         </p:txBody>
@@ -5222,7 +5186,7 @@
               </a:defRPr>
             </a:pPr>
             <a:r>
-              <a:t>💬 "AI-first approach generating measurable business value"</a:t>
+              <a:t>💬 "The future is here — AI-powered performance management at scale"</a:t>
             </a:r>
           </a:p>
         </p:txBody>
@@ -5268,7 +5232,7 @@
             <a:avLst/>
           </a:prstGeom>
           <a:solidFill>
-            <a:srgbClr val="F1C40F"/>
+            <a:srgbClr val="27AE60"/>
           </a:solidFill>
           <a:ln>
             <a:noFill/>
@@ -5321,13 +5285,13 @@
             <a:pPr algn="l">
               <a:defRPr sz="1000" b="1">
                 <a:solidFill>
-                  <a:srgbClr val="F1C40F"/>
-                </a:solidFill>
-                <a:latin typeface="Calibri"/>
-              </a:defRPr>
-            </a:pPr>
-            <a:r>
-              <a:t>🏆  CLAPS</a:t>
+                  <a:srgbClr val="27AE60"/>
+                </a:solidFill>
+                <a:latin typeface="Calibri"/>
+              </a:defRPr>
+            </a:pPr>
+            <a:r>
+              <a:t>💰  MILESTONE</a:t>
             </a:r>
           </a:p>
         </p:txBody>
@@ -5357,13 +5321,13 @@
             <a:pPr algn="l">
               <a:defRPr sz="3200" b="1" i="0">
                 <a:solidFill>
-                  <a:srgbClr val="F1C40F"/>
-                </a:solidFill>
-                <a:latin typeface="Calibri"/>
-              </a:defRPr>
-            </a:pPr>
-            <a:r>
-              <a:t>Marketing Excellence</a:t>
+                  <a:srgbClr val="27AE60"/>
+                </a:solidFill>
+                <a:latin typeface="Calibri"/>
+              </a:defRPr>
+            </a:pPr>
+            <a:r>
+              <a:t>Gaming Division Success</a:t>
             </a:r>
           </a:p>
         </p:txBody>
@@ -5377,29 +5341,29 @@
         <p:spPr>
           <a:xfrm>
             <a:off x="1097280" y="2103120"/>
-            <a:ext cx="2743200" cy="548640"/>
-          </a:xfrm>
-          <a:prstGeom prst="rect">
-            <a:avLst/>
-          </a:prstGeom>
-          <a:noFill/>
-        </p:spPr>
-        <p:txBody>
-          <a:bodyPr wrap="square">
-            <a:spAutoFit/>
-          </a:bodyPr>
-          <a:lstStyle/>
-          <a:p>
-            <a:pPr algn="l">
-              <a:defRPr sz="2800" b="1" i="0">
-                <a:solidFill>
-                  <a:srgbClr val="F1C40F"/>
-                </a:solidFill>
-                <a:latin typeface="Calibri"/>
-              </a:defRPr>
-            </a:pPr>
-            <a:r>
-              <a:t>30</a:t>
+            <a:ext cx="4572000" cy="822960"/>
+          </a:xfrm>
+          <a:prstGeom prst="rect">
+            <a:avLst/>
+          </a:prstGeom>
+          <a:noFill/>
+        </p:spPr>
+        <p:txBody>
+          <a:bodyPr wrap="square">
+            <a:spAutoFit/>
+          </a:bodyPr>
+          <a:lstStyle/>
+          <a:p>
+            <a:pPr algn="l">
+              <a:defRPr sz="5200" b="1" i="0">
+                <a:solidFill>
+                  <a:srgbClr val="27AE60"/>
+                </a:solidFill>
+                <a:latin typeface="Calibri"/>
+              </a:defRPr>
+            </a:pPr>
+            <a:r>
+              <a:t>61%</a:t>
             </a:r>
           </a:p>
         </p:txBody>
@@ -5412,22 +5376,94 @@
         </p:nvSpPr>
         <p:spPr>
           <a:xfrm>
-            <a:off x="1097280" y="2651760"/>
-            <a:ext cx="9966960" cy="365760"/>
-          </a:xfrm>
-          <a:prstGeom prst="rect">
-            <a:avLst/>
-          </a:prstGeom>
-          <a:noFill/>
-        </p:spPr>
-        <p:txBody>
-          <a:bodyPr wrap="square">
-            <a:spAutoFit/>
-          </a:bodyPr>
-          <a:lstStyle/>
-          <a:p>
-            <a:pPr algn="l">
-              <a:defRPr sz="1400" b="0" i="0">
+            <a:off x="1097280" y="2926080"/>
+            <a:ext cx="4572000" cy="365760"/>
+          </a:xfrm>
+          <a:prstGeom prst="rect">
+            <a:avLst/>
+          </a:prstGeom>
+          <a:noFill/>
+        </p:spPr>
+        <p:txBody>
+          <a:bodyPr wrap="square">
+            <a:spAutoFit/>
+          </a:bodyPr>
+          <a:lstStyle/>
+          <a:p>
+            <a:pPr algn="l">
+              <a:defRPr sz="1100" b="0" i="0">
+                <a:solidFill>
+                  <a:srgbClr val="8F95A3"/>
+                </a:solidFill>
+                <a:latin typeface="Calibri"/>
+              </a:defRPr>
+            </a:pPr>
+            <a:r>
+              <a:t>Infinite Minesweeper Retention</a:t>
+            </a:r>
+          </a:p>
+        </p:txBody>
+      </p:sp>
+      <p:sp>
+        <p:nvSpPr>
+          <p:cNvPr id="7" name="TextBox 6"/>
+          <p:cNvSpPr txBox="1"/>
+          <p:nvPr/>
+        </p:nvSpPr>
+        <p:spPr>
+          <a:xfrm>
+            <a:off x="1097280" y="3566160"/>
+            <a:ext cx="9966960" cy="457200"/>
+          </a:xfrm>
+          <a:prstGeom prst="rect">
+            <a:avLst/>
+          </a:prstGeom>
+          <a:noFill/>
+        </p:spPr>
+        <p:txBody>
+          <a:bodyPr wrap="square">
+            <a:spAutoFit/>
+          </a:bodyPr>
+          <a:lstStyle/>
+          <a:p>
+            <a:pPr algn="l">
+              <a:defRPr sz="1800" b="1" i="0">
+                <a:solidFill>
+                  <a:srgbClr val="FFFFFF"/>
+                </a:solidFill>
+                <a:latin typeface="Calibri"/>
+              </a:defRPr>
+            </a:pPr>
+            <a:r>
+              <a:t>Gaming Turns Profitable in 2025</a:t>
+            </a:r>
+          </a:p>
+        </p:txBody>
+      </p:sp>
+      <p:sp>
+        <p:nvSpPr>
+          <p:cNvPr id="8" name="TextBox 7"/>
+          <p:cNvSpPr txBox="1"/>
+          <p:nvPr/>
+        </p:nvSpPr>
+        <p:spPr>
+          <a:xfrm>
+            <a:off x="1097280" y="4206240"/>
+            <a:ext cx="9966960" cy="1371600"/>
+          </a:xfrm>
+          <a:prstGeom prst="rect">
+            <a:avLst/>
+          </a:prstGeom>
+          <a:noFill/>
+        </p:spPr>
+        <p:txBody>
+          <a:bodyPr wrap="square">
+            <a:spAutoFit/>
+          </a:bodyPr>
+          <a:lstStyle/>
+          <a:p>
+            <a:pPr algn="l">
+              <a:defRPr sz="1500" b="0" i="0">
                 <a:solidFill>
                   <a:srgbClr val="E2E2EA"/>
                 </a:solidFill>
@@ -5435,115 +5471,7 @@
               </a:defRPr>
             </a:pPr>
             <a:r>
-              <a:t>from Gleb Krahotkin</a:t>
-            </a:r>
-          </a:p>
-        </p:txBody>
-      </p:sp>
-      <p:sp>
-        <p:nvSpPr>
-          <p:cNvPr id="7" name="TextBox 6"/>
-          <p:cNvSpPr txBox="1"/>
-          <p:nvPr/>
-        </p:nvSpPr>
-        <p:spPr>
-          <a:xfrm>
-            <a:off x="1097280" y="3108960"/>
-            <a:ext cx="9966960" cy="365760"/>
-          </a:xfrm>
-          <a:prstGeom prst="rect">
-            <a:avLst/>
-          </a:prstGeom>
-          <a:noFill/>
-        </p:spPr>
-        <p:txBody>
-          <a:bodyPr wrap="square">
-            <a:spAutoFit/>
-          </a:bodyPr>
-          <a:lstStyle/>
-          <a:p>
-            <a:pPr algn="l">
-              <a:defRPr sz="1400" b="1" i="0">
-                <a:solidFill>
-                  <a:srgbClr val="FFFFFF"/>
-                </a:solidFill>
-                <a:latin typeface="Calibri"/>
-              </a:defRPr>
-            </a:pPr>
-            <a:r>
-              <a:t>to: Hierman Pelekh</a:t>
-            </a:r>
-          </a:p>
-        </p:txBody>
-      </p:sp>
-      <p:sp>
-        <p:nvSpPr>
-          <p:cNvPr id="8" name="TextBox 7"/>
-          <p:cNvSpPr txBox="1"/>
-          <p:nvPr/>
-        </p:nvSpPr>
-        <p:spPr>
-          <a:xfrm>
-            <a:off x="1097280" y="3749039"/>
-            <a:ext cx="9966960" cy="1097280"/>
-          </a:xfrm>
-          <a:prstGeom prst="rect">
-            <a:avLst/>
-          </a:prstGeom>
-          <a:noFill/>
-        </p:spPr>
-        <p:txBody>
-          <a:bodyPr wrap="square">
-            <a:spAutoFit/>
-          </a:bodyPr>
-          <a:lstStyle/>
-          <a:p>
-            <a:pPr algn="l">
-              <a:defRPr sz="1500" b="0" i="1">
-                <a:solidFill>
-                  <a:srgbClr val="E2E2EA"/>
-                </a:solidFill>
-                <a:latin typeface="Calibri"/>
-              </a:defRPr>
-            </a:pPr>
-            <a:r>
-              <a:t>"Outstanding marketing campaign performance"</a:t>
-            </a:r>
-          </a:p>
-        </p:txBody>
-      </p:sp>
-      <p:sp>
-        <p:nvSpPr>
-          <p:cNvPr id="9" name="TextBox 8"/>
-          <p:cNvSpPr txBox="1"/>
-          <p:nvPr/>
-        </p:nvSpPr>
-        <p:spPr>
-          <a:xfrm>
-            <a:off x="1097280" y="5120640"/>
-            <a:ext cx="9966960" cy="457200"/>
-          </a:xfrm>
-          <a:prstGeom prst="rect">
-            <a:avLst/>
-          </a:prstGeom>
-          <a:noFill/>
-        </p:spPr>
-        <p:txBody>
-          <a:bodyPr wrap="square">
-            <a:spAutoFit/>
-          </a:bodyPr>
-          <a:lstStyle/>
-          <a:p>
-            <a:pPr algn="l">
-              <a:defRPr sz="1200" b="1" i="0">
-                <a:solidFill>
-                  <a:srgbClr val="F1C40F"/>
-                </a:solidFill>
-                <a:latin typeface="Calibri"/>
-              </a:defRPr>
-            </a:pPr>
-            <a:r>
-              <a:t>EXCELLENCE · INNOVATION</a:t>
+              <a:t>Our gaming division has officially become profitable with impressive retention rates across all titles</a:t>
             </a:r>
           </a:p>
         </p:txBody>
@@ -5589,7 +5517,7 @@
             <a:avLst/>
           </a:prstGeom>
           <a:solidFill>
-            <a:srgbClr val="34495E"/>
+            <a:srgbClr val="E74C3C"/>
           </a:solidFill>
           <a:ln>
             <a:noFill/>
@@ -5642,13 +5570,13 @@
             <a:pPr algn="l">
               <a:defRPr sz="1000" b="1">
                 <a:solidFill>
-                  <a:srgbClr val="34495E"/>
-                </a:solidFill>
-                <a:latin typeface="Calibri"/>
-              </a:defRPr>
-            </a:pPr>
-            <a:r>
-              <a:t>📊  MILESTONE</a:t>
+                  <a:srgbClr val="E74C3C"/>
+                </a:solidFill>
+                <a:latin typeface="Calibri"/>
+              </a:defRPr>
+            </a:pPr>
+            <a:r>
+              <a:t>🛡️  WIN</a:t>
             </a:r>
           </a:p>
         </p:txBody>
@@ -5678,13 +5606,13 @@
             <a:pPr algn="l">
               <a:defRPr sz="3200" b="1" i="0">
                 <a:solidFill>
-                  <a:srgbClr val="34495E"/>
-                </a:solidFill>
-                <a:latin typeface="Calibri"/>
-              </a:defRPr>
-            </a:pPr>
-            <a:r>
-              <a:t>AI Operations Scale</a:t>
+                  <a:srgbClr val="E74C3C"/>
+                </a:solidFill>
+                <a:latin typeface="Calibri"/>
+              </a:defRPr>
+            </a:pPr>
+            <a:r>
+              <a:t>Fraud Protection Victory</a:t>
             </a:r>
           </a:p>
         </p:txBody>
@@ -5712,15 +5640,15 @@
           <a:lstStyle/>
           <a:p>
             <a:pPr algn="l">
-              <a:defRPr sz="5200" b="1" i="0">
-                <a:solidFill>
-                  <a:srgbClr val="34495E"/>
-                </a:solidFill>
-                <a:latin typeface="Calibri"/>
-              </a:defRPr>
-            </a:pPr>
-            <a:r>
-              <a:t>1,000+</a:t>
+              <a:defRPr sz="4800" b="1" i="0">
+                <a:solidFill>
+                  <a:srgbClr val="E74C3C"/>
+                </a:solidFill>
+                <a:latin typeface="Calibri"/>
+              </a:defRPr>
+            </a:pPr>
+            <a:r>
+              <a:t>4%</a:t>
             </a:r>
           </a:p>
         </p:txBody>
@@ -5733,7 +5661,7 @@
         </p:nvSpPr>
         <p:spPr>
           <a:xfrm>
-            <a:off x="1097280" y="2926080"/>
+            <a:off x="1097280" y="2834640"/>
             <a:ext cx="4572000" cy="365760"/>
           </a:xfrm>
           <a:prstGeom prst="rect">
@@ -5748,7 +5676,7 @@
           <a:lstStyle/>
           <a:p>
             <a:pPr algn="l">
-              <a:defRPr sz="1100" b="0" i="0">
+              <a:defRPr sz="1200" b="0" i="0">
                 <a:solidFill>
                   <a:srgbClr val="8F95A3"/>
                 </a:solidFill>
@@ -5756,7 +5684,7 @@
               </a:defRPr>
             </a:pPr>
             <a:r>
-              <a:t>OKRs Audited Daily</a:t>
+              <a:t>fraud rate</a:t>
             </a:r>
           </a:p>
         </p:txBody>
@@ -5769,7 +5697,43 @@
         </p:nvSpPr>
         <p:spPr>
           <a:xfrm>
-            <a:off x="1097280" y="3566160"/>
+            <a:off x="1097280" y="3291840"/>
+            <a:ext cx="9966960" cy="365760"/>
+          </a:xfrm>
+          <a:prstGeom prst="rect">
+            <a:avLst/>
+          </a:prstGeom>
+          <a:noFill/>
+        </p:spPr>
+        <p:txBody>
+          <a:bodyPr wrap="square">
+            <a:spAutoFit/>
+          </a:bodyPr>
+          <a:lstStyle/>
+          <a:p>
+            <a:pPr algn="l">
+              <a:defRPr sz="1400" b="0" i="0">
+                <a:solidFill>
+                  <a:srgbClr val="E2E2EA"/>
+                </a:solidFill>
+                <a:latin typeface="Calibri"/>
+              </a:defRPr>
+            </a:pPr>
+            <a:r>
+              <a:t>by Security Team</a:t>
+            </a:r>
+          </a:p>
+        </p:txBody>
+      </p:sp>
+      <p:sp>
+        <p:nvSpPr>
+          <p:cNvPr id="8" name="TextBox 7"/>
+          <p:cNvSpPr txBox="1"/>
+          <p:nvPr/>
+        </p:nvSpPr>
+        <p:spPr>
+          <a:xfrm>
+            <a:off x="1097280" y="3840480"/>
             <a:ext cx="9966960" cy="457200"/>
           </a:xfrm>
           <a:prstGeom prst="rect">
@@ -5792,35 +5756,35 @@
               </a:defRPr>
             </a:pPr>
             <a:r>
-              <a:t>OKR Auditor Achievement</a:t>
-            </a:r>
-          </a:p>
-        </p:txBody>
-      </p:sp>
-      <p:sp>
-        <p:nvSpPr>
-          <p:cNvPr id="8" name="TextBox 7"/>
-          <p:cNvSpPr txBox="1"/>
-          <p:nvPr/>
-        </p:nvSpPr>
-        <p:spPr>
-          <a:xfrm>
-            <a:off x="1097280" y="4206240"/>
-            <a:ext cx="9966960" cy="1371600"/>
-          </a:xfrm>
-          <a:prstGeom prst="rect">
-            <a:avLst/>
-          </a:prstGeom>
-          <a:noFill/>
-        </p:spPr>
-        <p:txBody>
-          <a:bodyPr wrap="square">
-            <a:spAutoFit/>
-          </a:bodyPr>
-          <a:lstStyle/>
-          <a:p>
-            <a:pPr algn="l">
-              <a:defRPr sz="1500" b="0" i="0">
+              <a:t>Massive Fraud Reduction Achieved</a:t>
+            </a:r>
+          </a:p>
+        </p:txBody>
+      </p:sp>
+      <p:sp>
+        <p:nvSpPr>
+          <p:cNvPr id="9" name="TextBox 8"/>
+          <p:cNvSpPr txBox="1"/>
+          <p:nvPr/>
+        </p:nvSpPr>
+        <p:spPr>
+          <a:xfrm>
+            <a:off x="1097280" y="4389120"/>
+            <a:ext cx="9966960" cy="914400"/>
+          </a:xfrm>
+          <a:prstGeom prst="rect">
+            <a:avLst/>
+          </a:prstGeom>
+          <a:noFill/>
+        </p:spPr>
+        <p:txBody>
+          <a:bodyPr wrap="square">
+            <a:spAutoFit/>
+          </a:bodyPr>
+          <a:lstStyle/>
+          <a:p>
+            <a:pPr algn="l">
+              <a:defRPr sz="1400" b="0" i="0">
                 <a:solidFill>
                   <a:srgbClr val="E2E2EA"/>
                 </a:solidFill>
@@ -5828,7 +5792,43 @@
               </a:defRPr>
             </a:pPr>
             <a:r>
-              <a:t>AI system processing massive scale of individual objectives</a:t>
+              <a:t>Dynamic SDK signatures helped us slash fraud from 22% to under 4% — a game-changing security improvement</a:t>
+            </a:r>
+          </a:p>
+        </p:txBody>
+      </p:sp>
+      <p:sp>
+        <p:nvSpPr>
+          <p:cNvPr id="10" name="TextBox 9"/>
+          <p:cNvSpPr txBox="1"/>
+          <p:nvPr/>
+        </p:nvSpPr>
+        <p:spPr>
+          <a:xfrm>
+            <a:off x="1097280" y="5486400"/>
+            <a:ext cx="9966960" cy="457200"/>
+          </a:xfrm>
+          <a:prstGeom prst="rect">
+            <a:avLst/>
+          </a:prstGeom>
+          <a:noFill/>
+        </p:spPr>
+        <p:txBody>
+          <a:bodyPr wrap="square">
+            <a:spAutoFit/>
+          </a:bodyPr>
+          <a:lstStyle/>
+          <a:p>
+            <a:pPr algn="l">
+              <a:defRPr sz="1300" b="0" i="1">
+                <a:solidFill>
+                  <a:srgbClr val="8F95A3"/>
+                </a:solidFill>
+                <a:latin typeface="Calibri"/>
+              </a:defRPr>
+            </a:pPr>
+            <a:r>
+              <a:t>💬 "Innovation in security delivers real business impact"</a:t>
             </a:r>
           </a:p>
         </p:txBody>
@@ -5874,7 +5874,7 @@
             <a:avLst/>
           </a:prstGeom>
           <a:solidFill>
-            <a:srgbClr val="9B59B6"/>
+            <a:srgbClr val="3498DB"/>
           </a:solidFill>
           <a:ln>
             <a:noFill/>
@@ -5927,13 +5927,13 @@
             <a:pPr algn="l">
               <a:defRPr sz="1000" b="1">
                 <a:solidFill>
-                  <a:srgbClr val="9B59B6"/>
-                </a:solidFill>
-                <a:latin typeface="Calibri"/>
-              </a:defRPr>
-            </a:pPr>
-            <a:r>
-              <a:t>🧘  OFFICE LIFE</a:t>
+                  <a:srgbClr val="3498DB"/>
+                </a:solidFill>
+                <a:latin typeface="Calibri"/>
+              </a:defRPr>
+            </a:pPr>
+            <a:r>
+              <a:t>📈  WEEKLY RITUAL</a:t>
             </a:r>
           </a:p>
         </p:txBody>
@@ -5963,13 +5963,13 @@
             <a:pPr algn="l">
               <a:defRPr sz="3200" b="1" i="0">
                 <a:solidFill>
-                  <a:srgbClr val="9B59B6"/>
-                </a:solidFill>
-                <a:latin typeface="Calibri"/>
-              </a:defRPr>
-            </a:pPr>
-            <a:r>
-              <a:t>Wellness Culture</a:t>
+                  <a:srgbClr val="3498DB"/>
+                </a:solidFill>
+                <a:latin typeface="Calibri"/>
+              </a:defRPr>
+            </a:pPr>
+            <a:r>
+              <a:t>Weekly Sales Victory</a:t>
             </a:r>
           </a:p>
         </p:txBody>
@@ -6005,7 +6005,7 @@
               </a:defRPr>
             </a:pPr>
             <a:r>
-              <a:t>Daily Yoga Sessions</a:t>
+              <a:t>8 Deals Closed This Week</a:t>
             </a:r>
           </a:p>
         </p:txBody>
@@ -6018,8 +6018,80 @@
         </p:nvSpPr>
         <p:spPr>
           <a:xfrm>
-            <a:off x="1371600" y="2743200"/>
-            <a:ext cx="9692640" cy="1828800"/>
+            <a:off x="1371600" y="2926080"/>
+            <a:ext cx="9418320" cy="548640"/>
+          </a:xfrm>
+          <a:prstGeom prst="rect">
+            <a:avLst/>
+          </a:prstGeom>
+          <a:noFill/>
+        </p:spPr>
+        <p:txBody>
+          <a:bodyPr wrap="square">
+            <a:spAutoFit/>
+          </a:bodyPr>
+          <a:lstStyle/>
+          <a:p>
+            <a:pPr algn="l">
+              <a:defRPr sz="1400" b="0" i="0">
+                <a:solidFill>
+                  <a:srgbClr val="E2E2EA"/>
+                </a:solidFill>
+                <a:latin typeface="Calibri"/>
+              </a:defRPr>
+            </a:pPr>
+            <a:r>
+              <a:t>What's your biggest win this week?</a:t>
+            </a:r>
+          </a:p>
+        </p:txBody>
+      </p:sp>
+      <p:sp>
+        <p:nvSpPr>
+          <p:cNvPr id="7" name="TextBox 6"/>
+          <p:cNvSpPr txBox="1"/>
+          <p:nvPr/>
+        </p:nvSpPr>
+        <p:spPr>
+          <a:xfrm>
+            <a:off x="1371600" y="3657600"/>
+            <a:ext cx="9418320" cy="548640"/>
+          </a:xfrm>
+          <a:prstGeom prst="rect">
+            <a:avLst/>
+          </a:prstGeom>
+          <a:noFill/>
+        </p:spPr>
+        <p:txBody>
+          <a:bodyPr wrap="square">
+            <a:spAutoFit/>
+          </a:bodyPr>
+          <a:lstStyle/>
+          <a:p>
+            <a:pPr algn="l">
+              <a:defRPr sz="1400" b="0" i="0">
+                <a:solidFill>
+                  <a:srgbClr val="E2E2EA"/>
+                </a:solidFill>
+                <a:latin typeface="Calibri"/>
+              </a:defRPr>
+            </a:pPr>
+            <a:r>
+              <a:t>How can we support each other's success?</a:t>
+            </a:r>
+          </a:p>
+        </p:txBody>
+      </p:sp>
+      <p:sp>
+        <p:nvSpPr>
+          <p:cNvPr id="8" name="TextBox 7"/>
+          <p:cNvSpPr txBox="1"/>
+          <p:nvPr/>
+        </p:nvSpPr>
+        <p:spPr>
+          <a:xfrm>
+            <a:off x="1097280" y="4754880"/>
+            <a:ext cx="9966960" cy="731520"/>
           </a:xfrm>
           <a:prstGeom prst="rect">
             <a:avLst/>
@@ -6041,79 +6113,7 @@
               </a:defRPr>
             </a:pPr>
             <a:r>
-              <a:t>"Daily yoga at 13:10 CET - building healthy habits together"</a:t>
-            </a:r>
-          </a:p>
-        </p:txBody>
-      </p:sp>
-      <p:sp>
-        <p:nvSpPr>
-          <p:cNvPr id="7" name="TextBox 6"/>
-          <p:cNvSpPr txBox="1"/>
-          <p:nvPr/>
-        </p:nvSpPr>
-        <p:spPr>
-          <a:xfrm>
-            <a:off x="1097280" y="4754880"/>
-            <a:ext cx="9966960" cy="365760"/>
-          </a:xfrm>
-          <a:prstGeom prst="rect">
-            <a:avLst/>
-          </a:prstGeom>
-          <a:noFill/>
-        </p:spPr>
-        <p:txBody>
-          <a:bodyPr wrap="square">
-            <a:spAutoFit/>
-          </a:bodyPr>
-          <a:lstStyle/>
-          <a:p>
-            <a:pPr algn="l">
-              <a:defRPr sz="1400" b="0" i="0">
-                <a:solidFill>
-                  <a:srgbClr val="8F95A3"/>
-                </a:solidFill>
-                <a:latin typeface="Calibri"/>
-              </a:defRPr>
-            </a:pPr>
-            <a:r>
-              <a:t>— Anna Kolyada</a:t>
-            </a:r>
-          </a:p>
-        </p:txBody>
-      </p:sp>
-      <p:sp>
-        <p:nvSpPr>
-          <p:cNvPr id="8" name="TextBox 7"/>
-          <p:cNvSpPr txBox="1"/>
-          <p:nvPr/>
-        </p:nvSpPr>
-        <p:spPr>
-          <a:xfrm>
-            <a:off x="1097280" y="5212080"/>
-            <a:ext cx="9966960" cy="365760"/>
-          </a:xfrm>
-          <a:prstGeom prst="rect">
-            <a:avLst/>
-          </a:prstGeom>
-          <a:noFill/>
-        </p:spPr>
-        <p:txBody>
-          <a:bodyPr wrap="square">
-            <a:spAutoFit/>
-          </a:bodyPr>
-          <a:lstStyle/>
-          <a:p>
-            <a:pPr algn="l">
-              <a:defRPr sz="1400" b="1" i="0">
-                <a:solidFill>
-                  <a:srgbClr val="9B59B6"/>
-                </a:solidFill>
-                <a:latin typeface="Calibri"/>
-              </a:defRPr>
-            </a:pPr>
-            <a:r>
-              <a:t>positive</a:t>
+              <a:t>DELIVER RESULTS</a:t>
             </a:r>
           </a:p>
         </p:txBody>
@@ -6149,7 +6149,7 @@
               </a:defRPr>
             </a:pPr>
             <a:r>
-              <a:t>office culture</a:t>
+              <a:t>Sales Team</a:t>
             </a:r>
           </a:p>
         </p:txBody>
@@ -6195,7 +6195,7 @@
             <a:avLst/>
           </a:prstGeom>
           <a:solidFill>
-            <a:srgbClr val="E67E22"/>
+            <a:srgbClr val="F39C12"/>
           </a:solidFill>
           <a:ln>
             <a:noFill/>
@@ -6248,13 +6248,13 @@
             <a:pPr algn="l">
               <a:defRPr sz="1000" b="1">
                 <a:solidFill>
-                  <a:srgbClr val="E67E22"/>
-                </a:solidFill>
-                <a:latin typeface="Calibri"/>
-              </a:defRPr>
-            </a:pPr>
-            <a:r>
-              <a:t>🚢  WEEKLY RITUAL</a:t>
+                  <a:srgbClr val="F39C12"/>
+                </a:solidFill>
+                <a:latin typeface="Calibri"/>
+              </a:defRPr>
+            </a:pPr>
+            <a:r>
+              <a:t>📝  OFFICE LIFE</a:t>
             </a:r>
           </a:p>
         </p:txBody>
@@ -6284,13 +6284,13 @@
             <a:pPr algn="l">
               <a:defRPr sz="3200" b="1" i="0">
                 <a:solidFill>
-                  <a:srgbClr val="E67E22"/>
-                </a:solidFill>
-                <a:latin typeface="Calibri"/>
-              </a:defRPr>
-            </a:pPr>
-            <a:r>
-              <a:t>Build Culture</a:t>
+                  <a:srgbClr val="F39C12"/>
+                </a:solidFill>
+                <a:latin typeface="Calibri"/>
+              </a:defRPr>
+            </a:pPr>
+            <a:r>
+              <a:t>Leadership Philosophy</a:t>
             </a:r>
           </a:p>
         </p:txBody>
@@ -6339,8 +6339,44 @@
         </p:nvSpPr>
         <p:spPr>
           <a:xfrm>
-            <a:off x="1371600" y="2926080"/>
-            <a:ext cx="9418320" cy="548640"/>
+            <a:off x="1371600" y="2743200"/>
+            <a:ext cx="9692640" cy="1828800"/>
+          </a:xfrm>
+          <a:prstGeom prst="rect">
+            <a:avLst/>
+          </a:prstGeom>
+          <a:noFill/>
+        </p:spPr>
+        <p:txBody>
+          <a:bodyPr wrap="square">
+            <a:spAutoFit/>
+          </a:bodyPr>
+          <a:lstStyle/>
+          <a:p>
+            <a:pPr algn="l">
+              <a:defRPr sz="1500" b="0" i="1">
+                <a:solidFill>
+                  <a:srgbClr val="E2E2EA"/>
+                </a:solidFill>
+                <a:latin typeface="Calibri"/>
+              </a:defRPr>
+            </a:pPr>
+            <a:r>
+              <a:t>"We're shifting from requirements to pull request mentality — focus on action and continuous improvement"</a:t>
+            </a:r>
+          </a:p>
+        </p:txBody>
+      </p:sp>
+      <p:sp>
+        <p:nvSpPr>
+          <p:cNvPr id="7" name="TextBox 6"/>
+          <p:cNvSpPr txBox="1"/>
+          <p:nvPr/>
+        </p:nvSpPr>
+        <p:spPr>
+          <a:xfrm>
+            <a:off x="1097280" y="4754880"/>
+            <a:ext cx="9966960" cy="365760"/>
           </a:xfrm>
           <a:prstGeom prst="rect">
             <a:avLst/>
@@ -6356,49 +6392,13 @@
             <a:pPr algn="l">
               <a:defRPr sz="1400" b="0" i="0">
                 <a:solidFill>
-                  <a:srgbClr val="E2E2EA"/>
-                </a:solidFill>
-                <a:latin typeface="Calibri"/>
-              </a:defRPr>
-            </a:pPr>
-            <a:r>
-              <a:t>Shift from requirements to pull requests</a:t>
-            </a:r>
-          </a:p>
-        </p:txBody>
-      </p:sp>
-      <p:sp>
-        <p:nvSpPr>
-          <p:cNvPr id="7" name="TextBox 6"/>
-          <p:cNvSpPr txBox="1"/>
-          <p:nvPr/>
-        </p:nvSpPr>
-        <p:spPr>
-          <a:xfrm>
-            <a:off x="1371600" y="3657600"/>
-            <a:ext cx="9418320" cy="548640"/>
-          </a:xfrm>
-          <a:prstGeom prst="rect">
-            <a:avLst/>
-          </a:prstGeom>
-          <a:noFill/>
-        </p:spPr>
-        <p:txBody>
-          <a:bodyPr wrap="square">
-            <a:spAutoFit/>
-          </a:bodyPr>
-          <a:lstStyle/>
-          <a:p>
-            <a:pPr algn="l">
-              <a:defRPr sz="1400" b="0" i="0">
-                <a:solidFill>
-                  <a:srgbClr val="E2E2EA"/>
-                </a:solidFill>
-                <a:latin typeface="Calibri"/>
-              </a:defRPr>
-            </a:pPr>
-            <a:r>
-              <a:t>Action over analysis paralysis</a:t>
+                  <a:srgbClr val="8F95A3"/>
+                </a:solidFill>
+                <a:latin typeface="Calibri"/>
+              </a:defRPr>
+            </a:pPr>
+            <a:r>
+              <a:t>— CEO Mandate</a:t>
             </a:r>
           </a:p>
         </p:txBody>
@@ -6411,30 +6411,30 @@
         </p:nvSpPr>
         <p:spPr>
           <a:xfrm>
-            <a:off x="1097280" y="4754880"/>
-            <a:ext cx="9966960" cy="731520"/>
-          </a:xfrm>
-          <a:prstGeom prst="rect">
-            <a:avLst/>
-          </a:prstGeom>
-          <a:noFill/>
-        </p:spPr>
-        <p:txBody>
-          <a:bodyPr wrap="square">
-            <a:spAutoFit/>
-          </a:bodyPr>
-          <a:lstStyle/>
-          <a:p>
-            <a:pPr algn="l">
-              <a:defRPr sz="1500" b="0" i="1">
-                <a:solidFill>
-                  <a:srgbClr val="E2E2EA"/>
-                </a:solidFill>
-                <a:latin typeface="Calibri"/>
-              </a:defRPr>
-            </a:pPr>
-            <a:r>
-              <a:t>EXECUTION EXCELLENCE</a:t>
+            <a:off x="1097280" y="5212080"/>
+            <a:ext cx="9966960" cy="365760"/>
+          </a:xfrm>
+          <a:prstGeom prst="rect">
+            <a:avLst/>
+          </a:prstGeom>
+          <a:noFill/>
+        </p:spPr>
+        <p:txBody>
+          <a:bodyPr wrap="square">
+            <a:spAutoFit/>
+          </a:bodyPr>
+          <a:lstStyle/>
+          <a:p>
+            <a:pPr algn="l">
+              <a:defRPr sz="1400" b="1" i="0">
+                <a:solidFill>
+                  <a:srgbClr val="F39C12"/>
+                </a:solidFill>
+                <a:latin typeface="Calibri"/>
+              </a:defRPr>
+            </a:pPr>
+            <a:r>
+              <a:t>🚀</a:t>
             </a:r>
           </a:p>
         </p:txBody>
@@ -6470,7 +6470,7 @@
               </a:defRPr>
             </a:pPr>
             <a:r>
-              <a:t>company culture</a:t>
+              <a:t>Company Culture</a:t>
             </a:r>
           </a:p>
         </p:txBody>
@@ -6516,7 +6516,7 @@
             <a:avLst/>
           </a:prstGeom>
           <a:solidFill>
-            <a:srgbClr val="FF6B6B"/>
+            <a:srgbClr val="FF6B35"/>
           </a:solidFill>
           <a:ln>
             <a:noFill/>
@@ -6569,13 +6569,13 @@
             <a:pPr algn="l">
               <a:defRPr sz="1000" b="1">
                 <a:solidFill>
-                  <a:srgbClr val="FF6B6B"/>
-                </a:solidFill>
-                <a:latin typeface="Calibri"/>
-              </a:defRPr>
-            </a:pPr>
-            <a:r>
-              <a:t>🎂  CELEBRATION</a:t>
+                  <a:srgbClr val="FF6B35"/>
+                </a:solidFill>
+                <a:latin typeface="Calibri"/>
+              </a:defRPr>
+            </a:pPr>
+            <a:r>
+              <a:t>🚀  WIN</a:t>
             </a:r>
           </a:p>
         </p:txBody>
@@ -6605,13 +6605,13 @@
             <a:pPr algn="l">
               <a:defRPr sz="3200" b="1" i="0">
                 <a:solidFill>
-                  <a:srgbClr val="FF6B6B"/>
-                </a:solidFill>
-                <a:latin typeface="Calibri"/>
-              </a:defRPr>
-            </a:pPr>
-            <a:r>
-              <a:t>Birthday Celebration</a:t>
+                  <a:srgbClr val="FF6B35"/>
+                </a:solidFill>
+                <a:latin typeface="Calibri"/>
+              </a:defRPr>
+            </a:pPr>
+            <a:r>
+              <a:t>DevOps Magic Unleashed</a:t>
             </a:r>
           </a:p>
         </p:txBody>
@@ -6625,21 +6625,129 @@
         <p:spPr>
           <a:xfrm>
             <a:off x="1097280" y="2103120"/>
-            <a:ext cx="9966960" cy="640080"/>
-          </a:xfrm>
-          <a:prstGeom prst="rect">
-            <a:avLst/>
-          </a:prstGeom>
-          <a:noFill/>
-        </p:spPr>
-        <p:txBody>
-          <a:bodyPr wrap="square">
-            <a:spAutoFit/>
-          </a:bodyPr>
-          <a:lstStyle/>
-          <a:p>
-            <a:pPr algn="l">
-              <a:defRPr sz="2800" b="1" i="0">
+            <a:ext cx="4572000" cy="822960"/>
+          </a:xfrm>
+          <a:prstGeom prst="rect">
+            <a:avLst/>
+          </a:prstGeom>
+          <a:noFill/>
+        </p:spPr>
+        <p:txBody>
+          <a:bodyPr wrap="square">
+            <a:spAutoFit/>
+          </a:bodyPr>
+          <a:lstStyle/>
+          <a:p>
+            <a:pPr algn="l">
+              <a:defRPr sz="4800" b="1" i="0">
+                <a:solidFill>
+                  <a:srgbClr val="FF6B35"/>
+                </a:solidFill>
+                <a:latin typeface="Calibri"/>
+              </a:defRPr>
+            </a:pPr>
+            <a:r>
+              <a:t>36</a:t>
+            </a:r>
+          </a:p>
+        </p:txBody>
+      </p:sp>
+      <p:sp>
+        <p:nvSpPr>
+          <p:cNvPr id="6" name="TextBox 5"/>
+          <p:cNvSpPr txBox="1"/>
+          <p:nvPr/>
+        </p:nvSpPr>
+        <p:spPr>
+          <a:xfrm>
+            <a:off x="1097280" y="2834640"/>
+            <a:ext cx="4572000" cy="365760"/>
+          </a:xfrm>
+          <a:prstGeom prst="rect">
+            <a:avLst/>
+          </a:prstGeom>
+          <a:noFill/>
+        </p:spPr>
+        <p:txBody>
+          <a:bodyPr wrap="square">
+            <a:spAutoFit/>
+          </a:bodyPr>
+          <a:lstStyle/>
+          <a:p>
+            <a:pPr algn="l">
+              <a:defRPr sz="1200" b="0" i="0">
+                <a:solidFill>
+                  <a:srgbClr val="8F95A3"/>
+                </a:solidFill>
+                <a:latin typeface="Calibri"/>
+              </a:defRPr>
+            </a:pPr>
+            <a:r>
+              <a:t>rocket reactions</a:t>
+            </a:r>
+          </a:p>
+        </p:txBody>
+      </p:sp>
+      <p:sp>
+        <p:nvSpPr>
+          <p:cNvPr id="7" name="TextBox 6"/>
+          <p:cNvSpPr txBox="1"/>
+          <p:nvPr/>
+        </p:nvSpPr>
+        <p:spPr>
+          <a:xfrm>
+            <a:off x="1097280" y="3291840"/>
+            <a:ext cx="9966960" cy="365760"/>
+          </a:xfrm>
+          <a:prstGeom prst="rect">
+            <a:avLst/>
+          </a:prstGeom>
+          <a:noFill/>
+        </p:spPr>
+        <p:txBody>
+          <a:bodyPr wrap="square">
+            <a:spAutoFit/>
+          </a:bodyPr>
+          <a:lstStyle/>
+          <a:p>
+            <a:pPr algn="l">
+              <a:defRPr sz="1400" b="0" i="0">
+                <a:solidFill>
+                  <a:srgbClr val="E2E2EA"/>
+                </a:solidFill>
+                <a:latin typeface="Calibri"/>
+              </a:defRPr>
+            </a:pPr>
+            <a:r>
+              <a:t>by Gleb Krahotkin</a:t>
+            </a:r>
+          </a:p>
+        </p:txBody>
+      </p:sp>
+      <p:sp>
+        <p:nvSpPr>
+          <p:cNvPr id="8" name="TextBox 7"/>
+          <p:cNvSpPr txBox="1"/>
+          <p:nvPr/>
+        </p:nvSpPr>
+        <p:spPr>
+          <a:xfrm>
+            <a:off x="1097280" y="3840480"/>
+            <a:ext cx="9966960" cy="457200"/>
+          </a:xfrm>
+          <a:prstGeom prst="rect">
+            <a:avLst/>
+          </a:prstGeom>
+          <a:noFill/>
+        </p:spPr>
+        <p:txBody>
+          <a:bodyPr wrap="square">
+            <a:spAutoFit/>
+          </a:bodyPr>
+          <a:lstStyle/>
+          <a:p>
+            <a:pPr algn="l">
+              <a:defRPr sz="1800" b="1" i="0">
                 <a:solidFill>
                   <a:srgbClr val="FFFFFF"/>
                 </a:solidFill>
@@ -6647,21 +6755,21 @@
               </a:defRPr>
             </a:pPr>
             <a:r>
-              <a:t>Alexandr Sikorsky</a:t>
-            </a:r>
-          </a:p>
-        </p:txBody>
-      </p:sp>
-      <p:sp>
-        <p:nvSpPr>
-          <p:cNvPr id="6" name="TextBox 5"/>
-          <p:cNvSpPr txBox="1"/>
-          <p:nvPr/>
-        </p:nvSpPr>
-        <p:spPr>
-          <a:xfrm>
-            <a:off x="1097280" y="2743200"/>
-            <a:ext cx="9966960" cy="365760"/>
+              <a:t>Coolify Deployment Platform Goes Live</a:t>
+            </a:r>
+          </a:p>
+        </p:txBody>
+      </p:sp>
+      <p:sp>
+        <p:nvSpPr>
+          <p:cNvPr id="9" name="TextBox 8"/>
+          <p:cNvSpPr txBox="1"/>
+          <p:nvPr/>
+        </p:nvSpPr>
+        <p:spPr>
+          <a:xfrm>
+            <a:off x="1097280" y="4389120"/>
+            <a:ext cx="9966960" cy="914400"/>
           </a:xfrm>
           <a:prstGeom prst="rect">
             <a:avLst/>
@@ -6677,85 +6785,49 @@
             <a:pPr algn="l">
               <a:defRPr sz="1400" b="0" i="0">
                 <a:solidFill>
+                  <a:srgbClr val="E2E2EA"/>
+                </a:solidFill>
+                <a:latin typeface="Calibri"/>
+              </a:defRPr>
+            </a:pPr>
+            <a:r>
+              <a:t>Our DevOps team just dropped a game-changer! Deploy applications in just a few clicks with the new Coolify platform.</a:t>
+            </a:r>
+          </a:p>
+        </p:txBody>
+      </p:sp>
+      <p:sp>
+        <p:nvSpPr>
+          <p:cNvPr id="10" name="TextBox 9"/>
+          <p:cNvSpPr txBox="1"/>
+          <p:nvPr/>
+        </p:nvSpPr>
+        <p:spPr>
+          <a:xfrm>
+            <a:off x="1097280" y="5486400"/>
+            <a:ext cx="9966960" cy="457200"/>
+          </a:xfrm>
+          <a:prstGeom prst="rect">
+            <a:avLst/>
+          </a:prstGeom>
+          <a:noFill/>
+        </p:spPr>
+        <p:txBody>
+          <a:bodyPr wrap="square">
+            <a:spAutoFit/>
+          </a:bodyPr>
+          <a:lstStyle/>
+          <a:p>
+            <a:pPr algn="l">
+              <a:defRPr sz="1300" b="0" i="1">
+                <a:solidFill>
                   <a:srgbClr val="8F95A3"/>
                 </a:solidFill>
                 <a:latin typeface="Calibri"/>
               </a:defRPr>
             </a:pPr>
             <a:r>
-              <a:t>March 12, 2026</a:t>
-            </a:r>
-          </a:p>
-        </p:txBody>
-      </p:sp>
-      <p:sp>
-        <p:nvSpPr>
-          <p:cNvPr id="7" name="TextBox 6"/>
-          <p:cNvSpPr txBox="1"/>
-          <p:nvPr/>
-        </p:nvSpPr>
-        <p:spPr>
-          <a:xfrm>
-            <a:off x="1097280" y="3291840"/>
-            <a:ext cx="9966960" cy="914400"/>
-          </a:xfrm>
-          <a:prstGeom prst="rect">
-            <a:avLst/>
-          </a:prstGeom>
-          <a:noFill/>
-        </p:spPr>
-        <p:txBody>
-          <a:bodyPr wrap="square">
-            <a:spAutoFit/>
-          </a:bodyPr>
-          <a:lstStyle/>
-          <a:p>
-            <a:pPr algn="l">
-              <a:defRPr sz="1600" b="0" i="0">
-                <a:solidFill>
-                  <a:srgbClr val="E2E2EA"/>
-                </a:solidFill>
-                <a:latin typeface="Calibri"/>
-              </a:defRPr>
-            </a:pPr>
-            <a:r>
-              <a:t>Celebrating another year of awesome! Thank you for being such a fantastic part of our team.</a:t>
-            </a:r>
-          </a:p>
-        </p:txBody>
-      </p:sp>
-      <p:sp>
-        <p:nvSpPr>
-          <p:cNvPr id="8" name="TextBox 7"/>
-          <p:cNvSpPr txBox="1"/>
-          <p:nvPr/>
-        </p:nvSpPr>
-        <p:spPr>
-          <a:xfrm>
-            <a:off x="1097280" y="4572000"/>
-            <a:ext cx="9966960" cy="457200"/>
-          </a:xfrm>
-          <a:prstGeom prst="rect">
-            <a:avLst/>
-          </a:prstGeom>
-          <a:noFill/>
-        </p:spPr>
-        <p:txBody>
-          <a:bodyPr wrap="square">
-            <a:spAutoFit/>
-          </a:bodyPr>
-          <a:lstStyle/>
-          <a:p>
-            <a:pPr algn="l">
-              <a:defRPr sz="1400" b="0" i="1">
-                <a:solidFill>
-                  <a:srgbClr val="FF6B6B"/>
-                </a:solidFill>
-                <a:latin typeface="Calibri"/>
-              </a:defRPr>
-            </a:pPr>
-            <a:r>
-              <a:t>Making work brighter with ideas, humor, and dedication</a:t>
+              <a:t>💬 "Innovation meets simplicity — building the future, one click at a time"</a:t>
             </a:r>
           </a:p>
         </p:txBody>
@@ -6801,7 +6873,7 @@
             <a:avLst/>
           </a:prstGeom>
           <a:solidFill>
-            <a:srgbClr val="4ECDC4"/>
+            <a:srgbClr val="FF69B4"/>
           </a:solidFill>
           <a:ln>
             <a:noFill/>
@@ -6854,13 +6926,13 @@
             <a:pPr algn="l">
               <a:defRPr sz="1000" b="1">
                 <a:solidFill>
-                  <a:srgbClr val="4ECDC4"/>
-                </a:solidFill>
-                <a:latin typeface="Calibri"/>
-              </a:defRPr>
-            </a:pPr>
-            <a:r>
-              <a:t>🚀  WIN</a:t>
+                  <a:srgbClr val="FF69B4"/>
+                </a:solidFill>
+                <a:latin typeface="Calibri"/>
+              </a:defRPr>
+            </a:pPr>
+            <a:r>
+              <a:t>🎂  CELEBRATION</a:t>
             </a:r>
           </a:p>
         </p:txBody>
@@ -6890,13 +6962,13 @@
             <a:pPr algn="l">
               <a:defRPr sz="3200" b="1" i="0">
                 <a:solidFill>
-                  <a:srgbClr val="4ECDC4"/>
-                </a:solidFill>
-                <a:latin typeface="Calibri"/>
-              </a:defRPr>
-            </a:pPr>
-            <a:r>
-              <a:t>DevOps Innovation</a:t>
+                  <a:srgbClr val="FF69B4"/>
+                </a:solidFill>
+                <a:latin typeface="Calibri"/>
+              </a:defRPr>
+            </a:pPr>
+            <a:r>
+              <a:t>Birthday Celebrations!</a:t>
             </a:r>
           </a:p>
         </p:txBody>
@@ -6910,29 +6982,29 @@
         <p:spPr>
           <a:xfrm>
             <a:off x="1097280" y="2103120"/>
-            <a:ext cx="4572000" cy="822960"/>
-          </a:xfrm>
-          <a:prstGeom prst="rect">
-            <a:avLst/>
-          </a:prstGeom>
-          <a:noFill/>
-        </p:spPr>
-        <p:txBody>
-          <a:bodyPr wrap="square">
-            <a:spAutoFit/>
-          </a:bodyPr>
-          <a:lstStyle/>
-          <a:p>
-            <a:pPr algn="l">
-              <a:defRPr sz="4800" b="1" i="0">
-                <a:solidFill>
-                  <a:srgbClr val="4ECDC4"/>
-                </a:solidFill>
-                <a:latin typeface="Calibri"/>
-              </a:defRPr>
-            </a:pPr>
-            <a:r>
-              <a:t>1</a:t>
+            <a:ext cx="9966960" cy="640080"/>
+          </a:xfrm>
+          <a:prstGeom prst="rect">
+            <a:avLst/>
+          </a:prstGeom>
+          <a:noFill/>
+        </p:spPr>
+        <p:txBody>
+          <a:bodyPr wrap="square">
+            <a:spAutoFit/>
+          </a:bodyPr>
+          <a:lstStyle/>
+          <a:p>
+            <a:pPr algn="l">
+              <a:defRPr sz="2800" b="1" i="0">
+                <a:solidFill>
+                  <a:srgbClr val="FFFFFF"/>
+                </a:solidFill>
+                <a:latin typeface="Calibri"/>
+              </a:defRPr>
+            </a:pPr>
+            <a:r>
+              <a:t>Alexandr Sikorsky</a:t>
             </a:r>
           </a:p>
         </p:txBody>
@@ -6945,22 +7017,22 @@
         </p:nvSpPr>
         <p:spPr>
           <a:xfrm>
-            <a:off x="1097280" y="2834640"/>
-            <a:ext cx="4572000" cy="365760"/>
-          </a:xfrm>
-          <a:prstGeom prst="rect">
-            <a:avLst/>
-          </a:prstGeom>
-          <a:noFill/>
-        </p:spPr>
-        <p:txBody>
-          <a:bodyPr wrap="square">
-            <a:spAutoFit/>
-          </a:bodyPr>
-          <a:lstStyle/>
-          <a:p>
-            <a:pPr algn="l">
-              <a:defRPr sz="1200" b="0" i="0">
+            <a:off x="1097280" y="2743200"/>
+            <a:ext cx="9966960" cy="365760"/>
+          </a:xfrm>
+          <a:prstGeom prst="rect">
+            <a:avLst/>
+          </a:prstGeom>
+          <a:noFill/>
+        </p:spPr>
+        <p:txBody>
+          <a:bodyPr wrap="square">
+            <a:spAutoFit/>
+          </a:bodyPr>
+          <a:lstStyle/>
+          <a:p>
+            <a:pPr algn="l">
+              <a:defRPr sz="1400" b="0" i="0">
                 <a:solidFill>
                   <a:srgbClr val="8F95A3"/>
                 </a:solidFill>
@@ -6968,7 +7040,7 @@
               </a:defRPr>
             </a:pPr>
             <a:r>
-              <a:t>click deployment</a:t>
+              <a:t>March 12th</a:t>
             </a:r>
           </a:p>
         </p:txBody>
@@ -6982,21 +7054,21 @@
         <p:spPr>
           <a:xfrm>
             <a:off x="1097280" y="3291840"/>
-            <a:ext cx="9966960" cy="365760"/>
-          </a:xfrm>
-          <a:prstGeom prst="rect">
-            <a:avLst/>
-          </a:prstGeom>
-          <a:noFill/>
-        </p:spPr>
-        <p:txBody>
-          <a:bodyPr wrap="square">
-            <a:spAutoFit/>
-          </a:bodyPr>
-          <a:lstStyle/>
-          <a:p>
-            <a:pPr algn="l">
-              <a:defRPr sz="1400" b="0" i="0">
+            <a:ext cx="9966960" cy="914400"/>
+          </a:xfrm>
+          <a:prstGeom prst="rect">
+            <a:avLst/>
+          </a:prstGeom>
+          <a:noFill/>
+        </p:spPr>
+        <p:txBody>
+          <a:bodyPr wrap="square">
+            <a:spAutoFit/>
+          </a:bodyPr>
+          <a:lstStyle/>
+          <a:p>
+            <a:pPr algn="l">
+              <a:defRPr sz="1600" b="0" i="0">
                 <a:solidFill>
                   <a:srgbClr val="E2E2EA"/>
                 </a:solidFill>
@@ -7004,7 +7076,7 @@
               </a:defRPr>
             </a:pPr>
             <a:r>
-              <a:t>by Gleb Krahotkin</a:t>
+              <a:t>Thanks guys, all of you, for the warm wishes! 💕</a:t>
             </a:r>
           </a:p>
         </p:txBody>
@@ -7017,7 +7089,7 @@
         </p:nvSpPr>
         <p:spPr>
           <a:xfrm>
-            <a:off x="1097280" y="3840480"/>
+            <a:off x="1097280" y="4572000"/>
             <a:ext cx="9966960" cy="457200"/>
           </a:xfrm>
           <a:prstGeom prst="rect">
@@ -7032,87 +7104,15 @@
           <a:lstStyle/>
           <a:p>
             <a:pPr algn="l">
-              <a:defRPr sz="1800" b="1" i="0">
-                <a:solidFill>
-                  <a:srgbClr val="FFFFFF"/>
-                </a:solidFill>
-                <a:latin typeface="Calibri"/>
-              </a:defRPr>
-            </a:pPr>
-            <a:r>
-              <a:t>Coolify Platform Launched</a:t>
-            </a:r>
-          </a:p>
-        </p:txBody>
-      </p:sp>
-      <p:sp>
-        <p:nvSpPr>
-          <p:cNvPr id="9" name="TextBox 8"/>
-          <p:cNvSpPr txBox="1"/>
-          <p:nvPr/>
-        </p:nvSpPr>
-        <p:spPr>
-          <a:xfrm>
-            <a:off x="1097280" y="4389120"/>
-            <a:ext cx="9966960" cy="914400"/>
-          </a:xfrm>
-          <a:prstGeom prst="rect">
-            <a:avLst/>
-          </a:prstGeom>
-          <a:noFill/>
-        </p:spPr>
-        <p:txBody>
-          <a:bodyPr wrap="square">
-            <a:spAutoFit/>
-          </a:bodyPr>
-          <a:lstStyle/>
-          <a:p>
-            <a:pPr algn="l">
-              <a:defRPr sz="1400" b="0" i="0">
-                <a:solidFill>
-                  <a:srgbClr val="E2E2EA"/>
-                </a:solidFill>
-                <a:latin typeface="Calibri"/>
-              </a:defRPr>
-            </a:pPr>
-            <a:r>
-              <a:t>Revolutionary deployment service now live for all teams</a:t>
-            </a:r>
-          </a:p>
-        </p:txBody>
-      </p:sp>
-      <p:sp>
-        <p:nvSpPr>
-          <p:cNvPr id="10" name="TextBox 9"/>
-          <p:cNvSpPr txBox="1"/>
-          <p:nvPr/>
-        </p:nvSpPr>
-        <p:spPr>
-          <a:xfrm>
-            <a:off x="1097280" y="5486400"/>
-            <a:ext cx="9966960" cy="457200"/>
-          </a:xfrm>
-          <a:prstGeom prst="rect">
-            <a:avLst/>
-          </a:prstGeom>
-          <a:noFill/>
-        </p:spPr>
-        <p:txBody>
-          <a:bodyPr wrap="square">
-            <a:spAutoFit/>
-          </a:bodyPr>
-          <a:lstStyle/>
-          <a:p>
-            <a:pPr algn="l">
-              <a:defRPr sz="1300" b="0" i="1">
-                <a:solidFill>
-                  <a:srgbClr val="8F95A3"/>
-                </a:solidFill>
-                <a:latin typeface="Calibri"/>
-              </a:defRPr>
-            </a:pPr>
-            <a:r>
-              <a:t>💬 "Deploy applications in just a few clicks with our new internal platform"</a:t>
+              <a:defRPr sz="1400" b="0" i="1">
+                <a:solidFill>
+                  <a:srgbClr val="FF69B4"/>
+                </a:solidFill>
+                <a:latin typeface="Calibri"/>
+              </a:defRPr>
+            </a:pPr>
+            <a:r>
+              <a:t>The whole team showered our birthday star with love and wishes!</a:t>
             </a:r>
           </a:p>
         </p:txBody>
@@ -7158,7 +7158,7 @@
             <a:avLst/>
           </a:prstGeom>
           <a:solidFill>
-            <a:srgbClr val="9B59B6"/>
+            <a:srgbClr val="E74C3C"/>
           </a:solidFill>
           <a:ln>
             <a:noFill/>
@@ -7211,13 +7211,13 @@
             <a:pPr algn="l">
               <a:defRPr sz="1000" b="1">
                 <a:solidFill>
-                  <a:srgbClr val="9B59B6"/>
-                </a:solidFill>
-                <a:latin typeface="Calibri"/>
-              </a:defRPr>
-            </a:pPr>
-            <a:r>
-              <a:t>👏  CLAPS</a:t>
+                  <a:srgbClr val="E74C3C"/>
+                </a:solidFill>
+                <a:latin typeface="Calibri"/>
+              </a:defRPr>
+            </a:pPr>
+            <a:r>
+              <a:t>🔥  EVENT</a:t>
             </a:r>
           </a:p>
         </p:txBody>
@@ -7247,13 +7247,13 @@
             <a:pPr algn="l">
               <a:defRPr sz="3200" b="1" i="0">
                 <a:solidFill>
-                  <a:srgbClr val="9B59B6"/>
-                </a:solidFill>
-                <a:latin typeface="Calibri"/>
-              </a:defRPr>
-            </a:pPr>
-            <a:r>
-              <a:t>Team Recognition</a:t>
+                  <a:srgbClr val="E74C3C"/>
+                </a:solidFill>
+                <a:latin typeface="Calibri"/>
+              </a:defRPr>
+            </a:pPr>
+            <a:r>
+              <a:t>Lunch &amp; Learn Success</a:t>
             </a:r>
           </a:p>
         </p:txBody>
@@ -7267,29 +7267,29 @@
         <p:spPr>
           <a:xfrm>
             <a:off x="1097280" y="2103120"/>
-            <a:ext cx="2743200" cy="548640"/>
-          </a:xfrm>
-          <a:prstGeom prst="rect">
-            <a:avLst/>
-          </a:prstGeom>
-          <a:noFill/>
-        </p:spPr>
-        <p:txBody>
-          <a:bodyPr wrap="square">
-            <a:spAutoFit/>
-          </a:bodyPr>
-          <a:lstStyle/>
-          <a:p>
-            <a:pPr algn="l">
-              <a:defRPr sz="2800" b="1" i="0">
-                <a:solidFill>
-                  <a:srgbClr val="9B59B6"/>
-                </a:solidFill>
-                <a:latin typeface="Calibri"/>
-              </a:defRPr>
-            </a:pPr>
-            <a:r>
-              <a:t>50</a:t>
+            <a:ext cx="9966960" cy="548640"/>
+          </a:xfrm>
+          <a:prstGeom prst="rect">
+            <a:avLst/>
+          </a:prstGeom>
+          <a:noFill/>
+        </p:spPr>
+        <p:txBody>
+          <a:bodyPr wrap="square">
+            <a:spAutoFit/>
+          </a:bodyPr>
+          <a:lstStyle/>
+          <a:p>
+            <a:pPr algn="l">
+              <a:defRPr sz="2200" b="1" i="0">
+                <a:solidFill>
+                  <a:srgbClr val="FFFFFF"/>
+                </a:solidFill>
+                <a:latin typeface="Calibri"/>
+              </a:defRPr>
+            </a:pPr>
+            <a:r>
+              <a:t>11th Lunch &amp; Learn Session</a:t>
             </a:r>
           </a:p>
         </p:txBody>
@@ -7302,7 +7302,7 @@
         </p:nvSpPr>
         <p:spPr>
           <a:xfrm>
-            <a:off x="1097280" y="2651760"/>
+            <a:off x="1097280" y="2743200"/>
             <a:ext cx="9966960" cy="365760"/>
           </a:xfrm>
           <a:prstGeom prst="rect">
@@ -7317,7 +7317,43 @@
           <a:lstStyle/>
           <a:p>
             <a:pPr algn="l">
-              <a:defRPr sz="1400" b="0" i="0">
+              <a:defRPr sz="1400" b="1" i="0">
+                <a:solidFill>
+                  <a:srgbClr val="E74C3C"/>
+                </a:solidFill>
+                <a:latin typeface="Calibri"/>
+              </a:defRPr>
+            </a:pPr>
+            <a:r>
+              <a:t>This week</a:t>
+            </a:r>
+          </a:p>
+        </p:txBody>
+      </p:sp>
+      <p:sp>
+        <p:nvSpPr>
+          <p:cNvPr id="7" name="TextBox 6"/>
+          <p:cNvSpPr txBox="1"/>
+          <p:nvPr/>
+        </p:nvSpPr>
+        <p:spPr>
+          <a:xfrm>
+            <a:off x="1097280" y="3291840"/>
+            <a:ext cx="9966960" cy="1371600"/>
+          </a:xfrm>
+          <a:prstGeom prst="rect">
+            <a:avLst/>
+          </a:prstGeom>
+          <a:noFill/>
+        </p:spPr>
+        <p:txBody>
+          <a:bodyPr wrap="square">
+            <a:spAutoFit/>
+          </a:bodyPr>
+          <a:lstStyle/>
+          <a:p>
+            <a:pPr algn="l">
+              <a:defRPr sz="1500" b="0" i="0">
                 <a:solidFill>
                   <a:srgbClr val="E2E2EA"/>
                 </a:solidFill>
@@ -7325,20 +7361,20 @@
               </a:defRPr>
             </a:pPr>
             <a:r>
-              <a:t>from pavel.savinskiy</a:t>
-            </a:r>
-          </a:p>
-        </p:txBody>
-      </p:sp>
-      <p:sp>
-        <p:nvSpPr>
-          <p:cNvPr id="7" name="TextBox 6"/>
-          <p:cNvSpPr txBox="1"/>
-          <p:nvPr/>
-        </p:nvSpPr>
-        <p:spPr>
-          <a:xfrm>
-            <a:off x="1097280" y="3108960"/>
+              <a:t>Timofey Levanov delivered an amazing presentation on fraud traffic detection. Recording available on Fireflies!</a:t>
+            </a:r>
+          </a:p>
+        </p:txBody>
+      </p:sp>
+      <p:sp>
+        <p:nvSpPr>
+          <p:cNvPr id="8" name="TextBox 7"/>
+          <p:cNvSpPr txBox="1"/>
+          <p:nvPr/>
+        </p:nvSpPr>
+        <p:spPr>
+          <a:xfrm>
+            <a:off x="1097280" y="5029200"/>
             <a:ext cx="9966960" cy="365760"/>
           </a:xfrm>
           <a:prstGeom prst="rect">
@@ -7353,87 +7389,15 @@
           <a:lstStyle/>
           <a:p>
             <a:pPr algn="l">
-              <a:defRPr sz="1400" b="1" i="0">
-                <a:solidFill>
-                  <a:srgbClr val="FFFFFF"/>
-                </a:solidFill>
-                <a:latin typeface="Calibri"/>
-              </a:defRPr>
-            </a:pPr>
-            <a:r>
-              <a:t>to: sergeydesigner</a:t>
-            </a:r>
-          </a:p>
-        </p:txBody>
-      </p:sp>
-      <p:sp>
-        <p:nvSpPr>
-          <p:cNvPr id="8" name="TextBox 7"/>
-          <p:cNvSpPr txBox="1"/>
-          <p:nvPr/>
-        </p:nvSpPr>
-        <p:spPr>
-          <a:xfrm>
-            <a:off x="1097280" y="3749039"/>
-            <a:ext cx="9966960" cy="1097280"/>
-          </a:xfrm>
-          <a:prstGeom prst="rect">
-            <a:avLst/>
-          </a:prstGeom>
-          <a:noFill/>
-        </p:spPr>
-        <p:txBody>
-          <a:bodyPr wrap="square">
-            <a:spAutoFit/>
-          </a:bodyPr>
-          <a:lstStyle/>
-          <a:p>
-            <a:pPr algn="l">
-              <a:defRPr sz="1500" b="0" i="1">
-                <a:solidFill>
-                  <a:srgbClr val="E2E2EA"/>
-                </a:solidFill>
-                <a:latin typeface="Calibri"/>
-              </a:defRPr>
-            </a:pPr>
-            <a:r>
-              <a:t>"Outstanding design work and creative excellence"</a:t>
-            </a:r>
-          </a:p>
-        </p:txBody>
-      </p:sp>
-      <p:sp>
-        <p:nvSpPr>
-          <p:cNvPr id="9" name="TextBox 8"/>
-          <p:cNvSpPr txBox="1"/>
-          <p:nvPr/>
-        </p:nvSpPr>
-        <p:spPr>
-          <a:xfrm>
-            <a:off x="1097280" y="5120640"/>
-            <a:ext cx="9966960" cy="457200"/>
-          </a:xfrm>
-          <a:prstGeom prst="rect">
-            <a:avLst/>
-          </a:prstGeom>
-          <a:noFill/>
-        </p:spPr>
-        <p:txBody>
-          <a:bodyPr wrap="square">
-            <a:spAutoFit/>
-          </a:bodyPr>
-          <a:lstStyle/>
-          <a:p>
-            <a:pPr algn="l">
-              <a:defRPr sz="1200" b="1" i="0">
-                <a:solidFill>
-                  <a:srgbClr val="9B59B6"/>
-                </a:solidFill>
-                <a:latin typeface="Calibri"/>
-              </a:defRPr>
-            </a:pPr>
-            <a:r>
-              <a:t>EXCELLENCE · CREATIVITY</a:t>
+              <a:defRPr sz="1300" b="0" i="0">
+                <a:solidFill>
+                  <a:srgbClr val="8F95A3"/>
+                </a:solidFill>
+                <a:latin typeface="Calibri"/>
+              </a:defRPr>
+            </a:pPr>
+            <a:r>
+              <a:t>Organized by Katarzyna Raniszewska</a:t>
             </a:r>
           </a:p>
         </p:txBody>
@@ -7479,7 +7443,7 @@
             <a:avLst/>
           </a:prstGeom>
           <a:solidFill>
-            <a:srgbClr val="E67E22"/>
+            <a:srgbClr val="9B59B6"/>
           </a:solidFill>
           <a:ln>
             <a:noFill/>
@@ -7532,13 +7496,13 @@
             <a:pPr algn="l">
               <a:defRPr sz="1000" b="1">
                 <a:solidFill>
-                  <a:srgbClr val="E67E22"/>
-                </a:solidFill>
-                <a:latin typeface="Calibri"/>
-              </a:defRPr>
-            </a:pPr>
-            <a:r>
-              <a:t>🔥  EVENT</a:t>
+                  <a:srgbClr val="9B59B6"/>
+                </a:solidFill>
+                <a:latin typeface="Calibri"/>
+              </a:defRPr>
+            </a:pPr>
+            <a:r>
+              <a:t>👏  CLAPS</a:t>
             </a:r>
           </a:p>
         </p:txBody>
@@ -7568,13 +7532,13 @@
             <a:pPr algn="l">
               <a:defRPr sz="3200" b="1" i="0">
                 <a:solidFill>
-                  <a:srgbClr val="E67E22"/>
-                </a:solidFill>
-                <a:latin typeface="Calibri"/>
-              </a:defRPr>
-            </a:pPr>
-            <a:r>
-              <a:t>Lunch &amp; Learn Success</a:t>
+                  <a:srgbClr val="9B59B6"/>
+                </a:solidFill>
+                <a:latin typeface="Calibri"/>
+              </a:defRPr>
+            </a:pPr>
+            <a:r>
+              <a:t>Design Excellence</a:t>
             </a:r>
           </a:p>
         </p:txBody>
@@ -7588,21 +7552,93 @@
         <p:spPr>
           <a:xfrm>
             <a:off x="1097280" y="2103120"/>
-            <a:ext cx="9966960" cy="548640"/>
-          </a:xfrm>
-          <a:prstGeom prst="rect">
-            <a:avLst/>
-          </a:prstGeom>
-          <a:noFill/>
-        </p:spPr>
-        <p:txBody>
-          <a:bodyPr wrap="square">
-            <a:spAutoFit/>
-          </a:bodyPr>
-          <a:lstStyle/>
-          <a:p>
-            <a:pPr algn="l">
-              <a:defRPr sz="2200" b="1" i="0">
+            <a:ext cx="2743200" cy="548640"/>
+          </a:xfrm>
+          <a:prstGeom prst="rect">
+            <a:avLst/>
+          </a:prstGeom>
+          <a:noFill/>
+        </p:spPr>
+        <p:txBody>
+          <a:bodyPr wrap="square">
+            <a:spAutoFit/>
+          </a:bodyPr>
+          <a:lstStyle/>
+          <a:p>
+            <a:pPr algn="l">
+              <a:defRPr sz="2800" b="1" i="0">
+                <a:solidFill>
+                  <a:srgbClr val="9B59B6"/>
+                </a:solidFill>
+                <a:latin typeface="Calibri"/>
+              </a:defRPr>
+            </a:pPr>
+            <a:r>
+              <a:t>50</a:t>
+            </a:r>
+          </a:p>
+        </p:txBody>
+      </p:sp>
+      <p:sp>
+        <p:nvSpPr>
+          <p:cNvPr id="6" name="TextBox 5"/>
+          <p:cNvSpPr txBox="1"/>
+          <p:nvPr/>
+        </p:nvSpPr>
+        <p:spPr>
+          <a:xfrm>
+            <a:off x="1097280" y="2651760"/>
+            <a:ext cx="9966960" cy="365760"/>
+          </a:xfrm>
+          <a:prstGeom prst="rect">
+            <a:avLst/>
+          </a:prstGeom>
+          <a:noFill/>
+        </p:spPr>
+        <p:txBody>
+          <a:bodyPr wrap="square">
+            <a:spAutoFit/>
+          </a:bodyPr>
+          <a:lstStyle/>
+          <a:p>
+            <a:pPr algn="l">
+              <a:defRPr sz="1400" b="0" i="0">
+                <a:solidFill>
+                  <a:srgbClr val="E2E2EA"/>
+                </a:solidFill>
+                <a:latin typeface="Calibri"/>
+              </a:defRPr>
+            </a:pPr>
+            <a:r>
+              <a:t>from Pavel Savinskiy</a:t>
+            </a:r>
+          </a:p>
+        </p:txBody>
+      </p:sp>
+      <p:sp>
+        <p:nvSpPr>
+          <p:cNvPr id="7" name="TextBox 6"/>
+          <p:cNvSpPr txBox="1"/>
+          <p:nvPr/>
+        </p:nvSpPr>
+        <p:spPr>
+          <a:xfrm>
+            <a:off x="1097280" y="3108960"/>
+            <a:ext cx="9966960" cy="365760"/>
+          </a:xfrm>
+          <a:prstGeom prst="rect">
+            <a:avLst/>
+          </a:prstGeom>
+          <a:noFill/>
+        </p:spPr>
+        <p:txBody>
+          <a:bodyPr wrap="square">
+            <a:spAutoFit/>
+          </a:bodyPr>
+          <a:lstStyle/>
+          <a:p>
+            <a:pPr algn="l">
+              <a:defRPr sz="1400" b="1" i="0">
                 <a:solidFill>
                   <a:srgbClr val="FFFFFF"/>
                 </a:solidFill>
@@ -7610,71 +7646,35 @@
               </a:defRPr>
             </a:pPr>
             <a:r>
-              <a:t>11th Lunch &amp; Learn Session</a:t>
-            </a:r>
-          </a:p>
-        </p:txBody>
-      </p:sp>
-      <p:sp>
-        <p:nvSpPr>
-          <p:cNvPr id="6" name="TextBox 5"/>
-          <p:cNvSpPr txBox="1"/>
-          <p:nvPr/>
-        </p:nvSpPr>
-        <p:spPr>
-          <a:xfrm>
-            <a:off x="1097280" y="2743200"/>
-            <a:ext cx="9966960" cy="365760"/>
-          </a:xfrm>
-          <a:prstGeom prst="rect">
-            <a:avLst/>
-          </a:prstGeom>
-          <a:noFill/>
-        </p:spPr>
-        <p:txBody>
-          <a:bodyPr wrap="square">
-            <a:spAutoFit/>
-          </a:bodyPr>
-          <a:lstStyle/>
-          <a:p>
-            <a:pPr algn="l">
-              <a:defRPr sz="1400" b="1" i="0">
-                <a:solidFill>
-                  <a:srgbClr val="E67E22"/>
-                </a:solidFill>
-                <a:latin typeface="Calibri"/>
-              </a:defRPr>
-            </a:pPr>
-            <a:r>
-              <a:t>This Week</a:t>
-            </a:r>
-          </a:p>
-        </p:txBody>
-      </p:sp>
-      <p:sp>
-        <p:nvSpPr>
-          <p:cNvPr id="7" name="TextBox 6"/>
-          <p:cNvSpPr txBox="1"/>
-          <p:nvPr/>
-        </p:nvSpPr>
-        <p:spPr>
-          <a:xfrm>
-            <a:off x="1097280" y="3291840"/>
-            <a:ext cx="9966960" cy="1371600"/>
-          </a:xfrm>
-          <a:prstGeom prst="rect">
-            <a:avLst/>
-          </a:prstGeom>
-          <a:noFill/>
-        </p:spPr>
-        <p:txBody>
-          <a:bodyPr wrap="square">
-            <a:spAutoFit/>
-          </a:bodyPr>
-          <a:lstStyle/>
-          <a:p>
-            <a:pPr algn="l">
-              <a:defRPr sz="1500" b="0" i="0">
+              <a:t>to: sergeydesigner</a:t>
+            </a:r>
+          </a:p>
+        </p:txBody>
+      </p:sp>
+      <p:sp>
+        <p:nvSpPr>
+          <p:cNvPr id="8" name="TextBox 7"/>
+          <p:cNvSpPr txBox="1"/>
+          <p:nvPr/>
+        </p:nvSpPr>
+        <p:spPr>
+          <a:xfrm>
+            <a:off x="1097280" y="3749039"/>
+            <a:ext cx="9966960" cy="1097280"/>
+          </a:xfrm>
+          <a:prstGeom prst="rect">
+            <a:avLst/>
+          </a:prstGeom>
+          <a:noFill/>
+        </p:spPr>
+        <p:txBody>
+          <a:bodyPr wrap="square">
+            <a:spAutoFit/>
+          </a:bodyPr>
+          <a:lstStyle/>
+          <a:p>
+            <a:pPr algn="l">
+              <a:defRPr sz="1500" b="0" i="1">
                 <a:solidFill>
                   <a:srgbClr val="E2E2EA"/>
                 </a:solidFill>
@@ -7682,43 +7682,43 @@
               </a:defRPr>
             </a:pPr>
             <a:r>
-              <a:t>Timofey Levanov presented on fraud traffic detection</a:t>
-            </a:r>
-          </a:p>
-        </p:txBody>
-      </p:sp>
-      <p:sp>
-        <p:nvSpPr>
-          <p:cNvPr id="8" name="TextBox 7"/>
-          <p:cNvSpPr txBox="1"/>
-          <p:nvPr/>
-        </p:nvSpPr>
-        <p:spPr>
-          <a:xfrm>
-            <a:off x="1097280" y="5029200"/>
-            <a:ext cx="9966960" cy="365760"/>
-          </a:xfrm>
-          <a:prstGeom prst="rect">
-            <a:avLst/>
-          </a:prstGeom>
-          <a:noFill/>
-        </p:spPr>
-        <p:txBody>
-          <a:bodyPr wrap="square">
-            <a:spAutoFit/>
-          </a:bodyPr>
-          <a:lstStyle/>
-          <a:p>
-            <a:pPr algn="l">
-              <a:defRPr sz="1300" b="0" i="0">
-                <a:solidFill>
-                  <a:srgbClr val="8F95A3"/>
-                </a:solidFill>
-                <a:latin typeface="Calibri"/>
-              </a:defRPr>
-            </a:pPr>
-            <a:r>
-              <a:t>Organized by Katarzyna Raniszewska</a:t>
+              <a:t>"Outstanding design work that impressed the whole team"</a:t>
+            </a:r>
+          </a:p>
+        </p:txBody>
+      </p:sp>
+      <p:sp>
+        <p:nvSpPr>
+          <p:cNvPr id="9" name="TextBox 8"/>
+          <p:cNvSpPr txBox="1"/>
+          <p:nvPr/>
+        </p:nvSpPr>
+        <p:spPr>
+          <a:xfrm>
+            <a:off x="1097280" y="5120640"/>
+            <a:ext cx="9966960" cy="457200"/>
+          </a:xfrm>
+          <a:prstGeom prst="rect">
+            <a:avLst/>
+          </a:prstGeom>
+          <a:noFill/>
+        </p:spPr>
+        <p:txBody>
+          <a:bodyPr wrap="square">
+            <a:spAutoFit/>
+          </a:bodyPr>
+          <a:lstStyle/>
+          <a:p>
+            <a:pPr algn="l">
+              <a:defRPr sz="1200" b="1" i="0">
+                <a:solidFill>
+                  <a:srgbClr val="9B59B6"/>
+                </a:solidFill>
+                <a:latin typeface="Calibri"/>
+              </a:defRPr>
+            </a:pPr>
+            <a:r>
+              <a:t>CRAFT · EXCELLENCE</a:t>
             </a:r>
           </a:p>
         </p:txBody>
@@ -7823,7 +7823,7 @@
               </a:defRPr>
             </a:pPr>
             <a:r>
-              <a:t>🌟  CLAPS</a:t>
+              <a:t>🧠  CLAPS</a:t>
             </a:r>
           </a:p>
         </p:txBody>
@@ -7859,7 +7859,7 @@
               </a:defRPr>
             </a:pPr>
             <a:r>
-              <a:t>Individual Excellence</a:t>
+              <a:t>Technical Brilliance</a:t>
             </a:r>
           </a:p>
         </p:txBody>
@@ -8003,7 +8003,7 @@
               </a:defRPr>
             </a:pPr>
             <a:r>
-              <a:t>"Exceptional performance and dedication"</a:t>
+              <a:t>"Exceptional technical contribution that moved us forward"</a:t>
             </a:r>
           </a:p>
         </p:txBody>
@@ -8039,7 +8039,7 @@
               </a:defRPr>
             </a:pPr>
             <a:r>
-              <a:t>EXCELLENCE · DEDICATION</a:t>
+              <a:t>INNOVATION · EXCELLENCE</a:t>
             </a:r>
           </a:p>
         </p:txBody>
@@ -8085,7 +8085,7 @@
             <a:avLst/>
           </a:prstGeom>
           <a:solidFill>
-            <a:srgbClr val="27AE60"/>
+            <a:srgbClr val="E67E22"/>
           </a:solidFill>
           <a:ln>
             <a:noFill/>
@@ -8138,13 +8138,13 @@
             <a:pPr algn="l">
               <a:defRPr sz="1000" b="1">
                 <a:solidFill>
-                  <a:srgbClr val="27AE60"/>
-                </a:solidFill>
-                <a:latin typeface="Calibri"/>
-              </a:defRPr>
-            </a:pPr>
-            <a:r>
-              <a:t>📚  RECOMMENDED</a:t>
+                  <a:srgbClr val="E67E22"/>
+                </a:solidFill>
+                <a:latin typeface="Calibri"/>
+              </a:defRPr>
+            </a:pPr>
+            <a:r>
+              <a:t>💪  CLAPS</a:t>
             </a:r>
           </a:p>
         </p:txBody>
@@ -8174,13 +8174,13 @@
             <a:pPr algn="l">
               <a:defRPr sz="3200" b="1" i="0">
                 <a:solidFill>
-                  <a:srgbClr val="27AE60"/>
-                </a:solidFill>
-                <a:latin typeface="Calibri"/>
-              </a:defRPr>
-            </a:pPr>
-            <a:r>
-              <a:t>Knowledge Sharing</a:t>
+                  <a:srgbClr val="E67E22"/>
+                </a:solidFill>
+                <a:latin typeface="Calibri"/>
+              </a:defRPr>
+            </a:pPr>
+            <a:r>
+              <a:t>Team Collaboration Win</a:t>
             </a:r>
           </a:p>
         </p:txBody>
@@ -8194,29 +8194,29 @@
         <p:spPr>
           <a:xfrm>
             <a:off x="1097280" y="2103120"/>
-            <a:ext cx="457200" cy="365760"/>
-          </a:xfrm>
-          <a:prstGeom prst="rect">
-            <a:avLst/>
-          </a:prstGeom>
-          <a:noFill/>
-        </p:spPr>
-        <p:txBody>
-          <a:bodyPr wrap="square">
-            <a:spAutoFit/>
-          </a:bodyPr>
-          <a:lstStyle/>
-          <a:p>
-            <a:pPr algn="l">
-              <a:defRPr sz="2200" b="1" i="0">
-                <a:solidFill>
-                  <a:srgbClr val="27AE60"/>
-                </a:solidFill>
-                <a:latin typeface="Calibri"/>
-              </a:defRPr>
-            </a:pPr>
-            <a:r>
-              <a:t>01</a:t>
+            <a:ext cx="2743200" cy="548640"/>
+          </a:xfrm>
+          <a:prstGeom prst="rect">
+            <a:avLst/>
+          </a:prstGeom>
+          <a:noFill/>
+        </p:spPr>
+        <p:txBody>
+          <a:bodyPr wrap="square">
+            <a:spAutoFit/>
+          </a:bodyPr>
+          <a:lstStyle/>
+          <a:p>
+            <a:pPr algn="l">
+              <a:defRPr sz="2800" b="1" i="0">
+                <a:solidFill>
+                  <a:srgbClr val="E67E22"/>
+                </a:solidFill>
+                <a:latin typeface="Calibri"/>
+              </a:defRPr>
+            </a:pPr>
+            <a:r>
+              <a:t>8</a:t>
             </a:r>
           </a:p>
         </p:txBody>
@@ -8229,22 +8229,58 @@
         </p:nvSpPr>
         <p:spPr>
           <a:xfrm>
-            <a:off x="1737360" y="2103120"/>
-            <a:ext cx="9326880" cy="365760"/>
-          </a:xfrm>
-          <a:prstGeom prst="rect">
-            <a:avLst/>
-          </a:prstGeom>
-          <a:noFill/>
-        </p:spPr>
-        <p:txBody>
-          <a:bodyPr wrap="square">
-            <a:spAutoFit/>
-          </a:bodyPr>
-          <a:lstStyle/>
-          <a:p>
-            <a:pPr algn="l">
-              <a:defRPr sz="1600" b="1" i="0">
+            <a:off x="1097280" y="2651760"/>
+            <a:ext cx="9966960" cy="365760"/>
+          </a:xfrm>
+          <a:prstGeom prst="rect">
+            <a:avLst/>
+          </a:prstGeom>
+          <a:noFill/>
+        </p:spPr>
+        <p:txBody>
+          <a:bodyPr wrap="square">
+            <a:spAutoFit/>
+          </a:bodyPr>
+          <a:lstStyle/>
+          <a:p>
+            <a:pPr algn="l">
+              <a:defRPr sz="1400" b="0" i="0">
+                <a:solidFill>
+                  <a:srgbClr val="E2E2EA"/>
+                </a:solidFill>
+                <a:latin typeface="Calibri"/>
+              </a:defRPr>
+            </a:pPr>
+            <a:r>
+              <a:t>from Alexandr Zhitlukhin</a:t>
+            </a:r>
+          </a:p>
+        </p:txBody>
+      </p:sp>
+      <p:sp>
+        <p:nvSpPr>
+          <p:cNvPr id="7" name="TextBox 6"/>
+          <p:cNvSpPr txBox="1"/>
+          <p:nvPr/>
+        </p:nvSpPr>
+        <p:spPr>
+          <a:xfrm>
+            <a:off x="1097280" y="3108960"/>
+            <a:ext cx="9966960" cy="365760"/>
+          </a:xfrm>
+          <a:prstGeom prst="rect">
+            <a:avLst/>
+          </a:prstGeom>
+          <a:noFill/>
+        </p:spPr>
+        <p:txBody>
+          <a:bodyPr wrap="square">
+            <a:spAutoFit/>
+          </a:bodyPr>
+          <a:lstStyle/>
+          <a:p>
+            <a:pPr algn="l">
+              <a:defRPr sz="1400" b="1" i="0">
                 <a:solidFill>
                   <a:srgbClr val="FFFFFF"/>
                 </a:solidFill>
@@ -8252,35 +8288,35 @@
               </a:defRPr>
             </a:pPr>
             <a:r>
-              <a:t>The Speaking Coach: Communication Mastery</a:t>
-            </a:r>
-          </a:p>
-        </p:txBody>
-      </p:sp>
-      <p:sp>
-        <p:nvSpPr>
-          <p:cNvPr id="7" name="TextBox 6"/>
-          <p:cNvSpPr txBox="1"/>
-          <p:nvPr/>
-        </p:nvSpPr>
-        <p:spPr>
-          <a:xfrm>
-            <a:off x="1737360" y="2423160"/>
-            <a:ext cx="9326880" cy="365760"/>
-          </a:xfrm>
-          <a:prstGeom prst="rect">
-            <a:avLst/>
-          </a:prstGeom>
-          <a:noFill/>
-        </p:spPr>
-        <p:txBody>
-          <a:bodyPr wrap="square">
-            <a:spAutoFit/>
-          </a:bodyPr>
-          <a:lstStyle/>
-          <a:p>
-            <a:pPr algn="l">
-              <a:defRPr sz="1200" b="0" i="0">
+              <a:t>to: ArtKip, Taha, Agustin, Francesco, Alessandro, Anna Timoshenko</a:t>
+            </a:r>
+          </a:p>
+        </p:txBody>
+      </p:sp>
+      <p:sp>
+        <p:nvSpPr>
+          <p:cNvPr id="8" name="TextBox 7"/>
+          <p:cNvSpPr txBox="1"/>
+          <p:nvPr/>
+        </p:nvSpPr>
+        <p:spPr>
+          <a:xfrm>
+            <a:off x="1097280" y="3749039"/>
+            <a:ext cx="9966960" cy="1097280"/>
+          </a:xfrm>
+          <a:prstGeom prst="rect">
+            <a:avLst/>
+          </a:prstGeom>
+          <a:noFill/>
+        </p:spPr>
+        <p:txBody>
+          <a:bodyPr wrap="square">
+            <a:spAutoFit/>
+          </a:bodyPr>
+          <a:lstStyle/>
+          <a:p>
+            <a:pPr algn="l">
+              <a:defRPr sz="1500" b="0" i="1">
                 <a:solidFill>
                   <a:srgbClr val="E2E2EA"/>
                 </a:solidFill>
@@ -8288,43 +8324,7 @@
               </a:defRPr>
             </a:pPr>
             <a:r>
-              <a:t>Essential insights on powerful communication and avoiding weak language patterns</a:t>
-            </a:r>
-          </a:p>
-        </p:txBody>
-      </p:sp>
-      <p:sp>
-        <p:nvSpPr>
-          <p:cNvPr id="8" name="TextBox 7"/>
-          <p:cNvSpPr txBox="1"/>
-          <p:nvPr/>
-        </p:nvSpPr>
-        <p:spPr>
-          <a:xfrm>
-            <a:off x="1737360" y="2743200"/>
-            <a:ext cx="9326880" cy="274320"/>
-          </a:xfrm>
-          <a:prstGeom prst="rect">
-            <a:avLst/>
-          </a:prstGeom>
-          <a:noFill/>
-        </p:spPr>
-        <p:txBody>
-          <a:bodyPr wrap="square">
-            <a:spAutoFit/>
-          </a:bodyPr>
-          <a:lstStyle/>
-          <a:p>
-            <a:pPr algn="l">
-              <a:defRPr sz="1100" b="0" i="0">
-                <a:solidFill>
-                  <a:srgbClr val="8F95A3"/>
-                </a:solidFill>
-                <a:latin typeface="Calibri"/>
-              </a:defRPr>
-            </a:pPr>
-            <a:r>
-              <a:t>Shared by Maria Plendukova · 2</a:t>
+              <a:t>"Amazing teamwork and collaboration across multiple areas"</a:t>
             </a:r>
           </a:p>
         </p:txBody>
@@ -8337,30 +8337,30 @@
         </p:nvSpPr>
         <p:spPr>
           <a:xfrm>
-            <a:off x="1097280" y="5943600"/>
-            <a:ext cx="9966960" cy="274320"/>
-          </a:xfrm>
-          <a:prstGeom prst="rect">
-            <a:avLst/>
-          </a:prstGeom>
-          <a:noFill/>
-        </p:spPr>
-        <p:txBody>
-          <a:bodyPr wrap="square">
-            <a:spAutoFit/>
-          </a:bodyPr>
-          <a:lstStyle/>
-          <a:p>
-            <a:pPr algn="l">
-              <a:defRPr sz="1100" b="0" i="0">
-                <a:solidFill>
-                  <a:srgbClr val="5C6270"/>
-                </a:solidFill>
-                <a:latin typeface="Calibri"/>
-              </a:defRPr>
-            </a:pPr>
-            <a:r>
-              <a:t>#general-chat</a:t>
+            <a:off x="1097280" y="5120640"/>
+            <a:ext cx="9966960" cy="457200"/>
+          </a:xfrm>
+          <a:prstGeom prst="rect">
+            <a:avLst/>
+          </a:prstGeom>
+          <a:noFill/>
+        </p:spPr>
+        <p:txBody>
+          <a:bodyPr wrap="square">
+            <a:spAutoFit/>
+          </a:bodyPr>
+          <a:lstStyle/>
+          <a:p>
+            <a:pPr algn="l">
+              <a:defRPr sz="1200" b="1" i="0">
+                <a:solidFill>
+                  <a:srgbClr val="E67E22"/>
+                </a:solidFill>
+                <a:latin typeface="Calibri"/>
+              </a:defRPr>
+            </a:pPr>
+            <a:r>
+              <a:t>TOGETHER · SERVE OTHERS</a:t>
             </a:r>
           </a:p>
         </p:txBody>
@@ -8406,7 +8406,7 @@
             <a:avLst/>
           </a:prstGeom>
           <a:solidFill>
-            <a:srgbClr val="8E44AD"/>
+            <a:srgbClr val="27AE60"/>
           </a:solidFill>
           <a:ln>
             <a:noFill/>
@@ -8459,13 +8459,13 @@
             <a:pPr algn="l">
               <a:defRPr sz="1000" b="1">
                 <a:solidFill>
-                  <a:srgbClr val="8E44AD"/>
-                </a:solidFill>
-                <a:latin typeface="Calibri"/>
-              </a:defRPr>
-            </a:pPr>
-            <a:r>
-              <a:t>📖  WEEKLY RITUAL</a:t>
+                  <a:srgbClr val="27AE60"/>
+                </a:solidFill>
+                <a:latin typeface="Calibri"/>
+              </a:defRPr>
+            </a:pPr>
+            <a:r>
+              <a:t>🎯  CLAPS</a:t>
             </a:r>
           </a:p>
         </p:txBody>
@@ -8495,13 +8495,13 @@
             <a:pPr algn="l">
               <a:defRPr sz="3200" b="1" i="0">
                 <a:solidFill>
-                  <a:srgbClr val="8E44AD"/>
-                </a:solidFill>
-                <a:latin typeface="Calibri"/>
-              </a:defRPr>
-            </a:pPr>
-            <a:r>
-              <a:t>Reading Club Launch</a:t>
+                  <a:srgbClr val="27AE60"/>
+                </a:solidFill>
+                <a:latin typeface="Calibri"/>
+              </a:defRPr>
+            </a:pPr>
+            <a:r>
+              <a:t>Outstanding Performance</a:t>
             </a:r>
           </a:p>
         </p:txBody>
@@ -8515,6 +8515,150 @@
         <p:spPr>
           <a:xfrm>
             <a:off x="1097280" y="2103120"/>
+            <a:ext cx="2743200" cy="548640"/>
+          </a:xfrm>
+          <a:prstGeom prst="rect">
+            <a:avLst/>
+          </a:prstGeom>
+          <a:noFill/>
+        </p:spPr>
+        <p:txBody>
+          <a:bodyPr wrap="square">
+            <a:spAutoFit/>
+          </a:bodyPr>
+          <a:lstStyle/>
+          <a:p>
+            <a:pPr algn="l">
+              <a:defRPr sz="2800" b="1" i="0">
+                <a:solidFill>
+                  <a:srgbClr val="27AE60"/>
+                </a:solidFill>
+                <a:latin typeface="Calibri"/>
+              </a:defRPr>
+            </a:pPr>
+            <a:r>
+              <a:t>40</a:t>
+            </a:r>
+          </a:p>
+        </p:txBody>
+      </p:sp>
+      <p:sp>
+        <p:nvSpPr>
+          <p:cNvPr id="6" name="TextBox 5"/>
+          <p:cNvSpPr txBox="1"/>
+          <p:nvPr/>
+        </p:nvSpPr>
+        <p:spPr>
+          <a:xfrm>
+            <a:off x="1097280" y="2651760"/>
+            <a:ext cx="9966960" cy="365760"/>
+          </a:xfrm>
+          <a:prstGeom prst="rect">
+            <a:avLst/>
+          </a:prstGeom>
+          <a:noFill/>
+        </p:spPr>
+        <p:txBody>
+          <a:bodyPr wrap="square">
+            <a:spAutoFit/>
+          </a:bodyPr>
+          <a:lstStyle/>
+          <a:p>
+            <a:pPr algn="l">
+              <a:defRPr sz="1400" b="0" i="0">
+                <a:solidFill>
+                  <a:srgbClr val="E2E2EA"/>
+                </a:solidFill>
+                <a:latin typeface="Calibri"/>
+              </a:defRPr>
+            </a:pPr>
+            <a:r>
+              <a:t>from Anastasia Sokolova</a:t>
+            </a:r>
+          </a:p>
+        </p:txBody>
+      </p:sp>
+      <p:sp>
+        <p:nvSpPr>
+          <p:cNvPr id="7" name="TextBox 6"/>
+          <p:cNvSpPr txBox="1"/>
+          <p:nvPr/>
+        </p:nvSpPr>
+        <p:spPr>
+          <a:xfrm>
+            <a:off x="1097280" y="3108960"/>
+            <a:ext cx="9966960" cy="365760"/>
+          </a:xfrm>
+          <a:prstGeom prst="rect">
+            <a:avLst/>
+          </a:prstGeom>
+          <a:noFill/>
+        </p:spPr>
+        <p:txBody>
+          <a:bodyPr wrap="square">
+            <a:spAutoFit/>
+          </a:bodyPr>
+          <a:lstStyle/>
+          <a:p>
+            <a:pPr algn="l">
+              <a:defRPr sz="1400" b="1" i="0">
+                <a:solidFill>
+                  <a:srgbClr val="FFFFFF"/>
+                </a:solidFill>
+                <a:latin typeface="Calibri"/>
+              </a:defRPr>
+            </a:pPr>
+            <a:r>
+              <a:t>to: Sasha Sakovich</a:t>
+            </a:r>
+          </a:p>
+        </p:txBody>
+      </p:sp>
+      <p:sp>
+        <p:nvSpPr>
+          <p:cNvPr id="8" name="TextBox 7"/>
+          <p:cNvSpPr txBox="1"/>
+          <p:nvPr/>
+        </p:nvSpPr>
+        <p:spPr>
+          <a:xfrm>
+            <a:off x="1097280" y="3749039"/>
+            <a:ext cx="9966960" cy="1097280"/>
+          </a:xfrm>
+          <a:prstGeom prst="rect">
+            <a:avLst/>
+          </a:prstGeom>
+          <a:noFill/>
+        </p:spPr>
+        <p:txBody>
+          <a:bodyPr wrap="square">
+            <a:spAutoFit/>
+          </a:bodyPr>
+          <a:lstStyle/>
+          <a:p>
+            <a:pPr algn="l">
+              <a:defRPr sz="1500" b="0" i="1">
+                <a:solidFill>
+                  <a:srgbClr val="E2E2EA"/>
+                </a:solidFill>
+                <a:latin typeface="Calibri"/>
+              </a:defRPr>
+            </a:pPr>
+            <a:r>
+              <a:t>"Exceptional work that deserved recognition"</a:t>
+            </a:r>
+          </a:p>
+        </p:txBody>
+      </p:sp>
+      <p:sp>
+        <p:nvSpPr>
+          <p:cNvPr id="9" name="TextBox 8"/>
+          <p:cNvSpPr txBox="1"/>
+          <p:nvPr/>
+        </p:nvSpPr>
+        <p:spPr>
+          <a:xfrm>
+            <a:off x="1097280" y="5120640"/>
             <a:ext cx="9966960" cy="457200"/>
           </a:xfrm>
           <a:prstGeom prst="rect">
@@ -8529,159 +8673,15 @@
           <a:lstStyle/>
           <a:p>
             <a:pPr algn="l">
-              <a:defRPr sz="1800" b="1" i="0">
-                <a:solidFill>
-                  <a:srgbClr val="FFFFFF"/>
-                </a:solidFill>
-                <a:latin typeface="Calibri"/>
-              </a:defRPr>
-            </a:pPr>
-            <a:r>
-              <a:t>The 4 Disciplines of Execution</a:t>
-            </a:r>
-          </a:p>
-        </p:txBody>
-      </p:sp>
-      <p:sp>
-        <p:nvSpPr>
-          <p:cNvPr id="6" name="TextBox 5"/>
-          <p:cNvSpPr txBox="1"/>
-          <p:nvPr/>
-        </p:nvSpPr>
-        <p:spPr>
-          <a:xfrm>
-            <a:off x="1371600" y="2926080"/>
-            <a:ext cx="9418320" cy="548640"/>
-          </a:xfrm>
-          <a:prstGeom prst="rect">
-            <a:avLst/>
-          </a:prstGeom>
-          <a:noFill/>
-        </p:spPr>
-        <p:txBody>
-          <a:bodyPr wrap="square">
-            <a:spAutoFit/>
-          </a:bodyPr>
-          <a:lstStyle/>
-          <a:p>
-            <a:pPr algn="l">
-              <a:defRPr sz="1400" b="0" i="0">
-                <a:solidFill>
-                  <a:srgbClr val="E2E2EA"/>
-                </a:solidFill>
-                <a:latin typeface="Calibri"/>
-              </a:defRPr>
-            </a:pPr>
-            <a:r>
-              <a:t>Join Anna's new reading club</a:t>
-            </a:r>
-          </a:p>
-        </p:txBody>
-      </p:sp>
-      <p:sp>
-        <p:nvSpPr>
-          <p:cNvPr id="7" name="TextBox 6"/>
-          <p:cNvSpPr txBox="1"/>
-          <p:nvPr/>
-        </p:nvSpPr>
-        <p:spPr>
-          <a:xfrm>
-            <a:off x="1371600" y="3657600"/>
-            <a:ext cx="9418320" cy="548640"/>
-          </a:xfrm>
-          <a:prstGeom prst="rect">
-            <a:avLst/>
-          </a:prstGeom>
-          <a:noFill/>
-        </p:spPr>
-        <p:txBody>
-          <a:bodyPr wrap="square">
-            <a:spAutoFit/>
-          </a:bodyPr>
-          <a:lstStyle/>
-          <a:p>
-            <a:pPr algn="l">
-              <a:defRPr sz="1400" b="0" i="0">
-                <a:solidFill>
-                  <a:srgbClr val="E2E2EA"/>
-                </a:solidFill>
-                <a:latin typeface="Calibri"/>
-              </a:defRPr>
-            </a:pPr>
-            <a:r>
-              <a:t>Focus on execution excellence this quarter</a:t>
-            </a:r>
-          </a:p>
-        </p:txBody>
-      </p:sp>
-      <p:sp>
-        <p:nvSpPr>
-          <p:cNvPr id="8" name="TextBox 7"/>
-          <p:cNvSpPr txBox="1"/>
-          <p:nvPr/>
-        </p:nvSpPr>
-        <p:spPr>
-          <a:xfrm>
-            <a:off x="1097280" y="4754880"/>
-            <a:ext cx="9966960" cy="731520"/>
-          </a:xfrm>
-          <a:prstGeom prst="rect">
-            <a:avLst/>
-          </a:prstGeom>
-          <a:noFill/>
-        </p:spPr>
-        <p:txBody>
-          <a:bodyPr wrap="square">
-            <a:spAutoFit/>
-          </a:bodyPr>
-          <a:lstStyle/>
-          <a:p>
-            <a:pPr algn="l">
-              <a:defRPr sz="1500" b="0" i="1">
-                <a:solidFill>
-                  <a:srgbClr val="E2E2EA"/>
-                </a:solidFill>
-                <a:latin typeface="Calibri"/>
-              </a:defRPr>
-            </a:pPr>
-            <a:r>
-              <a:t>CONTINUOUS LEARNING</a:t>
-            </a:r>
-          </a:p>
-        </p:txBody>
-      </p:sp>
-      <p:sp>
-        <p:nvSpPr>
-          <p:cNvPr id="9" name="TextBox 8"/>
-          <p:cNvSpPr txBox="1"/>
-          <p:nvPr/>
-        </p:nvSpPr>
-        <p:spPr>
-          <a:xfrm>
-            <a:off x="1097280" y="5760720"/>
-            <a:ext cx="9966960" cy="274320"/>
-          </a:xfrm>
-          <a:prstGeom prst="rect">
-            <a:avLst/>
-          </a:prstGeom>
-          <a:noFill/>
-        </p:spPr>
-        <p:txBody>
-          <a:bodyPr wrap="square">
-            <a:spAutoFit/>
-          </a:bodyPr>
-          <a:lstStyle/>
-          <a:p>
-            <a:pPr algn="l">
-              <a:defRPr sz="1100" b="0" i="0">
-                <a:solidFill>
-                  <a:srgbClr val="5C6270"/>
-                </a:solidFill>
-                <a:latin typeface="Calibri"/>
-              </a:defRPr>
-            </a:pPr>
-            <a:r>
-              <a:t>#general</a:t>
+              <a:defRPr sz="1200" b="1" i="0">
+                <a:solidFill>
+                  <a:srgbClr val="27AE60"/>
+                </a:solidFill>
+                <a:latin typeface="Calibri"/>
+              </a:defRPr>
+            </a:pPr>
+            <a:r>
+              <a:t>EXCELLENCE · DELIVER</a:t>
             </a:r>
           </a:p>
         </p:txBody>
@@ -8786,7 +8786,7 @@
               </a:defRPr>
             </a:pPr>
             <a:r>
-              <a:t>🎯  CLAPS</a:t>
+              <a:t>🌟  CLAPS</a:t>
             </a:r>
           </a:p>
         </p:txBody>
@@ -8822,7 +8822,7 @@
               </a:defRPr>
             </a:pPr>
             <a:r>
-              <a:t>Team Collaboration</a:t>
+              <a:t>DevOps Hero</a:t>
             </a:r>
           </a:p>
         </p:txBody>
@@ -8858,7 +8858,7 @@
               </a:defRPr>
             </a:pPr>
             <a:r>
-              <a:t>40</a:t>
+              <a:t>30</a:t>
             </a:r>
           </a:p>
         </p:txBody>
@@ -8894,7 +8894,7 @@
               </a:defRPr>
             </a:pPr>
             <a:r>
-              <a:t>from Anastasia Sokolova</a:t>
+              <a:t>from Gleb Krahotkin</a:t>
             </a:r>
           </a:p>
         </p:txBody>
@@ -8930,7 +8930,7 @@
               </a:defRPr>
             </a:pPr>
             <a:r>
-              <a:t>to: Sasha Sakovich</a:t>
+              <a:t>to: Hierman Pelekh</a:t>
             </a:r>
           </a:p>
         </p:txBody>
@@ -8966,7 +8966,7 @@
               </a:defRPr>
             </a:pPr>
             <a:r>
-              <a:t>"Outstanding teamwork and results delivery"</a:t>
+              <a:t>"Outstanding technical contribution to our infrastructure"</a:t>
             </a:r>
           </a:p>
         </p:txBody>
@@ -9002,7 +9002,7 @@
               </a:defRPr>
             </a:pPr>
             <a:r>
-              <a:t>TEAMWORK · RESULTS</a:t>
+              <a:t>INNOVATION · SERVE OTHERS</a:t>
             </a:r>
           </a:p>
         </p:txBody>

--- a/data/archive/pulse_2026-03-12.pptx
+++ b/data/archive/pulse_2026-03-12.pptx
@@ -23,7 +23,6 @@
     <p:sldId id="271" r:id="rId22"/>
     <p:sldId id="272" r:id="rId23"/>
     <p:sldId id="273" r:id="rId24"/>
-    <p:sldId id="274" r:id="rId25"/>
   </p:sldIdLst>
   <p:sldSz cx="12191695" cy="6858000" type="screen4x3"/>
   <p:notesSz cx="6858000" cy="9144000"/>
@@ -3306,7 +3305,7 @@
             <a:avLst/>
           </a:prstGeom>
           <a:solidFill>
-            <a:srgbClr val="9B59B6"/>
+            <a:srgbClr val="00B894"/>
           </a:solidFill>
           <a:ln>
             <a:noFill/>
@@ -3359,13 +3358,13 @@
             <a:pPr algn="l">
               <a:defRPr sz="1000" b="1">
                 <a:solidFill>
-                  <a:srgbClr val="9B59B6"/>
-                </a:solidFill>
-                <a:latin typeface="Calibri"/>
-              </a:defRPr>
-            </a:pPr>
-            <a:r>
-              <a:t>📚  RECOMMENDED</a:t>
+                  <a:srgbClr val="00B894"/>
+                </a:solidFill>
+                <a:latin typeface="Calibri"/>
+              </a:defRPr>
+            </a:pPr>
+            <a:r>
+              <a:t>🚀  CLAPS</a:t>
             </a:r>
           </a:p>
         </p:txBody>
@@ -3395,13 +3394,13 @@
             <a:pPr algn="l">
               <a:defRPr sz="3200" b="1" i="0">
                 <a:solidFill>
-                  <a:srgbClr val="9B59B6"/>
-                </a:solidFill>
-                <a:latin typeface="Calibri"/>
-              </a:defRPr>
-            </a:pPr>
-            <a:r>
-              <a:t>Knowledge Sharing</a:t>
+                  <a:srgbClr val="00B894"/>
+                </a:solidFill>
+                <a:latin typeface="Calibri"/>
+              </a:defRPr>
+            </a:pPr>
+            <a:r>
+              <a:t>Team Collaboration</a:t>
             </a:r>
           </a:p>
         </p:txBody>
@@ -3415,29 +3414,29 @@
         <p:spPr>
           <a:xfrm>
             <a:off x="1097280" y="2103120"/>
-            <a:ext cx="457200" cy="365760"/>
-          </a:xfrm>
-          <a:prstGeom prst="rect">
-            <a:avLst/>
-          </a:prstGeom>
-          <a:noFill/>
-        </p:spPr>
-        <p:txBody>
-          <a:bodyPr wrap="square">
-            <a:spAutoFit/>
-          </a:bodyPr>
-          <a:lstStyle/>
-          <a:p>
-            <a:pPr algn="l">
-              <a:defRPr sz="2200" b="1" i="0">
-                <a:solidFill>
-                  <a:srgbClr val="9B59B6"/>
-                </a:solidFill>
-                <a:latin typeface="Calibri"/>
-              </a:defRPr>
-            </a:pPr>
-            <a:r>
-              <a:t>01</a:t>
+            <a:ext cx="2743200" cy="548640"/>
+          </a:xfrm>
+          <a:prstGeom prst="rect">
+            <a:avLst/>
+          </a:prstGeom>
+          <a:noFill/>
+        </p:spPr>
+        <p:txBody>
+          <a:bodyPr wrap="square">
+            <a:spAutoFit/>
+          </a:bodyPr>
+          <a:lstStyle/>
+          <a:p>
+            <a:pPr algn="l">
+              <a:defRPr sz="2800" b="1" i="0">
+                <a:solidFill>
+                  <a:srgbClr val="00B894"/>
+                </a:solidFill>
+                <a:latin typeface="Calibri"/>
+              </a:defRPr>
+            </a:pPr>
+            <a:r>
+              <a:t>25</a:t>
             </a:r>
           </a:p>
         </p:txBody>
@@ -3450,22 +3449,58 @@
         </p:nvSpPr>
         <p:spPr>
           <a:xfrm>
-            <a:off x="1737360" y="2103120"/>
-            <a:ext cx="9326880" cy="365760"/>
-          </a:xfrm>
-          <a:prstGeom prst="rect">
-            <a:avLst/>
-          </a:prstGeom>
-          <a:noFill/>
-        </p:spPr>
-        <p:txBody>
-          <a:bodyPr wrap="square">
-            <a:spAutoFit/>
-          </a:bodyPr>
-          <a:lstStyle/>
-          <a:p>
-            <a:pPr algn="l">
-              <a:defRPr sz="1600" b="1" i="0">
+            <a:off x="1097280" y="2651760"/>
+            <a:ext cx="9966960" cy="365760"/>
+          </a:xfrm>
+          <a:prstGeom prst="rect">
+            <a:avLst/>
+          </a:prstGeom>
+          <a:noFill/>
+        </p:spPr>
+        <p:txBody>
+          <a:bodyPr wrap="square">
+            <a:spAutoFit/>
+          </a:bodyPr>
+          <a:lstStyle/>
+          <a:p>
+            <a:pPr algn="l">
+              <a:defRPr sz="1400" b="0" i="0">
+                <a:solidFill>
+                  <a:srgbClr val="E2E2EA"/>
+                </a:solidFill>
+                <a:latin typeface="Calibri"/>
+              </a:defRPr>
+            </a:pPr>
+            <a:r>
+              <a:t>from Roman Rinchinov</a:t>
+            </a:r>
+          </a:p>
+        </p:txBody>
+      </p:sp>
+      <p:sp>
+        <p:nvSpPr>
+          <p:cNvPr id="7" name="TextBox 6"/>
+          <p:cNvSpPr txBox="1"/>
+          <p:nvPr/>
+        </p:nvSpPr>
+        <p:spPr>
+          <a:xfrm>
+            <a:off x="1097280" y="3108960"/>
+            <a:ext cx="9966960" cy="365760"/>
+          </a:xfrm>
+          <a:prstGeom prst="rect">
+            <a:avLst/>
+          </a:prstGeom>
+          <a:noFill/>
+        </p:spPr>
+        <p:txBody>
+          <a:bodyPr wrap="square">
+            <a:spAutoFit/>
+          </a:bodyPr>
+          <a:lstStyle/>
+          <a:p>
+            <a:pPr algn="l">
+              <a:defRPr sz="1400" b="1" i="0">
                 <a:solidFill>
                   <a:srgbClr val="FFFFFF"/>
                 </a:solidFill>
@@ -3473,35 +3508,35 @@
               </a:defRPr>
             </a:pPr>
             <a:r>
-              <a:t>The Speaking Coach: Stop Saying This Word!</a:t>
-            </a:r>
-          </a:p>
-        </p:txBody>
-      </p:sp>
-      <p:sp>
-        <p:nvSpPr>
-          <p:cNvPr id="7" name="TextBox 6"/>
-          <p:cNvSpPr txBox="1"/>
-          <p:nvPr/>
-        </p:nvSpPr>
-        <p:spPr>
-          <a:xfrm>
-            <a:off x="1737360" y="2423160"/>
-            <a:ext cx="9326880" cy="365760"/>
-          </a:xfrm>
-          <a:prstGeom prst="rect">
-            <a:avLst/>
-          </a:prstGeom>
-          <a:noFill/>
-        </p:spPr>
-        <p:txBody>
-          <a:bodyPr wrap="square">
-            <a:spAutoFit/>
-          </a:bodyPr>
-          <a:lstStyle/>
-          <a:p>
-            <a:pPr algn="l">
-              <a:defRPr sz="1200" b="0" i="0">
+              <a:t>to: Vasyl Plesiuk</a:t>
+            </a:r>
+          </a:p>
+        </p:txBody>
+      </p:sp>
+      <p:sp>
+        <p:nvSpPr>
+          <p:cNvPr id="8" name="TextBox 7"/>
+          <p:cNvSpPr txBox="1"/>
+          <p:nvPr/>
+        </p:nvSpPr>
+        <p:spPr>
+          <a:xfrm>
+            <a:off x="1097280" y="3749039"/>
+            <a:ext cx="9966960" cy="1097280"/>
+          </a:xfrm>
+          <a:prstGeom prst="rect">
+            <a:avLst/>
+          </a:prstGeom>
+          <a:noFill/>
+        </p:spPr>
+        <p:txBody>
+          <a:bodyPr wrap="square">
+            <a:spAutoFit/>
+          </a:bodyPr>
+          <a:lstStyle/>
+          <a:p>
+            <a:pPr algn="l">
+              <a:defRPr sz="1500" b="0" i="1">
                 <a:solidFill>
                   <a:srgbClr val="E2E2EA"/>
                 </a:solidFill>
@@ -3509,43 +3544,7 @@
               </a:defRPr>
             </a:pPr>
             <a:r>
-              <a:t>Genuinely great content on communication skills</a:t>
-            </a:r>
-          </a:p>
-        </p:txBody>
-      </p:sp>
-      <p:sp>
-        <p:nvSpPr>
-          <p:cNvPr id="8" name="TextBox 7"/>
-          <p:cNvSpPr txBox="1"/>
-          <p:nvPr/>
-        </p:nvSpPr>
-        <p:spPr>
-          <a:xfrm>
-            <a:off x="1737360" y="2743200"/>
-            <a:ext cx="9326880" cy="274320"/>
-          </a:xfrm>
-          <a:prstGeom prst="rect">
-            <a:avLst/>
-          </a:prstGeom>
-          <a:noFill/>
-        </p:spPr>
-        <p:txBody>
-          <a:bodyPr wrap="square">
-            <a:spAutoFit/>
-          </a:bodyPr>
-          <a:lstStyle/>
-          <a:p>
-            <a:pPr algn="l">
-              <a:defRPr sz="1100" b="0" i="0">
-                <a:solidFill>
-                  <a:srgbClr val="8F95A3"/>
-                </a:solidFill>
-                <a:latin typeface="Calibri"/>
-              </a:defRPr>
-            </a:pPr>
-            <a:r>
-              <a:t>Shared by Maria Plendukova · 💛</a:t>
+              <a:t>"Excellent teamwork and collaborative spirit"</a:t>
             </a:r>
           </a:p>
         </p:txBody>
@@ -3558,30 +3557,30 @@
         </p:nvSpPr>
         <p:spPr>
           <a:xfrm>
-            <a:off x="1097280" y="5943600"/>
-            <a:ext cx="9966960" cy="274320"/>
-          </a:xfrm>
-          <a:prstGeom prst="rect">
-            <a:avLst/>
-          </a:prstGeom>
-          <a:noFill/>
-        </p:spPr>
-        <p:txBody>
-          <a:bodyPr wrap="square">
-            <a:spAutoFit/>
-          </a:bodyPr>
-          <a:lstStyle/>
-          <a:p>
-            <a:pPr algn="l">
-              <a:defRPr sz="1100" b="0" i="0">
-                <a:solidFill>
-                  <a:srgbClr val="5C6270"/>
-                </a:solidFill>
-                <a:latin typeface="Calibri"/>
-              </a:defRPr>
-            </a:pPr>
-            <a:r>
-              <a:t>#general-chat</a:t>
+            <a:off x="1097280" y="5120640"/>
+            <a:ext cx="9966960" cy="457200"/>
+          </a:xfrm>
+          <a:prstGeom prst="rect">
+            <a:avLst/>
+          </a:prstGeom>
+          <a:noFill/>
+        </p:spPr>
+        <p:txBody>
+          <a:bodyPr wrap="square">
+            <a:spAutoFit/>
+          </a:bodyPr>
+          <a:lstStyle/>
+          <a:p>
+            <a:pPr algn="l">
+              <a:defRPr sz="1200" b="1" i="0">
+                <a:solidFill>
+                  <a:srgbClr val="00B894"/>
+                </a:solidFill>
+                <a:latin typeface="Calibri"/>
+              </a:defRPr>
+            </a:pPr>
+            <a:r>
+              <a:t>We work TOGETHER · Team Excellence</a:t>
             </a:r>
           </a:p>
         </p:txBody>
@@ -3627,7 +3626,7 @@
             <a:avLst/>
           </a:prstGeom>
           <a:solidFill>
-            <a:srgbClr val="27AE60"/>
+            <a:srgbClr val="FDCB6E"/>
           </a:solidFill>
           <a:ln>
             <a:noFill/>
@@ -3680,13 +3679,13 @@
             <a:pPr algn="l">
               <a:defRPr sz="1000" b="1">
                 <a:solidFill>
-                  <a:srgbClr val="27AE60"/>
-                </a:solidFill>
-                <a:latin typeface="Calibri"/>
-              </a:defRPr>
-            </a:pPr>
-            <a:r>
-              <a:t>📖  OFFICE LIFE</a:t>
+                  <a:srgbClr val="FDCB6E"/>
+                </a:solidFill>
+                <a:latin typeface="Calibri"/>
+              </a:defRPr>
+            </a:pPr>
+            <a:r>
+              <a:t>⭐  CLAPS</a:t>
             </a:r>
           </a:p>
         </p:txBody>
@@ -3716,13 +3715,13 @@
             <a:pPr algn="l">
               <a:defRPr sz="3200" b="1" i="0">
                 <a:solidFill>
-                  <a:srgbClr val="27AE60"/>
-                </a:solidFill>
-                <a:latin typeface="Calibri"/>
-              </a:defRPr>
-            </a:pPr>
-            <a:r>
-              <a:t>Book Club Launch</a:t>
+                  <a:srgbClr val="FDCB6E"/>
+                </a:solidFill>
+                <a:latin typeface="Calibri"/>
+              </a:defRPr>
+            </a:pPr>
+            <a:r>
+              <a:t>Creative Team Power</a:t>
             </a:r>
           </a:p>
         </p:txBody>
@@ -3736,6 +3735,150 @@
         <p:spPr>
           <a:xfrm>
             <a:off x="1097280" y="2103120"/>
+            <a:ext cx="2743200" cy="548640"/>
+          </a:xfrm>
+          <a:prstGeom prst="rect">
+            <a:avLst/>
+          </a:prstGeom>
+          <a:noFill/>
+        </p:spPr>
+        <p:txBody>
+          <a:bodyPr wrap="square">
+            <a:spAutoFit/>
+          </a:bodyPr>
+          <a:lstStyle/>
+          <a:p>
+            <a:pPr algn="l">
+              <a:defRPr sz="2800" b="1" i="0">
+                <a:solidFill>
+                  <a:srgbClr val="FDCB6E"/>
+                </a:solidFill>
+                <a:latin typeface="Calibri"/>
+              </a:defRPr>
+            </a:pPr>
+            <a:r>
+              <a:t>8</a:t>
+            </a:r>
+          </a:p>
+        </p:txBody>
+      </p:sp>
+      <p:sp>
+        <p:nvSpPr>
+          <p:cNvPr id="6" name="TextBox 5"/>
+          <p:cNvSpPr txBox="1"/>
+          <p:nvPr/>
+        </p:nvSpPr>
+        <p:spPr>
+          <a:xfrm>
+            <a:off x="1097280" y="2651760"/>
+            <a:ext cx="9966960" cy="365760"/>
+          </a:xfrm>
+          <a:prstGeom prst="rect">
+            <a:avLst/>
+          </a:prstGeom>
+          <a:noFill/>
+        </p:spPr>
+        <p:txBody>
+          <a:bodyPr wrap="square">
+            <a:spAutoFit/>
+          </a:bodyPr>
+          <a:lstStyle/>
+          <a:p>
+            <a:pPr algn="l">
+              <a:defRPr sz="1400" b="0" i="0">
+                <a:solidFill>
+                  <a:srgbClr val="E2E2EA"/>
+                </a:solidFill>
+                <a:latin typeface="Calibri"/>
+              </a:defRPr>
+            </a:pPr>
+            <a:r>
+              <a:t>from Alexandr Zhitlukhin</a:t>
+            </a:r>
+          </a:p>
+        </p:txBody>
+      </p:sp>
+      <p:sp>
+        <p:nvSpPr>
+          <p:cNvPr id="7" name="TextBox 6"/>
+          <p:cNvSpPr txBox="1"/>
+          <p:nvPr/>
+        </p:nvSpPr>
+        <p:spPr>
+          <a:xfrm>
+            <a:off x="1097280" y="3108960"/>
+            <a:ext cx="9966960" cy="365760"/>
+          </a:xfrm>
+          <a:prstGeom prst="rect">
+            <a:avLst/>
+          </a:prstGeom>
+          <a:noFill/>
+        </p:spPr>
+        <p:txBody>
+          <a:bodyPr wrap="square">
+            <a:spAutoFit/>
+          </a:bodyPr>
+          <a:lstStyle/>
+          <a:p>
+            <a:pPr algn="l">
+              <a:defRPr sz="1400" b="1" i="0">
+                <a:solidFill>
+                  <a:srgbClr val="FFFFFF"/>
+                </a:solidFill>
+                <a:latin typeface="Calibri"/>
+              </a:defRPr>
+            </a:pPr>
+            <a:r>
+              <a:t>to: ArtKip, Taha, Agustin, Francesco, Alessandro, Anna Timoshenko</a:t>
+            </a:r>
+          </a:p>
+        </p:txBody>
+      </p:sp>
+      <p:sp>
+        <p:nvSpPr>
+          <p:cNvPr id="8" name="TextBox 7"/>
+          <p:cNvSpPr txBox="1"/>
+          <p:nvPr/>
+        </p:nvSpPr>
+        <p:spPr>
+          <a:xfrm>
+            <a:off x="1097280" y="3749039"/>
+            <a:ext cx="9966960" cy="1097280"/>
+          </a:xfrm>
+          <a:prstGeom prst="rect">
+            <a:avLst/>
+          </a:prstGeom>
+          <a:noFill/>
+        </p:spPr>
+        <p:txBody>
+          <a:bodyPr wrap="square">
+            <a:spAutoFit/>
+          </a:bodyPr>
+          <a:lstStyle/>
+          <a:p>
+            <a:pPr algn="l">
+              <a:defRPr sz="1500" b="0" i="1">
+                <a:solidFill>
+                  <a:srgbClr val="E2E2EA"/>
+                </a:solidFill>
+                <a:latin typeface="Calibri"/>
+              </a:defRPr>
+            </a:pPr>
+            <a:r>
+              <a:t>"Amazing collaborative creative work"</a:t>
+            </a:r>
+          </a:p>
+        </p:txBody>
+      </p:sp>
+      <p:sp>
+        <p:nvSpPr>
+          <p:cNvPr id="9" name="TextBox 8"/>
+          <p:cNvSpPr txBox="1"/>
+          <p:nvPr/>
+        </p:nvSpPr>
+        <p:spPr>
+          <a:xfrm>
+            <a:off x="1097280" y="5120640"/>
             <a:ext cx="9966960" cy="457200"/>
           </a:xfrm>
           <a:prstGeom prst="rect">
@@ -3750,159 +3893,15 @@
           <a:lstStyle/>
           <a:p>
             <a:pPr algn="l">
-              <a:defRPr sz="1800" b="1" i="0">
-                <a:solidFill>
-                  <a:srgbClr val="FFFFFF"/>
-                </a:solidFill>
-                <a:latin typeface="Calibri"/>
-              </a:defRPr>
-            </a:pPr>
-            <a:r>
-              <a:t>The 4 Disciplines of Execution</a:t>
-            </a:r>
-          </a:p>
-        </p:txBody>
-      </p:sp>
-      <p:sp>
-        <p:nvSpPr>
-          <p:cNvPr id="6" name="TextBox 5"/>
-          <p:cNvSpPr txBox="1"/>
-          <p:nvPr/>
-        </p:nvSpPr>
-        <p:spPr>
-          <a:xfrm>
-            <a:off x="1371600" y="2743200"/>
-            <a:ext cx="9692640" cy="1828800"/>
-          </a:xfrm>
-          <a:prstGeom prst="rect">
-            <a:avLst/>
-          </a:prstGeom>
-          <a:noFill/>
-        </p:spPr>
-        <p:txBody>
-          <a:bodyPr wrap="square">
-            <a:spAutoFit/>
-          </a:bodyPr>
-          <a:lstStyle/>
-          <a:p>
-            <a:pPr algn="l">
-              <a:defRPr sz="1500" b="0" i="1">
-                <a:solidFill>
-                  <a:srgbClr val="E2E2EA"/>
-                </a:solidFill>
-                <a:latin typeface="Calibri"/>
-              </a:defRPr>
-            </a:pPr>
-            <a:r>
-              <a:t>"This book focuses on Wildly Important Goals, Leading and Lagging Metrics, Scorecards, and Follow-through discipline"</a:t>
-            </a:r>
-          </a:p>
-        </p:txBody>
-      </p:sp>
-      <p:sp>
-        <p:nvSpPr>
-          <p:cNvPr id="7" name="TextBox 6"/>
-          <p:cNvSpPr txBox="1"/>
-          <p:nvPr/>
-        </p:nvSpPr>
-        <p:spPr>
-          <a:xfrm>
-            <a:off x="1097280" y="4754880"/>
-            <a:ext cx="9966960" cy="365760"/>
-          </a:xfrm>
-          <a:prstGeom prst="rect">
-            <a:avLst/>
-          </a:prstGeom>
-          <a:noFill/>
-        </p:spPr>
-        <p:txBody>
-          <a:bodyPr wrap="square">
-            <a:spAutoFit/>
-          </a:bodyPr>
-          <a:lstStyle/>
-          <a:p>
-            <a:pPr algn="l">
-              <a:defRPr sz="1400" b="0" i="0">
-                <a:solidFill>
-                  <a:srgbClr val="8F95A3"/>
-                </a:solidFill>
-                <a:latin typeface="Calibri"/>
-              </a:defRPr>
-            </a:pPr>
-            <a:r>
-              <a:t>— Pavel Golubev</a:t>
-            </a:r>
-          </a:p>
-        </p:txBody>
-      </p:sp>
-      <p:sp>
-        <p:nvSpPr>
-          <p:cNvPr id="8" name="TextBox 7"/>
-          <p:cNvSpPr txBox="1"/>
-          <p:nvPr/>
-        </p:nvSpPr>
-        <p:spPr>
-          <a:xfrm>
-            <a:off x="1097280" y="5212080"/>
-            <a:ext cx="9966960" cy="365760"/>
-          </a:xfrm>
-          <a:prstGeom prst="rect">
-            <a:avLst/>
-          </a:prstGeom>
-          <a:noFill/>
-        </p:spPr>
-        <p:txBody>
-          <a:bodyPr wrap="square">
-            <a:spAutoFit/>
-          </a:bodyPr>
-          <a:lstStyle/>
-          <a:p>
-            <a:pPr algn="l">
-              <a:defRPr sz="1400" b="1" i="0">
-                <a:solidFill>
-                  <a:srgbClr val="27AE60"/>
-                </a:solidFill>
-                <a:latin typeface="Calibri"/>
-              </a:defRPr>
-            </a:pPr>
-            <a:r>
-              <a:t>🧠×7</a:t>
-            </a:r>
-          </a:p>
-        </p:txBody>
-      </p:sp>
-      <p:sp>
-        <p:nvSpPr>
-          <p:cNvPr id="9" name="TextBox 8"/>
-          <p:cNvSpPr txBox="1"/>
-          <p:nvPr/>
-        </p:nvSpPr>
-        <p:spPr>
-          <a:xfrm>
-            <a:off x="1097280" y="5760720"/>
-            <a:ext cx="9966960" cy="274320"/>
-          </a:xfrm>
-          <a:prstGeom prst="rect">
-            <a:avLst/>
-          </a:prstGeom>
-          <a:noFill/>
-        </p:spPr>
-        <p:txBody>
-          <a:bodyPr wrap="square">
-            <a:spAutoFit/>
-          </a:bodyPr>
-          <a:lstStyle/>
-          <a:p>
-            <a:pPr algn="l">
-              <a:defRPr sz="1100" b="0" i="0">
-                <a:solidFill>
-                  <a:srgbClr val="5C6270"/>
-                </a:solidFill>
-                <a:latin typeface="Calibri"/>
-              </a:defRPr>
-            </a:pPr>
-            <a:r>
-              <a:t>#general</a:t>
+              <a:defRPr sz="1200" b="1" i="0">
+                <a:solidFill>
+                  <a:srgbClr val="FDCB6E"/>
+                </a:solidFill>
+                <a:latin typeface="Calibri"/>
+              </a:defRPr>
+            </a:pPr>
+            <a:r>
+              <a:t>Creativity · Teamwork · Excellence</a:t>
             </a:r>
           </a:p>
         </p:txBody>
@@ -3948,7 +3947,7 @@
             <a:avLst/>
           </a:prstGeom>
           <a:solidFill>
-            <a:srgbClr val="E74C3C"/>
+            <a:srgbClr val="A29BFE"/>
           </a:solidFill>
           <a:ln>
             <a:noFill/>
@@ -4001,13 +4000,13 @@
             <a:pPr algn="l">
               <a:defRPr sz="1000" b="1">
                 <a:solidFill>
-                  <a:srgbClr val="E74C3C"/>
-                </a:solidFill>
-                <a:latin typeface="Calibri"/>
-              </a:defRPr>
-            </a:pPr>
-            <a:r>
-              <a:t>👥  CLAPS</a:t>
+                  <a:srgbClr val="A29BFE"/>
+                </a:solidFill>
+                <a:latin typeface="Calibri"/>
+              </a:defRPr>
+            </a:pPr>
+            <a:r>
+              <a:t>💼  WIN</a:t>
             </a:r>
           </a:p>
         </p:txBody>
@@ -4037,13 +4036,13 @@
             <a:pPr algn="l">
               <a:defRPr sz="3200" b="1" i="0">
                 <a:solidFill>
-                  <a:srgbClr val="E74C3C"/>
-                </a:solidFill>
-                <a:latin typeface="Calibri"/>
-              </a:defRPr>
-            </a:pPr>
-            <a:r>
-              <a:t>Marketing Team Power</a:t>
+                  <a:srgbClr val="A29BFE"/>
+                </a:solidFill>
+                <a:latin typeface="Calibri"/>
+              </a:defRPr>
+            </a:pPr>
+            <a:r>
+              <a:t>Strategic Leadership</a:t>
             </a:r>
           </a:p>
         </p:txBody>
@@ -4057,29 +4056,29 @@
         <p:spPr>
           <a:xfrm>
             <a:off x="1097280" y="2103120"/>
-            <a:ext cx="2743200" cy="548640"/>
-          </a:xfrm>
-          <a:prstGeom prst="rect">
-            <a:avLst/>
-          </a:prstGeom>
-          <a:noFill/>
-        </p:spPr>
-        <p:txBody>
-          <a:bodyPr wrap="square">
-            <a:spAutoFit/>
-          </a:bodyPr>
-          <a:lstStyle/>
-          <a:p>
-            <a:pPr algn="l">
-              <a:defRPr sz="2800" b="1" i="0">
-                <a:solidFill>
-                  <a:srgbClr val="E74C3C"/>
-                </a:solidFill>
-                <a:latin typeface="Calibri"/>
-              </a:defRPr>
-            </a:pPr>
-            <a:r>
-              <a:t>8</a:t>
+            <a:ext cx="4572000" cy="822960"/>
+          </a:xfrm>
+          <a:prstGeom prst="rect">
+            <a:avLst/>
+          </a:prstGeom>
+          <a:noFill/>
+        </p:spPr>
+        <p:txBody>
+          <a:bodyPr wrap="square">
+            <a:spAutoFit/>
+          </a:bodyPr>
+          <a:lstStyle/>
+          <a:p>
+            <a:pPr algn="l">
+              <a:defRPr sz="4800" b="1" i="0">
+                <a:solidFill>
+                  <a:srgbClr val="A29BFE"/>
+                </a:solidFill>
+                <a:latin typeface="Calibri"/>
+              </a:defRPr>
+            </a:pPr>
+            <a:r>
+              <a:t>4</a:t>
             </a:r>
           </a:p>
         </p:txBody>
@@ -4092,7 +4091,43 @@
         </p:nvSpPr>
         <p:spPr>
           <a:xfrm>
-            <a:off x="1097280" y="2651760"/>
+            <a:off x="1097280" y="2834640"/>
+            <a:ext cx="4572000" cy="365760"/>
+          </a:xfrm>
+          <a:prstGeom prst="rect">
+            <a:avLst/>
+          </a:prstGeom>
+          <a:noFill/>
+        </p:spPr>
+        <p:txBody>
+          <a:bodyPr wrap="square">
+            <a:spAutoFit/>
+          </a:bodyPr>
+          <a:lstStyle/>
+          <a:p>
+            <a:pPr algn="l">
+              <a:defRPr sz="1200" b="0" i="0">
+                <a:solidFill>
+                  <a:srgbClr val="8F95A3"/>
+                </a:solidFill>
+                <a:latin typeface="Calibri"/>
+              </a:defRPr>
+            </a:pPr>
+            <a:r>
+              <a:t>core concepts</a:t>
+            </a:r>
+          </a:p>
+        </p:txBody>
+      </p:sp>
+      <p:sp>
+        <p:nvSpPr>
+          <p:cNvPr id="7" name="TextBox 6"/>
+          <p:cNvSpPr txBox="1"/>
+          <p:nvPr/>
+        </p:nvSpPr>
+        <p:spPr>
+          <a:xfrm>
+            <a:off x="1097280" y="3291840"/>
             <a:ext cx="9966960" cy="365760"/>
           </a:xfrm>
           <a:prstGeom prst="rect">
@@ -4115,35 +4150,35 @@
               </a:defRPr>
             </a:pPr>
             <a:r>
-              <a:t>from Maria Plendukova</a:t>
-            </a:r>
-          </a:p>
-        </p:txBody>
-      </p:sp>
-      <p:sp>
-        <p:nvSpPr>
-          <p:cNvPr id="7" name="TextBox 6"/>
-          <p:cNvSpPr txBox="1"/>
-          <p:nvPr/>
-        </p:nvSpPr>
-        <p:spPr>
-          <a:xfrm>
-            <a:off x="1097280" y="3108960"/>
-            <a:ext cx="9966960" cy="365760"/>
-          </a:xfrm>
-          <a:prstGeom prst="rect">
-            <a:avLst/>
-          </a:prstGeom>
-          <a:noFill/>
-        </p:spPr>
-        <p:txBody>
-          <a:bodyPr wrap="square">
-            <a:spAutoFit/>
-          </a:bodyPr>
-          <a:lstStyle/>
-          <a:p>
-            <a:pPr algn="l">
-              <a:defRPr sz="1400" b="1" i="0">
+              <a:t>by Pavel Golubev</a:t>
+            </a:r>
+          </a:p>
+        </p:txBody>
+      </p:sp>
+      <p:sp>
+        <p:nvSpPr>
+          <p:cNvPr id="8" name="TextBox 7"/>
+          <p:cNvSpPr txBox="1"/>
+          <p:nvPr/>
+        </p:nvSpPr>
+        <p:spPr>
+          <a:xfrm>
+            <a:off x="1097280" y="3840480"/>
+            <a:ext cx="9966960" cy="457200"/>
+          </a:xfrm>
+          <a:prstGeom prst="rect">
+            <a:avLst/>
+          </a:prstGeom>
+          <a:noFill/>
+        </p:spPr>
+        <p:txBody>
+          <a:bodyPr wrap="square">
+            <a:spAutoFit/>
+          </a:bodyPr>
+          <a:lstStyle/>
+          <a:p>
+            <a:pPr algn="l">
+              <a:defRPr sz="1800" b="1" i="0">
                 <a:solidFill>
                   <a:srgbClr val="FFFFFF"/>
                 </a:solidFill>
@@ -4151,35 +4186,35 @@
               </a:defRPr>
             </a:pPr>
             <a:r>
-              <a:t>to: evgeny.garlukovich, Berta, Hanna Minko, Mikita Sinkevich, Tatiana Rokhlova, tomiris</a:t>
-            </a:r>
-          </a:p>
-        </p:txBody>
-      </p:sp>
-      <p:sp>
-        <p:nvSpPr>
-          <p:cNvPr id="8" name="TextBox 7"/>
-          <p:cNvSpPr txBox="1"/>
-          <p:nvPr/>
-        </p:nvSpPr>
-        <p:spPr>
-          <a:xfrm>
-            <a:off x="1097280" y="3749039"/>
-            <a:ext cx="9966960" cy="1097280"/>
-          </a:xfrm>
-          <a:prstGeom prst="rect">
-            <a:avLst/>
-          </a:prstGeom>
-          <a:noFill/>
-        </p:spPr>
-        <p:txBody>
-          <a:bodyPr wrap="square">
-            <a:spAutoFit/>
-          </a:bodyPr>
-          <a:lstStyle/>
-          <a:p>
-            <a:pPr algn="l">
-              <a:defRPr sz="1500" b="0" i="1">
+              <a:t>CV Health Rate Initiative</a:t>
+            </a:r>
+          </a:p>
+        </p:txBody>
+      </p:sp>
+      <p:sp>
+        <p:nvSpPr>
+          <p:cNvPr id="9" name="TextBox 8"/>
+          <p:cNvSpPr txBox="1"/>
+          <p:nvPr/>
+        </p:nvSpPr>
+        <p:spPr>
+          <a:xfrm>
+            <a:off x="1097280" y="4389120"/>
+            <a:ext cx="9966960" cy="914400"/>
+          </a:xfrm>
+          <a:prstGeom prst="rect">
+            <a:avLst/>
+          </a:prstGeom>
+          <a:noFill/>
+        </p:spPr>
+        <p:txBody>
+          <a:bodyPr wrap="square">
+            <a:spAutoFit/>
+          </a:bodyPr>
+          <a:lstStyle/>
+          <a:p>
+            <a:pPr algn="l">
+              <a:defRPr sz="1400" b="0" i="0">
                 <a:solidFill>
                   <a:srgbClr val="E2E2EA"/>
                 </a:solidFill>
@@ -4187,20 +4222,20 @@
               </a:defRPr>
             </a:pPr>
             <a:r>
-              <a:t>"Incredible teamwork and mutual support across the marketing team"</a:t>
-            </a:r>
-          </a:p>
-        </p:txBody>
-      </p:sp>
-      <p:sp>
-        <p:nvSpPr>
-          <p:cNvPr id="9" name="TextBox 8"/>
-          <p:cNvSpPr txBox="1"/>
-          <p:nvPr/>
-        </p:nvSpPr>
-        <p:spPr>
-          <a:xfrm>
-            <a:off x="1097280" y="5120640"/>
+              <a:t>Turning Core Values and Leadership Principles into real operating constraints and decision-making guardrails</a:t>
+            </a:r>
+          </a:p>
+        </p:txBody>
+      </p:sp>
+      <p:sp>
+        <p:nvSpPr>
+          <p:cNvPr id="10" name="TextBox 9"/>
+          <p:cNvSpPr txBox="1"/>
+          <p:nvPr/>
+        </p:nvSpPr>
+        <p:spPr>
+          <a:xfrm>
+            <a:off x="1097280" y="5486400"/>
             <a:ext cx="9966960" cy="457200"/>
           </a:xfrm>
           <a:prstGeom prst="rect">
@@ -4215,15 +4250,15 @@
           <a:lstStyle/>
           <a:p>
             <a:pPr algn="l">
-              <a:defRPr sz="1200" b="1" i="0">
-                <a:solidFill>
-                  <a:srgbClr val="E74C3C"/>
-                </a:solidFill>
-                <a:latin typeface="Calibri"/>
-              </a:defRPr>
-            </a:pPr>
-            <a:r>
-              <a:t>TOGETHER · SUPPORT</a:t>
+              <a:defRPr sz="1300" b="0" i="1">
+                <a:solidFill>
+                  <a:srgbClr val="8F95A3"/>
+                </a:solidFill>
+                <a:latin typeface="Calibri"/>
+              </a:defRPr>
+            </a:pPr>
+            <a:r>
+              <a:t>💬 "Moving from slogans to actionable business framework with measurable outcomes"</a:t>
             </a:r>
           </a:p>
         </p:txBody>
@@ -4269,7 +4304,7 @@
             <a:avLst/>
           </a:prstGeom>
           <a:solidFill>
-            <a:srgbClr val="1ABC9C"/>
+            <a:srgbClr val="00B894"/>
           </a:solidFill>
           <a:ln>
             <a:noFill/>
@@ -4322,13 +4357,13 @@
             <a:pPr algn="l">
               <a:defRPr sz="1000" b="1">
                 <a:solidFill>
-                  <a:srgbClr val="1ABC9C"/>
-                </a:solidFill>
-                <a:latin typeface="Calibri"/>
-              </a:defRPr>
-            </a:pPr>
-            <a:r>
-              <a:t>💎  CLAPS</a:t>
+                  <a:srgbClr val="00B894"/>
+                </a:solidFill>
+                <a:latin typeface="Calibri"/>
+              </a:defRPr>
+            </a:pPr>
+            <a:r>
+              <a:t>🎯  MILESTONE</a:t>
             </a:r>
           </a:p>
         </p:txBody>
@@ -4358,13 +4393,13 @@
             <a:pPr algn="l">
               <a:defRPr sz="3200" b="1" i="0">
                 <a:solidFill>
-                  <a:srgbClr val="1ABC9C"/>
-                </a:solidFill>
-                <a:latin typeface="Calibri"/>
-              </a:defRPr>
-            </a:pPr>
-            <a:r>
-              <a:t>Quality Excellence</a:t>
+                  <a:srgbClr val="00B894"/>
+                </a:solidFill>
+                <a:latin typeface="Calibri"/>
+              </a:defRPr>
+            </a:pPr>
+            <a:r>
+              <a:t>Company Growth</a:t>
             </a:r>
           </a:p>
         </p:txBody>
@@ -4378,29 +4413,29 @@
         <p:spPr>
           <a:xfrm>
             <a:off x="1097280" y="2103120"/>
-            <a:ext cx="2743200" cy="548640"/>
-          </a:xfrm>
-          <a:prstGeom prst="rect">
-            <a:avLst/>
-          </a:prstGeom>
-          <a:noFill/>
-        </p:spPr>
-        <p:txBody>
-          <a:bodyPr wrap="square">
-            <a:spAutoFit/>
-          </a:bodyPr>
-          <a:lstStyle/>
-          <a:p>
-            <a:pPr algn="l">
-              <a:defRPr sz="2800" b="1" i="0">
-                <a:solidFill>
-                  <a:srgbClr val="1ABC9C"/>
-                </a:solidFill>
-                <a:latin typeface="Calibri"/>
-              </a:defRPr>
-            </a:pPr>
-            <a:r>
-              <a:t>25</a:t>
+            <a:ext cx="4572000" cy="822960"/>
+          </a:xfrm>
+          <a:prstGeom prst="rect">
+            <a:avLst/>
+          </a:prstGeom>
+          <a:noFill/>
+        </p:spPr>
+        <p:txBody>
+          <a:bodyPr wrap="square">
+            <a:spAutoFit/>
+          </a:bodyPr>
+          <a:lstStyle/>
+          <a:p>
+            <a:pPr algn="l">
+              <a:defRPr sz="5200" b="1" i="0">
+                <a:solidFill>
+                  <a:srgbClr val="00B894"/>
+                </a:solidFill>
+                <a:latin typeface="Calibri"/>
+              </a:defRPr>
+            </a:pPr>
+            <a:r>
+              <a:t>$20M</a:t>
             </a:r>
           </a:p>
         </p:txBody>
@@ -4413,22 +4448,94 @@
         </p:nvSpPr>
         <p:spPr>
           <a:xfrm>
-            <a:off x="1097280" y="2651760"/>
-            <a:ext cx="9966960" cy="365760"/>
-          </a:xfrm>
-          <a:prstGeom prst="rect">
-            <a:avLst/>
-          </a:prstGeom>
-          <a:noFill/>
-        </p:spPr>
-        <p:txBody>
-          <a:bodyPr wrap="square">
-            <a:spAutoFit/>
-          </a:bodyPr>
-          <a:lstStyle/>
-          <a:p>
-            <a:pPr algn="l">
-              <a:defRPr sz="1400" b="0" i="0">
+            <a:off x="1097280" y="2926080"/>
+            <a:ext cx="4572000" cy="365760"/>
+          </a:xfrm>
+          <a:prstGeom prst="rect">
+            <a:avLst/>
+          </a:prstGeom>
+          <a:noFill/>
+        </p:spPr>
+        <p:txBody>
+          <a:bodyPr wrap="square">
+            <a:spAutoFit/>
+          </a:bodyPr>
+          <a:lstStyle/>
+          <a:p>
+            <a:pPr algn="l">
+              <a:defRPr sz="1100" b="0" i="0">
+                <a:solidFill>
+                  <a:srgbClr val="8F95A3"/>
+                </a:solidFill>
+                <a:latin typeface="Calibri"/>
+              </a:defRPr>
+            </a:pPr>
+            <a:r>
+              <a:t>EBITDA Achievement</a:t>
+            </a:r>
+          </a:p>
+        </p:txBody>
+      </p:sp>
+      <p:sp>
+        <p:nvSpPr>
+          <p:cNvPr id="7" name="TextBox 6"/>
+          <p:cNvSpPr txBox="1"/>
+          <p:nvPr/>
+        </p:nvSpPr>
+        <p:spPr>
+          <a:xfrm>
+            <a:off x="1097280" y="3566160"/>
+            <a:ext cx="9966960" cy="457200"/>
+          </a:xfrm>
+          <a:prstGeom prst="rect">
+            <a:avLst/>
+          </a:prstGeom>
+          <a:noFill/>
+        </p:spPr>
+        <p:txBody>
+          <a:bodyPr wrap="square">
+            <a:spAutoFit/>
+          </a:bodyPr>
+          <a:lstStyle/>
+          <a:p>
+            <a:pPr algn="l">
+              <a:defRPr sz="1800" b="1" i="0">
+                <a:solidFill>
+                  <a:srgbClr val="FFFFFF"/>
+                </a:solidFill>
+                <a:latin typeface="Calibri"/>
+              </a:defRPr>
+            </a:pPr>
+            <a:r>
+              <a:t>40% YoY Growth Trajectory</a:t>
+            </a:r>
+          </a:p>
+        </p:txBody>
+      </p:sp>
+      <p:sp>
+        <p:nvSpPr>
+          <p:cNvPr id="8" name="TextBox 7"/>
+          <p:cNvSpPr txBox="1"/>
+          <p:nvPr/>
+        </p:nvSpPr>
+        <p:spPr>
+          <a:xfrm>
+            <a:off x="1097280" y="4206240"/>
+            <a:ext cx="9966960" cy="1371600"/>
+          </a:xfrm>
+          <a:prstGeom prst="rect">
+            <a:avLst/>
+          </a:prstGeom>
+          <a:noFill/>
+        </p:spPr>
+        <p:txBody>
+          <a:bodyPr wrap="square">
+            <a:spAutoFit/>
+          </a:bodyPr>
+          <a:lstStyle/>
+          <a:p>
+            <a:pPr algn="l">
+              <a:defRPr sz="1500" b="0" i="0">
                 <a:solidFill>
                   <a:srgbClr val="E2E2EA"/>
                 </a:solidFill>
@@ -4436,115 +4543,7 @@
               </a:defRPr>
             </a:pPr>
             <a:r>
-              <a:t>from Roman Rinchinov</a:t>
-            </a:r>
-          </a:p>
-        </p:txBody>
-      </p:sp>
-      <p:sp>
-        <p:nvSpPr>
-          <p:cNvPr id="7" name="TextBox 6"/>
-          <p:cNvSpPr txBox="1"/>
-          <p:nvPr/>
-        </p:nvSpPr>
-        <p:spPr>
-          <a:xfrm>
-            <a:off x="1097280" y="3108960"/>
-            <a:ext cx="9966960" cy="365760"/>
-          </a:xfrm>
-          <a:prstGeom prst="rect">
-            <a:avLst/>
-          </a:prstGeom>
-          <a:noFill/>
-        </p:spPr>
-        <p:txBody>
-          <a:bodyPr wrap="square">
-            <a:spAutoFit/>
-          </a:bodyPr>
-          <a:lstStyle/>
-          <a:p>
-            <a:pPr algn="l">
-              <a:defRPr sz="1400" b="1" i="0">
-                <a:solidFill>
-                  <a:srgbClr val="FFFFFF"/>
-                </a:solidFill>
-                <a:latin typeface="Calibri"/>
-              </a:defRPr>
-            </a:pPr>
-            <a:r>
-              <a:t>to: Vasyl Plesiuk</a:t>
-            </a:r>
-          </a:p>
-        </p:txBody>
-      </p:sp>
-      <p:sp>
-        <p:nvSpPr>
-          <p:cNvPr id="8" name="TextBox 7"/>
-          <p:cNvSpPr txBox="1"/>
-          <p:nvPr/>
-        </p:nvSpPr>
-        <p:spPr>
-          <a:xfrm>
-            <a:off x="1097280" y="3749039"/>
-            <a:ext cx="9966960" cy="1097280"/>
-          </a:xfrm>
-          <a:prstGeom prst="rect">
-            <a:avLst/>
-          </a:prstGeom>
-          <a:noFill/>
-        </p:spPr>
-        <p:txBody>
-          <a:bodyPr wrap="square">
-            <a:spAutoFit/>
-          </a:bodyPr>
-          <a:lstStyle/>
-          <a:p>
-            <a:pPr algn="l">
-              <a:defRPr sz="1500" b="0" i="1">
-                <a:solidFill>
-                  <a:srgbClr val="E2E2EA"/>
-                </a:solidFill>
-                <a:latin typeface="Calibri"/>
-              </a:defRPr>
-            </a:pPr>
-            <a:r>
-              <a:t>"Exceptional quality and attention to detail"</a:t>
-            </a:r>
-          </a:p>
-        </p:txBody>
-      </p:sp>
-      <p:sp>
-        <p:nvSpPr>
-          <p:cNvPr id="9" name="TextBox 8"/>
-          <p:cNvSpPr txBox="1"/>
-          <p:nvPr/>
-        </p:nvSpPr>
-        <p:spPr>
-          <a:xfrm>
-            <a:off x="1097280" y="5120640"/>
-            <a:ext cx="9966960" cy="457200"/>
-          </a:xfrm>
-          <a:prstGeom prst="rect">
-            <a:avLst/>
-          </a:prstGeom>
-          <a:noFill/>
-        </p:spPr>
-        <p:txBody>
-          <a:bodyPr wrap="square">
-            <a:spAutoFit/>
-          </a:bodyPr>
-          <a:lstStyle/>
-          <a:p>
-            <a:pPr algn="l">
-              <a:defRPr sz="1200" b="1" i="0">
-                <a:solidFill>
-                  <a:srgbClr val="1ABC9C"/>
-                </a:solidFill>
-                <a:latin typeface="Calibri"/>
-              </a:defRPr>
-            </a:pPr>
-            <a:r>
-              <a:t>CRAFT · EXCELLENCE</a:t>
+              <a:t>Appodeal continues its impressive growth journey toward becoming a $50B company with 1,500 employees</a:t>
             </a:r>
           </a:p>
         </p:txBody>
@@ -4590,7 +4589,7 @@
             <a:avLst/>
           </a:prstGeom>
           <a:solidFill>
-            <a:srgbClr val="E67E22"/>
+            <a:srgbClr val="FF6B6B"/>
           </a:solidFill>
           <a:ln>
             <a:noFill/>
@@ -4643,13 +4642,13 @@
             <a:pPr algn="l">
               <a:defRPr sz="1000" b="1">
                 <a:solidFill>
-                  <a:srgbClr val="E67E22"/>
-                </a:solidFill>
-                <a:latin typeface="Calibri"/>
-              </a:defRPr>
-            </a:pPr>
-            <a:r>
-              <a:t>🎯  MILESTONE</a:t>
+                  <a:srgbClr val="FF6B6B"/>
+                </a:solidFill>
+                <a:latin typeface="Calibri"/>
+              </a:defRPr>
+            </a:pPr>
+            <a:r>
+              <a:t>🤖  WIN</a:t>
             </a:r>
           </a:p>
         </p:txBody>
@@ -4679,13 +4678,13 @@
             <a:pPr algn="l">
               <a:defRPr sz="3200" b="1" i="0">
                 <a:solidFill>
-                  <a:srgbClr val="E67E22"/>
-                </a:solidFill>
-                <a:latin typeface="Calibri"/>
-              </a:defRPr>
-            </a:pPr>
-            <a:r>
-              <a:t>Company Growth Milestone</a:t>
+                  <a:srgbClr val="FF6B6B"/>
+                </a:solidFill>
+                <a:latin typeface="Calibri"/>
+              </a:defRPr>
+            </a:pPr>
+            <a:r>
+              <a:t>AI Revolution</a:t>
             </a:r>
           </a:p>
         </p:txBody>
@@ -4713,15 +4712,15 @@
           <a:lstStyle/>
           <a:p>
             <a:pPr algn="l">
-              <a:defRPr sz="5200" b="1" i="0">
-                <a:solidFill>
-                  <a:srgbClr val="E67E22"/>
-                </a:solidFill>
-                <a:latin typeface="Calibri"/>
-              </a:defRPr>
-            </a:pPr>
-            <a:r>
-              <a:t>40%</a:t>
+              <a:defRPr sz="4800" b="1" i="0">
+                <a:solidFill>
+                  <a:srgbClr val="FF6B6B"/>
+                </a:solidFill>
+                <a:latin typeface="Calibri"/>
+              </a:defRPr>
+            </a:pPr>
+            <a:r>
+              <a:t>1000+</a:t>
             </a:r>
           </a:p>
         </p:txBody>
@@ -4734,7 +4733,7 @@
         </p:nvSpPr>
         <p:spPr>
           <a:xfrm>
-            <a:off x="1097280" y="2926080"/>
+            <a:off x="1097280" y="2834640"/>
             <a:ext cx="4572000" cy="365760"/>
           </a:xfrm>
           <a:prstGeom prst="rect">
@@ -4749,7 +4748,7 @@
           <a:lstStyle/>
           <a:p>
             <a:pPr algn="l">
-              <a:defRPr sz="1100" b="0" i="0">
+              <a:defRPr sz="1200" b="0" i="0">
                 <a:solidFill>
                   <a:srgbClr val="8F95A3"/>
                 </a:solidFill>
@@ -4757,7 +4756,7 @@
               </a:defRPr>
             </a:pPr>
             <a:r>
-              <a:t>YoY Growth</a:t>
+              <a:t>OKRs analyzed daily</a:t>
             </a:r>
           </a:p>
         </p:txBody>
@@ -4770,7 +4769,43 @@
         </p:nvSpPr>
         <p:spPr>
           <a:xfrm>
-            <a:off x="1097280" y="3566160"/>
+            <a:off x="1097280" y="3291840"/>
+            <a:ext cx="9966960" cy="365760"/>
+          </a:xfrm>
+          <a:prstGeom prst="rect">
+            <a:avLst/>
+          </a:prstGeom>
+          <a:noFill/>
+        </p:spPr>
+        <p:txBody>
+          <a:bodyPr wrap="square">
+            <a:spAutoFit/>
+          </a:bodyPr>
+          <a:lstStyle/>
+          <a:p>
+            <a:pPr algn="l">
+              <a:defRPr sz="1400" b="0" i="0">
+                <a:solidFill>
+                  <a:srgbClr val="E2E2EA"/>
+                </a:solidFill>
+                <a:latin typeface="Calibri"/>
+              </a:defRPr>
+            </a:pPr>
+            <a:r>
+              <a:t>by Engineering Teams</a:t>
+            </a:r>
+          </a:p>
+        </p:txBody>
+      </p:sp>
+      <p:sp>
+        <p:nvSpPr>
+          <p:cNvPr id="8" name="TextBox 7"/>
+          <p:cNvSpPr txBox="1"/>
+          <p:nvPr/>
+        </p:nvSpPr>
+        <p:spPr>
+          <a:xfrm>
+            <a:off x="1097280" y="3840480"/>
             <a:ext cx="9966960" cy="457200"/>
           </a:xfrm>
           <a:prstGeom prst="rect">
@@ -4793,35 +4828,35 @@
               </a:defRPr>
             </a:pPr>
             <a:r>
-              <a:t>$100M Gross Profit Achieved</a:t>
-            </a:r>
-          </a:p>
-        </p:txBody>
-      </p:sp>
-      <p:sp>
-        <p:nvSpPr>
-          <p:cNvPr id="8" name="TextBox 7"/>
-          <p:cNvSpPr txBox="1"/>
-          <p:nvPr/>
-        </p:nvSpPr>
-        <p:spPr>
-          <a:xfrm>
-            <a:off x="1097280" y="4206240"/>
-            <a:ext cx="9966960" cy="1371600"/>
-          </a:xfrm>
-          <a:prstGeom prst="rect">
-            <a:avLst/>
-          </a:prstGeom>
-          <a:noFill/>
-        </p:spPr>
-        <p:txBody>
-          <a:bodyPr wrap="square">
-            <a:spAutoFit/>
-          </a:bodyPr>
-          <a:lstStyle/>
-          <a:p>
-            <a:pPr algn="l">
-              <a:defRPr sz="1500" b="0" i="0">
+              <a:t>AI-Powered Operations</a:t>
+            </a:r>
+          </a:p>
+        </p:txBody>
+      </p:sp>
+      <p:sp>
+        <p:nvSpPr>
+          <p:cNvPr id="9" name="TextBox 8"/>
+          <p:cNvSpPr txBox="1"/>
+          <p:nvPr/>
+        </p:nvSpPr>
+        <p:spPr>
+          <a:xfrm>
+            <a:off x="1097280" y="4389120"/>
+            <a:ext cx="9966960" cy="914400"/>
+          </a:xfrm>
+          <a:prstGeom prst="rect">
+            <a:avLst/>
+          </a:prstGeom>
+          <a:noFill/>
+        </p:spPr>
+        <p:txBody>
+          <a:bodyPr wrap="square">
+            <a:spAutoFit/>
+          </a:bodyPr>
+          <a:lstStyle/>
+          <a:p>
+            <a:pPr algn="l">
+              <a:defRPr sz="1400" b="0" i="0">
                 <a:solidFill>
                   <a:srgbClr val="E2E2EA"/>
                 </a:solidFill>
@@ -4829,7 +4864,43 @@
               </a:defRPr>
             </a:pPr>
             <a:r>
-              <a:t>We've reached an incredible milestone with $100M in gross profit and $20M EBITDA, projecting 40% YoY growth</a:t>
+              <a:t>Every employee will manage 5-10 AI agents within 3-6 months as we transform how work gets done</a:t>
+            </a:r>
+          </a:p>
+        </p:txBody>
+      </p:sp>
+      <p:sp>
+        <p:nvSpPr>
+          <p:cNvPr id="10" name="TextBox 9"/>
+          <p:cNvSpPr txBox="1"/>
+          <p:nvPr/>
+        </p:nvSpPr>
+        <p:spPr>
+          <a:xfrm>
+            <a:off x="1097280" y="5486400"/>
+            <a:ext cx="9966960" cy="457200"/>
+          </a:xfrm>
+          <a:prstGeom prst="rect">
+            <a:avLst/>
+          </a:prstGeom>
+          <a:noFill/>
+        </p:spPr>
+        <p:txBody>
+          <a:bodyPr wrap="square">
+            <a:spAutoFit/>
+          </a:bodyPr>
+          <a:lstStyle/>
+          <a:p>
+            <a:pPr algn="l">
+              <a:defRPr sz="1300" b="0" i="1">
+                <a:solidFill>
+                  <a:srgbClr val="8F95A3"/>
+                </a:solidFill>
+                <a:latin typeface="Calibri"/>
+              </a:defRPr>
+            </a:pPr>
+            <a:r>
+              <a:t>💬 "OKR Auditor now checks 1,000+ individual OKRs daily via AI automation"</a:t>
             </a:r>
           </a:p>
         </p:txBody>
@@ -4875,7 +4946,7 @@
             <a:avLst/>
           </a:prstGeom>
           <a:solidFill>
-            <a:srgbClr val="9B59B6"/>
+            <a:srgbClr val="E17055"/>
           </a:solidFill>
           <a:ln>
             <a:noFill/>
@@ -4928,13 +4999,13 @@
             <a:pPr algn="l">
               <a:defRPr sz="1000" b="1">
                 <a:solidFill>
-                  <a:srgbClr val="9B59B6"/>
-                </a:solidFill>
-                <a:latin typeface="Calibri"/>
-              </a:defRPr>
-            </a:pPr>
-            <a:r>
-              <a:t>🤖  WIN</a:t>
+                  <a:srgbClr val="E17055"/>
+                </a:solidFill>
+                <a:latin typeface="Calibri"/>
+              </a:defRPr>
+            </a:pPr>
+            <a:r>
+              <a:t>🎮  WIN</a:t>
             </a:r>
           </a:p>
         </p:txBody>
@@ -4964,13 +5035,13 @@
             <a:pPr algn="l">
               <a:defRPr sz="3200" b="1" i="0">
                 <a:solidFill>
-                  <a:srgbClr val="9B59B6"/>
-                </a:solidFill>
-                <a:latin typeface="Calibri"/>
-              </a:defRPr>
-            </a:pPr>
-            <a:r>
-              <a:t>AI Revolution in Progress</a:t>
+                  <a:srgbClr val="E17055"/>
+                </a:solidFill>
+                <a:latin typeface="Calibri"/>
+              </a:defRPr>
+            </a:pPr>
+            <a:r>
+              <a:t>Gaming Success</a:t>
             </a:r>
           </a:p>
         </p:txBody>
@@ -5000,13 +5071,13 @@
             <a:pPr algn="l">
               <a:defRPr sz="4800" b="1" i="0">
                 <a:solidFill>
-                  <a:srgbClr val="9B59B6"/>
-                </a:solidFill>
-                <a:latin typeface="Calibri"/>
-              </a:defRPr>
-            </a:pPr>
-            <a:r>
-              <a:t>1,000+</a:t>
+                  <a:srgbClr val="E17055"/>
+                </a:solidFill>
+                <a:latin typeface="Calibri"/>
+              </a:defRPr>
+            </a:pPr>
+            <a:r>
+              <a:t>61%</a:t>
             </a:r>
           </a:p>
         </p:txBody>
@@ -5042,7 +5113,7 @@
               </a:defRPr>
             </a:pPr>
             <a:r>
-              <a:t>OKRs checked daily</a:t>
+              <a:t>retention rate</a:t>
             </a:r>
           </a:p>
         </p:txBody>
@@ -5078,7 +5149,7 @@
               </a:defRPr>
             </a:pPr>
             <a:r>
-              <a:t>by Appodeal Team</a:t>
+              <a:t>by Gaming Division</a:t>
             </a:r>
           </a:p>
         </p:txBody>
@@ -5114,7 +5185,7 @@
               </a:defRPr>
             </a:pPr>
             <a:r>
-              <a:t>AI Auditor Goes Full Scale</a:t>
+              <a:t>Infinite Minesweeper Hits Target</a:t>
             </a:r>
           </a:p>
         </p:txBody>
@@ -5150,7 +5221,7 @@
               </a:defRPr>
             </a:pPr>
             <a:r>
-              <a:t>Our AI OKR Auditor is now checking over 1,000 individual OKRs daily, revolutionizing how we track progress</a:t>
+              <a:t>Achieved 61% retention rate, meeting Apple benchmark ERA: 151-160%</a:t>
             </a:r>
           </a:p>
         </p:txBody>
@@ -5186,7 +5257,7 @@
               </a:defRPr>
             </a:pPr>
             <a:r>
-              <a:t>💬 "The future is here — AI-powered performance management at scale"</a:t>
+              <a:t>💬 "Gaming division turned profitable in 2025 with multiple hit titles"</a:t>
             </a:r>
           </a:p>
         </p:txBody>
@@ -5232,7 +5303,7 @@
             <a:avLst/>
           </a:prstGeom>
           <a:solidFill>
-            <a:srgbClr val="27AE60"/>
+            <a:srgbClr val="6C5CE7"/>
           </a:solidFill>
           <a:ln>
             <a:noFill/>
@@ -5285,13 +5356,13 @@
             <a:pPr algn="l">
               <a:defRPr sz="1000" b="1">
                 <a:solidFill>
-                  <a:srgbClr val="27AE60"/>
-                </a:solidFill>
-                <a:latin typeface="Calibri"/>
-              </a:defRPr>
-            </a:pPr>
-            <a:r>
-              <a:t>💰  MILESTONE</a:t>
+                  <a:srgbClr val="6C5CE7"/>
+                </a:solidFill>
+                <a:latin typeface="Calibri"/>
+              </a:defRPr>
+            </a:pPr>
+            <a:r>
+              <a:t>🛡️  WIN</a:t>
             </a:r>
           </a:p>
         </p:txBody>
@@ -5321,13 +5392,13 @@
             <a:pPr algn="l">
               <a:defRPr sz="3200" b="1" i="0">
                 <a:solidFill>
-                  <a:srgbClr val="27AE60"/>
-                </a:solidFill>
-                <a:latin typeface="Calibri"/>
-              </a:defRPr>
-            </a:pPr>
-            <a:r>
-              <a:t>Gaming Division Success</a:t>
+                  <a:srgbClr val="6C5CE7"/>
+                </a:solidFill>
+                <a:latin typeface="Calibri"/>
+              </a:defRPr>
+            </a:pPr>
+            <a:r>
+              <a:t>Security Excellence</a:t>
             </a:r>
           </a:p>
         </p:txBody>
@@ -5355,15 +5426,15 @@
           <a:lstStyle/>
           <a:p>
             <a:pPr algn="l">
-              <a:defRPr sz="5200" b="1" i="0">
-                <a:solidFill>
-                  <a:srgbClr val="27AE60"/>
-                </a:solidFill>
-                <a:latin typeface="Calibri"/>
-              </a:defRPr>
-            </a:pPr>
-            <a:r>
-              <a:t>61%</a:t>
+              <a:defRPr sz="4800" b="1" i="0">
+                <a:solidFill>
+                  <a:srgbClr val="6C5CE7"/>
+                </a:solidFill>
+                <a:latin typeface="Calibri"/>
+              </a:defRPr>
+            </a:pPr>
+            <a:r>
+              <a:t>4%</a:t>
             </a:r>
           </a:p>
         </p:txBody>
@@ -5376,7 +5447,7 @@
         </p:nvSpPr>
         <p:spPr>
           <a:xfrm>
-            <a:off x="1097280" y="2926080"/>
+            <a:off x="1097280" y="2834640"/>
             <a:ext cx="4572000" cy="365760"/>
           </a:xfrm>
           <a:prstGeom prst="rect">
@@ -5391,7 +5462,7 @@
           <a:lstStyle/>
           <a:p>
             <a:pPr algn="l">
-              <a:defRPr sz="1100" b="0" i="0">
+              <a:defRPr sz="1200" b="0" i="0">
                 <a:solidFill>
                   <a:srgbClr val="8F95A3"/>
                 </a:solidFill>
@@ -5399,7 +5470,7 @@
               </a:defRPr>
             </a:pPr>
             <a:r>
-              <a:t>Infinite Minesweeper Retention</a:t>
+              <a:t>fraud rate</a:t>
             </a:r>
           </a:p>
         </p:txBody>
@@ -5412,7 +5483,43 @@
         </p:nvSpPr>
         <p:spPr>
           <a:xfrm>
-            <a:off x="1097280" y="3566160"/>
+            <a:off x="1097280" y="3291840"/>
+            <a:ext cx="9966960" cy="365760"/>
+          </a:xfrm>
+          <a:prstGeom prst="rect">
+            <a:avLst/>
+          </a:prstGeom>
+          <a:noFill/>
+        </p:spPr>
+        <p:txBody>
+          <a:bodyPr wrap="square">
+            <a:spAutoFit/>
+          </a:bodyPr>
+          <a:lstStyle/>
+          <a:p>
+            <a:pPr algn="l">
+              <a:defRPr sz="1400" b="0" i="0">
+                <a:solidFill>
+                  <a:srgbClr val="E2E2EA"/>
+                </a:solidFill>
+                <a:latin typeface="Calibri"/>
+              </a:defRPr>
+            </a:pPr>
+            <a:r>
+              <a:t>by Security Team</a:t>
+            </a:r>
+          </a:p>
+        </p:txBody>
+      </p:sp>
+      <p:sp>
+        <p:nvSpPr>
+          <p:cNvPr id="8" name="TextBox 7"/>
+          <p:cNvSpPr txBox="1"/>
+          <p:nvPr/>
+        </p:nvSpPr>
+        <p:spPr>
+          <a:xfrm>
+            <a:off x="1097280" y="3840480"/>
             <a:ext cx="9966960" cy="457200"/>
           </a:xfrm>
           <a:prstGeom prst="rect">
@@ -5435,35 +5542,35 @@
               </a:defRPr>
             </a:pPr>
             <a:r>
-              <a:t>Gaming Turns Profitable in 2025</a:t>
-            </a:r>
-          </a:p>
-        </p:txBody>
-      </p:sp>
-      <p:sp>
-        <p:nvSpPr>
-          <p:cNvPr id="8" name="TextBox 7"/>
-          <p:cNvSpPr txBox="1"/>
-          <p:nvPr/>
-        </p:nvSpPr>
-        <p:spPr>
-          <a:xfrm>
-            <a:off x="1097280" y="4206240"/>
-            <a:ext cx="9966960" cy="1371600"/>
-          </a:xfrm>
-          <a:prstGeom prst="rect">
-            <a:avLst/>
-          </a:prstGeom>
-          <a:noFill/>
-        </p:spPr>
-        <p:txBody>
-          <a:bodyPr wrap="square">
-            <a:spAutoFit/>
-          </a:bodyPr>
-          <a:lstStyle/>
-          <a:p>
-            <a:pPr algn="l">
-              <a:defRPr sz="1500" b="0" i="0">
+              <a:t>Fraud Prevention Breakthrough</a:t>
+            </a:r>
+          </a:p>
+        </p:txBody>
+      </p:sp>
+      <p:sp>
+        <p:nvSpPr>
+          <p:cNvPr id="9" name="TextBox 8"/>
+          <p:cNvSpPr txBox="1"/>
+          <p:nvPr/>
+        </p:nvSpPr>
+        <p:spPr>
+          <a:xfrm>
+            <a:off x="1097280" y="4389120"/>
+            <a:ext cx="9966960" cy="914400"/>
+          </a:xfrm>
+          <a:prstGeom prst="rect">
+            <a:avLst/>
+          </a:prstGeom>
+          <a:noFill/>
+        </p:spPr>
+        <p:txBody>
+          <a:bodyPr wrap="square">
+            <a:spAutoFit/>
+          </a:bodyPr>
+          <a:lstStyle/>
+          <a:p>
+            <a:pPr algn="l">
+              <a:defRPr sz="1400" b="0" i="0">
                 <a:solidFill>
                   <a:srgbClr val="E2E2EA"/>
                 </a:solidFill>
@@ -5471,7 +5578,43 @@
               </a:defRPr>
             </a:pPr>
             <a:r>
-              <a:t>Our gaming division has officially become profitable with impressive retention rates across all titles</a:t>
+              <a:t>Reduced fraud from 22% to under 4% using dynamic SDK signatures</a:t>
+            </a:r>
+          </a:p>
+        </p:txBody>
+      </p:sp>
+      <p:sp>
+        <p:nvSpPr>
+          <p:cNvPr id="10" name="TextBox 9"/>
+          <p:cNvSpPr txBox="1"/>
+          <p:nvPr/>
+        </p:nvSpPr>
+        <p:spPr>
+          <a:xfrm>
+            <a:off x="1097280" y="5486400"/>
+            <a:ext cx="9966960" cy="457200"/>
+          </a:xfrm>
+          <a:prstGeom prst="rect">
+            <a:avLst/>
+          </a:prstGeom>
+          <a:noFill/>
+        </p:spPr>
+        <p:txBody>
+          <a:bodyPr wrap="square">
+            <a:spAutoFit/>
+          </a:bodyPr>
+          <a:lstStyle/>
+          <a:p>
+            <a:pPr algn="l">
+              <a:defRPr sz="1300" b="0" i="1">
+                <a:solidFill>
+                  <a:srgbClr val="8F95A3"/>
+                </a:solidFill>
+                <a:latin typeface="Calibri"/>
+              </a:defRPr>
+            </a:pPr>
+            <a:r>
+              <a:t>💬 "Massive improvement in platform security and user protection"</a:t>
             </a:r>
           </a:p>
         </p:txBody>
@@ -5517,7 +5660,7 @@
             <a:avLst/>
           </a:prstGeom>
           <a:solidFill>
-            <a:srgbClr val="E74C3C"/>
+            <a:srgbClr val="00CEC9"/>
           </a:solidFill>
           <a:ln>
             <a:noFill/>
@@ -5570,13 +5713,13 @@
             <a:pPr algn="l">
               <a:defRPr sz="1000" b="1">
                 <a:solidFill>
-                  <a:srgbClr val="E74C3C"/>
-                </a:solidFill>
-                <a:latin typeface="Calibri"/>
-              </a:defRPr>
-            </a:pPr>
-            <a:r>
-              <a:t>🛡️  WIN</a:t>
+                  <a:srgbClr val="00CEC9"/>
+                </a:solidFill>
+                <a:latin typeface="Calibri"/>
+              </a:defRPr>
+            </a:pPr>
+            <a:r>
+              <a:t>🧘‍♀️  WEEKLY RITUAL</a:t>
             </a:r>
           </a:p>
         </p:txBody>
@@ -5606,13 +5749,13 @@
             <a:pPr algn="l">
               <a:defRPr sz="3200" b="1" i="0">
                 <a:solidFill>
-                  <a:srgbClr val="E74C3C"/>
-                </a:solidFill>
-                <a:latin typeface="Calibri"/>
-              </a:defRPr>
-            </a:pPr>
-            <a:r>
-              <a:t>Fraud Protection Victory</a:t>
+                  <a:srgbClr val="00CEC9"/>
+                </a:solidFill>
+                <a:latin typeface="Calibri"/>
+              </a:defRPr>
+            </a:pPr>
+            <a:r>
+              <a:t>Wellness Wednesday</a:t>
             </a:r>
           </a:p>
         </p:txBody>
@@ -5626,29 +5769,29 @@
         <p:spPr>
           <a:xfrm>
             <a:off x="1097280" y="2103120"/>
-            <a:ext cx="4572000" cy="822960"/>
-          </a:xfrm>
-          <a:prstGeom prst="rect">
-            <a:avLst/>
-          </a:prstGeom>
-          <a:noFill/>
-        </p:spPr>
-        <p:txBody>
-          <a:bodyPr wrap="square">
-            <a:spAutoFit/>
-          </a:bodyPr>
-          <a:lstStyle/>
-          <a:p>
-            <a:pPr algn="l">
-              <a:defRPr sz="4800" b="1" i="0">
-                <a:solidFill>
-                  <a:srgbClr val="E74C3C"/>
-                </a:solidFill>
-                <a:latin typeface="Calibri"/>
-              </a:defRPr>
-            </a:pPr>
-            <a:r>
-              <a:t>4%</a:t>
+            <a:ext cx="9966960" cy="457200"/>
+          </a:xfrm>
+          <a:prstGeom prst="rect">
+            <a:avLst/>
+          </a:prstGeom>
+          <a:noFill/>
+        </p:spPr>
+        <p:txBody>
+          <a:bodyPr wrap="square">
+            <a:spAutoFit/>
+          </a:bodyPr>
+          <a:lstStyle/>
+          <a:p>
+            <a:pPr algn="l">
+              <a:defRPr sz="1800" b="1" i="0">
+                <a:solidFill>
+                  <a:srgbClr val="FFFFFF"/>
+                </a:solidFill>
+                <a:latin typeface="Calibri"/>
+              </a:defRPr>
+            </a:pPr>
+            <a:r>
+              <a:t>Daily Yoga with Anna</a:t>
             </a:r>
           </a:p>
         </p:txBody>
@@ -5661,30 +5804,30 @@
         </p:nvSpPr>
         <p:spPr>
           <a:xfrm>
-            <a:off x="1097280" y="2834640"/>
-            <a:ext cx="4572000" cy="365760"/>
-          </a:xfrm>
-          <a:prstGeom prst="rect">
-            <a:avLst/>
-          </a:prstGeom>
-          <a:noFill/>
-        </p:spPr>
-        <p:txBody>
-          <a:bodyPr wrap="square">
-            <a:spAutoFit/>
-          </a:bodyPr>
-          <a:lstStyle/>
-          <a:p>
-            <a:pPr algn="l">
-              <a:defRPr sz="1200" b="0" i="0">
-                <a:solidFill>
-                  <a:srgbClr val="8F95A3"/>
-                </a:solidFill>
-                <a:latin typeface="Calibri"/>
-              </a:defRPr>
-            </a:pPr>
-            <a:r>
-              <a:t>fraud rate</a:t>
+            <a:off x="1371600" y="2926080"/>
+            <a:ext cx="9418320" cy="548640"/>
+          </a:xfrm>
+          <a:prstGeom prst="rect">
+            <a:avLst/>
+          </a:prstGeom>
+          <a:noFill/>
+        </p:spPr>
+        <p:txBody>
+          <a:bodyPr wrap="square">
+            <a:spAutoFit/>
+          </a:bodyPr>
+          <a:lstStyle/>
+          <a:p>
+            <a:pPr algn="l">
+              <a:defRPr sz="1400" b="0" i="0">
+                <a:solidFill>
+                  <a:srgbClr val="E2E2EA"/>
+                </a:solidFill>
+                <a:latin typeface="Calibri"/>
+              </a:defRPr>
+            </a:pPr>
+            <a:r>
+              <a:t>Join Anna Kolyada for daily yoga at 13:10 CET</a:t>
             </a:r>
           </a:p>
         </p:txBody>
@@ -5697,8 +5840,8 @@
         </p:nvSpPr>
         <p:spPr>
           <a:xfrm>
-            <a:off x="1097280" y="3291840"/>
-            <a:ext cx="9966960" cy="365760"/>
+            <a:off x="1371600" y="3657600"/>
+            <a:ext cx="9418320" cy="548640"/>
           </a:xfrm>
           <a:prstGeom prst="rect">
             <a:avLst/>
@@ -5720,7 +5863,7 @@
               </a:defRPr>
             </a:pPr>
             <a:r>
-              <a:t>by Security Team</a:t>
+              <a:t>Available both in office and online streaming</a:t>
             </a:r>
           </a:p>
         </p:txBody>
@@ -5733,30 +5876,30 @@
         </p:nvSpPr>
         <p:spPr>
           <a:xfrm>
-            <a:off x="1097280" y="3840480"/>
-            <a:ext cx="9966960" cy="457200"/>
-          </a:xfrm>
-          <a:prstGeom prst="rect">
-            <a:avLst/>
-          </a:prstGeom>
-          <a:noFill/>
-        </p:spPr>
-        <p:txBody>
-          <a:bodyPr wrap="square">
-            <a:spAutoFit/>
-          </a:bodyPr>
-          <a:lstStyle/>
-          <a:p>
-            <a:pPr algn="l">
-              <a:defRPr sz="1800" b="1" i="0">
-                <a:solidFill>
-                  <a:srgbClr val="FFFFFF"/>
-                </a:solidFill>
-                <a:latin typeface="Calibri"/>
-              </a:defRPr>
-            </a:pPr>
-            <a:r>
-              <a:t>Massive Fraud Reduction Achieved</a:t>
+            <a:off x="1097280" y="4754880"/>
+            <a:ext cx="9966960" cy="731520"/>
+          </a:xfrm>
+          <a:prstGeom prst="rect">
+            <a:avLst/>
+          </a:prstGeom>
+          <a:noFill/>
+        </p:spPr>
+        <p:txBody>
+          <a:bodyPr wrap="square">
+            <a:spAutoFit/>
+          </a:bodyPr>
+          <a:lstStyle/>
+          <a:p>
+            <a:pPr algn="l">
+              <a:defRPr sz="1500" b="0" i="1">
+                <a:solidFill>
+                  <a:srgbClr val="E2E2EA"/>
+                </a:solidFill>
+                <a:latin typeface="Calibri"/>
+              </a:defRPr>
+            </a:pPr>
+            <a:r>
+              <a:t>Work-Life Balance</a:t>
             </a:r>
           </a:p>
         </p:txBody>
@@ -5769,66 +5912,30 @@
         </p:nvSpPr>
         <p:spPr>
           <a:xfrm>
-            <a:off x="1097280" y="4389120"/>
-            <a:ext cx="9966960" cy="914400"/>
-          </a:xfrm>
-          <a:prstGeom prst="rect">
-            <a:avLst/>
-          </a:prstGeom>
-          <a:noFill/>
-        </p:spPr>
-        <p:txBody>
-          <a:bodyPr wrap="square">
-            <a:spAutoFit/>
-          </a:bodyPr>
-          <a:lstStyle/>
-          <a:p>
-            <a:pPr algn="l">
-              <a:defRPr sz="1400" b="0" i="0">
-                <a:solidFill>
-                  <a:srgbClr val="E2E2EA"/>
-                </a:solidFill>
-                <a:latin typeface="Calibri"/>
-              </a:defRPr>
-            </a:pPr>
-            <a:r>
-              <a:t>Dynamic SDK signatures helped us slash fraud from 22% to under 4% — a game-changing security improvement</a:t>
-            </a:r>
-          </a:p>
-        </p:txBody>
-      </p:sp>
-      <p:sp>
-        <p:nvSpPr>
-          <p:cNvPr id="10" name="TextBox 9"/>
-          <p:cNvSpPr txBox="1"/>
-          <p:nvPr/>
-        </p:nvSpPr>
-        <p:spPr>
-          <a:xfrm>
-            <a:off x="1097280" y="5486400"/>
-            <a:ext cx="9966960" cy="457200"/>
-          </a:xfrm>
-          <a:prstGeom prst="rect">
-            <a:avLst/>
-          </a:prstGeom>
-          <a:noFill/>
-        </p:spPr>
-        <p:txBody>
-          <a:bodyPr wrap="square">
-            <a:spAutoFit/>
-          </a:bodyPr>
-          <a:lstStyle/>
-          <a:p>
-            <a:pPr algn="l">
-              <a:defRPr sz="1300" b="0" i="1">
-                <a:solidFill>
-                  <a:srgbClr val="8F95A3"/>
-                </a:solidFill>
-                <a:latin typeface="Calibri"/>
-              </a:defRPr>
-            </a:pPr>
-            <a:r>
-              <a:t>💬 "Innovation in security delivers real business impact"</a:t>
+            <a:off x="1097280" y="5760720"/>
+            <a:ext cx="9966960" cy="274320"/>
+          </a:xfrm>
+          <a:prstGeom prst="rect">
+            <a:avLst/>
+          </a:prstGeom>
+          <a:noFill/>
+        </p:spPr>
+        <p:txBody>
+          <a:bodyPr wrap="square">
+            <a:spAutoFit/>
+          </a:bodyPr>
+          <a:lstStyle/>
+          <a:p>
+            <a:pPr algn="l">
+              <a:defRPr sz="1100" b="0" i="0">
+                <a:solidFill>
+                  <a:srgbClr val="5C6270"/>
+                </a:solidFill>
+                <a:latin typeface="Calibri"/>
+              </a:defRPr>
+            </a:pPr>
+            <a:r>
+              <a:t>#wellness</a:t>
             </a:r>
           </a:p>
         </p:txBody>
@@ -5874,7 +5981,7 @@
             <a:avLst/>
           </a:prstGeom>
           <a:solidFill>
-            <a:srgbClr val="3498DB"/>
+            <a:srgbClr val="FFD93D"/>
           </a:solidFill>
           <a:ln>
             <a:noFill/>
@@ -5927,13 +6034,13 @@
             <a:pPr algn="l">
               <a:defRPr sz="1000" b="1">
                 <a:solidFill>
-                  <a:srgbClr val="3498DB"/>
-                </a:solidFill>
-                <a:latin typeface="Calibri"/>
-              </a:defRPr>
-            </a:pPr>
-            <a:r>
-              <a:t>📈  WEEKLY RITUAL</a:t>
+                  <a:srgbClr val="FFD93D"/>
+                </a:solidFill>
+                <a:latin typeface="Calibri"/>
+              </a:defRPr>
+            </a:pPr>
+            <a:r>
+              <a:t>✨  OFFICE LIFE</a:t>
             </a:r>
           </a:p>
         </p:txBody>
@@ -5963,13 +6070,13 @@
             <a:pPr algn="l">
               <a:defRPr sz="3200" b="1" i="0">
                 <a:solidFill>
-                  <a:srgbClr val="3498DB"/>
-                </a:solidFill>
-                <a:latin typeface="Calibri"/>
-              </a:defRPr>
-            </a:pPr>
-            <a:r>
-              <a:t>Weekly Sales Victory</a:t>
+                  <a:srgbClr val="FFD93D"/>
+                </a:solidFill>
+                <a:latin typeface="Calibri"/>
+              </a:defRPr>
+            </a:pPr>
+            <a:r>
+              <a:t>Office Energy</a:t>
             </a:r>
           </a:p>
         </p:txBody>
@@ -6005,7 +6112,7 @@
               </a:defRPr>
             </a:pPr>
             <a:r>
-              <a:t>8 Deals Closed This Week</a:t>
+              <a:t>Amazing Team Spirit</a:t>
             </a:r>
           </a:p>
         </p:txBody>
@@ -6018,8 +6125,44 @@
         </p:nvSpPr>
         <p:spPr>
           <a:xfrm>
-            <a:off x="1371600" y="2926080"/>
-            <a:ext cx="9418320" cy="548640"/>
+            <a:off x="1371600" y="2743200"/>
+            <a:ext cx="9692640" cy="1828800"/>
+          </a:xfrm>
+          <a:prstGeom prst="rect">
+            <a:avLst/>
+          </a:prstGeom>
+          <a:noFill/>
+        </p:spPr>
+        <p:txBody>
+          <a:bodyPr wrap="square">
+            <a:spAutoFit/>
+          </a:bodyPr>
+          <a:lstStyle/>
+          <a:p>
+            <a:pPr algn="l">
+              <a:defRPr sz="1500" b="0" i="1">
+                <a:solidFill>
+                  <a:srgbClr val="E2E2EA"/>
+                </a:solidFill>
+                <a:latin typeface="Calibri"/>
+              </a:defRPr>
+            </a:pPr>
+            <a:r>
+              <a:t>"The whole team came together with warm birthday wishes and incredible support for new initiatives"</a:t>
+            </a:r>
+          </a:p>
+        </p:txBody>
+      </p:sp>
+      <p:sp>
+        <p:nvSpPr>
+          <p:cNvPr id="7" name="TextBox 6"/>
+          <p:cNvSpPr txBox="1"/>
+          <p:nvPr/>
+        </p:nvSpPr>
+        <p:spPr>
+          <a:xfrm>
+            <a:off x="1097280" y="4754880"/>
+            <a:ext cx="9966960" cy="365760"/>
           </a:xfrm>
           <a:prstGeom prst="rect">
             <a:avLst/>
@@ -6035,49 +6178,13 @@
             <a:pPr algn="l">
               <a:defRPr sz="1400" b="0" i="0">
                 <a:solidFill>
-                  <a:srgbClr val="E2E2EA"/>
-                </a:solidFill>
-                <a:latin typeface="Calibri"/>
-              </a:defRPr>
-            </a:pPr>
-            <a:r>
-              <a:t>What's your biggest win this week?</a:t>
-            </a:r>
-          </a:p>
-        </p:txBody>
-      </p:sp>
-      <p:sp>
-        <p:nvSpPr>
-          <p:cNvPr id="7" name="TextBox 6"/>
-          <p:cNvSpPr txBox="1"/>
-          <p:nvPr/>
-        </p:nvSpPr>
-        <p:spPr>
-          <a:xfrm>
-            <a:off x="1371600" y="3657600"/>
-            <a:ext cx="9418320" cy="548640"/>
-          </a:xfrm>
-          <a:prstGeom prst="rect">
-            <a:avLst/>
-          </a:prstGeom>
-          <a:noFill/>
-        </p:spPr>
-        <p:txBody>
-          <a:bodyPr wrap="square">
-            <a:spAutoFit/>
-          </a:bodyPr>
-          <a:lstStyle/>
-          <a:p>
-            <a:pPr algn="l">
-              <a:defRPr sz="1400" b="0" i="0">
-                <a:solidFill>
-                  <a:srgbClr val="E2E2EA"/>
-                </a:solidFill>
-                <a:latin typeface="Calibri"/>
-              </a:defRPr>
-            </a:pPr>
-            <a:r>
-              <a:t>How can we support each other's success?</a:t>
+                  <a:srgbClr val="8F95A3"/>
+                </a:solidFill>
+                <a:latin typeface="Calibri"/>
+              </a:defRPr>
+            </a:pPr>
+            <a:r>
+              <a:t>— Team Appodeal</a:t>
             </a:r>
           </a:p>
         </p:txBody>
@@ -6090,30 +6197,30 @@
         </p:nvSpPr>
         <p:spPr>
           <a:xfrm>
-            <a:off x="1097280" y="4754880"/>
-            <a:ext cx="9966960" cy="731520"/>
-          </a:xfrm>
-          <a:prstGeom prst="rect">
-            <a:avLst/>
-          </a:prstGeom>
-          <a:noFill/>
-        </p:spPr>
-        <p:txBody>
-          <a:bodyPr wrap="square">
-            <a:spAutoFit/>
-          </a:bodyPr>
-          <a:lstStyle/>
-          <a:p>
-            <a:pPr algn="l">
-              <a:defRPr sz="1500" b="0" i="1">
-                <a:solidFill>
-                  <a:srgbClr val="E2E2EA"/>
-                </a:solidFill>
-                <a:latin typeface="Calibri"/>
-              </a:defRPr>
-            </a:pPr>
-            <a:r>
-              <a:t>DELIVER RESULTS</a:t>
+            <a:off x="1097280" y="5212080"/>
+            <a:ext cx="9966960" cy="365760"/>
+          </a:xfrm>
+          <a:prstGeom prst="rect">
+            <a:avLst/>
+          </a:prstGeom>
+          <a:noFill/>
+        </p:spPr>
+        <p:txBody>
+          <a:bodyPr wrap="square">
+            <a:spAutoFit/>
+          </a:bodyPr>
+          <a:lstStyle/>
+          <a:p>
+            <a:pPr algn="l">
+              <a:defRPr sz="1400" b="1" i="0">
+                <a:solidFill>
+                  <a:srgbClr val="FFD93D"/>
+                </a:solidFill>
+                <a:latin typeface="Calibri"/>
+              </a:defRPr>
+            </a:pPr>
+            <a:r>
+              <a:t>150</a:t>
             </a:r>
           </a:p>
         </p:txBody>
@@ -6149,328 +6256,7 @@
               </a:defRPr>
             </a:pPr>
             <a:r>
-              <a:t>Sales Team</a:t>
-            </a:r>
-          </a:p>
-        </p:txBody>
-      </p:sp>
-    </p:spTree>
-  </p:cSld>
-  <p:clrMapOvr>
-    <a:masterClrMapping/>
-  </p:clrMapOvr>
-</p:sld>
-</file>
-
-<file path=ppt/slides/slide19.xml><?xml version="1.0" encoding="utf-8"?>
-<p:sld xmlns:a="http://schemas.openxmlformats.org/drawingml/2006/main" xmlns:p="http://schemas.openxmlformats.org/presentationml/2006/main" xmlns:r="http://schemas.openxmlformats.org/officeDocument/2006/relationships">
-  <p:cSld>
-    <p:bg>
-      <p:bgPr>
-        <a:solidFill>
-          <a:srgbClr val="08080C"/>
-        </a:solidFill>
-        <a:effectLst/>
-      </p:bgPr>
-    </p:bg>
-    <p:spTree>
-      <p:nvGrpSpPr>
-        <p:cNvPr id="1" name=""/>
-        <p:cNvGrpSpPr/>
-        <p:nvPr/>
-      </p:nvGrpSpPr>
-      <p:grpSpPr/>
-      <p:sp>
-        <p:nvSpPr>
-          <p:cNvPr id="2" name="Rectangle 1"/>
-          <p:cNvSpPr/>
-          <p:nvPr/>
-        </p:nvSpPr>
-        <p:spPr>
-          <a:xfrm>
-            <a:off x="0" y="365760"/>
-            <a:ext cx="12191695" cy="54864"/>
-          </a:xfrm>
-          <a:prstGeom prst="rect">
-            <a:avLst/>
-          </a:prstGeom>
-          <a:solidFill>
-            <a:srgbClr val="F39C12"/>
-          </a:solidFill>
-          <a:ln>
-            <a:noFill/>
-          </a:ln>
-        </p:spPr>
-        <p:style>
-          <a:lnRef idx="1">
-            <a:schemeClr val="accent1"/>
-          </a:lnRef>
-          <a:fillRef idx="3">
-            <a:schemeClr val="accent1"/>
-          </a:fillRef>
-          <a:effectRef idx="2">
-            <a:schemeClr val="accent1"/>
-          </a:effectRef>
-          <a:fontRef idx="minor">
-            <a:schemeClr val="lt1"/>
-          </a:fontRef>
-        </p:style>
-        <p:txBody>
-          <a:bodyPr rtlCol="0" anchor="ctr"/>
-          <a:lstStyle/>
-          <a:p>
-            <a:pPr algn="ctr"/>
-          </a:p>
-        </p:txBody>
-      </p:sp>
-      <p:sp>
-        <p:nvSpPr>
-          <p:cNvPr id="3" name="TextBox 2"/>
-          <p:cNvSpPr txBox="1"/>
-          <p:nvPr/>
-        </p:nvSpPr>
-        <p:spPr>
-          <a:xfrm>
-            <a:off x="1097280" y="731520"/>
-            <a:ext cx="3657600" cy="365760"/>
-          </a:xfrm>
-          <a:prstGeom prst="rect">
-            <a:avLst/>
-          </a:prstGeom>
-          <a:noFill/>
-        </p:spPr>
-        <p:txBody>
-          <a:bodyPr wrap="none">
-            <a:spAutoFit/>
-          </a:bodyPr>
-          <a:lstStyle/>
-          <a:p>
-            <a:pPr algn="l">
-              <a:defRPr sz="1000" b="1">
-                <a:solidFill>
-                  <a:srgbClr val="F39C12"/>
-                </a:solidFill>
-                <a:latin typeface="Calibri"/>
-              </a:defRPr>
-            </a:pPr>
-            <a:r>
-              <a:t>📝  OFFICE LIFE</a:t>
-            </a:r>
-          </a:p>
-        </p:txBody>
-      </p:sp>
-      <p:sp>
-        <p:nvSpPr>
-          <p:cNvPr id="4" name="TextBox 3"/>
-          <p:cNvSpPr txBox="1"/>
-          <p:nvPr/>
-        </p:nvSpPr>
-        <p:spPr>
-          <a:xfrm>
-            <a:off x="1097280" y="1188720"/>
-            <a:ext cx="9966960" cy="731520"/>
-          </a:xfrm>
-          <a:prstGeom prst="rect">
-            <a:avLst/>
-          </a:prstGeom>
-          <a:noFill/>
-        </p:spPr>
-        <p:txBody>
-          <a:bodyPr wrap="square">
-            <a:spAutoFit/>
-          </a:bodyPr>
-          <a:lstStyle/>
-          <a:p>
-            <a:pPr algn="l">
-              <a:defRPr sz="3200" b="1" i="0">
-                <a:solidFill>
-                  <a:srgbClr val="F39C12"/>
-                </a:solidFill>
-                <a:latin typeface="Calibri"/>
-              </a:defRPr>
-            </a:pPr>
-            <a:r>
-              <a:t>Leadership Philosophy</a:t>
-            </a:r>
-          </a:p>
-        </p:txBody>
-      </p:sp>
-      <p:sp>
-        <p:nvSpPr>
-          <p:cNvPr id="5" name="TextBox 4"/>
-          <p:cNvSpPr txBox="1"/>
-          <p:nvPr/>
-        </p:nvSpPr>
-        <p:spPr>
-          <a:xfrm>
-            <a:off x="1097280" y="2103120"/>
-            <a:ext cx="9966960" cy="457200"/>
-          </a:xfrm>
-          <a:prstGeom prst="rect">
-            <a:avLst/>
-          </a:prstGeom>
-          <a:noFill/>
-        </p:spPr>
-        <p:txBody>
-          <a:bodyPr wrap="square">
-            <a:spAutoFit/>
-          </a:bodyPr>
-          <a:lstStyle/>
-          <a:p>
-            <a:pPr algn="l">
-              <a:defRPr sz="1800" b="1" i="0">
-                <a:solidFill>
-                  <a:srgbClr val="FFFFFF"/>
-                </a:solidFill>
-                <a:latin typeface="Calibri"/>
-              </a:defRPr>
-            </a:pPr>
-            <a:r>
-              <a:t>Build. Ship. Improve.</a:t>
-            </a:r>
-          </a:p>
-        </p:txBody>
-      </p:sp>
-      <p:sp>
-        <p:nvSpPr>
-          <p:cNvPr id="6" name="TextBox 5"/>
-          <p:cNvSpPr txBox="1"/>
-          <p:nvPr/>
-        </p:nvSpPr>
-        <p:spPr>
-          <a:xfrm>
-            <a:off x="1371600" y="2743200"/>
-            <a:ext cx="9692640" cy="1828800"/>
-          </a:xfrm>
-          <a:prstGeom prst="rect">
-            <a:avLst/>
-          </a:prstGeom>
-          <a:noFill/>
-        </p:spPr>
-        <p:txBody>
-          <a:bodyPr wrap="square">
-            <a:spAutoFit/>
-          </a:bodyPr>
-          <a:lstStyle/>
-          <a:p>
-            <a:pPr algn="l">
-              <a:defRPr sz="1500" b="0" i="1">
-                <a:solidFill>
-                  <a:srgbClr val="E2E2EA"/>
-                </a:solidFill>
-                <a:latin typeface="Calibri"/>
-              </a:defRPr>
-            </a:pPr>
-            <a:r>
-              <a:t>"We're shifting from requirements to pull request mentality — focus on action and continuous improvement"</a:t>
-            </a:r>
-          </a:p>
-        </p:txBody>
-      </p:sp>
-      <p:sp>
-        <p:nvSpPr>
-          <p:cNvPr id="7" name="TextBox 6"/>
-          <p:cNvSpPr txBox="1"/>
-          <p:nvPr/>
-        </p:nvSpPr>
-        <p:spPr>
-          <a:xfrm>
-            <a:off x="1097280" y="4754880"/>
-            <a:ext cx="9966960" cy="365760"/>
-          </a:xfrm>
-          <a:prstGeom prst="rect">
-            <a:avLst/>
-          </a:prstGeom>
-          <a:noFill/>
-        </p:spPr>
-        <p:txBody>
-          <a:bodyPr wrap="square">
-            <a:spAutoFit/>
-          </a:bodyPr>
-          <a:lstStyle/>
-          <a:p>
-            <a:pPr algn="l">
-              <a:defRPr sz="1400" b="0" i="0">
-                <a:solidFill>
-                  <a:srgbClr val="8F95A3"/>
-                </a:solidFill>
-                <a:latin typeface="Calibri"/>
-              </a:defRPr>
-            </a:pPr>
-            <a:r>
-              <a:t>— CEO Mandate</a:t>
-            </a:r>
-          </a:p>
-        </p:txBody>
-      </p:sp>
-      <p:sp>
-        <p:nvSpPr>
-          <p:cNvPr id="8" name="TextBox 7"/>
-          <p:cNvSpPr txBox="1"/>
-          <p:nvPr/>
-        </p:nvSpPr>
-        <p:spPr>
-          <a:xfrm>
-            <a:off x="1097280" y="5212080"/>
-            <a:ext cx="9966960" cy="365760"/>
-          </a:xfrm>
-          <a:prstGeom prst="rect">
-            <a:avLst/>
-          </a:prstGeom>
-          <a:noFill/>
-        </p:spPr>
-        <p:txBody>
-          <a:bodyPr wrap="square">
-            <a:spAutoFit/>
-          </a:bodyPr>
-          <a:lstStyle/>
-          <a:p>
-            <a:pPr algn="l">
-              <a:defRPr sz="1400" b="1" i="0">
-                <a:solidFill>
-                  <a:srgbClr val="F39C12"/>
-                </a:solidFill>
-                <a:latin typeface="Calibri"/>
-              </a:defRPr>
-            </a:pPr>
-            <a:r>
-              <a:t>🚀</a:t>
-            </a:r>
-          </a:p>
-        </p:txBody>
-      </p:sp>
-      <p:sp>
-        <p:nvSpPr>
-          <p:cNvPr id="9" name="TextBox 8"/>
-          <p:cNvSpPr txBox="1"/>
-          <p:nvPr/>
-        </p:nvSpPr>
-        <p:spPr>
-          <a:xfrm>
-            <a:off x="1097280" y="5760720"/>
-            <a:ext cx="9966960" cy="274320"/>
-          </a:xfrm>
-          <a:prstGeom prst="rect">
-            <a:avLst/>
-          </a:prstGeom>
-          <a:noFill/>
-        </p:spPr>
-        <p:txBody>
-          <a:bodyPr wrap="square">
-            <a:spAutoFit/>
-          </a:bodyPr>
-          <a:lstStyle/>
-          <a:p>
-            <a:pPr algn="l">
-              <a:defRPr sz="1100" b="0" i="0">
-                <a:solidFill>
-                  <a:srgbClr val="5C6270"/>
-                </a:solidFill>
-                <a:latin typeface="Calibri"/>
-              </a:defRPr>
-            </a:pPr>
-            <a:r>
-              <a:t>Company Culture</a:t>
+              <a:t>#birthdays</a:t>
             </a:r>
           </a:p>
         </p:txBody>
@@ -6516,7 +6302,7 @@
             <a:avLst/>
           </a:prstGeom>
           <a:solidFill>
-            <a:srgbClr val="FF6B35"/>
+            <a:srgbClr val="FF6B6B"/>
           </a:solidFill>
           <a:ln>
             <a:noFill/>
@@ -6569,13 +6355,13 @@
             <a:pPr algn="l">
               <a:defRPr sz="1000" b="1">
                 <a:solidFill>
-                  <a:srgbClr val="FF6B35"/>
-                </a:solidFill>
-                <a:latin typeface="Calibri"/>
-              </a:defRPr>
-            </a:pPr>
-            <a:r>
-              <a:t>🚀  WIN</a:t>
+                  <a:srgbClr val="FF6B6B"/>
+                </a:solidFill>
+                <a:latin typeface="Calibri"/>
+              </a:defRPr>
+            </a:pPr>
+            <a:r>
+              <a:t>🎂  CELEBRATION</a:t>
             </a:r>
           </a:p>
         </p:txBody>
@@ -6605,13 +6391,13 @@
             <a:pPr algn="l">
               <a:defRPr sz="3200" b="1" i="0">
                 <a:solidFill>
-                  <a:srgbClr val="FF6B35"/>
-                </a:solidFill>
-                <a:latin typeface="Calibri"/>
-              </a:defRPr>
-            </a:pPr>
-            <a:r>
-              <a:t>DevOps Magic Unleashed</a:t>
+                  <a:srgbClr val="FF6B6B"/>
+                </a:solidFill>
+                <a:latin typeface="Calibri"/>
+              </a:defRPr>
+            </a:pPr>
+            <a:r>
+              <a:t>Birthday Celebration</a:t>
             </a:r>
           </a:p>
         </p:txBody>
@@ -6625,29 +6411,29 @@
         <p:spPr>
           <a:xfrm>
             <a:off x="1097280" y="2103120"/>
-            <a:ext cx="4572000" cy="822960"/>
-          </a:xfrm>
-          <a:prstGeom prst="rect">
-            <a:avLst/>
-          </a:prstGeom>
-          <a:noFill/>
-        </p:spPr>
-        <p:txBody>
-          <a:bodyPr wrap="square">
-            <a:spAutoFit/>
-          </a:bodyPr>
-          <a:lstStyle/>
-          <a:p>
-            <a:pPr algn="l">
-              <a:defRPr sz="4800" b="1" i="0">
-                <a:solidFill>
-                  <a:srgbClr val="FF6B35"/>
-                </a:solidFill>
-                <a:latin typeface="Calibri"/>
-              </a:defRPr>
-            </a:pPr>
-            <a:r>
-              <a:t>36</a:t>
+            <a:ext cx="9966960" cy="640080"/>
+          </a:xfrm>
+          <a:prstGeom prst="rect">
+            <a:avLst/>
+          </a:prstGeom>
+          <a:noFill/>
+        </p:spPr>
+        <p:txBody>
+          <a:bodyPr wrap="square">
+            <a:spAutoFit/>
+          </a:bodyPr>
+          <a:lstStyle/>
+          <a:p>
+            <a:pPr algn="l">
+              <a:defRPr sz="2800" b="1" i="0">
+                <a:solidFill>
+                  <a:srgbClr val="FFFFFF"/>
+                </a:solidFill>
+                <a:latin typeface="Calibri"/>
+              </a:defRPr>
+            </a:pPr>
+            <a:r>
+              <a:t>Alexandr Sikorsky</a:t>
             </a:r>
           </a:p>
         </p:txBody>
@@ -6660,22 +6446,22 @@
         </p:nvSpPr>
         <p:spPr>
           <a:xfrm>
-            <a:off x="1097280" y="2834640"/>
-            <a:ext cx="4572000" cy="365760"/>
-          </a:xfrm>
-          <a:prstGeom prst="rect">
-            <a:avLst/>
-          </a:prstGeom>
-          <a:noFill/>
-        </p:spPr>
-        <p:txBody>
-          <a:bodyPr wrap="square">
-            <a:spAutoFit/>
-          </a:bodyPr>
-          <a:lstStyle/>
-          <a:p>
-            <a:pPr algn="l">
-              <a:defRPr sz="1200" b="0" i="0">
+            <a:off x="1097280" y="2743200"/>
+            <a:ext cx="9966960" cy="365760"/>
+          </a:xfrm>
+          <a:prstGeom prst="rect">
+            <a:avLst/>
+          </a:prstGeom>
+          <a:noFill/>
+        </p:spPr>
+        <p:txBody>
+          <a:bodyPr wrap="square">
+            <a:spAutoFit/>
+          </a:bodyPr>
+          <a:lstStyle/>
+          <a:p>
+            <a:pPr algn="l">
+              <a:defRPr sz="1400" b="0" i="0">
                 <a:solidFill>
                   <a:srgbClr val="8F95A3"/>
                 </a:solidFill>
@@ -6683,7 +6469,7 @@
               </a:defRPr>
             </a:pPr>
             <a:r>
-              <a:t>rocket reactions</a:t>
+              <a:t>March 11, 2026</a:t>
             </a:r>
           </a:p>
         </p:txBody>
@@ -6697,21 +6483,21 @@
         <p:spPr>
           <a:xfrm>
             <a:off x="1097280" y="3291840"/>
-            <a:ext cx="9966960" cy="365760"/>
-          </a:xfrm>
-          <a:prstGeom prst="rect">
-            <a:avLst/>
-          </a:prstGeom>
-          <a:noFill/>
-        </p:spPr>
-        <p:txBody>
-          <a:bodyPr wrap="square">
-            <a:spAutoFit/>
-          </a:bodyPr>
-          <a:lstStyle/>
-          <a:p>
-            <a:pPr algn="l">
-              <a:defRPr sz="1400" b="0" i="0">
+            <a:ext cx="9966960" cy="914400"/>
+          </a:xfrm>
+          <a:prstGeom prst="rect">
+            <a:avLst/>
+          </a:prstGeom>
+          <a:noFill/>
+        </p:spPr>
+        <p:txBody>
+          <a:bodyPr wrap="square">
+            <a:spAutoFit/>
+          </a:bodyPr>
+          <a:lstStyle/>
+          <a:p>
+            <a:pPr algn="l">
+              <a:defRPr sz="1600" b="0" i="0">
                 <a:solidFill>
                   <a:srgbClr val="E2E2EA"/>
                 </a:solidFill>
@@ -6719,7 +6505,7 @@
               </a:defRPr>
             </a:pPr>
             <a:r>
-              <a:t>by Gleb Krahotkin</a:t>
+              <a:t>Thanks guys, all of you, for the warm wishes! 💕</a:t>
             </a:r>
           </a:p>
         </p:txBody>
@@ -6732,7 +6518,7 @@
         </p:nvSpPr>
         <p:spPr>
           <a:xfrm>
-            <a:off x="1097280" y="3840480"/>
+            <a:off x="1097280" y="4572000"/>
             <a:ext cx="9966960" cy="457200"/>
           </a:xfrm>
           <a:prstGeom prst="rect">
@@ -6747,87 +6533,15 @@
           <a:lstStyle/>
           <a:p>
             <a:pPr algn="l">
-              <a:defRPr sz="1800" b="1" i="0">
-                <a:solidFill>
-                  <a:srgbClr val="FFFFFF"/>
-                </a:solidFill>
-                <a:latin typeface="Calibri"/>
-              </a:defRPr>
-            </a:pPr>
-            <a:r>
-              <a:t>Coolify Deployment Platform Goes Live</a:t>
-            </a:r>
-          </a:p>
-        </p:txBody>
-      </p:sp>
-      <p:sp>
-        <p:nvSpPr>
-          <p:cNvPr id="9" name="TextBox 8"/>
-          <p:cNvSpPr txBox="1"/>
-          <p:nvPr/>
-        </p:nvSpPr>
-        <p:spPr>
-          <a:xfrm>
-            <a:off x="1097280" y="4389120"/>
-            <a:ext cx="9966960" cy="914400"/>
-          </a:xfrm>
-          <a:prstGeom prst="rect">
-            <a:avLst/>
-          </a:prstGeom>
-          <a:noFill/>
-        </p:spPr>
-        <p:txBody>
-          <a:bodyPr wrap="square">
-            <a:spAutoFit/>
-          </a:bodyPr>
-          <a:lstStyle/>
-          <a:p>
-            <a:pPr algn="l">
-              <a:defRPr sz="1400" b="0" i="0">
-                <a:solidFill>
-                  <a:srgbClr val="E2E2EA"/>
-                </a:solidFill>
-                <a:latin typeface="Calibri"/>
-              </a:defRPr>
-            </a:pPr>
-            <a:r>
-              <a:t>Our DevOps team just dropped a game-changer! Deploy applications in just a few clicks with the new Coolify platform.</a:t>
-            </a:r>
-          </a:p>
-        </p:txBody>
-      </p:sp>
-      <p:sp>
-        <p:nvSpPr>
-          <p:cNvPr id="10" name="TextBox 9"/>
-          <p:cNvSpPr txBox="1"/>
-          <p:nvPr/>
-        </p:nvSpPr>
-        <p:spPr>
-          <a:xfrm>
-            <a:off x="1097280" y="5486400"/>
-            <a:ext cx="9966960" cy="457200"/>
-          </a:xfrm>
-          <a:prstGeom prst="rect">
-            <a:avLst/>
-          </a:prstGeom>
-          <a:noFill/>
-        </p:spPr>
-        <p:txBody>
-          <a:bodyPr wrap="square">
-            <a:spAutoFit/>
-          </a:bodyPr>
-          <a:lstStyle/>
-          <a:p>
-            <a:pPr algn="l">
-              <a:defRPr sz="1300" b="0" i="1">
-                <a:solidFill>
-                  <a:srgbClr val="8F95A3"/>
-                </a:solidFill>
-                <a:latin typeface="Calibri"/>
-              </a:defRPr>
-            </a:pPr>
-            <a:r>
-              <a:t>💬 "Innovation meets simplicity — building the future, one click at a time"</a:t>
+              <a:defRPr sz="1400" b="0" i="1">
+                <a:solidFill>
+                  <a:srgbClr val="FF6B6B"/>
+                </a:solidFill>
+                <a:latin typeface="Calibri"/>
+              </a:defRPr>
+            </a:pPr>
+            <a:r>
+              <a:t>The whole team came together to celebrate with warm birthday wishes!</a:t>
             </a:r>
           </a:p>
         </p:txBody>
@@ -6873,7 +6587,7 @@
             <a:avLst/>
           </a:prstGeom>
           <a:solidFill>
-            <a:srgbClr val="FF69B4"/>
+            <a:srgbClr val="4ECDC4"/>
           </a:solidFill>
           <a:ln>
             <a:noFill/>
@@ -6926,13 +6640,13 @@
             <a:pPr algn="l">
               <a:defRPr sz="1000" b="1">
                 <a:solidFill>
-                  <a:srgbClr val="FF69B4"/>
-                </a:solidFill>
-                <a:latin typeface="Calibri"/>
-              </a:defRPr>
-            </a:pPr>
-            <a:r>
-              <a:t>🎂  CELEBRATION</a:t>
+                  <a:srgbClr val="4ECDC4"/>
+                </a:solidFill>
+                <a:latin typeface="Calibri"/>
+              </a:defRPr>
+            </a:pPr>
+            <a:r>
+              <a:t>🚀  WIN</a:t>
             </a:r>
           </a:p>
         </p:txBody>
@@ -6962,13 +6676,13 @@
             <a:pPr algn="l">
               <a:defRPr sz="3200" b="1" i="0">
                 <a:solidFill>
-                  <a:srgbClr val="FF69B4"/>
-                </a:solidFill>
-                <a:latin typeface="Calibri"/>
-              </a:defRPr>
-            </a:pPr>
-            <a:r>
-              <a:t>Birthday Celebrations!</a:t>
+                  <a:srgbClr val="4ECDC4"/>
+                </a:solidFill>
+                <a:latin typeface="Calibri"/>
+              </a:defRPr>
+            </a:pPr>
+            <a:r>
+              <a:t>DevOps Innovation</a:t>
             </a:r>
           </a:p>
         </p:txBody>
@@ -6982,21 +6696,129 @@
         <p:spPr>
           <a:xfrm>
             <a:off x="1097280" y="2103120"/>
-            <a:ext cx="9966960" cy="640080"/>
-          </a:xfrm>
-          <a:prstGeom prst="rect">
-            <a:avLst/>
-          </a:prstGeom>
-          <a:noFill/>
-        </p:spPr>
-        <p:txBody>
-          <a:bodyPr wrap="square">
-            <a:spAutoFit/>
-          </a:bodyPr>
-          <a:lstStyle/>
-          <a:p>
-            <a:pPr algn="l">
-              <a:defRPr sz="2800" b="1" i="0">
+            <a:ext cx="4572000" cy="822960"/>
+          </a:xfrm>
+          <a:prstGeom prst="rect">
+            <a:avLst/>
+          </a:prstGeom>
+          <a:noFill/>
+        </p:spPr>
+        <p:txBody>
+          <a:bodyPr wrap="square">
+            <a:spAutoFit/>
+          </a:bodyPr>
+          <a:lstStyle/>
+          <a:p>
+            <a:pPr algn="l">
+              <a:defRPr sz="4800" b="1" i="0">
+                <a:solidFill>
+                  <a:srgbClr val="4ECDC4"/>
+                </a:solidFill>
+                <a:latin typeface="Calibri"/>
+              </a:defRPr>
+            </a:pPr>
+            <a:r>
+              <a:t>26</a:t>
+            </a:r>
+          </a:p>
+        </p:txBody>
+      </p:sp>
+      <p:sp>
+        <p:nvSpPr>
+          <p:cNvPr id="6" name="TextBox 5"/>
+          <p:cNvSpPr txBox="1"/>
+          <p:nvPr/>
+        </p:nvSpPr>
+        <p:spPr>
+          <a:xfrm>
+            <a:off x="1097280" y="2834640"/>
+            <a:ext cx="4572000" cy="365760"/>
+          </a:xfrm>
+          <a:prstGeom prst="rect">
+            <a:avLst/>
+          </a:prstGeom>
+          <a:noFill/>
+        </p:spPr>
+        <p:txBody>
+          <a:bodyPr wrap="square">
+            <a:spAutoFit/>
+          </a:bodyPr>
+          <a:lstStyle/>
+          <a:p>
+            <a:pPr algn="l">
+              <a:defRPr sz="1200" b="0" i="0">
+                <a:solidFill>
+                  <a:srgbClr val="8F95A3"/>
+                </a:solidFill>
+                <a:latin typeface="Calibri"/>
+              </a:defRPr>
+            </a:pPr>
+            <a:r>
+              <a:t>reactions</a:t>
+            </a:r>
+          </a:p>
+        </p:txBody>
+      </p:sp>
+      <p:sp>
+        <p:nvSpPr>
+          <p:cNvPr id="7" name="TextBox 6"/>
+          <p:cNvSpPr txBox="1"/>
+          <p:nvPr/>
+        </p:nvSpPr>
+        <p:spPr>
+          <a:xfrm>
+            <a:off x="1097280" y="3291840"/>
+            <a:ext cx="9966960" cy="365760"/>
+          </a:xfrm>
+          <a:prstGeom prst="rect">
+            <a:avLst/>
+          </a:prstGeom>
+          <a:noFill/>
+        </p:spPr>
+        <p:txBody>
+          <a:bodyPr wrap="square">
+            <a:spAutoFit/>
+          </a:bodyPr>
+          <a:lstStyle/>
+          <a:p>
+            <a:pPr algn="l">
+              <a:defRPr sz="1400" b="0" i="0">
+                <a:solidFill>
+                  <a:srgbClr val="E2E2EA"/>
+                </a:solidFill>
+                <a:latin typeface="Calibri"/>
+              </a:defRPr>
+            </a:pPr>
+            <a:r>
+              <a:t>by Gleb Krahotkin</a:t>
+            </a:r>
+          </a:p>
+        </p:txBody>
+      </p:sp>
+      <p:sp>
+        <p:nvSpPr>
+          <p:cNvPr id="8" name="TextBox 7"/>
+          <p:cNvSpPr txBox="1"/>
+          <p:nvPr/>
+        </p:nvSpPr>
+        <p:spPr>
+          <a:xfrm>
+            <a:off x="1097280" y="3840480"/>
+            <a:ext cx="9966960" cy="457200"/>
+          </a:xfrm>
+          <a:prstGeom prst="rect">
+            <a:avLst/>
+          </a:prstGeom>
+          <a:noFill/>
+        </p:spPr>
+        <p:txBody>
+          <a:bodyPr wrap="square">
+            <a:spAutoFit/>
+          </a:bodyPr>
+          <a:lstStyle/>
+          <a:p>
+            <a:pPr algn="l">
+              <a:defRPr sz="1800" b="1" i="0">
                 <a:solidFill>
                   <a:srgbClr val="FFFFFF"/>
                 </a:solidFill>
@@ -7004,21 +6826,21 @@
               </a:defRPr>
             </a:pPr>
             <a:r>
-              <a:t>Alexandr Sikorsky</a:t>
-            </a:r>
-          </a:p>
-        </p:txBody>
-      </p:sp>
-      <p:sp>
-        <p:nvSpPr>
-          <p:cNvPr id="6" name="TextBox 5"/>
-          <p:cNvSpPr txBox="1"/>
-          <p:nvPr/>
-        </p:nvSpPr>
-        <p:spPr>
-          <a:xfrm>
-            <a:off x="1097280" y="2743200"/>
-            <a:ext cx="9966960" cy="365760"/>
+              <a:t>Coolify Platform Launched</a:t>
+            </a:r>
+          </a:p>
+        </p:txBody>
+      </p:sp>
+      <p:sp>
+        <p:nvSpPr>
+          <p:cNvPr id="9" name="TextBox 8"/>
+          <p:cNvSpPr txBox="1"/>
+          <p:nvPr/>
+        </p:nvSpPr>
+        <p:spPr>
+          <a:xfrm>
+            <a:off x="1097280" y="4389120"/>
+            <a:ext cx="9966960" cy="914400"/>
           </a:xfrm>
           <a:prstGeom prst="rect">
             <a:avLst/>
@@ -7034,85 +6856,49 @@
             <a:pPr algn="l">
               <a:defRPr sz="1400" b="0" i="0">
                 <a:solidFill>
+                  <a:srgbClr val="E2E2EA"/>
+                </a:solidFill>
+                <a:latin typeface="Calibri"/>
+              </a:defRPr>
+            </a:pPr>
+            <a:r>
+              <a:t>Introduced a revolutionary deployment service that allows applications to be deployed in just a few clicks</a:t>
+            </a:r>
+          </a:p>
+        </p:txBody>
+      </p:sp>
+      <p:sp>
+        <p:nvSpPr>
+          <p:cNvPr id="10" name="TextBox 9"/>
+          <p:cNvSpPr txBox="1"/>
+          <p:nvPr/>
+        </p:nvSpPr>
+        <p:spPr>
+          <a:xfrm>
+            <a:off x="1097280" y="5486400"/>
+            <a:ext cx="9966960" cy="457200"/>
+          </a:xfrm>
+          <a:prstGeom prst="rect">
+            <a:avLst/>
+          </a:prstGeom>
+          <a:noFill/>
+        </p:spPr>
+        <p:txBody>
+          <a:bodyPr wrap="square">
+            <a:spAutoFit/>
+          </a:bodyPr>
+          <a:lstStyle/>
+          <a:p>
+            <a:pPr algn="l">
+              <a:defRPr sz="1300" b="0" i="1">
+                <a:solidFill>
                   <a:srgbClr val="8F95A3"/>
                 </a:solidFill>
                 <a:latin typeface="Calibri"/>
               </a:defRPr>
             </a:pPr>
             <a:r>
-              <a:t>March 12th</a:t>
-            </a:r>
-          </a:p>
-        </p:txBody>
-      </p:sp>
-      <p:sp>
-        <p:nvSpPr>
-          <p:cNvPr id="7" name="TextBox 6"/>
-          <p:cNvSpPr txBox="1"/>
-          <p:nvPr/>
-        </p:nvSpPr>
-        <p:spPr>
-          <a:xfrm>
-            <a:off x="1097280" y="3291840"/>
-            <a:ext cx="9966960" cy="914400"/>
-          </a:xfrm>
-          <a:prstGeom prst="rect">
-            <a:avLst/>
-          </a:prstGeom>
-          <a:noFill/>
-        </p:spPr>
-        <p:txBody>
-          <a:bodyPr wrap="square">
-            <a:spAutoFit/>
-          </a:bodyPr>
-          <a:lstStyle/>
-          <a:p>
-            <a:pPr algn="l">
-              <a:defRPr sz="1600" b="0" i="0">
-                <a:solidFill>
-                  <a:srgbClr val="E2E2EA"/>
-                </a:solidFill>
-                <a:latin typeface="Calibri"/>
-              </a:defRPr>
-            </a:pPr>
-            <a:r>
-              <a:t>Thanks guys, all of you, for the warm wishes! 💕</a:t>
-            </a:r>
-          </a:p>
-        </p:txBody>
-      </p:sp>
-      <p:sp>
-        <p:nvSpPr>
-          <p:cNvPr id="8" name="TextBox 7"/>
-          <p:cNvSpPr txBox="1"/>
-          <p:nvPr/>
-        </p:nvSpPr>
-        <p:spPr>
-          <a:xfrm>
-            <a:off x="1097280" y="4572000"/>
-            <a:ext cx="9966960" cy="457200"/>
-          </a:xfrm>
-          <a:prstGeom prst="rect">
-            <a:avLst/>
-          </a:prstGeom>
-          <a:noFill/>
-        </p:spPr>
-        <p:txBody>
-          <a:bodyPr wrap="square">
-            <a:spAutoFit/>
-          </a:bodyPr>
-          <a:lstStyle/>
-          <a:p>
-            <a:pPr algn="l">
-              <a:defRPr sz="1400" b="0" i="1">
-                <a:solidFill>
-                  <a:srgbClr val="FF69B4"/>
-                </a:solidFill>
-                <a:latin typeface="Calibri"/>
-              </a:defRPr>
-            </a:pPr>
-            <a:r>
-              <a:t>The whole team showered our birthday star with love and wishes!</a:t>
+              <a:t>💬 "Massive team excitement with 36 🚀 reactions and detailed documentation already available"</a:t>
             </a:r>
           </a:p>
         </p:txBody>
@@ -7158,7 +6944,7 @@
             <a:avLst/>
           </a:prstGeom>
           <a:solidFill>
-            <a:srgbClr val="E74C3C"/>
+            <a:srgbClr val="FFD93D"/>
           </a:solidFill>
           <a:ln>
             <a:noFill/>
@@ -7211,7 +6997,7 @@
             <a:pPr algn="l">
               <a:defRPr sz="1000" b="1">
                 <a:solidFill>
-                  <a:srgbClr val="E74C3C"/>
+                  <a:srgbClr val="FFD93D"/>
                 </a:solidFill>
                 <a:latin typeface="Calibri"/>
               </a:defRPr>
@@ -7247,13 +7033,13 @@
             <a:pPr algn="l">
               <a:defRPr sz="3200" b="1" i="0">
                 <a:solidFill>
-                  <a:srgbClr val="E74C3C"/>
-                </a:solidFill>
-                <a:latin typeface="Calibri"/>
-              </a:defRPr>
-            </a:pPr>
-            <a:r>
-              <a:t>Lunch &amp; Learn Success</a:t>
+                  <a:srgbClr val="FFD93D"/>
+                </a:solidFill>
+                <a:latin typeface="Calibri"/>
+              </a:defRPr>
+            </a:pPr>
+            <a:r>
+              <a:t>Learning Excellence</a:t>
             </a:r>
           </a:p>
         </p:txBody>
@@ -7289,7 +7075,7 @@
               </a:defRPr>
             </a:pPr>
             <a:r>
-              <a:t>11th Lunch &amp; Learn Session</a:t>
+              <a:t>11th Lunch &amp; Learn: Fraud Traffic Detection</a:t>
             </a:r>
           </a:p>
         </p:txBody>
@@ -7319,13 +7105,13 @@
             <a:pPr algn="l">
               <a:defRPr sz="1400" b="1" i="0">
                 <a:solidFill>
-                  <a:srgbClr val="E74C3C"/>
-                </a:solidFill>
-                <a:latin typeface="Calibri"/>
-              </a:defRPr>
-            </a:pPr>
-            <a:r>
-              <a:t>This week</a:t>
+                  <a:srgbClr val="FFD93D"/>
+                </a:solidFill>
+                <a:latin typeface="Calibri"/>
+              </a:defRPr>
+            </a:pPr>
+            <a:r>
+              <a:t>Recently completed</a:t>
             </a:r>
           </a:p>
         </p:txBody>
@@ -7361,7 +7147,7 @@
               </a:defRPr>
             </a:pPr>
             <a:r>
-              <a:t>Timofey Levanov delivered an amazing presentation on fraud traffic detection. Recording available on Fireflies!</a:t>
+              <a:t>Timofey Levanov delivered an insightful presentation on fraud detection methods</a:t>
             </a:r>
           </a:p>
         </p:txBody>
@@ -7443,7 +7229,7 @@
             <a:avLst/>
           </a:prstGeom>
           <a:solidFill>
-            <a:srgbClr val="9B59B6"/>
+            <a:srgbClr val="6C5CE7"/>
           </a:solidFill>
           <a:ln>
             <a:noFill/>
@@ -7496,13 +7282,13 @@
             <a:pPr algn="l">
               <a:defRPr sz="1000" b="1">
                 <a:solidFill>
-                  <a:srgbClr val="9B59B6"/>
-                </a:solidFill>
-                <a:latin typeface="Calibri"/>
-              </a:defRPr>
-            </a:pPr>
-            <a:r>
-              <a:t>👏  CLAPS</a:t>
+                  <a:srgbClr val="6C5CE7"/>
+                </a:solidFill>
+                <a:latin typeface="Calibri"/>
+              </a:defRPr>
+            </a:pPr>
+            <a:r>
+              <a:t>📚  RECOMMENDED</a:t>
             </a:r>
           </a:p>
         </p:txBody>
@@ -7532,13 +7318,13 @@
             <a:pPr algn="l">
               <a:defRPr sz="3200" b="1" i="0">
                 <a:solidFill>
-                  <a:srgbClr val="9B59B6"/>
-                </a:solidFill>
-                <a:latin typeface="Calibri"/>
-              </a:defRPr>
-            </a:pPr>
-            <a:r>
-              <a:t>Design Excellence</a:t>
+                  <a:srgbClr val="6C5CE7"/>
+                </a:solidFill>
+                <a:latin typeface="Calibri"/>
+              </a:defRPr>
+            </a:pPr>
+            <a:r>
+              <a:t>Reading Club Launch</a:t>
             </a:r>
           </a:p>
         </p:txBody>
@@ -7552,29 +7338,29 @@
         <p:spPr>
           <a:xfrm>
             <a:off x="1097280" y="2103120"/>
-            <a:ext cx="2743200" cy="548640"/>
-          </a:xfrm>
-          <a:prstGeom prst="rect">
-            <a:avLst/>
-          </a:prstGeom>
-          <a:noFill/>
-        </p:spPr>
-        <p:txBody>
-          <a:bodyPr wrap="square">
-            <a:spAutoFit/>
-          </a:bodyPr>
-          <a:lstStyle/>
-          <a:p>
-            <a:pPr algn="l">
-              <a:defRPr sz="2800" b="1" i="0">
-                <a:solidFill>
-                  <a:srgbClr val="9B59B6"/>
-                </a:solidFill>
-                <a:latin typeface="Calibri"/>
-              </a:defRPr>
-            </a:pPr>
-            <a:r>
-              <a:t>50</a:t>
+            <a:ext cx="457200" cy="365760"/>
+          </a:xfrm>
+          <a:prstGeom prst="rect">
+            <a:avLst/>
+          </a:prstGeom>
+          <a:noFill/>
+        </p:spPr>
+        <p:txBody>
+          <a:bodyPr wrap="square">
+            <a:spAutoFit/>
+          </a:bodyPr>
+          <a:lstStyle/>
+          <a:p>
+            <a:pPr algn="l">
+              <a:defRPr sz="2200" b="1" i="0">
+                <a:solidFill>
+                  <a:srgbClr val="6C5CE7"/>
+                </a:solidFill>
+                <a:latin typeface="Calibri"/>
+              </a:defRPr>
+            </a:pPr>
+            <a:r>
+              <a:t>01</a:t>
             </a:r>
           </a:p>
         </p:txBody>
@@ -7587,22 +7373,58 @@
         </p:nvSpPr>
         <p:spPr>
           <a:xfrm>
-            <a:off x="1097280" y="2651760"/>
-            <a:ext cx="9966960" cy="365760"/>
-          </a:xfrm>
-          <a:prstGeom prst="rect">
-            <a:avLst/>
-          </a:prstGeom>
-          <a:noFill/>
-        </p:spPr>
-        <p:txBody>
-          <a:bodyPr wrap="square">
-            <a:spAutoFit/>
-          </a:bodyPr>
-          <a:lstStyle/>
-          <a:p>
-            <a:pPr algn="l">
-              <a:defRPr sz="1400" b="0" i="0">
+            <a:off x="1737360" y="2103120"/>
+            <a:ext cx="9326880" cy="365760"/>
+          </a:xfrm>
+          <a:prstGeom prst="rect">
+            <a:avLst/>
+          </a:prstGeom>
+          <a:noFill/>
+        </p:spPr>
+        <p:txBody>
+          <a:bodyPr wrap="square">
+            <a:spAutoFit/>
+          </a:bodyPr>
+          <a:lstStyle/>
+          <a:p>
+            <a:pPr algn="l">
+              <a:defRPr sz="1600" b="1" i="0">
+                <a:solidFill>
+                  <a:srgbClr val="FFFFFF"/>
+                </a:solidFill>
+                <a:latin typeface="Calibri"/>
+              </a:defRPr>
+            </a:pPr>
+            <a:r>
+              <a:t>The 4 Disciplines of Execution</a:t>
+            </a:r>
+          </a:p>
+        </p:txBody>
+      </p:sp>
+      <p:sp>
+        <p:nvSpPr>
+          <p:cNvPr id="7" name="TextBox 6"/>
+          <p:cNvSpPr txBox="1"/>
+          <p:nvPr/>
+        </p:nvSpPr>
+        <p:spPr>
+          <a:xfrm>
+            <a:off x="1737360" y="2423160"/>
+            <a:ext cx="9326880" cy="365760"/>
+          </a:xfrm>
+          <a:prstGeom prst="rect">
+            <a:avLst/>
+          </a:prstGeom>
+          <a:noFill/>
+        </p:spPr>
+        <p:txBody>
+          <a:bodyPr wrap="square">
+            <a:spAutoFit/>
+          </a:bodyPr>
+          <a:lstStyle/>
+          <a:p>
+            <a:pPr algn="l">
+              <a:defRPr sz="1200" b="0" i="0">
                 <a:solidFill>
                   <a:srgbClr val="E2E2EA"/>
                 </a:solidFill>
@@ -7610,35 +7432,107 @@
               </a:defRPr>
             </a:pPr>
             <a:r>
-              <a:t>from Pavel Savinskiy</a:t>
-            </a:r>
-          </a:p>
-        </p:txBody>
-      </p:sp>
-      <p:sp>
-        <p:nvSpPr>
-          <p:cNvPr id="7" name="TextBox 6"/>
-          <p:cNvSpPr txBox="1"/>
-          <p:nvPr/>
-        </p:nvSpPr>
-        <p:spPr>
-          <a:xfrm>
-            <a:off x="1097280" y="3108960"/>
-            <a:ext cx="9966960" cy="365760"/>
-          </a:xfrm>
-          <a:prstGeom prst="rect">
-            <a:avLst/>
-          </a:prstGeom>
-          <a:noFill/>
-        </p:spPr>
-        <p:txBody>
-          <a:bodyPr wrap="square">
-            <a:spAutoFit/>
-          </a:bodyPr>
-          <a:lstStyle/>
-          <a:p>
-            <a:pPr algn="l">
-              <a:defRPr sz="1400" b="1" i="0">
+              <a:t>Focus on Wildly Important Goals, Leading/Lagging Metrics, Scorecards, and Follow-through</a:t>
+            </a:r>
+          </a:p>
+        </p:txBody>
+      </p:sp>
+      <p:sp>
+        <p:nvSpPr>
+          <p:cNvPr id="8" name="TextBox 7"/>
+          <p:cNvSpPr txBox="1"/>
+          <p:nvPr/>
+        </p:nvSpPr>
+        <p:spPr>
+          <a:xfrm>
+            <a:off x="1737360" y="2743200"/>
+            <a:ext cx="9326880" cy="274320"/>
+          </a:xfrm>
+          <a:prstGeom prst="rect">
+            <a:avLst/>
+          </a:prstGeom>
+          <a:noFill/>
+        </p:spPr>
+        <p:txBody>
+          <a:bodyPr wrap="square">
+            <a:spAutoFit/>
+          </a:bodyPr>
+          <a:lstStyle/>
+          <a:p>
+            <a:pPr algn="l">
+              <a:defRPr sz="1100" b="0" i="0">
+                <a:solidFill>
+                  <a:srgbClr val="8F95A3"/>
+                </a:solidFill>
+                <a:latin typeface="Calibri"/>
+              </a:defRPr>
+            </a:pPr>
+            <a:r>
+              <a:t>Shared by Pavel Golubev · 7</a:t>
+            </a:r>
+          </a:p>
+        </p:txBody>
+      </p:sp>
+      <p:sp>
+        <p:nvSpPr>
+          <p:cNvPr id="9" name="TextBox 8"/>
+          <p:cNvSpPr txBox="1"/>
+          <p:nvPr/>
+        </p:nvSpPr>
+        <p:spPr>
+          <a:xfrm>
+            <a:off x="1097280" y="3291839"/>
+            <a:ext cx="457200" cy="365760"/>
+          </a:xfrm>
+          <a:prstGeom prst="rect">
+            <a:avLst/>
+          </a:prstGeom>
+          <a:noFill/>
+        </p:spPr>
+        <p:txBody>
+          <a:bodyPr wrap="square">
+            <a:spAutoFit/>
+          </a:bodyPr>
+          <a:lstStyle/>
+          <a:p>
+            <a:pPr algn="l">
+              <a:defRPr sz="2200" b="1" i="0">
+                <a:solidFill>
+                  <a:srgbClr val="6C5CE7"/>
+                </a:solidFill>
+                <a:latin typeface="Calibri"/>
+              </a:defRPr>
+            </a:pPr>
+            <a:r>
+              <a:t>02</a:t>
+            </a:r>
+          </a:p>
+        </p:txBody>
+      </p:sp>
+      <p:sp>
+        <p:nvSpPr>
+          <p:cNvPr id="10" name="TextBox 9"/>
+          <p:cNvSpPr txBox="1"/>
+          <p:nvPr/>
+        </p:nvSpPr>
+        <p:spPr>
+          <a:xfrm>
+            <a:off x="1737360" y="3291839"/>
+            <a:ext cx="9326880" cy="365760"/>
+          </a:xfrm>
+          <a:prstGeom prst="rect">
+            <a:avLst/>
+          </a:prstGeom>
+          <a:noFill/>
+        </p:spPr>
+        <p:txBody>
+          <a:bodyPr wrap="square">
+            <a:spAutoFit/>
+          </a:bodyPr>
+          <a:lstStyle/>
+          <a:p>
+            <a:pPr algn="l">
+              <a:defRPr sz="1600" b="1" i="0">
                 <a:solidFill>
                   <a:srgbClr val="FFFFFF"/>
                 </a:solidFill>
@@ -7646,35 +7540,35 @@
               </a:defRPr>
             </a:pPr>
             <a:r>
-              <a:t>to: sergeydesigner</a:t>
-            </a:r>
-          </a:p>
-        </p:txBody>
-      </p:sp>
-      <p:sp>
-        <p:nvSpPr>
-          <p:cNvPr id="8" name="TextBox 7"/>
-          <p:cNvSpPr txBox="1"/>
-          <p:nvPr/>
-        </p:nvSpPr>
-        <p:spPr>
-          <a:xfrm>
-            <a:off x="1097280" y="3749039"/>
-            <a:ext cx="9966960" cy="1097280"/>
-          </a:xfrm>
-          <a:prstGeom prst="rect">
-            <a:avLst/>
-          </a:prstGeom>
-          <a:noFill/>
-        </p:spPr>
-        <p:txBody>
-          <a:bodyPr wrap="square">
-            <a:spAutoFit/>
-          </a:bodyPr>
-          <a:lstStyle/>
-          <a:p>
-            <a:pPr algn="l">
-              <a:defRPr sz="1500" b="0" i="1">
+              <a:t>The Speaking Coach</a:t>
+            </a:r>
+          </a:p>
+        </p:txBody>
+      </p:sp>
+      <p:sp>
+        <p:nvSpPr>
+          <p:cNvPr id="11" name="TextBox 10"/>
+          <p:cNvSpPr txBox="1"/>
+          <p:nvPr/>
+        </p:nvSpPr>
+        <p:spPr>
+          <a:xfrm>
+            <a:off x="1737360" y="3611879"/>
+            <a:ext cx="9326880" cy="365760"/>
+          </a:xfrm>
+          <a:prstGeom prst="rect">
+            <a:avLst/>
+          </a:prstGeom>
+          <a:noFill/>
+        </p:spPr>
+        <p:txBody>
+          <a:bodyPr wrap="square">
+            <a:spAutoFit/>
+          </a:bodyPr>
+          <a:lstStyle/>
+          <a:p>
+            <a:pPr algn="l">
+              <a:defRPr sz="1200" b="0" i="0">
                 <a:solidFill>
                   <a:srgbClr val="E2E2EA"/>
                 </a:solidFill>
@@ -7682,43 +7576,79 @@
               </a:defRPr>
             </a:pPr>
             <a:r>
-              <a:t>"Outstanding design work that impressed the whole team"</a:t>
-            </a:r>
-          </a:p>
-        </p:txBody>
-      </p:sp>
-      <p:sp>
-        <p:nvSpPr>
-          <p:cNvPr id="9" name="TextBox 8"/>
-          <p:cNvSpPr txBox="1"/>
-          <p:nvPr/>
-        </p:nvSpPr>
-        <p:spPr>
-          <a:xfrm>
-            <a:off x="1097280" y="5120640"/>
-            <a:ext cx="9966960" cy="457200"/>
-          </a:xfrm>
-          <a:prstGeom prst="rect">
-            <a:avLst/>
-          </a:prstGeom>
-          <a:noFill/>
-        </p:spPr>
-        <p:txBody>
-          <a:bodyPr wrap="square">
-            <a:spAutoFit/>
-          </a:bodyPr>
-          <a:lstStyle/>
-          <a:p>
-            <a:pPr algn="l">
-              <a:defRPr sz="1200" b="1" i="0">
-                <a:solidFill>
-                  <a:srgbClr val="9B59B6"/>
-                </a:solidFill>
-                <a:latin typeface="Calibri"/>
-              </a:defRPr>
-            </a:pPr>
-            <a:r>
-              <a:t>CRAFT · EXCELLENCE</a:t>
+              <a:t>Highly recommended content on effective communication techniques</a:t>
+            </a:r>
+          </a:p>
+        </p:txBody>
+      </p:sp>
+      <p:sp>
+        <p:nvSpPr>
+          <p:cNvPr id="12" name="TextBox 11"/>
+          <p:cNvSpPr txBox="1"/>
+          <p:nvPr/>
+        </p:nvSpPr>
+        <p:spPr>
+          <a:xfrm>
+            <a:off x="1737360" y="3931920"/>
+            <a:ext cx="9326880" cy="274320"/>
+          </a:xfrm>
+          <a:prstGeom prst="rect">
+            <a:avLst/>
+          </a:prstGeom>
+          <a:noFill/>
+        </p:spPr>
+        <p:txBody>
+          <a:bodyPr wrap="square">
+            <a:spAutoFit/>
+          </a:bodyPr>
+          <a:lstStyle/>
+          <a:p>
+            <a:pPr algn="l">
+              <a:defRPr sz="1100" b="0" i="0">
+                <a:solidFill>
+                  <a:srgbClr val="8F95A3"/>
+                </a:solidFill>
+                <a:latin typeface="Calibri"/>
+              </a:defRPr>
+            </a:pPr>
+            <a:r>
+              <a:t>Shared by Maria Plendukova · 2</a:t>
+            </a:r>
+          </a:p>
+        </p:txBody>
+      </p:sp>
+      <p:sp>
+        <p:nvSpPr>
+          <p:cNvPr id="13" name="TextBox 12"/>
+          <p:cNvSpPr txBox="1"/>
+          <p:nvPr/>
+        </p:nvSpPr>
+        <p:spPr>
+          <a:xfrm>
+            <a:off x="1097280" y="5943600"/>
+            <a:ext cx="9966960" cy="274320"/>
+          </a:xfrm>
+          <a:prstGeom prst="rect">
+            <a:avLst/>
+          </a:prstGeom>
+          <a:noFill/>
+        </p:spPr>
+        <p:txBody>
+          <a:bodyPr wrap="square">
+            <a:spAutoFit/>
+          </a:bodyPr>
+          <a:lstStyle/>
+          <a:p>
+            <a:pPr algn="l">
+              <a:defRPr sz="1100" b="0" i="0">
+                <a:solidFill>
+                  <a:srgbClr val="5C6270"/>
+                </a:solidFill>
+                <a:latin typeface="Calibri"/>
+              </a:defRPr>
+            </a:pPr>
+            <a:r>
+              <a:t>#general</a:t>
             </a:r>
           </a:p>
         </p:txBody>
@@ -7764,7 +7694,7 @@
             <a:avLst/>
           </a:prstGeom>
           <a:solidFill>
-            <a:srgbClr val="3498DB"/>
+            <a:srgbClr val="FF9F43"/>
           </a:solidFill>
           <a:ln>
             <a:noFill/>
@@ -7817,13 +7747,13 @@
             <a:pPr algn="l">
               <a:defRPr sz="1000" b="1">
                 <a:solidFill>
-                  <a:srgbClr val="3498DB"/>
-                </a:solidFill>
-                <a:latin typeface="Calibri"/>
-              </a:defRPr>
-            </a:pPr>
-            <a:r>
-              <a:t>🧠  CLAPS</a:t>
+                  <a:srgbClr val="FF9F43"/>
+                </a:solidFill>
+                <a:latin typeface="Calibri"/>
+              </a:defRPr>
+            </a:pPr>
+            <a:r>
+              <a:t>👏  CLAPS</a:t>
             </a:r>
           </a:p>
         </p:txBody>
@@ -7853,13 +7783,13 @@
             <a:pPr algn="l">
               <a:defRPr sz="3200" b="1" i="0">
                 <a:solidFill>
-                  <a:srgbClr val="3498DB"/>
-                </a:solidFill>
-                <a:latin typeface="Calibri"/>
-              </a:defRPr>
-            </a:pPr>
-            <a:r>
-              <a:t>Technical Brilliance</a:t>
+                  <a:srgbClr val="FF9F43"/>
+                </a:solidFill>
+                <a:latin typeface="Calibri"/>
+              </a:defRPr>
+            </a:pPr>
+            <a:r>
+              <a:t>Design Excellence</a:t>
             </a:r>
           </a:p>
         </p:txBody>
@@ -7889,7 +7819,7 @@
             <a:pPr algn="l">
               <a:defRPr sz="2800" b="1" i="0">
                 <a:solidFill>
-                  <a:srgbClr val="3498DB"/>
+                  <a:srgbClr val="FF9F43"/>
                 </a:solidFill>
                 <a:latin typeface="Calibri"/>
               </a:defRPr>
@@ -7931,7 +7861,7 @@
               </a:defRPr>
             </a:pPr>
             <a:r>
-              <a:t>from Sem Sinchenko</a:t>
+              <a:t>from pavel.savinskiy</a:t>
             </a:r>
           </a:p>
         </p:txBody>
@@ -7967,7 +7897,7 @@
               </a:defRPr>
             </a:pPr>
             <a:r>
-              <a:t>to: Ildar Fatykhov</a:t>
+              <a:t>to: sergeydesigner</a:t>
             </a:r>
           </a:p>
         </p:txBody>
@@ -8003,7 +7933,7 @@
               </a:defRPr>
             </a:pPr>
             <a:r>
-              <a:t>"Exceptional technical contribution that moved us forward"</a:t>
+              <a:t>"Outstanding design work and creative contributions"</a:t>
             </a:r>
           </a:p>
         </p:txBody>
@@ -8033,13 +7963,13 @@
             <a:pPr algn="l">
               <a:defRPr sz="1200" b="1" i="0">
                 <a:solidFill>
-                  <a:srgbClr val="3498DB"/>
-                </a:solidFill>
-                <a:latin typeface="Calibri"/>
-              </a:defRPr>
-            </a:pPr>
-            <a:r>
-              <a:t>INNOVATION · EXCELLENCE</a:t>
+                  <a:srgbClr val="FF9F43"/>
+                </a:solidFill>
+                <a:latin typeface="Calibri"/>
+              </a:defRPr>
+            </a:pPr>
+            <a:r>
+              <a:t>We work TOGETHER · SERVE OTHERS</a:t>
             </a:r>
           </a:p>
         </p:txBody>
@@ -8085,7 +8015,7 @@
             <a:avLst/>
           </a:prstGeom>
           <a:solidFill>
-            <a:srgbClr val="E67E22"/>
+            <a:srgbClr val="00B894"/>
           </a:solidFill>
           <a:ln>
             <a:noFill/>
@@ -8138,13 +8068,13 @@
             <a:pPr algn="l">
               <a:defRPr sz="1000" b="1">
                 <a:solidFill>
-                  <a:srgbClr val="E67E22"/>
-                </a:solidFill>
-                <a:latin typeface="Calibri"/>
-              </a:defRPr>
-            </a:pPr>
-            <a:r>
-              <a:t>💪  CLAPS</a:t>
+                  <a:srgbClr val="00B894"/>
+                </a:solidFill>
+                <a:latin typeface="Calibri"/>
+              </a:defRPr>
+            </a:pPr>
+            <a:r>
+              <a:t>🌟  CLAPS</a:t>
             </a:r>
           </a:p>
         </p:txBody>
@@ -8174,13 +8104,13 @@
             <a:pPr algn="l">
               <a:defRPr sz="3200" b="1" i="0">
                 <a:solidFill>
-                  <a:srgbClr val="E67E22"/>
-                </a:solidFill>
-                <a:latin typeface="Calibri"/>
-              </a:defRPr>
-            </a:pPr>
-            <a:r>
-              <a:t>Team Collaboration Win</a:t>
+                  <a:srgbClr val="00B894"/>
+                </a:solidFill>
+                <a:latin typeface="Calibri"/>
+              </a:defRPr>
+            </a:pPr>
+            <a:r>
+              <a:t>DevOps Heroes</a:t>
             </a:r>
           </a:p>
         </p:txBody>
@@ -8210,13 +8140,13 @@
             <a:pPr algn="l">
               <a:defRPr sz="2800" b="1" i="0">
                 <a:solidFill>
-                  <a:srgbClr val="E67E22"/>
-                </a:solidFill>
-                <a:latin typeface="Calibri"/>
-              </a:defRPr>
-            </a:pPr>
-            <a:r>
-              <a:t>8</a:t>
+                  <a:srgbClr val="00B894"/>
+                </a:solidFill>
+                <a:latin typeface="Calibri"/>
+              </a:defRPr>
+            </a:pPr>
+            <a:r>
+              <a:t>30</a:t>
             </a:r>
           </a:p>
         </p:txBody>
@@ -8252,7 +8182,7 @@
               </a:defRPr>
             </a:pPr>
             <a:r>
-              <a:t>from Alexandr Zhitlukhin</a:t>
+              <a:t>from Gleb Krahotkin</a:t>
             </a:r>
           </a:p>
         </p:txBody>
@@ -8288,7 +8218,7 @@
               </a:defRPr>
             </a:pPr>
             <a:r>
-              <a:t>to: ArtKip, Taha, Agustin, Francesco, Alessandro, Anna Timoshenko</a:t>
+              <a:t>to: Hierman Pelekh</a:t>
             </a:r>
           </a:p>
         </p:txBody>
@@ -8324,7 +8254,7 @@
               </a:defRPr>
             </a:pPr>
             <a:r>
-              <a:t>"Amazing teamwork and collaboration across multiple areas"</a:t>
+              <a:t>"Exceptional technical contributions to infrastructure"</a:t>
             </a:r>
           </a:p>
         </p:txBody>
@@ -8354,13 +8284,13 @@
             <a:pPr algn="l">
               <a:defRPr sz="1200" b="1" i="0">
                 <a:solidFill>
-                  <a:srgbClr val="E67E22"/>
-                </a:solidFill>
-                <a:latin typeface="Calibri"/>
-              </a:defRPr>
-            </a:pPr>
-            <a:r>
-              <a:t>TOGETHER · SERVE OTHERS</a:t>
+                  <a:srgbClr val="00B894"/>
+                </a:solidFill>
+                <a:latin typeface="Calibri"/>
+              </a:defRPr>
+            </a:pPr>
+            <a:r>
+              <a:t>Technical Excellence · Innovation</a:t>
             </a:r>
           </a:p>
         </p:txBody>
@@ -8406,7 +8336,7 @@
             <a:avLst/>
           </a:prstGeom>
           <a:solidFill>
-            <a:srgbClr val="27AE60"/>
+            <a:srgbClr val="E17055"/>
           </a:solidFill>
           <a:ln>
             <a:noFill/>
@@ -8459,13 +8389,13 @@
             <a:pPr algn="l">
               <a:defRPr sz="1000" b="1">
                 <a:solidFill>
-                  <a:srgbClr val="27AE60"/>
-                </a:solidFill>
-                <a:latin typeface="Calibri"/>
-              </a:defRPr>
-            </a:pPr>
-            <a:r>
-              <a:t>🎯  CLAPS</a:t>
+                  <a:srgbClr val="E17055"/>
+                </a:solidFill>
+                <a:latin typeface="Calibri"/>
+              </a:defRPr>
+            </a:pPr>
+            <a:r>
+              <a:t>💪  CLAPS</a:t>
             </a:r>
           </a:p>
         </p:txBody>
@@ -8495,13 +8425,13 @@
             <a:pPr algn="l">
               <a:defRPr sz="3200" b="1" i="0">
                 <a:solidFill>
-                  <a:srgbClr val="27AE60"/>
-                </a:solidFill>
-                <a:latin typeface="Calibri"/>
-              </a:defRPr>
-            </a:pPr>
-            <a:r>
-              <a:t>Outstanding Performance</a:t>
+                  <a:srgbClr val="E17055"/>
+                </a:solidFill>
+                <a:latin typeface="Calibri"/>
+              </a:defRPr>
+            </a:pPr>
+            <a:r>
+              <a:t>Development Powerhouse</a:t>
             </a:r>
           </a:p>
         </p:txBody>
@@ -8531,13 +8461,13 @@
             <a:pPr algn="l">
               <a:defRPr sz="2800" b="1" i="0">
                 <a:solidFill>
-                  <a:srgbClr val="27AE60"/>
-                </a:solidFill>
-                <a:latin typeface="Calibri"/>
-              </a:defRPr>
-            </a:pPr>
-            <a:r>
-              <a:t>40</a:t>
+                  <a:srgbClr val="E17055"/>
+                </a:solidFill>
+                <a:latin typeface="Calibri"/>
+              </a:defRPr>
+            </a:pPr>
+            <a:r>
+              <a:t>50</a:t>
             </a:r>
           </a:p>
         </p:txBody>
@@ -8573,7 +8503,7 @@
               </a:defRPr>
             </a:pPr>
             <a:r>
-              <a:t>from Anastasia Sokolova</a:t>
+              <a:t>from Sem Sinchenko</a:t>
             </a:r>
           </a:p>
         </p:txBody>
@@ -8609,7 +8539,7 @@
               </a:defRPr>
             </a:pPr>
             <a:r>
-              <a:t>to: Sasha Sakovich</a:t>
+              <a:t>to: Ildar Fatykhov</a:t>
             </a:r>
           </a:p>
         </p:txBody>
@@ -8645,7 +8575,7 @@
               </a:defRPr>
             </a:pPr>
             <a:r>
-              <a:t>"Exceptional work that deserved recognition"</a:t>
+              <a:t>"Brilliant technical execution and problem-solving"</a:t>
             </a:r>
           </a:p>
         </p:txBody>
@@ -8675,13 +8605,13 @@
             <a:pPr algn="l">
               <a:defRPr sz="1200" b="1" i="0">
                 <a:solidFill>
-                  <a:srgbClr val="27AE60"/>
-                </a:solidFill>
-                <a:latin typeface="Calibri"/>
-              </a:defRPr>
-            </a:pPr>
-            <a:r>
-              <a:t>EXCELLENCE · DELIVER</a:t>
+                  <a:srgbClr val="E17055"/>
+                </a:solidFill>
+                <a:latin typeface="Calibri"/>
+              </a:defRPr>
+            </a:pPr>
+            <a:r>
+              <a:t>Excellence · Innovation</a:t>
             </a:r>
           </a:p>
         </p:txBody>
@@ -8727,7 +8657,7 @@
             <a:avLst/>
           </a:prstGeom>
           <a:solidFill>
-            <a:srgbClr val="F39C12"/>
+            <a:srgbClr val="6C5CE7"/>
           </a:solidFill>
           <a:ln>
             <a:noFill/>
@@ -8780,13 +8710,13 @@
             <a:pPr algn="l">
               <a:defRPr sz="1000" b="1">
                 <a:solidFill>
-                  <a:srgbClr val="F39C12"/>
-                </a:solidFill>
-                <a:latin typeface="Calibri"/>
-              </a:defRPr>
-            </a:pPr>
-            <a:r>
-              <a:t>🌟  CLAPS</a:t>
+                  <a:srgbClr val="6C5CE7"/>
+                </a:solidFill>
+                <a:latin typeface="Calibri"/>
+              </a:defRPr>
+            </a:pPr>
+            <a:r>
+              <a:t>🎯  CLAPS</a:t>
             </a:r>
           </a:p>
         </p:txBody>
@@ -8816,13 +8746,13 @@
             <a:pPr algn="l">
               <a:defRPr sz="3200" b="1" i="0">
                 <a:solidFill>
-                  <a:srgbClr val="F39C12"/>
-                </a:solidFill>
-                <a:latin typeface="Calibri"/>
-              </a:defRPr>
-            </a:pPr>
-            <a:r>
-              <a:t>DevOps Hero</a:t>
+                  <a:srgbClr val="6C5CE7"/>
+                </a:solidFill>
+                <a:latin typeface="Calibri"/>
+              </a:defRPr>
+            </a:pPr>
+            <a:r>
+              <a:t>Exceptional Support</a:t>
             </a:r>
           </a:p>
         </p:txBody>
@@ -8852,13 +8782,13 @@
             <a:pPr algn="l">
               <a:defRPr sz="2800" b="1" i="0">
                 <a:solidFill>
-                  <a:srgbClr val="F39C12"/>
-                </a:solidFill>
-                <a:latin typeface="Calibri"/>
-              </a:defRPr>
-            </a:pPr>
-            <a:r>
-              <a:t>30</a:t>
+                  <a:srgbClr val="6C5CE7"/>
+                </a:solidFill>
+                <a:latin typeface="Calibri"/>
+              </a:defRPr>
+            </a:pPr>
+            <a:r>
+              <a:t>40</a:t>
             </a:r>
           </a:p>
         </p:txBody>
@@ -8894,7 +8824,7 @@
               </a:defRPr>
             </a:pPr>
             <a:r>
-              <a:t>from Gleb Krahotkin</a:t>
+              <a:t>from Anastasia Sokolova</a:t>
             </a:r>
           </a:p>
         </p:txBody>
@@ -8930,7 +8860,7 @@
               </a:defRPr>
             </a:pPr>
             <a:r>
-              <a:t>to: Hierman Pelekh</a:t>
+              <a:t>to: Sasha Sakovich</a:t>
             </a:r>
           </a:p>
         </p:txBody>
@@ -8966,7 +8896,7 @@
               </a:defRPr>
             </a:pPr>
             <a:r>
-              <a:t>"Outstanding technical contribution to our infrastructure"</a:t>
+              <a:t>"Outstanding customer support and problem resolution"</a:t>
             </a:r>
           </a:p>
         </p:txBody>
@@ -8996,13 +8926,13 @@
             <a:pPr algn="l">
               <a:defRPr sz="1200" b="1" i="0">
                 <a:solidFill>
-                  <a:srgbClr val="F39C12"/>
-                </a:solidFill>
-                <a:latin typeface="Calibri"/>
-              </a:defRPr>
-            </a:pPr>
-            <a:r>
-              <a:t>INNOVATION · SERVE OTHERS</a:t>
+                  <a:srgbClr val="6C5CE7"/>
+                </a:solidFill>
+                <a:latin typeface="Calibri"/>
+              </a:defRPr>
+            </a:pPr>
+            <a:r>
+              <a:t>Customer Focus · Excellence</a:t>
             </a:r>
           </a:p>
         </p:txBody>

--- a/data/archive/pulse_2026-03-12.pptx
+++ b/data/archive/pulse_2026-03-12.pptx
@@ -22,7 +22,6 @@
     <p:sldId id="270" r:id="rId21"/>
     <p:sldId id="271" r:id="rId22"/>
     <p:sldId id="272" r:id="rId23"/>
-    <p:sldId id="273" r:id="rId24"/>
   </p:sldIdLst>
   <p:sldSz cx="12191695" cy="6858000" type="screen4x3"/>
   <p:notesSz cx="6858000" cy="9144000"/>
@@ -3305,7 +3304,7 @@
             <a:avLst/>
           </a:prstGeom>
           <a:solidFill>
-            <a:srgbClr val="00B894"/>
+            <a:srgbClr val="4CAF50"/>
           </a:solidFill>
           <a:ln>
             <a:noFill/>
@@ -3358,7 +3357,7 @@
             <a:pPr algn="l">
               <a:defRPr sz="1000" b="1">
                 <a:solidFill>
-                  <a:srgbClr val="00B894"/>
+                  <a:srgbClr val="4CAF50"/>
                 </a:solidFill>
                 <a:latin typeface="Calibri"/>
               </a:defRPr>
@@ -3394,13 +3393,13 @@
             <a:pPr algn="l">
               <a:defRPr sz="3200" b="1" i="0">
                 <a:solidFill>
-                  <a:srgbClr val="00B894"/>
-                </a:solidFill>
-                <a:latin typeface="Calibri"/>
-              </a:defRPr>
-            </a:pPr>
-            <a:r>
-              <a:t>Team Collaboration</a:t>
+                  <a:srgbClr val="4CAF50"/>
+                </a:solidFill>
+                <a:latin typeface="Calibri"/>
+              </a:defRPr>
+            </a:pPr>
+            <a:r>
+              <a:t>Team Synergy</a:t>
             </a:r>
           </a:p>
         </p:txBody>
@@ -3430,13 +3429,13 @@
             <a:pPr algn="l">
               <a:defRPr sz="2800" b="1" i="0">
                 <a:solidFill>
-                  <a:srgbClr val="00B894"/>
-                </a:solidFill>
-                <a:latin typeface="Calibri"/>
-              </a:defRPr>
-            </a:pPr>
-            <a:r>
-              <a:t>25</a:t>
+                  <a:srgbClr val="4CAF50"/>
+                </a:solidFill>
+                <a:latin typeface="Calibri"/>
+              </a:defRPr>
+            </a:pPr>
+            <a:r>
+              <a:t>8</a:t>
             </a:r>
           </a:p>
         </p:txBody>
@@ -3472,7 +3471,7 @@
               </a:defRPr>
             </a:pPr>
             <a:r>
-              <a:t>from Roman Rinchinov</a:t>
+              <a:t>from Alexandr Zhitlukhin</a:t>
             </a:r>
           </a:p>
         </p:txBody>
@@ -3508,7 +3507,7 @@
               </a:defRPr>
             </a:pPr>
             <a:r>
-              <a:t>to: Vasyl Plesiuk</a:t>
+              <a:t>to: ArtKip, Taha, Agustin, Francesco, Alessandro, Anna Timoshenko</a:t>
             </a:r>
           </a:p>
         </p:txBody>
@@ -3544,7 +3543,7 @@
               </a:defRPr>
             </a:pPr>
             <a:r>
-              <a:t>"Excellent teamwork and collaborative spirit"</a:t>
+              <a:t>"Amazing cross-team collaboration on key initiatives"</a:t>
             </a:r>
           </a:p>
         </p:txBody>
@@ -3574,13 +3573,13 @@
             <a:pPr algn="l">
               <a:defRPr sz="1200" b="1" i="0">
                 <a:solidFill>
-                  <a:srgbClr val="00B894"/>
-                </a:solidFill>
-                <a:latin typeface="Calibri"/>
-              </a:defRPr>
-            </a:pPr>
-            <a:r>
-              <a:t>We work TOGETHER · Team Excellence</a:t>
+                  <a:srgbClr val="4CAF50"/>
+                </a:solidFill>
+                <a:latin typeface="Calibri"/>
+              </a:defRPr>
+            </a:pPr>
+            <a:r>
+              <a:t>WORK TOGETHER · SERVE OTHERS</a:t>
             </a:r>
           </a:p>
         </p:txBody>
@@ -3626,7 +3625,7 @@
             <a:avLst/>
           </a:prstGeom>
           <a:solidFill>
-            <a:srgbClr val="FDCB6E"/>
+            <a:srgbClr val="FF5722"/>
           </a:solidFill>
           <a:ln>
             <a:noFill/>
@@ -3679,13 +3678,13 @@
             <a:pPr algn="l">
               <a:defRPr sz="1000" b="1">
                 <a:solidFill>
-                  <a:srgbClr val="FDCB6E"/>
-                </a:solidFill>
-                <a:latin typeface="Calibri"/>
-              </a:defRPr>
-            </a:pPr>
-            <a:r>
-              <a:t>⭐  CLAPS</a:t>
+                  <a:srgbClr val="FF5722"/>
+                </a:solidFill>
+                <a:latin typeface="Calibri"/>
+              </a:defRPr>
+            </a:pPr>
+            <a:r>
+              <a:t>📈  MILESTONE</a:t>
             </a:r>
           </a:p>
         </p:txBody>
@@ -3715,13 +3714,13 @@
             <a:pPr algn="l">
               <a:defRPr sz="3200" b="1" i="0">
                 <a:solidFill>
-                  <a:srgbClr val="FDCB6E"/>
-                </a:solidFill>
-                <a:latin typeface="Calibri"/>
-              </a:defRPr>
-            </a:pPr>
-            <a:r>
-              <a:t>Creative Team Power</a:t>
+                  <a:srgbClr val="FF5722"/>
+                </a:solidFill>
+                <a:latin typeface="Calibri"/>
+              </a:defRPr>
+            </a:pPr>
+            <a:r>
+              <a:t>Company Growth</a:t>
             </a:r>
           </a:p>
         </p:txBody>
@@ -3735,29 +3734,29 @@
         <p:spPr>
           <a:xfrm>
             <a:off x="1097280" y="2103120"/>
-            <a:ext cx="2743200" cy="548640"/>
-          </a:xfrm>
-          <a:prstGeom prst="rect">
-            <a:avLst/>
-          </a:prstGeom>
-          <a:noFill/>
-        </p:spPr>
-        <p:txBody>
-          <a:bodyPr wrap="square">
-            <a:spAutoFit/>
-          </a:bodyPr>
-          <a:lstStyle/>
-          <a:p>
-            <a:pPr algn="l">
-              <a:defRPr sz="2800" b="1" i="0">
-                <a:solidFill>
-                  <a:srgbClr val="FDCB6E"/>
-                </a:solidFill>
-                <a:latin typeface="Calibri"/>
-              </a:defRPr>
-            </a:pPr>
-            <a:r>
-              <a:t>8</a:t>
+            <a:ext cx="4572000" cy="822960"/>
+          </a:xfrm>
+          <a:prstGeom prst="rect">
+            <a:avLst/>
+          </a:prstGeom>
+          <a:noFill/>
+        </p:spPr>
+        <p:txBody>
+          <a:bodyPr wrap="square">
+            <a:spAutoFit/>
+          </a:bodyPr>
+          <a:lstStyle/>
+          <a:p>
+            <a:pPr algn="l">
+              <a:defRPr sz="5200" b="1" i="0">
+                <a:solidFill>
+                  <a:srgbClr val="FF5722"/>
+                </a:solidFill>
+                <a:latin typeface="Calibri"/>
+              </a:defRPr>
+            </a:pPr>
+            <a:r>
+              <a:t>$100M</a:t>
             </a:r>
           </a:p>
         </p:txBody>
@@ -3770,22 +3769,94 @@
         </p:nvSpPr>
         <p:spPr>
           <a:xfrm>
-            <a:off x="1097280" y="2651760"/>
-            <a:ext cx="9966960" cy="365760"/>
-          </a:xfrm>
-          <a:prstGeom prst="rect">
-            <a:avLst/>
-          </a:prstGeom>
-          <a:noFill/>
-        </p:spPr>
-        <p:txBody>
-          <a:bodyPr wrap="square">
-            <a:spAutoFit/>
-          </a:bodyPr>
-          <a:lstStyle/>
-          <a:p>
-            <a:pPr algn="l">
-              <a:defRPr sz="1400" b="0" i="0">
+            <a:off x="1097280" y="2926080"/>
+            <a:ext cx="4572000" cy="365760"/>
+          </a:xfrm>
+          <a:prstGeom prst="rect">
+            <a:avLst/>
+          </a:prstGeom>
+          <a:noFill/>
+        </p:spPr>
+        <p:txBody>
+          <a:bodyPr wrap="square">
+            <a:spAutoFit/>
+          </a:bodyPr>
+          <a:lstStyle/>
+          <a:p>
+            <a:pPr algn="l">
+              <a:defRPr sz="1100" b="0" i="0">
+                <a:solidFill>
+                  <a:srgbClr val="8F95A3"/>
+                </a:solidFill>
+                <a:latin typeface="Calibri"/>
+              </a:defRPr>
+            </a:pPr>
+            <a:r>
+              <a:t>Gross Profit</a:t>
+            </a:r>
+          </a:p>
+        </p:txBody>
+      </p:sp>
+      <p:sp>
+        <p:nvSpPr>
+          <p:cNvPr id="7" name="TextBox 6"/>
+          <p:cNvSpPr txBox="1"/>
+          <p:nvPr/>
+        </p:nvSpPr>
+        <p:spPr>
+          <a:xfrm>
+            <a:off x="1097280" y="3566160"/>
+            <a:ext cx="9966960" cy="457200"/>
+          </a:xfrm>
+          <a:prstGeom prst="rect">
+            <a:avLst/>
+          </a:prstGeom>
+          <a:noFill/>
+        </p:spPr>
+        <p:txBody>
+          <a:bodyPr wrap="square">
+            <a:spAutoFit/>
+          </a:bodyPr>
+          <a:lstStyle/>
+          <a:p>
+            <a:pPr algn="l">
+              <a:defRPr sz="1800" b="1" i="0">
+                <a:solidFill>
+                  <a:srgbClr val="FFFFFF"/>
+                </a:solidFill>
+                <a:latin typeface="Calibri"/>
+              </a:defRPr>
+            </a:pPr>
+            <a:r>
+              <a:t>40% YoY Growth Trajectory</a:t>
+            </a:r>
+          </a:p>
+        </p:txBody>
+      </p:sp>
+      <p:sp>
+        <p:nvSpPr>
+          <p:cNvPr id="8" name="TextBox 7"/>
+          <p:cNvSpPr txBox="1"/>
+          <p:nvPr/>
+        </p:nvSpPr>
+        <p:spPr>
+          <a:xfrm>
+            <a:off x="1097280" y="4206240"/>
+            <a:ext cx="9966960" cy="1371600"/>
+          </a:xfrm>
+          <a:prstGeom prst="rect">
+            <a:avLst/>
+          </a:prstGeom>
+          <a:noFill/>
+        </p:spPr>
+        <p:txBody>
+          <a:bodyPr wrap="square">
+            <a:spAutoFit/>
+          </a:bodyPr>
+          <a:lstStyle/>
+          <a:p>
+            <a:pPr algn="l">
+              <a:defRPr sz="1500" b="0" i="0">
                 <a:solidFill>
                   <a:srgbClr val="E2E2EA"/>
                 </a:solidFill>
@@ -3793,115 +3864,7 @@
               </a:defRPr>
             </a:pPr>
             <a:r>
-              <a:t>from Alexandr Zhitlukhin</a:t>
-            </a:r>
-          </a:p>
-        </p:txBody>
-      </p:sp>
-      <p:sp>
-        <p:nvSpPr>
-          <p:cNvPr id="7" name="TextBox 6"/>
-          <p:cNvSpPr txBox="1"/>
-          <p:nvPr/>
-        </p:nvSpPr>
-        <p:spPr>
-          <a:xfrm>
-            <a:off x="1097280" y="3108960"/>
-            <a:ext cx="9966960" cy="365760"/>
-          </a:xfrm>
-          <a:prstGeom prst="rect">
-            <a:avLst/>
-          </a:prstGeom>
-          <a:noFill/>
-        </p:spPr>
-        <p:txBody>
-          <a:bodyPr wrap="square">
-            <a:spAutoFit/>
-          </a:bodyPr>
-          <a:lstStyle/>
-          <a:p>
-            <a:pPr algn="l">
-              <a:defRPr sz="1400" b="1" i="0">
-                <a:solidFill>
-                  <a:srgbClr val="FFFFFF"/>
-                </a:solidFill>
-                <a:latin typeface="Calibri"/>
-              </a:defRPr>
-            </a:pPr>
-            <a:r>
-              <a:t>to: ArtKip, Taha, Agustin, Francesco, Alessandro, Anna Timoshenko</a:t>
-            </a:r>
-          </a:p>
-        </p:txBody>
-      </p:sp>
-      <p:sp>
-        <p:nvSpPr>
-          <p:cNvPr id="8" name="TextBox 7"/>
-          <p:cNvSpPr txBox="1"/>
-          <p:nvPr/>
-        </p:nvSpPr>
-        <p:spPr>
-          <a:xfrm>
-            <a:off x="1097280" y="3749039"/>
-            <a:ext cx="9966960" cy="1097280"/>
-          </a:xfrm>
-          <a:prstGeom prst="rect">
-            <a:avLst/>
-          </a:prstGeom>
-          <a:noFill/>
-        </p:spPr>
-        <p:txBody>
-          <a:bodyPr wrap="square">
-            <a:spAutoFit/>
-          </a:bodyPr>
-          <a:lstStyle/>
-          <a:p>
-            <a:pPr algn="l">
-              <a:defRPr sz="1500" b="0" i="1">
-                <a:solidFill>
-                  <a:srgbClr val="E2E2EA"/>
-                </a:solidFill>
-                <a:latin typeface="Calibri"/>
-              </a:defRPr>
-            </a:pPr>
-            <a:r>
-              <a:t>"Amazing collaborative creative work"</a:t>
-            </a:r>
-          </a:p>
-        </p:txBody>
-      </p:sp>
-      <p:sp>
-        <p:nvSpPr>
-          <p:cNvPr id="9" name="TextBox 8"/>
-          <p:cNvSpPr txBox="1"/>
-          <p:nvPr/>
-        </p:nvSpPr>
-        <p:spPr>
-          <a:xfrm>
-            <a:off x="1097280" y="5120640"/>
-            <a:ext cx="9966960" cy="457200"/>
-          </a:xfrm>
-          <a:prstGeom prst="rect">
-            <a:avLst/>
-          </a:prstGeom>
-          <a:noFill/>
-        </p:spPr>
-        <p:txBody>
-          <a:bodyPr wrap="square">
-            <a:spAutoFit/>
-          </a:bodyPr>
-          <a:lstStyle/>
-          <a:p>
-            <a:pPr algn="l">
-              <a:defRPr sz="1200" b="1" i="0">
-                <a:solidFill>
-                  <a:srgbClr val="FDCB6E"/>
-                </a:solidFill>
-                <a:latin typeface="Calibri"/>
-              </a:defRPr>
-            </a:pPr>
-            <a:r>
-              <a:t>Creativity · Teamwork · Excellence</a:t>
+              <a:t>Building toward our ambitious $50B vision with strong fundamentals</a:t>
             </a:r>
           </a:p>
         </p:txBody>
@@ -3947,7 +3910,7 @@
             <a:avLst/>
           </a:prstGeom>
           <a:solidFill>
-            <a:srgbClr val="A29BFE"/>
+            <a:srgbClr val="9C27B0"/>
           </a:solidFill>
           <a:ln>
             <a:noFill/>
@@ -4000,13 +3963,13 @@
             <a:pPr algn="l">
               <a:defRPr sz="1000" b="1">
                 <a:solidFill>
-                  <a:srgbClr val="A29BFE"/>
-                </a:solidFill>
-                <a:latin typeface="Calibri"/>
-              </a:defRPr>
-            </a:pPr>
-            <a:r>
-              <a:t>💼  WIN</a:t>
+                  <a:srgbClr val="9C27B0"/>
+                </a:solidFill>
+                <a:latin typeface="Calibri"/>
+              </a:defRPr>
+            </a:pPr>
+            <a:r>
+              <a:t>🤖  WIN</a:t>
             </a:r>
           </a:p>
         </p:txBody>
@@ -4036,13 +3999,13 @@
             <a:pPr algn="l">
               <a:defRPr sz="3200" b="1" i="0">
                 <a:solidFill>
-                  <a:srgbClr val="A29BFE"/>
-                </a:solidFill>
-                <a:latin typeface="Calibri"/>
-              </a:defRPr>
-            </a:pPr>
-            <a:r>
-              <a:t>Strategic Leadership</a:t>
+                  <a:srgbClr val="9C27B0"/>
+                </a:solidFill>
+                <a:latin typeface="Calibri"/>
+              </a:defRPr>
+            </a:pPr>
+            <a:r>
+              <a:t>AI Revolution</a:t>
             </a:r>
           </a:p>
         </p:txBody>
@@ -4072,13 +4035,13 @@
             <a:pPr algn="l">
               <a:defRPr sz="4800" b="1" i="0">
                 <a:solidFill>
-                  <a:srgbClr val="A29BFE"/>
-                </a:solidFill>
-                <a:latin typeface="Calibri"/>
-              </a:defRPr>
-            </a:pPr>
-            <a:r>
-              <a:t>4</a:t>
+                  <a:srgbClr val="9C27B0"/>
+                </a:solidFill>
+                <a:latin typeface="Calibri"/>
+              </a:defRPr>
+            </a:pPr>
+            <a:r>
+              <a:t>1,000+</a:t>
             </a:r>
           </a:p>
         </p:txBody>
@@ -4114,7 +4077,7 @@
               </a:defRPr>
             </a:pPr>
             <a:r>
-              <a:t>core concepts</a:t>
+              <a:t>OKRs checked daily</a:t>
             </a:r>
           </a:p>
         </p:txBody>
@@ -4150,7 +4113,7 @@
               </a:defRPr>
             </a:pPr>
             <a:r>
-              <a:t>by Pavel Golubev</a:t>
+              <a:t>by Engineering Teams</a:t>
             </a:r>
           </a:p>
         </p:txBody>
@@ -4186,7 +4149,7 @@
               </a:defRPr>
             </a:pPr>
             <a:r>
-              <a:t>CV Health Rate Initiative</a:t>
+              <a:t>AI-Powered OKR Auditor Live</a:t>
             </a:r>
           </a:p>
         </p:txBody>
@@ -4222,7 +4185,7 @@
               </a:defRPr>
             </a:pPr>
             <a:r>
-              <a:t>Turning Core Values and Leadership Principles into real operating constraints and decision-making guardrails</a:t>
+              <a:t>Every employee will manage 5-10 AI agents within 3-6 months</a:t>
             </a:r>
           </a:p>
         </p:txBody>
@@ -4258,7 +4221,7 @@
               </a:defRPr>
             </a:pPr>
             <a:r>
-              <a:t>💬 "Moving from slogans to actionable business framework with measurable outcomes"</a:t>
+              <a:t>💬 "Automation is transforming how we work and scale"</a:t>
             </a:r>
           </a:p>
         </p:txBody>
@@ -4304,7 +4267,7 @@
             <a:avLst/>
           </a:prstGeom>
           <a:solidFill>
-            <a:srgbClr val="00B894"/>
+            <a:srgbClr val="4CAF50"/>
           </a:solidFill>
           <a:ln>
             <a:noFill/>
@@ -4357,13 +4320,13 @@
             <a:pPr algn="l">
               <a:defRPr sz="1000" b="1">
                 <a:solidFill>
-                  <a:srgbClr val="00B894"/>
-                </a:solidFill>
-                <a:latin typeface="Calibri"/>
-              </a:defRPr>
-            </a:pPr>
-            <a:r>
-              <a:t>🎯  MILESTONE</a:t>
+                  <a:srgbClr val="4CAF50"/>
+                </a:solidFill>
+                <a:latin typeface="Calibri"/>
+              </a:defRPr>
+            </a:pPr>
+            <a:r>
+              <a:t>🎮  WIN</a:t>
             </a:r>
           </a:p>
         </p:txBody>
@@ -4393,13 +4356,13 @@
             <a:pPr algn="l">
               <a:defRPr sz="3200" b="1" i="0">
                 <a:solidFill>
-                  <a:srgbClr val="00B894"/>
-                </a:solidFill>
-                <a:latin typeface="Calibri"/>
-              </a:defRPr>
-            </a:pPr>
-            <a:r>
-              <a:t>Company Growth</a:t>
+                  <a:srgbClr val="4CAF50"/>
+                </a:solidFill>
+                <a:latin typeface="Calibri"/>
+              </a:defRPr>
+            </a:pPr>
+            <a:r>
+              <a:t>Gaming Milestone</a:t>
             </a:r>
           </a:p>
         </p:txBody>
@@ -4427,15 +4390,15 @@
           <a:lstStyle/>
           <a:p>
             <a:pPr algn="l">
-              <a:defRPr sz="5200" b="1" i="0">
-                <a:solidFill>
-                  <a:srgbClr val="00B894"/>
-                </a:solidFill>
-                <a:latin typeface="Calibri"/>
-              </a:defRPr>
-            </a:pPr>
-            <a:r>
-              <a:t>$20M</a:t>
+              <a:defRPr sz="4800" b="1" i="0">
+                <a:solidFill>
+                  <a:srgbClr val="4CAF50"/>
+                </a:solidFill>
+                <a:latin typeface="Calibri"/>
+              </a:defRPr>
+            </a:pPr>
+            <a:r>
+              <a:t>61%</a:t>
             </a:r>
           </a:p>
         </p:txBody>
@@ -4448,7 +4411,7 @@
         </p:nvSpPr>
         <p:spPr>
           <a:xfrm>
-            <a:off x="1097280" y="2926080"/>
+            <a:off x="1097280" y="2834640"/>
             <a:ext cx="4572000" cy="365760"/>
           </a:xfrm>
           <a:prstGeom prst="rect">
@@ -4463,7 +4426,7 @@
           <a:lstStyle/>
           <a:p>
             <a:pPr algn="l">
-              <a:defRPr sz="1100" b="0" i="0">
+              <a:defRPr sz="1200" b="0" i="0">
                 <a:solidFill>
                   <a:srgbClr val="8F95A3"/>
                 </a:solidFill>
@@ -4471,7 +4434,7 @@
               </a:defRPr>
             </a:pPr>
             <a:r>
-              <a:t>EBITDA Achievement</a:t>
+              <a:t>retention rate</a:t>
             </a:r>
           </a:p>
         </p:txBody>
@@ -4484,7 +4447,43 @@
         </p:nvSpPr>
         <p:spPr>
           <a:xfrm>
-            <a:off x="1097280" y="3566160"/>
+            <a:off x="1097280" y="3291840"/>
+            <a:ext cx="9966960" cy="365760"/>
+          </a:xfrm>
+          <a:prstGeom prst="rect">
+            <a:avLst/>
+          </a:prstGeom>
+          <a:noFill/>
+        </p:spPr>
+        <p:txBody>
+          <a:bodyPr wrap="square">
+            <a:spAutoFit/>
+          </a:bodyPr>
+          <a:lstStyle/>
+          <a:p>
+            <a:pPr algn="l">
+              <a:defRPr sz="1400" b="0" i="0">
+                <a:solidFill>
+                  <a:srgbClr val="E2E2EA"/>
+                </a:solidFill>
+                <a:latin typeface="Calibri"/>
+              </a:defRPr>
+            </a:pPr>
+            <a:r>
+              <a:t>by Gaming Division</a:t>
+            </a:r>
+          </a:p>
+        </p:txBody>
+      </p:sp>
+      <p:sp>
+        <p:nvSpPr>
+          <p:cNvPr id="8" name="TextBox 7"/>
+          <p:cNvSpPr txBox="1"/>
+          <p:nvPr/>
+        </p:nvSpPr>
+        <p:spPr>
+          <a:xfrm>
+            <a:off x="1097280" y="3840480"/>
             <a:ext cx="9966960" cy="457200"/>
           </a:xfrm>
           <a:prstGeom prst="rect">
@@ -4507,35 +4506,35 @@
               </a:defRPr>
             </a:pPr>
             <a:r>
-              <a:t>40% YoY Growth Trajectory</a:t>
-            </a:r>
-          </a:p>
-        </p:txBody>
-      </p:sp>
-      <p:sp>
-        <p:nvSpPr>
-          <p:cNvPr id="8" name="TextBox 7"/>
-          <p:cNvSpPr txBox="1"/>
-          <p:nvPr/>
-        </p:nvSpPr>
-        <p:spPr>
-          <a:xfrm>
-            <a:off x="1097280" y="4206240"/>
-            <a:ext cx="9966960" cy="1371600"/>
-          </a:xfrm>
-          <a:prstGeom prst="rect">
-            <a:avLst/>
-          </a:prstGeom>
-          <a:noFill/>
-        </p:spPr>
-        <p:txBody>
-          <a:bodyPr wrap="square">
-            <a:spAutoFit/>
-          </a:bodyPr>
-          <a:lstStyle/>
-          <a:p>
-            <a:pPr algn="l">
-              <a:defRPr sz="1500" b="0" i="0">
+              <a:t>Infinite Minesweeper Exceeds Benchmarks</a:t>
+            </a:r>
+          </a:p>
+        </p:txBody>
+      </p:sp>
+      <p:sp>
+        <p:nvSpPr>
+          <p:cNvPr id="9" name="TextBox 8"/>
+          <p:cNvSpPr txBox="1"/>
+          <p:nvPr/>
+        </p:nvSpPr>
+        <p:spPr>
+          <a:xfrm>
+            <a:off x="1097280" y="4389120"/>
+            <a:ext cx="9966960" cy="914400"/>
+          </a:xfrm>
+          <a:prstGeom prst="rect">
+            <a:avLst/>
+          </a:prstGeom>
+          <a:noFill/>
+        </p:spPr>
+        <p:txBody>
+          <a:bodyPr wrap="square">
+            <a:spAutoFit/>
+          </a:bodyPr>
+          <a:lstStyle/>
+          <a:p>
+            <a:pPr algn="l">
+              <a:defRPr sz="1400" b="0" i="0">
                 <a:solidFill>
                   <a:srgbClr val="E2E2EA"/>
                 </a:solidFill>
@@ -4543,7 +4542,43 @@
               </a:defRPr>
             </a:pPr>
             <a:r>
-              <a:t>Appodeal continues its impressive growth journey toward becoming a $50B company with 1,500 employees</a:t>
+              <a:t>Apple ERA benchmark: 151-160%, we're crushing expectations</a:t>
+            </a:r>
+          </a:p>
+        </p:txBody>
+      </p:sp>
+      <p:sp>
+        <p:nvSpPr>
+          <p:cNvPr id="10" name="TextBox 9"/>
+          <p:cNvSpPr txBox="1"/>
+          <p:nvPr/>
+        </p:nvSpPr>
+        <p:spPr>
+          <a:xfrm>
+            <a:off x="1097280" y="5486400"/>
+            <a:ext cx="9966960" cy="457200"/>
+          </a:xfrm>
+          <a:prstGeom prst="rect">
+            <a:avLst/>
+          </a:prstGeom>
+          <a:noFill/>
+        </p:spPr>
+        <p:txBody>
+          <a:bodyPr wrap="square">
+            <a:spAutoFit/>
+          </a:bodyPr>
+          <a:lstStyle/>
+          <a:p>
+            <a:pPr algn="l">
+              <a:defRPr sz="1300" b="0" i="1">
+                <a:solidFill>
+                  <a:srgbClr val="8F95A3"/>
+                </a:solidFill>
+                <a:latin typeface="Calibri"/>
+              </a:defRPr>
+            </a:pPr>
+            <a:r>
+              <a:t>💬 "Gaming division officially profitable in 2025!"</a:t>
             </a:r>
           </a:p>
         </p:txBody>
@@ -4589,7 +4624,7 @@
             <a:avLst/>
           </a:prstGeom>
           <a:solidFill>
-            <a:srgbClr val="FF6B6B"/>
+            <a:srgbClr val="2196F3"/>
           </a:solidFill>
           <a:ln>
             <a:noFill/>
@@ -4642,13 +4677,13 @@
             <a:pPr algn="l">
               <a:defRPr sz="1000" b="1">
                 <a:solidFill>
-                  <a:srgbClr val="FF6B6B"/>
-                </a:solidFill>
-                <a:latin typeface="Calibri"/>
-              </a:defRPr>
-            </a:pPr>
-            <a:r>
-              <a:t>🤖  WIN</a:t>
+                  <a:srgbClr val="2196F3"/>
+                </a:solidFill>
+                <a:latin typeface="Calibri"/>
+              </a:defRPr>
+            </a:pPr>
+            <a:r>
+              <a:t>🛡️  WIN</a:t>
             </a:r>
           </a:p>
         </p:txBody>
@@ -4678,13 +4713,13 @@
             <a:pPr algn="l">
               <a:defRPr sz="3200" b="1" i="0">
                 <a:solidFill>
-                  <a:srgbClr val="FF6B6B"/>
-                </a:solidFill>
-                <a:latin typeface="Calibri"/>
-              </a:defRPr>
-            </a:pPr>
-            <a:r>
-              <a:t>AI Revolution</a:t>
+                  <a:srgbClr val="2196F3"/>
+                </a:solidFill>
+                <a:latin typeface="Calibri"/>
+              </a:defRPr>
+            </a:pPr>
+            <a:r>
+              <a:t>Security Achievement</a:t>
             </a:r>
           </a:p>
         </p:txBody>
@@ -4714,13 +4749,13 @@
             <a:pPr algn="l">
               <a:defRPr sz="4800" b="1" i="0">
                 <a:solidFill>
-                  <a:srgbClr val="FF6B6B"/>
-                </a:solidFill>
-                <a:latin typeface="Calibri"/>
-              </a:defRPr>
-            </a:pPr>
-            <a:r>
-              <a:t>1000+</a:t>
+                  <a:srgbClr val="2196F3"/>
+                </a:solidFill>
+                <a:latin typeface="Calibri"/>
+              </a:defRPr>
+            </a:pPr>
+            <a:r>
+              <a:t>4%</a:t>
             </a:r>
           </a:p>
         </p:txBody>
@@ -4756,7 +4791,7 @@
               </a:defRPr>
             </a:pPr>
             <a:r>
-              <a:t>OKRs analyzed daily</a:t>
+              <a:t>fraud rate</a:t>
             </a:r>
           </a:p>
         </p:txBody>
@@ -4792,7 +4827,7 @@
               </a:defRPr>
             </a:pPr>
             <a:r>
-              <a:t>by Engineering Teams</a:t>
+              <a:t>by Anti-Fraud Team</a:t>
             </a:r>
           </a:p>
         </p:txBody>
@@ -4828,7 +4863,7 @@
               </a:defRPr>
             </a:pPr>
             <a:r>
-              <a:t>AI-Powered Operations</a:t>
+              <a:t>Fraud Reduced from 22% to Under 4%</a:t>
             </a:r>
           </a:p>
         </p:txBody>
@@ -4864,7 +4899,7 @@
               </a:defRPr>
             </a:pPr>
             <a:r>
-              <a:t>Every employee will manage 5-10 AI agents within 3-6 months as we transform how work gets done</a:t>
+              <a:t>Dynamic SDK signatures proving highly effective</a:t>
             </a:r>
           </a:p>
         </p:txBody>
@@ -4900,7 +4935,7 @@
               </a:defRPr>
             </a:pPr>
             <a:r>
-              <a:t>💬 "OKR Auditor now checks 1,000+ individual OKRs daily via AI automation"</a:t>
+              <a:t>💬 "Protecting our ecosystem and partners"</a:t>
             </a:r>
           </a:p>
         </p:txBody>
@@ -4946,7 +4981,7 @@
             <a:avLst/>
           </a:prstGeom>
           <a:solidFill>
-            <a:srgbClr val="E17055"/>
+            <a:srgbClr val="FF9800"/>
           </a:solidFill>
           <a:ln>
             <a:noFill/>
@@ -4999,13 +5034,13 @@
             <a:pPr algn="l">
               <a:defRPr sz="1000" b="1">
                 <a:solidFill>
-                  <a:srgbClr val="E17055"/>
-                </a:solidFill>
-                <a:latin typeface="Calibri"/>
-              </a:defRPr>
-            </a:pPr>
-            <a:r>
-              <a:t>🎮  WIN</a:t>
+                  <a:srgbClr val="FF9800"/>
+                </a:solidFill>
+                <a:latin typeface="Calibri"/>
+              </a:defRPr>
+            </a:pPr>
+            <a:r>
+              <a:t>💰  WIN</a:t>
             </a:r>
           </a:p>
         </p:txBody>
@@ -5035,13 +5070,13 @@
             <a:pPr algn="l">
               <a:defRPr sz="3200" b="1" i="0">
                 <a:solidFill>
-                  <a:srgbClr val="E17055"/>
-                </a:solidFill>
-                <a:latin typeface="Calibri"/>
-              </a:defRPr>
-            </a:pPr>
-            <a:r>
-              <a:t>Gaming Success</a:t>
+                  <a:srgbClr val="FF9800"/>
+                </a:solidFill>
+                <a:latin typeface="Calibri"/>
+              </a:defRPr>
+            </a:pPr>
+            <a:r>
+              <a:t>Sales Excellence</a:t>
             </a:r>
           </a:p>
         </p:txBody>
@@ -5071,13 +5106,13 @@
             <a:pPr algn="l">
               <a:defRPr sz="4800" b="1" i="0">
                 <a:solidFill>
-                  <a:srgbClr val="E17055"/>
-                </a:solidFill>
-                <a:latin typeface="Calibri"/>
-              </a:defRPr>
-            </a:pPr>
-            <a:r>
-              <a:t>61%</a:t>
+                  <a:srgbClr val="FF9800"/>
+                </a:solidFill>
+                <a:latin typeface="Calibri"/>
+              </a:defRPr>
+            </a:pPr>
+            <a:r>
+              <a:t>$390K</a:t>
             </a:r>
           </a:p>
         </p:txBody>
@@ -5113,7 +5148,7 @@
               </a:defRPr>
             </a:pPr>
             <a:r>
-              <a:t>retention rate</a:t>
+              <a:t>net revenue</a:t>
             </a:r>
           </a:p>
         </p:txBody>
@@ -5149,7 +5184,7 @@
               </a:defRPr>
             </a:pPr>
             <a:r>
-              <a:t>by Gaming Division</a:t>
+              <a:t>by Sales Team</a:t>
             </a:r>
           </a:p>
         </p:txBody>
@@ -5185,7 +5220,7 @@
               </a:defRPr>
             </a:pPr>
             <a:r>
-              <a:t>Infinite Minesweeper Hits Target</a:t>
+              <a:t>8 Deals Closed in One Week</a:t>
             </a:r>
           </a:p>
         </p:txBody>
@@ -5221,7 +5256,7 @@
               </a:defRPr>
             </a:pPr>
             <a:r>
-              <a:t>Achieved 61% retention rate, meeting Apple benchmark ERA: 151-160%</a:t>
+              <a:t>Outstanding performance driving company growth</a:t>
             </a:r>
           </a:p>
         </p:txBody>
@@ -5257,7 +5292,7 @@
               </a:defRPr>
             </a:pPr>
             <a:r>
-              <a:t>💬 "Gaming division turned profitable in 2025 with multiple hit titles"</a:t>
+              <a:t>💬 "Momentum building across all verticals"</a:t>
             </a:r>
           </a:p>
         </p:txBody>
@@ -5303,7 +5338,7 @@
             <a:avLst/>
           </a:prstGeom>
           <a:solidFill>
-            <a:srgbClr val="6C5CE7"/>
+            <a:srgbClr val="8BC34A"/>
           </a:solidFill>
           <a:ln>
             <a:noFill/>
@@ -5356,13 +5391,13 @@
             <a:pPr algn="l">
               <a:defRPr sz="1000" b="1">
                 <a:solidFill>
-                  <a:srgbClr val="6C5CE7"/>
-                </a:solidFill>
-                <a:latin typeface="Calibri"/>
-              </a:defRPr>
-            </a:pPr>
-            <a:r>
-              <a:t>🛡️  WIN</a:t>
+                  <a:srgbClr val="8BC34A"/>
+                </a:solidFill>
+                <a:latin typeface="Calibri"/>
+              </a:defRPr>
+            </a:pPr>
+            <a:r>
+              <a:t>🧘  OFFICE LIFE</a:t>
             </a:r>
           </a:p>
         </p:txBody>
@@ -5392,13 +5427,13 @@
             <a:pPr algn="l">
               <a:defRPr sz="3200" b="1" i="0">
                 <a:solidFill>
-                  <a:srgbClr val="6C5CE7"/>
-                </a:solidFill>
-                <a:latin typeface="Calibri"/>
-              </a:defRPr>
-            </a:pPr>
-            <a:r>
-              <a:t>Security Excellence</a:t>
+                  <a:srgbClr val="8BC34A"/>
+                </a:solidFill>
+                <a:latin typeface="Calibri"/>
+              </a:defRPr>
+            </a:pPr>
+            <a:r>
+              <a:t>Office Wellness</a:t>
             </a:r>
           </a:p>
         </p:txBody>
@@ -5412,29 +5447,29 @@
         <p:spPr>
           <a:xfrm>
             <a:off x="1097280" y="2103120"/>
-            <a:ext cx="4572000" cy="822960"/>
-          </a:xfrm>
-          <a:prstGeom prst="rect">
-            <a:avLst/>
-          </a:prstGeom>
-          <a:noFill/>
-        </p:spPr>
-        <p:txBody>
-          <a:bodyPr wrap="square">
-            <a:spAutoFit/>
-          </a:bodyPr>
-          <a:lstStyle/>
-          <a:p>
-            <a:pPr algn="l">
-              <a:defRPr sz="4800" b="1" i="0">
-                <a:solidFill>
-                  <a:srgbClr val="6C5CE7"/>
-                </a:solidFill>
-                <a:latin typeface="Calibri"/>
-              </a:defRPr>
-            </a:pPr>
-            <a:r>
-              <a:t>4%</a:t>
+            <a:ext cx="9966960" cy="457200"/>
+          </a:xfrm>
+          <a:prstGeom prst="rect">
+            <a:avLst/>
+          </a:prstGeom>
+          <a:noFill/>
+        </p:spPr>
+        <p:txBody>
+          <a:bodyPr wrap="square">
+            <a:spAutoFit/>
+          </a:bodyPr>
+          <a:lstStyle/>
+          <a:p>
+            <a:pPr algn="l">
+              <a:defRPr sz="1800" b="1" i="0">
+                <a:solidFill>
+                  <a:srgbClr val="FFFFFF"/>
+                </a:solidFill>
+                <a:latin typeface="Calibri"/>
+              </a:defRPr>
+            </a:pPr>
+            <a:r>
+              <a:t>Daily Yoga Sessions</a:t>
             </a:r>
           </a:p>
         </p:txBody>
@@ -5447,22 +5482,58 @@
         </p:nvSpPr>
         <p:spPr>
           <a:xfrm>
-            <a:off x="1097280" y="2834640"/>
-            <a:ext cx="4572000" cy="365760"/>
-          </a:xfrm>
-          <a:prstGeom prst="rect">
-            <a:avLst/>
-          </a:prstGeom>
-          <a:noFill/>
-        </p:spPr>
-        <p:txBody>
-          <a:bodyPr wrap="square">
-            <a:spAutoFit/>
-          </a:bodyPr>
-          <a:lstStyle/>
-          <a:p>
-            <a:pPr algn="l">
-              <a:defRPr sz="1200" b="0" i="0">
+            <a:off x="1371600" y="2743200"/>
+            <a:ext cx="9692640" cy="1828800"/>
+          </a:xfrm>
+          <a:prstGeom prst="rect">
+            <a:avLst/>
+          </a:prstGeom>
+          <a:noFill/>
+        </p:spPr>
+        <p:txBody>
+          <a:bodyPr wrap="square">
+            <a:spAutoFit/>
+          </a:bodyPr>
+          <a:lstStyle/>
+          <a:p>
+            <a:pPr algn="l">
+              <a:defRPr sz="1500" b="0" i="1">
+                <a:solidFill>
+                  <a:srgbClr val="E2E2EA"/>
+                </a:solidFill>
+                <a:latin typeface="Calibri"/>
+              </a:defRPr>
+            </a:pPr>
+            <a:r>
+              <a:t>"Namaste! Join us every day at 13:10 CET"</a:t>
+            </a:r>
+          </a:p>
+        </p:txBody>
+      </p:sp>
+      <p:sp>
+        <p:nvSpPr>
+          <p:cNvPr id="7" name="TextBox 6"/>
+          <p:cNvSpPr txBox="1"/>
+          <p:nvPr/>
+        </p:nvSpPr>
+        <p:spPr>
+          <a:xfrm>
+            <a:off x="1097280" y="4754880"/>
+            <a:ext cx="9966960" cy="365760"/>
+          </a:xfrm>
+          <a:prstGeom prst="rect">
+            <a:avLst/>
+          </a:prstGeom>
+          <a:noFill/>
+        </p:spPr>
+        <p:txBody>
+          <a:bodyPr wrap="square">
+            <a:spAutoFit/>
+          </a:bodyPr>
+          <a:lstStyle/>
+          <a:p>
+            <a:pPr algn="l">
+              <a:defRPr sz="1400" b="0" i="0">
                 <a:solidFill>
                   <a:srgbClr val="8F95A3"/>
                 </a:solidFill>
@@ -5470,20 +5541,20 @@
               </a:defRPr>
             </a:pPr>
             <a:r>
-              <a:t>fraud rate</a:t>
-            </a:r>
-          </a:p>
-        </p:txBody>
-      </p:sp>
-      <p:sp>
-        <p:nvSpPr>
-          <p:cNvPr id="7" name="TextBox 6"/>
-          <p:cNvSpPr txBox="1"/>
-          <p:nvPr/>
-        </p:nvSpPr>
-        <p:spPr>
-          <a:xfrm>
-            <a:off x="1097280" y="3291840"/>
+              <a:t>— Anna Kolyada</a:t>
+            </a:r>
+          </a:p>
+        </p:txBody>
+      </p:sp>
+      <p:sp>
+        <p:nvSpPr>
+          <p:cNvPr id="8" name="TextBox 7"/>
+          <p:cNvSpPr txBox="1"/>
+          <p:nvPr/>
+        </p:nvSpPr>
+        <p:spPr>
+          <a:xfrm>
+            <a:off x="1097280" y="5212080"/>
             <a:ext cx="9966960" cy="365760"/>
           </a:xfrm>
           <a:prstGeom prst="rect">
@@ -5498,51 +5569,15 @@
           <a:lstStyle/>
           <a:p>
             <a:pPr algn="l">
-              <a:defRPr sz="1400" b="0" i="0">
-                <a:solidFill>
-                  <a:srgbClr val="E2E2EA"/>
-                </a:solidFill>
-                <a:latin typeface="Calibri"/>
-              </a:defRPr>
-            </a:pPr>
-            <a:r>
-              <a:t>by Security Team</a:t>
-            </a:r>
-          </a:p>
-        </p:txBody>
-      </p:sp>
-      <p:sp>
-        <p:nvSpPr>
-          <p:cNvPr id="8" name="TextBox 7"/>
-          <p:cNvSpPr txBox="1"/>
-          <p:nvPr/>
-        </p:nvSpPr>
-        <p:spPr>
-          <a:xfrm>
-            <a:off x="1097280" y="3840480"/>
-            <a:ext cx="9966960" cy="457200"/>
-          </a:xfrm>
-          <a:prstGeom prst="rect">
-            <a:avLst/>
-          </a:prstGeom>
-          <a:noFill/>
-        </p:spPr>
-        <p:txBody>
-          <a:bodyPr wrap="square">
-            <a:spAutoFit/>
-          </a:bodyPr>
-          <a:lstStyle/>
-          <a:p>
-            <a:pPr algn="l">
-              <a:defRPr sz="1800" b="1" i="0">
-                <a:solidFill>
-                  <a:srgbClr val="FFFFFF"/>
-                </a:solidFill>
-                <a:latin typeface="Calibri"/>
-              </a:defRPr>
-            </a:pPr>
-            <a:r>
-              <a:t>Fraud Prevention Breakthrough</a:t>
+              <a:defRPr sz="1400" b="1" i="0">
+                <a:solidFill>
+                  <a:srgbClr val="8BC34A"/>
+                </a:solidFill>
+                <a:latin typeface="Calibri"/>
+              </a:defRPr>
+            </a:pPr>
+            <a:r>
+              <a:t>🧘 ×15</a:t>
             </a:r>
           </a:p>
         </p:txBody>
@@ -5555,66 +5590,30 @@
         </p:nvSpPr>
         <p:spPr>
           <a:xfrm>
-            <a:off x="1097280" y="4389120"/>
-            <a:ext cx="9966960" cy="914400"/>
-          </a:xfrm>
-          <a:prstGeom prst="rect">
-            <a:avLst/>
-          </a:prstGeom>
-          <a:noFill/>
-        </p:spPr>
-        <p:txBody>
-          <a:bodyPr wrap="square">
-            <a:spAutoFit/>
-          </a:bodyPr>
-          <a:lstStyle/>
-          <a:p>
-            <a:pPr algn="l">
-              <a:defRPr sz="1400" b="0" i="0">
-                <a:solidFill>
-                  <a:srgbClr val="E2E2EA"/>
-                </a:solidFill>
-                <a:latin typeface="Calibri"/>
-              </a:defRPr>
-            </a:pPr>
-            <a:r>
-              <a:t>Reduced fraud from 22% to under 4% using dynamic SDK signatures</a:t>
-            </a:r>
-          </a:p>
-        </p:txBody>
-      </p:sp>
-      <p:sp>
-        <p:nvSpPr>
-          <p:cNvPr id="10" name="TextBox 9"/>
-          <p:cNvSpPr txBox="1"/>
-          <p:nvPr/>
-        </p:nvSpPr>
-        <p:spPr>
-          <a:xfrm>
-            <a:off x="1097280" y="5486400"/>
-            <a:ext cx="9966960" cy="457200"/>
-          </a:xfrm>
-          <a:prstGeom prst="rect">
-            <a:avLst/>
-          </a:prstGeom>
-          <a:noFill/>
-        </p:spPr>
-        <p:txBody>
-          <a:bodyPr wrap="square">
-            <a:spAutoFit/>
-          </a:bodyPr>
-          <a:lstStyle/>
-          <a:p>
-            <a:pPr algn="l">
-              <a:defRPr sz="1300" b="0" i="1">
-                <a:solidFill>
-                  <a:srgbClr val="8F95A3"/>
-                </a:solidFill>
-                <a:latin typeface="Calibri"/>
-              </a:defRPr>
-            </a:pPr>
-            <a:r>
-              <a:t>💬 "Massive improvement in platform security and user protection"</a:t>
+            <a:off x="1097280" y="5760720"/>
+            <a:ext cx="9966960" cy="274320"/>
+          </a:xfrm>
+          <a:prstGeom prst="rect">
+            <a:avLst/>
+          </a:prstGeom>
+          <a:noFill/>
+        </p:spPr>
+        <p:txBody>
+          <a:bodyPr wrap="square">
+            <a:spAutoFit/>
+          </a:bodyPr>
+          <a:lstStyle/>
+          <a:p>
+            <a:pPr algn="l">
+              <a:defRPr sz="1100" b="0" i="0">
+                <a:solidFill>
+                  <a:srgbClr val="5C6270"/>
+                </a:solidFill>
+                <a:latin typeface="Calibri"/>
+              </a:defRPr>
+            </a:pPr>
+            <a:r>
+              <a:t>Office Culture</a:t>
             </a:r>
           </a:p>
         </p:txBody>
@@ -5660,7 +5659,7 @@
             <a:avLst/>
           </a:prstGeom>
           <a:solidFill>
-            <a:srgbClr val="00CEC9"/>
+            <a:srgbClr val="FF6B35"/>
           </a:solidFill>
           <a:ln>
             <a:noFill/>
@@ -5713,13 +5712,13 @@
             <a:pPr algn="l">
               <a:defRPr sz="1000" b="1">
                 <a:solidFill>
-                  <a:srgbClr val="00CEC9"/>
-                </a:solidFill>
-                <a:latin typeface="Calibri"/>
-              </a:defRPr>
-            </a:pPr>
-            <a:r>
-              <a:t>🧘‍♀️  WEEKLY RITUAL</a:t>
+                  <a:srgbClr val="FF6B35"/>
+                </a:solidFill>
+                <a:latin typeface="Calibri"/>
+              </a:defRPr>
+            </a:pPr>
+            <a:r>
+              <a:t>🏆  WEEKLY RITUAL</a:t>
             </a:r>
           </a:p>
         </p:txBody>
@@ -5749,13 +5748,13 @@
             <a:pPr algn="l">
               <a:defRPr sz="3200" b="1" i="0">
                 <a:solidFill>
-                  <a:srgbClr val="00CEC9"/>
-                </a:solidFill>
-                <a:latin typeface="Calibri"/>
-              </a:defRPr>
-            </a:pPr>
-            <a:r>
-              <a:t>Wellness Wednesday</a:t>
+                  <a:srgbClr val="FF6B35"/>
+                </a:solidFill>
+                <a:latin typeface="Calibri"/>
+              </a:defRPr>
+            </a:pPr>
+            <a:r>
+              <a:t>Weekly Pulse Check</a:t>
             </a:r>
           </a:p>
         </p:txBody>
@@ -5791,7 +5790,7 @@
               </a:defRPr>
             </a:pPr>
             <a:r>
-              <a:t>Daily Yoga with Anna</a:t>
+              <a:t>Build. Ship. Improve.</a:t>
             </a:r>
           </a:p>
         </p:txBody>
@@ -5827,7 +5826,7 @@
               </a:defRPr>
             </a:pPr>
             <a:r>
-              <a:t>Join Anna Kolyada for daily yoga at 13:10 CET</a:t>
+              <a:t>What did you ship this week?</a:t>
             </a:r>
           </a:p>
         </p:txBody>
@@ -5863,7 +5862,7 @@
               </a:defRPr>
             </a:pPr>
             <a:r>
-              <a:t>Available both in office and online streaming</a:t>
+              <a:t>How will you improve next week?</a:t>
             </a:r>
           </a:p>
         </p:txBody>
@@ -5899,7 +5898,7 @@
               </a:defRPr>
             </a:pPr>
             <a:r>
-              <a:t>Work-Life Balance</a:t>
+              <a:t>From requirements to pull requests mentality</a:t>
             </a:r>
           </a:p>
         </p:txBody>
@@ -5935,328 +5934,7 @@
               </a:defRPr>
             </a:pPr>
             <a:r>
-              <a:t>#wellness</a:t>
-            </a:r>
-          </a:p>
-        </p:txBody>
-      </p:sp>
-    </p:spTree>
-  </p:cSld>
-  <p:clrMapOvr>
-    <a:masterClrMapping/>
-  </p:clrMapOvr>
-</p:sld>
-</file>
-
-<file path=ppt/slides/slide18.xml><?xml version="1.0" encoding="utf-8"?>
-<p:sld xmlns:a="http://schemas.openxmlformats.org/drawingml/2006/main" xmlns:p="http://schemas.openxmlformats.org/presentationml/2006/main" xmlns:r="http://schemas.openxmlformats.org/officeDocument/2006/relationships">
-  <p:cSld>
-    <p:bg>
-      <p:bgPr>
-        <a:solidFill>
-          <a:srgbClr val="08080C"/>
-        </a:solidFill>
-        <a:effectLst/>
-      </p:bgPr>
-    </p:bg>
-    <p:spTree>
-      <p:nvGrpSpPr>
-        <p:cNvPr id="1" name=""/>
-        <p:cNvGrpSpPr/>
-        <p:nvPr/>
-      </p:nvGrpSpPr>
-      <p:grpSpPr/>
-      <p:sp>
-        <p:nvSpPr>
-          <p:cNvPr id="2" name="Rectangle 1"/>
-          <p:cNvSpPr/>
-          <p:nvPr/>
-        </p:nvSpPr>
-        <p:spPr>
-          <a:xfrm>
-            <a:off x="0" y="365760"/>
-            <a:ext cx="12191695" cy="54864"/>
-          </a:xfrm>
-          <a:prstGeom prst="rect">
-            <a:avLst/>
-          </a:prstGeom>
-          <a:solidFill>
-            <a:srgbClr val="FFD93D"/>
-          </a:solidFill>
-          <a:ln>
-            <a:noFill/>
-          </a:ln>
-        </p:spPr>
-        <p:style>
-          <a:lnRef idx="1">
-            <a:schemeClr val="accent1"/>
-          </a:lnRef>
-          <a:fillRef idx="3">
-            <a:schemeClr val="accent1"/>
-          </a:fillRef>
-          <a:effectRef idx="2">
-            <a:schemeClr val="accent1"/>
-          </a:effectRef>
-          <a:fontRef idx="minor">
-            <a:schemeClr val="lt1"/>
-          </a:fontRef>
-        </p:style>
-        <p:txBody>
-          <a:bodyPr rtlCol="0" anchor="ctr"/>
-          <a:lstStyle/>
-          <a:p>
-            <a:pPr algn="ctr"/>
-          </a:p>
-        </p:txBody>
-      </p:sp>
-      <p:sp>
-        <p:nvSpPr>
-          <p:cNvPr id="3" name="TextBox 2"/>
-          <p:cNvSpPr txBox="1"/>
-          <p:nvPr/>
-        </p:nvSpPr>
-        <p:spPr>
-          <a:xfrm>
-            <a:off x="1097280" y="731520"/>
-            <a:ext cx="3657600" cy="365760"/>
-          </a:xfrm>
-          <a:prstGeom prst="rect">
-            <a:avLst/>
-          </a:prstGeom>
-          <a:noFill/>
-        </p:spPr>
-        <p:txBody>
-          <a:bodyPr wrap="none">
-            <a:spAutoFit/>
-          </a:bodyPr>
-          <a:lstStyle/>
-          <a:p>
-            <a:pPr algn="l">
-              <a:defRPr sz="1000" b="1">
-                <a:solidFill>
-                  <a:srgbClr val="FFD93D"/>
-                </a:solidFill>
-                <a:latin typeface="Calibri"/>
-              </a:defRPr>
-            </a:pPr>
-            <a:r>
-              <a:t>✨  OFFICE LIFE</a:t>
-            </a:r>
-          </a:p>
-        </p:txBody>
-      </p:sp>
-      <p:sp>
-        <p:nvSpPr>
-          <p:cNvPr id="4" name="TextBox 3"/>
-          <p:cNvSpPr txBox="1"/>
-          <p:nvPr/>
-        </p:nvSpPr>
-        <p:spPr>
-          <a:xfrm>
-            <a:off x="1097280" y="1188720"/>
-            <a:ext cx="9966960" cy="731520"/>
-          </a:xfrm>
-          <a:prstGeom prst="rect">
-            <a:avLst/>
-          </a:prstGeom>
-          <a:noFill/>
-        </p:spPr>
-        <p:txBody>
-          <a:bodyPr wrap="square">
-            <a:spAutoFit/>
-          </a:bodyPr>
-          <a:lstStyle/>
-          <a:p>
-            <a:pPr algn="l">
-              <a:defRPr sz="3200" b="1" i="0">
-                <a:solidFill>
-                  <a:srgbClr val="FFD93D"/>
-                </a:solidFill>
-                <a:latin typeface="Calibri"/>
-              </a:defRPr>
-            </a:pPr>
-            <a:r>
-              <a:t>Office Energy</a:t>
-            </a:r>
-          </a:p>
-        </p:txBody>
-      </p:sp>
-      <p:sp>
-        <p:nvSpPr>
-          <p:cNvPr id="5" name="TextBox 4"/>
-          <p:cNvSpPr txBox="1"/>
-          <p:nvPr/>
-        </p:nvSpPr>
-        <p:spPr>
-          <a:xfrm>
-            <a:off x="1097280" y="2103120"/>
-            <a:ext cx="9966960" cy="457200"/>
-          </a:xfrm>
-          <a:prstGeom prst="rect">
-            <a:avLst/>
-          </a:prstGeom>
-          <a:noFill/>
-        </p:spPr>
-        <p:txBody>
-          <a:bodyPr wrap="square">
-            <a:spAutoFit/>
-          </a:bodyPr>
-          <a:lstStyle/>
-          <a:p>
-            <a:pPr algn="l">
-              <a:defRPr sz="1800" b="1" i="0">
-                <a:solidFill>
-                  <a:srgbClr val="FFFFFF"/>
-                </a:solidFill>
-                <a:latin typeface="Calibri"/>
-              </a:defRPr>
-            </a:pPr>
-            <a:r>
-              <a:t>Amazing Team Spirit</a:t>
-            </a:r>
-          </a:p>
-        </p:txBody>
-      </p:sp>
-      <p:sp>
-        <p:nvSpPr>
-          <p:cNvPr id="6" name="TextBox 5"/>
-          <p:cNvSpPr txBox="1"/>
-          <p:nvPr/>
-        </p:nvSpPr>
-        <p:spPr>
-          <a:xfrm>
-            <a:off x="1371600" y="2743200"/>
-            <a:ext cx="9692640" cy="1828800"/>
-          </a:xfrm>
-          <a:prstGeom prst="rect">
-            <a:avLst/>
-          </a:prstGeom>
-          <a:noFill/>
-        </p:spPr>
-        <p:txBody>
-          <a:bodyPr wrap="square">
-            <a:spAutoFit/>
-          </a:bodyPr>
-          <a:lstStyle/>
-          <a:p>
-            <a:pPr algn="l">
-              <a:defRPr sz="1500" b="0" i="1">
-                <a:solidFill>
-                  <a:srgbClr val="E2E2EA"/>
-                </a:solidFill>
-                <a:latin typeface="Calibri"/>
-              </a:defRPr>
-            </a:pPr>
-            <a:r>
-              <a:t>"The whole team came together with warm birthday wishes and incredible support for new initiatives"</a:t>
-            </a:r>
-          </a:p>
-        </p:txBody>
-      </p:sp>
-      <p:sp>
-        <p:nvSpPr>
-          <p:cNvPr id="7" name="TextBox 6"/>
-          <p:cNvSpPr txBox="1"/>
-          <p:nvPr/>
-        </p:nvSpPr>
-        <p:spPr>
-          <a:xfrm>
-            <a:off x="1097280" y="4754880"/>
-            <a:ext cx="9966960" cy="365760"/>
-          </a:xfrm>
-          <a:prstGeom prst="rect">
-            <a:avLst/>
-          </a:prstGeom>
-          <a:noFill/>
-        </p:spPr>
-        <p:txBody>
-          <a:bodyPr wrap="square">
-            <a:spAutoFit/>
-          </a:bodyPr>
-          <a:lstStyle/>
-          <a:p>
-            <a:pPr algn="l">
-              <a:defRPr sz="1400" b="0" i="0">
-                <a:solidFill>
-                  <a:srgbClr val="8F95A3"/>
-                </a:solidFill>
-                <a:latin typeface="Calibri"/>
-              </a:defRPr>
-            </a:pPr>
-            <a:r>
-              <a:t>— Team Appodeal</a:t>
-            </a:r>
-          </a:p>
-        </p:txBody>
-      </p:sp>
-      <p:sp>
-        <p:nvSpPr>
-          <p:cNvPr id="8" name="TextBox 7"/>
-          <p:cNvSpPr txBox="1"/>
-          <p:nvPr/>
-        </p:nvSpPr>
-        <p:spPr>
-          <a:xfrm>
-            <a:off x="1097280" y="5212080"/>
-            <a:ext cx="9966960" cy="365760"/>
-          </a:xfrm>
-          <a:prstGeom prst="rect">
-            <a:avLst/>
-          </a:prstGeom>
-          <a:noFill/>
-        </p:spPr>
-        <p:txBody>
-          <a:bodyPr wrap="square">
-            <a:spAutoFit/>
-          </a:bodyPr>
-          <a:lstStyle/>
-          <a:p>
-            <a:pPr algn="l">
-              <a:defRPr sz="1400" b="1" i="0">
-                <a:solidFill>
-                  <a:srgbClr val="FFD93D"/>
-                </a:solidFill>
-                <a:latin typeface="Calibri"/>
-              </a:defRPr>
-            </a:pPr>
-            <a:r>
-              <a:t>150</a:t>
-            </a:r>
-          </a:p>
-        </p:txBody>
-      </p:sp>
-      <p:sp>
-        <p:nvSpPr>
-          <p:cNvPr id="9" name="TextBox 8"/>
-          <p:cNvSpPr txBox="1"/>
-          <p:nvPr/>
-        </p:nvSpPr>
-        <p:spPr>
-          <a:xfrm>
-            <a:off x="1097280" y="5760720"/>
-            <a:ext cx="9966960" cy="274320"/>
-          </a:xfrm>
-          <a:prstGeom prst="rect">
-            <a:avLst/>
-          </a:prstGeom>
-          <a:noFill/>
-        </p:spPr>
-        <p:txBody>
-          <a:bodyPr wrap="square">
-            <a:spAutoFit/>
-          </a:bodyPr>
-          <a:lstStyle/>
-          <a:p>
-            <a:pPr algn="l">
-              <a:defRPr sz="1100" b="0" i="0">
-                <a:solidFill>
-                  <a:srgbClr val="5C6270"/>
-                </a:solidFill>
-                <a:latin typeface="Calibri"/>
-              </a:defRPr>
-            </a:pPr>
-            <a:r>
-              <a:t>#birthdays</a:t>
+              <a:t>Company Culture</a:t>
             </a:r>
           </a:p>
         </p:txBody>
@@ -6302,7 +5980,7 @@
             <a:avLst/>
           </a:prstGeom>
           <a:solidFill>
-            <a:srgbClr val="FF6B6B"/>
+            <a:srgbClr val="FF6B9D"/>
           </a:solidFill>
           <a:ln>
             <a:noFill/>
@@ -6355,13 +6033,13 @@
             <a:pPr algn="l">
               <a:defRPr sz="1000" b="1">
                 <a:solidFill>
-                  <a:srgbClr val="FF6B6B"/>
-                </a:solidFill>
-                <a:latin typeface="Calibri"/>
-              </a:defRPr>
-            </a:pPr>
-            <a:r>
-              <a:t>🎂  CELEBRATION</a:t>
+                  <a:srgbClr val="FF6B9D"/>
+                </a:solidFill>
+                <a:latin typeface="Calibri"/>
+              </a:defRPr>
+            </a:pPr>
+            <a:r>
+              <a:t>🎉  CELEBRATION</a:t>
             </a:r>
           </a:p>
         </p:txBody>
@@ -6391,13 +6069,13 @@
             <a:pPr algn="l">
               <a:defRPr sz="3200" b="1" i="0">
                 <a:solidFill>
-                  <a:srgbClr val="FF6B6B"/>
-                </a:solidFill>
-                <a:latin typeface="Calibri"/>
-              </a:defRPr>
-            </a:pPr>
-            <a:r>
-              <a:t>Birthday Celebration</a:t>
+                  <a:srgbClr val="FF6B9D"/>
+                </a:solidFill>
+                <a:latin typeface="Calibri"/>
+              </a:defRPr>
+            </a:pPr>
+            <a:r>
+              <a:t>Birthday Celebrations!</a:t>
             </a:r>
           </a:p>
         </p:txBody>
@@ -6469,7 +6147,7 @@
               </a:defRPr>
             </a:pPr>
             <a:r>
-              <a:t>March 11, 2026</a:t>
+              <a:t>March 12, 2026</a:t>
             </a:r>
           </a:p>
         </p:txBody>
@@ -6535,13 +6213,13 @@
             <a:pPr algn="l">
               <a:defRPr sz="1400" b="0" i="1">
                 <a:solidFill>
-                  <a:srgbClr val="FF6B6B"/>
-                </a:solidFill>
-                <a:latin typeface="Calibri"/>
-              </a:defRPr>
-            </a:pPr>
-            <a:r>
-              <a:t>The whole team came together to celebrate with warm birthday wishes!</a:t>
+                  <a:srgbClr val="FF6B9D"/>
+                </a:solidFill>
+                <a:latin typeface="Calibri"/>
+              </a:defRPr>
+            </a:pPr>
+            <a:r>
+              <a:t>Our team showered Alexandr with birthday love and warm wishes!</a:t>
             </a:r>
           </a:p>
         </p:txBody>
@@ -6587,7 +6265,7 @@
             <a:avLst/>
           </a:prstGeom>
           <a:solidFill>
-            <a:srgbClr val="4ECDC4"/>
+            <a:srgbClr val="4CAF50"/>
           </a:solidFill>
           <a:ln>
             <a:noFill/>
@@ -6640,7 +6318,7 @@
             <a:pPr algn="l">
               <a:defRPr sz="1000" b="1">
                 <a:solidFill>
-                  <a:srgbClr val="4ECDC4"/>
+                  <a:srgbClr val="4CAF50"/>
                 </a:solidFill>
                 <a:latin typeface="Calibri"/>
               </a:defRPr>
@@ -6676,7 +6354,7 @@
             <a:pPr algn="l">
               <a:defRPr sz="3200" b="1" i="0">
                 <a:solidFill>
-                  <a:srgbClr val="4ECDC4"/>
+                  <a:srgbClr val="4CAF50"/>
                 </a:solidFill>
                 <a:latin typeface="Calibri"/>
               </a:defRPr>
@@ -6712,13 +6390,13 @@
             <a:pPr algn="l">
               <a:defRPr sz="4800" b="1" i="0">
                 <a:solidFill>
-                  <a:srgbClr val="4ECDC4"/>
-                </a:solidFill>
-                <a:latin typeface="Calibri"/>
-              </a:defRPr>
-            </a:pPr>
-            <a:r>
-              <a:t>26</a:t>
+                  <a:srgbClr val="4CAF50"/>
+                </a:solidFill>
+                <a:latin typeface="Calibri"/>
+              </a:defRPr>
+            </a:pPr>
+            <a:r>
+              <a:t>36</a:t>
             </a:r>
           </a:p>
         </p:txBody>
@@ -6754,7 +6432,7 @@
               </a:defRPr>
             </a:pPr>
             <a:r>
-              <a:t>reactions</a:t>
+              <a:t>rocket reactions</a:t>
             </a:r>
           </a:p>
         </p:txBody>
@@ -6790,7 +6468,7 @@
               </a:defRPr>
             </a:pPr>
             <a:r>
-              <a:t>by Gleb Krahotkin</a:t>
+              <a:t>by Gleb Krahotkin &amp; DevOps Team</a:t>
             </a:r>
           </a:p>
         </p:txBody>
@@ -6826,7 +6504,7 @@
               </a:defRPr>
             </a:pPr>
             <a:r>
-              <a:t>Coolify Platform Launched</a:t>
+              <a:t>Coolify Deployment Platform Launched</a:t>
             </a:r>
           </a:p>
         </p:txBody>
@@ -6862,7 +6540,7 @@
               </a:defRPr>
             </a:pPr>
             <a:r>
-              <a:t>Introduced a revolutionary deployment service that allows applications to be deployed in just a few clicks</a:t>
+              <a:t>One-click application deployment service now live for all teams</a:t>
             </a:r>
           </a:p>
         </p:txBody>
@@ -6898,7 +6576,7 @@
               </a:defRPr>
             </a:pPr>
             <a:r>
-              <a:t>💬 "Massive team excitement with 36 🚀 reactions and detailed documentation already available"</a:t>
+              <a:t>💬 "Making development faster and more accessible for everyone"</a:t>
             </a:r>
           </a:p>
         </p:txBody>
@@ -6944,7 +6622,7 @@
             <a:avLst/>
           </a:prstGeom>
           <a:solidFill>
-            <a:srgbClr val="FFD93D"/>
+            <a:srgbClr val="2196F3"/>
           </a:solidFill>
           <a:ln>
             <a:noFill/>
@@ -6997,13 +6675,13 @@
             <a:pPr algn="l">
               <a:defRPr sz="1000" b="1">
                 <a:solidFill>
-                  <a:srgbClr val="FFD93D"/>
-                </a:solidFill>
-                <a:latin typeface="Calibri"/>
-              </a:defRPr>
-            </a:pPr>
-            <a:r>
-              <a:t>🔥  EVENT</a:t>
+                  <a:srgbClr val="2196F3"/>
+                </a:solidFill>
+                <a:latin typeface="Calibri"/>
+              </a:defRPr>
+            </a:pPr>
+            <a:r>
+              <a:t>🧠  EVENT</a:t>
             </a:r>
           </a:p>
         </p:txBody>
@@ -7033,13 +6711,13 @@
             <a:pPr algn="l">
               <a:defRPr sz="3200" b="1" i="0">
                 <a:solidFill>
-                  <a:srgbClr val="FFD93D"/>
-                </a:solidFill>
-                <a:latin typeface="Calibri"/>
-              </a:defRPr>
-            </a:pPr>
-            <a:r>
-              <a:t>Learning Excellence</a:t>
+                  <a:srgbClr val="2196F3"/>
+                </a:solidFill>
+                <a:latin typeface="Calibri"/>
+              </a:defRPr>
+            </a:pPr>
+            <a:r>
+              <a:t>Learning &amp; Development</a:t>
             </a:r>
           </a:p>
         </p:txBody>
@@ -7075,7 +6753,7 @@
               </a:defRPr>
             </a:pPr>
             <a:r>
-              <a:t>11th Lunch &amp; Learn: Fraud Traffic Detection</a:t>
+              <a:t>11th Lunch &amp; Learn Session</a:t>
             </a:r>
           </a:p>
         </p:txBody>
@@ -7105,13 +6783,13 @@
             <a:pPr algn="l">
               <a:defRPr sz="1400" b="1" i="0">
                 <a:solidFill>
-                  <a:srgbClr val="FFD93D"/>
-                </a:solidFill>
-                <a:latin typeface="Calibri"/>
-              </a:defRPr>
-            </a:pPr>
-            <a:r>
-              <a:t>Recently completed</a:t>
+                  <a:srgbClr val="2196F3"/>
+                </a:solidFill>
+                <a:latin typeface="Calibri"/>
+              </a:defRPr>
+            </a:pPr>
+            <a:r>
+              <a:t>Recent session</a:t>
             </a:r>
           </a:p>
         </p:txBody>
@@ -7147,7 +6825,7 @@
               </a:defRPr>
             </a:pPr>
             <a:r>
-              <a:t>Timofey Levanov delivered an insightful presentation on fraud detection methods</a:t>
+              <a:t>Timofey Levanov presented on fraud traffic detection - fascinating insights!</a:t>
             </a:r>
           </a:p>
         </p:txBody>
@@ -7229,7 +6907,7 @@
             <a:avLst/>
           </a:prstGeom>
           <a:solidFill>
-            <a:srgbClr val="6C5CE7"/>
+            <a:srgbClr val="9C27B0"/>
           </a:solidFill>
           <a:ln>
             <a:noFill/>
@@ -7282,7 +6960,7 @@
             <a:pPr algn="l">
               <a:defRPr sz="1000" b="1">
                 <a:solidFill>
-                  <a:srgbClr val="6C5CE7"/>
+                  <a:srgbClr val="9C27B0"/>
                 </a:solidFill>
                 <a:latin typeface="Calibri"/>
               </a:defRPr>
@@ -7318,13 +6996,13 @@
             <a:pPr algn="l">
               <a:defRPr sz="3200" b="1" i="0">
                 <a:solidFill>
-                  <a:srgbClr val="6C5CE7"/>
-                </a:solidFill>
-                <a:latin typeface="Calibri"/>
-              </a:defRPr>
-            </a:pPr>
-            <a:r>
-              <a:t>Reading Club Launch</a:t>
+                  <a:srgbClr val="9C27B0"/>
+                </a:solidFill>
+                <a:latin typeface="Calibri"/>
+              </a:defRPr>
+            </a:pPr>
+            <a:r>
+              <a:t>Book Club Launch</a:t>
             </a:r>
           </a:p>
         </p:txBody>
@@ -7354,7 +7032,7 @@
             <a:pPr algn="l">
               <a:defRPr sz="2200" b="1" i="0">
                 <a:solidFill>
-                  <a:srgbClr val="6C5CE7"/>
+                  <a:srgbClr val="9C27B0"/>
                 </a:solidFill>
                 <a:latin typeface="Calibri"/>
               </a:defRPr>
@@ -7432,7 +7110,7 @@
               </a:defRPr>
             </a:pPr>
             <a:r>
-              <a:t>Focus on Wildly Important Goals, Leading/Lagging Metrics, Scorecards, and Follow-through</a:t>
+              <a:t>Focus on WIGs, Leading/Lagging Metrics, Scorecards &amp; Follow-through</a:t>
             </a:r>
           </a:p>
         </p:txBody>
@@ -7468,7 +7146,7 @@
               </a:defRPr>
             </a:pPr>
             <a:r>
-              <a:t>Shared by Pavel Golubev · 7</a:t>
+              <a:t>Shared by Pavel Golubev · 🧠 ×7</a:t>
             </a:r>
           </a:p>
         </p:txBody>
@@ -7498,7 +7176,7 @@
             <a:pPr algn="l">
               <a:defRPr sz="2200" b="1" i="0">
                 <a:solidFill>
-                  <a:srgbClr val="6C5CE7"/>
+                  <a:srgbClr val="9C27B0"/>
                 </a:solidFill>
                 <a:latin typeface="Calibri"/>
               </a:defRPr>
@@ -7540,7 +7218,7 @@
               </a:defRPr>
             </a:pPr>
             <a:r>
-              <a:t>The Speaking Coach</a:t>
+              <a:t>The Speaking Coach: Stop Saying This Word</a:t>
             </a:r>
           </a:p>
         </p:txBody>
@@ -7576,7 +7254,7 @@
               </a:defRPr>
             </a:pPr>
             <a:r>
-              <a:t>Highly recommended content on effective communication techniques</a:t>
+              <a:t>Communication insights - clickbait title but genuinely great content</a:t>
             </a:r>
           </a:p>
         </p:txBody>
@@ -7612,7 +7290,7 @@
               </a:defRPr>
             </a:pPr>
             <a:r>
-              <a:t>Shared by Maria Plendukova · 2</a:t>
+              <a:t>Shared by Maria Plendukova · ❤️ ×2</a:t>
             </a:r>
           </a:p>
         </p:txBody>
@@ -7694,7 +7372,7 @@
             <a:avLst/>
           </a:prstGeom>
           <a:solidFill>
-            <a:srgbClr val="FF9F43"/>
+            <a:srgbClr val="FF9800"/>
           </a:solidFill>
           <a:ln>
             <a:noFill/>
@@ -7747,7 +7425,7 @@
             <a:pPr algn="l">
               <a:defRPr sz="1000" b="1">
                 <a:solidFill>
-                  <a:srgbClr val="FF9F43"/>
+                  <a:srgbClr val="FF9800"/>
                 </a:solidFill>
                 <a:latin typeface="Calibri"/>
               </a:defRPr>
@@ -7783,13 +7461,13 @@
             <a:pPr algn="l">
               <a:defRPr sz="3200" b="1" i="0">
                 <a:solidFill>
-                  <a:srgbClr val="FF9F43"/>
-                </a:solidFill>
-                <a:latin typeface="Calibri"/>
-              </a:defRPr>
-            </a:pPr>
-            <a:r>
-              <a:t>Design Excellence</a:t>
+                  <a:srgbClr val="FF9800"/>
+                </a:solidFill>
+                <a:latin typeface="Calibri"/>
+              </a:defRPr>
+            </a:pPr>
+            <a:r>
+              <a:t>Recognition Round-Up</a:t>
             </a:r>
           </a:p>
         </p:txBody>
@@ -7819,7 +7497,7 @@
             <a:pPr algn="l">
               <a:defRPr sz="2800" b="1" i="0">
                 <a:solidFill>
-                  <a:srgbClr val="FF9F43"/>
+                  <a:srgbClr val="FF9800"/>
                 </a:solidFill>
                 <a:latin typeface="Calibri"/>
               </a:defRPr>
@@ -7933,7 +7611,7 @@
               </a:defRPr>
             </a:pPr>
             <a:r>
-              <a:t>"Outstanding design work and creative contributions"</a:t>
+              <a:t>"Outstanding design work and creativity"</a:t>
             </a:r>
           </a:p>
         </p:txBody>
@@ -7963,13 +7641,13 @@
             <a:pPr algn="l">
               <a:defRPr sz="1200" b="1" i="0">
                 <a:solidFill>
-                  <a:srgbClr val="FF9F43"/>
-                </a:solidFill>
-                <a:latin typeface="Calibri"/>
-              </a:defRPr>
-            </a:pPr>
-            <a:r>
-              <a:t>We work TOGETHER · SERVE OTHERS</a:t>
+                  <a:srgbClr val="FF9800"/>
+                </a:solidFill>
+                <a:latin typeface="Calibri"/>
+              </a:defRPr>
+            </a:pPr>
+            <a:r>
+              <a:t>SERVE OTHERS · WORK TOGETHER</a:t>
             </a:r>
           </a:p>
         </p:txBody>
@@ -8015,7 +7693,7 @@
             <a:avLst/>
           </a:prstGeom>
           <a:solidFill>
-            <a:srgbClr val="00B894"/>
+            <a:srgbClr val="E91E63"/>
           </a:solidFill>
           <a:ln>
             <a:noFill/>
@@ -8068,7 +7746,7 @@
             <a:pPr algn="l">
               <a:defRPr sz="1000" b="1">
                 <a:solidFill>
-                  <a:srgbClr val="00B894"/>
+                  <a:srgbClr val="E91E63"/>
                 </a:solidFill>
                 <a:latin typeface="Calibri"/>
               </a:defRPr>
@@ -8104,13 +7782,13 @@
             <a:pPr algn="l">
               <a:defRPr sz="3200" b="1" i="0">
                 <a:solidFill>
-                  <a:srgbClr val="00B894"/>
-                </a:solidFill>
-                <a:latin typeface="Calibri"/>
-              </a:defRPr>
-            </a:pPr>
-            <a:r>
-              <a:t>DevOps Heroes</a:t>
+                  <a:srgbClr val="E91E63"/>
+                </a:solidFill>
+                <a:latin typeface="Calibri"/>
+              </a:defRPr>
+            </a:pPr>
+            <a:r>
+              <a:t>Team Excellence</a:t>
             </a:r>
           </a:p>
         </p:txBody>
@@ -8140,13 +7818,13 @@
             <a:pPr algn="l">
               <a:defRPr sz="2800" b="1" i="0">
                 <a:solidFill>
-                  <a:srgbClr val="00B894"/>
-                </a:solidFill>
-                <a:latin typeface="Calibri"/>
-              </a:defRPr>
-            </a:pPr>
-            <a:r>
-              <a:t>30</a:t>
+                  <a:srgbClr val="E91E63"/>
+                </a:solidFill>
+                <a:latin typeface="Calibri"/>
+              </a:defRPr>
+            </a:pPr>
+            <a:r>
+              <a:t>50</a:t>
             </a:r>
           </a:p>
         </p:txBody>
@@ -8182,7 +7860,7 @@
               </a:defRPr>
             </a:pPr>
             <a:r>
-              <a:t>from Gleb Krahotkin</a:t>
+              <a:t>from Sem Sinchenko</a:t>
             </a:r>
           </a:p>
         </p:txBody>
@@ -8218,7 +7896,7 @@
               </a:defRPr>
             </a:pPr>
             <a:r>
-              <a:t>to: Hierman Pelekh</a:t>
+              <a:t>to: Ildar Fatykhov</a:t>
             </a:r>
           </a:p>
         </p:txBody>
@@ -8254,7 +7932,7 @@
               </a:defRPr>
             </a:pPr>
             <a:r>
-              <a:t>"Exceptional technical contributions to infrastructure"</a:t>
+              <a:t>"Exceptional technical contribution and problem-solving"</a:t>
             </a:r>
           </a:p>
         </p:txBody>
@@ -8284,13 +7962,13 @@
             <a:pPr algn="l">
               <a:defRPr sz="1200" b="1" i="0">
                 <a:solidFill>
-                  <a:srgbClr val="00B894"/>
-                </a:solidFill>
-                <a:latin typeface="Calibri"/>
-              </a:defRPr>
-            </a:pPr>
-            <a:r>
-              <a:t>Technical Excellence · Innovation</a:t>
+                  <a:srgbClr val="E91E63"/>
+                </a:solidFill>
+                <a:latin typeface="Calibri"/>
+              </a:defRPr>
+            </a:pPr>
+            <a:r>
+              <a:t>EXTREME OWNERSHIP · SERVE OTHERS</a:t>
             </a:r>
           </a:p>
         </p:txBody>
@@ -8336,7 +8014,7 @@
             <a:avLst/>
           </a:prstGeom>
           <a:solidFill>
-            <a:srgbClr val="E17055"/>
+            <a:srgbClr val="3F51B5"/>
           </a:solidFill>
           <a:ln>
             <a:noFill/>
@@ -8389,13 +8067,13 @@
             <a:pPr algn="l">
               <a:defRPr sz="1000" b="1">
                 <a:solidFill>
-                  <a:srgbClr val="E17055"/>
-                </a:solidFill>
-                <a:latin typeface="Calibri"/>
-              </a:defRPr>
-            </a:pPr>
-            <a:r>
-              <a:t>💪  CLAPS</a:t>
+                  <a:srgbClr val="3F51B5"/>
+                </a:solidFill>
+                <a:latin typeface="Calibri"/>
+              </a:defRPr>
+            </a:pPr>
+            <a:r>
+              <a:t>⚡  CLAPS</a:t>
             </a:r>
           </a:p>
         </p:txBody>
@@ -8425,13 +8103,13 @@
             <a:pPr algn="l">
               <a:defRPr sz="3200" b="1" i="0">
                 <a:solidFill>
-                  <a:srgbClr val="E17055"/>
-                </a:solidFill>
-                <a:latin typeface="Calibri"/>
-              </a:defRPr>
-            </a:pPr>
-            <a:r>
-              <a:t>Development Powerhouse</a:t>
+                  <a:srgbClr val="3F51B5"/>
+                </a:solidFill>
+                <a:latin typeface="Calibri"/>
+              </a:defRPr>
+            </a:pPr>
+            <a:r>
+              <a:t>DevOps Recognition</a:t>
             </a:r>
           </a:p>
         </p:txBody>
@@ -8461,13 +8139,13 @@
             <a:pPr algn="l">
               <a:defRPr sz="2800" b="1" i="0">
                 <a:solidFill>
-                  <a:srgbClr val="E17055"/>
-                </a:solidFill>
-                <a:latin typeface="Calibri"/>
-              </a:defRPr>
-            </a:pPr>
-            <a:r>
-              <a:t>50</a:t>
+                  <a:srgbClr val="3F51B5"/>
+                </a:solidFill>
+                <a:latin typeface="Calibri"/>
+              </a:defRPr>
+            </a:pPr>
+            <a:r>
+              <a:t>30</a:t>
             </a:r>
           </a:p>
         </p:txBody>
@@ -8503,7 +8181,7 @@
               </a:defRPr>
             </a:pPr>
             <a:r>
-              <a:t>from Sem Sinchenko</a:t>
+              <a:t>from Gleb Krahotkin</a:t>
             </a:r>
           </a:p>
         </p:txBody>
@@ -8539,7 +8217,7 @@
               </a:defRPr>
             </a:pPr>
             <a:r>
-              <a:t>to: Ildar Fatykhov</a:t>
+              <a:t>to: Hierman Pelekh</a:t>
             </a:r>
           </a:p>
         </p:txBody>
@@ -8575,7 +8253,7 @@
               </a:defRPr>
             </a:pPr>
             <a:r>
-              <a:t>"Brilliant technical execution and problem-solving"</a:t>
+              <a:t>"Infrastructure improvements and system reliability"</a:t>
             </a:r>
           </a:p>
         </p:txBody>
@@ -8605,13 +8283,13 @@
             <a:pPr algn="l">
               <a:defRPr sz="1200" b="1" i="0">
                 <a:solidFill>
-                  <a:srgbClr val="E17055"/>
-                </a:solidFill>
-                <a:latin typeface="Calibri"/>
-              </a:defRPr>
-            </a:pPr>
-            <a:r>
-              <a:t>Excellence · Innovation</a:t>
+                  <a:srgbClr val="3F51B5"/>
+                </a:solidFill>
+                <a:latin typeface="Calibri"/>
+              </a:defRPr>
+            </a:pPr>
+            <a:r>
+              <a:t>BUILD BETTER · WORK TOGETHER</a:t>
             </a:r>
           </a:p>
         </p:txBody>
@@ -8657,7 +8335,7 @@
             <a:avLst/>
           </a:prstGeom>
           <a:solidFill>
-            <a:srgbClr val="6C5CE7"/>
+            <a:srgbClr val="607D8B"/>
           </a:solidFill>
           <a:ln>
             <a:noFill/>
@@ -8710,7 +8388,7 @@
             <a:pPr algn="l">
               <a:defRPr sz="1000" b="1">
                 <a:solidFill>
-                  <a:srgbClr val="6C5CE7"/>
+                  <a:srgbClr val="607D8B"/>
                 </a:solidFill>
                 <a:latin typeface="Calibri"/>
               </a:defRPr>
@@ -8746,13 +8424,13 @@
             <a:pPr algn="l">
               <a:defRPr sz="3200" b="1" i="0">
                 <a:solidFill>
-                  <a:srgbClr val="6C5CE7"/>
-                </a:solidFill>
-                <a:latin typeface="Calibri"/>
-              </a:defRPr>
-            </a:pPr>
-            <a:r>
-              <a:t>Exceptional Support</a:t>
+                  <a:srgbClr val="607D8B"/>
+                </a:solidFill>
+                <a:latin typeface="Calibri"/>
+              </a:defRPr>
+            </a:pPr>
+            <a:r>
+              <a:t>Multi-Team Collaboration</a:t>
             </a:r>
           </a:p>
         </p:txBody>
@@ -8782,7 +8460,7 @@
             <a:pPr algn="l">
               <a:defRPr sz="2800" b="1" i="0">
                 <a:solidFill>
-                  <a:srgbClr val="6C5CE7"/>
+                  <a:srgbClr val="607D8B"/>
                 </a:solidFill>
                 <a:latin typeface="Calibri"/>
               </a:defRPr>
@@ -8896,7 +8574,7 @@
               </a:defRPr>
             </a:pPr>
             <a:r>
-              <a:t>"Outstanding customer support and problem resolution"</a:t>
+              <a:t>"Cross-functional project leadership and execution"</a:t>
             </a:r>
           </a:p>
         </p:txBody>
@@ -8926,13 +8604,13 @@
             <a:pPr algn="l">
               <a:defRPr sz="1200" b="1" i="0">
                 <a:solidFill>
-                  <a:srgbClr val="6C5CE7"/>
-                </a:solidFill>
-                <a:latin typeface="Calibri"/>
-              </a:defRPr>
-            </a:pPr>
-            <a:r>
-              <a:t>Customer Focus · Excellence</a:t>
+                  <a:srgbClr val="607D8B"/>
+                </a:solidFill>
+                <a:latin typeface="Calibri"/>
+              </a:defRPr>
+            </a:pPr>
+            <a:r>
+              <a:t>WORK TOGETHER · EXTREME OWNERSHIP</a:t>
             </a:r>
           </a:p>
         </p:txBody>

--- a/data/archive/pulse_2026-03-12.pptx
+++ b/data/archive/pulse_2026-03-12.pptx
@@ -22,6 +22,7 @@
     <p:sldId id="270" r:id="rId21"/>
     <p:sldId id="271" r:id="rId22"/>
     <p:sldId id="272" r:id="rId23"/>
+    <p:sldId id="273" r:id="rId24"/>
   </p:sldIdLst>
   <p:sldSz cx="12191695" cy="6858000" type="screen4x3"/>
   <p:notesSz cx="6858000" cy="9144000"/>
@@ -3304,7 +3305,7 @@
             <a:avLst/>
           </a:prstGeom>
           <a:solidFill>
-            <a:srgbClr val="4CAF50"/>
+            <a:srgbClr val="27AE60"/>
           </a:solidFill>
           <a:ln>
             <a:noFill/>
@@ -3357,13 +3358,13 @@
             <a:pPr algn="l">
               <a:defRPr sz="1000" b="1">
                 <a:solidFill>
-                  <a:srgbClr val="4CAF50"/>
-                </a:solidFill>
-                <a:latin typeface="Calibri"/>
-              </a:defRPr>
-            </a:pPr>
-            <a:r>
-              <a:t>🚀  CLAPS</a:t>
+                  <a:srgbClr val="27AE60"/>
+                </a:solidFill>
+                <a:latin typeface="Calibri"/>
+              </a:defRPr>
+            </a:pPr>
+            <a:r>
+              <a:t>💪  CLAPS</a:t>
             </a:r>
           </a:p>
         </p:txBody>
@@ -3393,13 +3394,13 @@
             <a:pPr algn="l">
               <a:defRPr sz="3200" b="1" i="0">
                 <a:solidFill>
-                  <a:srgbClr val="4CAF50"/>
-                </a:solidFill>
-                <a:latin typeface="Calibri"/>
-              </a:defRPr>
-            </a:pPr>
-            <a:r>
-              <a:t>Team Synergy</a:t>
+                  <a:srgbClr val="27AE60"/>
+                </a:solidFill>
+                <a:latin typeface="Calibri"/>
+              </a:defRPr>
+            </a:pPr>
+            <a:r>
+              <a:t>Quality Focus</a:t>
             </a:r>
           </a:p>
         </p:txBody>
@@ -3429,13 +3430,13 @@
             <a:pPr algn="l">
               <a:defRPr sz="2800" b="1" i="0">
                 <a:solidFill>
-                  <a:srgbClr val="4CAF50"/>
-                </a:solidFill>
-                <a:latin typeface="Calibri"/>
-              </a:defRPr>
-            </a:pPr>
-            <a:r>
-              <a:t>8</a:t>
+                  <a:srgbClr val="27AE60"/>
+                </a:solidFill>
+                <a:latin typeface="Calibri"/>
+              </a:defRPr>
+            </a:pPr>
+            <a:r>
+              <a:t>25</a:t>
             </a:r>
           </a:p>
         </p:txBody>
@@ -3471,7 +3472,7 @@
               </a:defRPr>
             </a:pPr>
             <a:r>
-              <a:t>from Alexandr Zhitlukhin</a:t>
+              <a:t>from Dima</a:t>
             </a:r>
           </a:p>
         </p:txBody>
@@ -3507,7 +3508,7 @@
               </a:defRPr>
             </a:pPr>
             <a:r>
-              <a:t>to: ArtKip, Taha, Agustin, Francesco, Alessandro, Anna Timoshenko</a:t>
+              <a:t>to: Irina Koval</a:t>
             </a:r>
           </a:p>
         </p:txBody>
@@ -3543,7 +3544,7 @@
               </a:defRPr>
             </a:pPr>
             <a:r>
-              <a:t>"Amazing cross-team collaboration on key initiatives"</a:t>
+              <a:t>"Exceptional attention to detail and quality assurance"</a:t>
             </a:r>
           </a:p>
         </p:txBody>
@@ -3573,13 +3574,13 @@
             <a:pPr algn="l">
               <a:defRPr sz="1200" b="1" i="0">
                 <a:solidFill>
-                  <a:srgbClr val="4CAF50"/>
-                </a:solidFill>
-                <a:latin typeface="Calibri"/>
-              </a:defRPr>
-            </a:pPr>
-            <a:r>
-              <a:t>WORK TOGETHER · SERVE OTHERS</a:t>
+                  <a:srgbClr val="27AE60"/>
+                </a:solidFill>
+                <a:latin typeface="Calibri"/>
+              </a:defRPr>
+            </a:pPr>
+            <a:r>
+              <a:t>Quality · Excellence</a:t>
             </a:r>
           </a:p>
         </p:txBody>
@@ -3625,7 +3626,7 @@
             <a:avLst/>
           </a:prstGeom>
           <a:solidFill>
-            <a:srgbClr val="FF5722"/>
+            <a:srgbClr val="27AE60"/>
           </a:solidFill>
           <a:ln>
             <a:noFill/>
@@ -3678,13 +3679,13 @@
             <a:pPr algn="l">
               <a:defRPr sz="1000" b="1">
                 <a:solidFill>
-                  <a:srgbClr val="FF5722"/>
-                </a:solidFill>
-                <a:latin typeface="Calibri"/>
-              </a:defRPr>
-            </a:pPr>
-            <a:r>
-              <a:t>📈  MILESTONE</a:t>
+                  <a:srgbClr val="27AE60"/>
+                </a:solidFill>
+                <a:latin typeface="Calibri"/>
+              </a:defRPr>
+            </a:pPr>
+            <a:r>
+              <a:t>🎨  CLAPS</a:t>
             </a:r>
           </a:p>
         </p:txBody>
@@ -3714,13 +3715,13 @@
             <a:pPr algn="l">
               <a:defRPr sz="3200" b="1" i="0">
                 <a:solidFill>
-                  <a:srgbClr val="FF5722"/>
-                </a:solidFill>
-                <a:latin typeface="Calibri"/>
-              </a:defRPr>
-            </a:pPr>
-            <a:r>
-              <a:t>Company Growth</a:t>
+                  <a:srgbClr val="27AE60"/>
+                </a:solidFill>
+                <a:latin typeface="Calibri"/>
+              </a:defRPr>
+            </a:pPr>
+            <a:r>
+              <a:t>Creative Team</a:t>
             </a:r>
           </a:p>
         </p:txBody>
@@ -3734,29 +3735,29 @@
         <p:spPr>
           <a:xfrm>
             <a:off x="1097280" y="2103120"/>
-            <a:ext cx="4572000" cy="822960"/>
-          </a:xfrm>
-          <a:prstGeom prst="rect">
-            <a:avLst/>
-          </a:prstGeom>
-          <a:noFill/>
-        </p:spPr>
-        <p:txBody>
-          <a:bodyPr wrap="square">
-            <a:spAutoFit/>
-          </a:bodyPr>
-          <a:lstStyle/>
-          <a:p>
-            <a:pPr algn="l">
-              <a:defRPr sz="5200" b="1" i="0">
-                <a:solidFill>
-                  <a:srgbClr val="FF5722"/>
-                </a:solidFill>
-                <a:latin typeface="Calibri"/>
-              </a:defRPr>
-            </a:pPr>
-            <a:r>
-              <a:t>$100M</a:t>
+            <a:ext cx="2743200" cy="548640"/>
+          </a:xfrm>
+          <a:prstGeom prst="rect">
+            <a:avLst/>
+          </a:prstGeom>
+          <a:noFill/>
+        </p:spPr>
+        <p:txBody>
+          <a:bodyPr wrap="square">
+            <a:spAutoFit/>
+          </a:bodyPr>
+          <a:lstStyle/>
+          <a:p>
+            <a:pPr algn="l">
+              <a:defRPr sz="2800" b="1" i="0">
+                <a:solidFill>
+                  <a:srgbClr val="27AE60"/>
+                </a:solidFill>
+                <a:latin typeface="Calibri"/>
+              </a:defRPr>
+            </a:pPr>
+            <a:r>
+              <a:t>25</a:t>
             </a:r>
           </a:p>
         </p:txBody>
@@ -3769,30 +3770,30 @@
         </p:nvSpPr>
         <p:spPr>
           <a:xfrm>
-            <a:off x="1097280" y="2926080"/>
-            <a:ext cx="4572000" cy="365760"/>
-          </a:xfrm>
-          <a:prstGeom prst="rect">
-            <a:avLst/>
-          </a:prstGeom>
-          <a:noFill/>
-        </p:spPr>
-        <p:txBody>
-          <a:bodyPr wrap="square">
-            <a:spAutoFit/>
-          </a:bodyPr>
-          <a:lstStyle/>
-          <a:p>
-            <a:pPr algn="l">
-              <a:defRPr sz="1100" b="0" i="0">
-                <a:solidFill>
-                  <a:srgbClr val="8F95A3"/>
-                </a:solidFill>
-                <a:latin typeface="Calibri"/>
-              </a:defRPr>
-            </a:pPr>
-            <a:r>
-              <a:t>Gross Profit</a:t>
+            <a:off x="1097280" y="2651760"/>
+            <a:ext cx="9966960" cy="365760"/>
+          </a:xfrm>
+          <a:prstGeom prst="rect">
+            <a:avLst/>
+          </a:prstGeom>
+          <a:noFill/>
+        </p:spPr>
+        <p:txBody>
+          <a:bodyPr wrap="square">
+            <a:spAutoFit/>
+          </a:bodyPr>
+          <a:lstStyle/>
+          <a:p>
+            <a:pPr algn="l">
+              <a:defRPr sz="1400" b="0" i="0">
+                <a:solidFill>
+                  <a:srgbClr val="E2E2EA"/>
+                </a:solidFill>
+                <a:latin typeface="Calibri"/>
+              </a:defRPr>
+            </a:pPr>
+            <a:r>
+              <a:t>from Roman Rinchinov</a:t>
             </a:r>
           </a:p>
         </p:txBody>
@@ -3805,7 +3806,79 @@
         </p:nvSpPr>
         <p:spPr>
           <a:xfrm>
-            <a:off x="1097280" y="3566160"/>
+            <a:off x="1097280" y="3108960"/>
+            <a:ext cx="9966960" cy="365760"/>
+          </a:xfrm>
+          <a:prstGeom prst="rect">
+            <a:avLst/>
+          </a:prstGeom>
+          <a:noFill/>
+        </p:spPr>
+        <p:txBody>
+          <a:bodyPr wrap="square">
+            <a:spAutoFit/>
+          </a:bodyPr>
+          <a:lstStyle/>
+          <a:p>
+            <a:pPr algn="l">
+              <a:defRPr sz="1400" b="1" i="0">
+                <a:solidFill>
+                  <a:srgbClr val="FFFFFF"/>
+                </a:solidFill>
+                <a:latin typeface="Calibri"/>
+              </a:defRPr>
+            </a:pPr>
+            <a:r>
+              <a:t>to: Vasyl Plesiuk</a:t>
+            </a:r>
+          </a:p>
+        </p:txBody>
+      </p:sp>
+      <p:sp>
+        <p:nvSpPr>
+          <p:cNvPr id="8" name="TextBox 7"/>
+          <p:cNvSpPr txBox="1"/>
+          <p:nvPr/>
+        </p:nvSpPr>
+        <p:spPr>
+          <a:xfrm>
+            <a:off x="1097280" y="3749039"/>
+            <a:ext cx="9966960" cy="1097280"/>
+          </a:xfrm>
+          <a:prstGeom prst="rect">
+            <a:avLst/>
+          </a:prstGeom>
+          <a:noFill/>
+        </p:spPr>
+        <p:txBody>
+          <a:bodyPr wrap="square">
+            <a:spAutoFit/>
+          </a:bodyPr>
+          <a:lstStyle/>
+          <a:p>
+            <a:pPr algn="l">
+              <a:defRPr sz="1500" b="0" i="1">
+                <a:solidFill>
+                  <a:srgbClr val="E2E2EA"/>
+                </a:solidFill>
+                <a:latin typeface="Calibri"/>
+              </a:defRPr>
+            </a:pPr>
+            <a:r>
+              <a:t>"Outstanding creative solutions and collaboration"</a:t>
+            </a:r>
+          </a:p>
+        </p:txBody>
+      </p:sp>
+      <p:sp>
+        <p:nvSpPr>
+          <p:cNvPr id="9" name="TextBox 8"/>
+          <p:cNvSpPr txBox="1"/>
+          <p:nvPr/>
+        </p:nvSpPr>
+        <p:spPr>
+          <a:xfrm>
+            <a:off x="1097280" y="5120640"/>
             <a:ext cx="9966960" cy="457200"/>
           </a:xfrm>
           <a:prstGeom prst="rect">
@@ -3820,51 +3893,15 @@
           <a:lstStyle/>
           <a:p>
             <a:pPr algn="l">
-              <a:defRPr sz="1800" b="1" i="0">
-                <a:solidFill>
-                  <a:srgbClr val="FFFFFF"/>
-                </a:solidFill>
-                <a:latin typeface="Calibri"/>
-              </a:defRPr>
-            </a:pPr>
-            <a:r>
-              <a:t>40% YoY Growth Trajectory</a:t>
-            </a:r>
-          </a:p>
-        </p:txBody>
-      </p:sp>
-      <p:sp>
-        <p:nvSpPr>
-          <p:cNvPr id="8" name="TextBox 7"/>
-          <p:cNvSpPr txBox="1"/>
-          <p:nvPr/>
-        </p:nvSpPr>
-        <p:spPr>
-          <a:xfrm>
-            <a:off x="1097280" y="4206240"/>
-            <a:ext cx="9966960" cy="1371600"/>
-          </a:xfrm>
-          <a:prstGeom prst="rect">
-            <a:avLst/>
-          </a:prstGeom>
-          <a:noFill/>
-        </p:spPr>
-        <p:txBody>
-          <a:bodyPr wrap="square">
-            <a:spAutoFit/>
-          </a:bodyPr>
-          <a:lstStyle/>
-          <a:p>
-            <a:pPr algn="l">
-              <a:defRPr sz="1500" b="0" i="0">
-                <a:solidFill>
-                  <a:srgbClr val="E2E2EA"/>
-                </a:solidFill>
-                <a:latin typeface="Calibri"/>
-              </a:defRPr>
-            </a:pPr>
-            <a:r>
-              <a:t>Building toward our ambitious $50B vision with strong fundamentals</a:t>
+              <a:defRPr sz="1200" b="1" i="0">
+                <a:solidFill>
+                  <a:srgbClr val="27AE60"/>
+                </a:solidFill>
+                <a:latin typeface="Calibri"/>
+              </a:defRPr>
+            </a:pPr>
+            <a:r>
+              <a:t>Creativity · Teamwork</a:t>
             </a:r>
           </a:p>
         </p:txBody>
@@ -3910,7 +3947,7 @@
             <a:avLst/>
           </a:prstGeom>
           <a:solidFill>
-            <a:srgbClr val="9C27B0"/>
+            <a:srgbClr val="8E44AD"/>
           </a:solidFill>
           <a:ln>
             <a:noFill/>
@@ -3963,13 +4000,13 @@
             <a:pPr algn="l">
               <a:defRPr sz="1000" b="1">
                 <a:solidFill>
-                  <a:srgbClr val="9C27B0"/>
-                </a:solidFill>
-                <a:latin typeface="Calibri"/>
-              </a:defRPr>
-            </a:pPr>
-            <a:r>
-              <a:t>🤖  WIN</a:t>
+                  <a:srgbClr val="8E44AD"/>
+                </a:solidFill>
+                <a:latin typeface="Calibri"/>
+              </a:defRPr>
+            </a:pPr>
+            <a:r>
+              <a:t>📈  MILESTONE</a:t>
             </a:r>
           </a:p>
         </p:txBody>
@@ -3999,13 +4036,13 @@
             <a:pPr algn="l">
               <a:defRPr sz="3200" b="1" i="0">
                 <a:solidFill>
-                  <a:srgbClr val="9C27B0"/>
-                </a:solidFill>
-                <a:latin typeface="Calibri"/>
-              </a:defRPr>
-            </a:pPr>
-            <a:r>
-              <a:t>AI Revolution</a:t>
+                  <a:srgbClr val="8E44AD"/>
+                </a:solidFill>
+                <a:latin typeface="Calibri"/>
+              </a:defRPr>
+            </a:pPr>
+            <a:r>
+              <a:t>Company Growth</a:t>
             </a:r>
           </a:p>
         </p:txBody>
@@ -4033,15 +4070,15 @@
           <a:lstStyle/>
           <a:p>
             <a:pPr algn="l">
-              <a:defRPr sz="4800" b="1" i="0">
-                <a:solidFill>
-                  <a:srgbClr val="9C27B0"/>
-                </a:solidFill>
-                <a:latin typeface="Calibri"/>
-              </a:defRPr>
-            </a:pPr>
-            <a:r>
-              <a:t>1,000+</a:t>
+              <a:defRPr sz="5200" b="1" i="0">
+                <a:solidFill>
+                  <a:srgbClr val="8E44AD"/>
+                </a:solidFill>
+                <a:latin typeface="Calibri"/>
+              </a:defRPr>
+            </a:pPr>
+            <a:r>
+              <a:t>40%</a:t>
             </a:r>
           </a:p>
         </p:txBody>
@@ -4054,7 +4091,7 @@
         </p:nvSpPr>
         <p:spPr>
           <a:xfrm>
-            <a:off x="1097280" y="2834640"/>
+            <a:off x="1097280" y="2926080"/>
             <a:ext cx="4572000" cy="365760"/>
           </a:xfrm>
           <a:prstGeom prst="rect">
@@ -4069,7 +4106,7 @@
           <a:lstStyle/>
           <a:p>
             <a:pPr algn="l">
-              <a:defRPr sz="1200" b="0" i="0">
+              <a:defRPr sz="1100" b="0" i="0">
                 <a:solidFill>
                   <a:srgbClr val="8F95A3"/>
                 </a:solidFill>
@@ -4077,7 +4114,7 @@
               </a:defRPr>
             </a:pPr>
             <a:r>
-              <a:t>OKRs checked daily</a:t>
+              <a:t>YoY Growth</a:t>
             </a:r>
           </a:p>
         </p:txBody>
@@ -4090,22 +4127,58 @@
         </p:nvSpPr>
         <p:spPr>
           <a:xfrm>
-            <a:off x="1097280" y="3291840"/>
-            <a:ext cx="9966960" cy="365760"/>
-          </a:xfrm>
-          <a:prstGeom prst="rect">
-            <a:avLst/>
-          </a:prstGeom>
-          <a:noFill/>
-        </p:spPr>
-        <p:txBody>
-          <a:bodyPr wrap="square">
-            <a:spAutoFit/>
-          </a:bodyPr>
-          <a:lstStyle/>
-          <a:p>
-            <a:pPr algn="l">
-              <a:defRPr sz="1400" b="0" i="0">
+            <a:off x="1097280" y="3566160"/>
+            <a:ext cx="9966960" cy="457200"/>
+          </a:xfrm>
+          <a:prstGeom prst="rect">
+            <a:avLst/>
+          </a:prstGeom>
+          <a:noFill/>
+        </p:spPr>
+        <p:txBody>
+          <a:bodyPr wrap="square">
+            <a:spAutoFit/>
+          </a:bodyPr>
+          <a:lstStyle/>
+          <a:p>
+            <a:pPr algn="l">
+              <a:defRPr sz="1800" b="1" i="0">
+                <a:solidFill>
+                  <a:srgbClr val="FFFFFF"/>
+                </a:solidFill>
+                <a:latin typeface="Calibri"/>
+              </a:defRPr>
+            </a:pPr>
+            <a:r>
+              <a:t>40% Year-over-Year Growth</a:t>
+            </a:r>
+          </a:p>
+        </p:txBody>
+      </p:sp>
+      <p:sp>
+        <p:nvSpPr>
+          <p:cNvPr id="8" name="TextBox 7"/>
+          <p:cNvSpPr txBox="1"/>
+          <p:nvPr/>
+        </p:nvSpPr>
+        <p:spPr>
+          <a:xfrm>
+            <a:off x="1097280" y="4206240"/>
+            <a:ext cx="9966960" cy="1371600"/>
+          </a:xfrm>
+          <a:prstGeom prst="rect">
+            <a:avLst/>
+          </a:prstGeom>
+          <a:noFill/>
+        </p:spPr>
+        <p:txBody>
+          <a:bodyPr wrap="square">
+            <a:spAutoFit/>
+          </a:bodyPr>
+          <a:lstStyle/>
+          <a:p>
+            <a:pPr algn="l">
+              <a:defRPr sz="1500" b="0" i="0">
                 <a:solidFill>
                   <a:srgbClr val="E2E2EA"/>
                 </a:solidFill>
@@ -4113,115 +4186,7 @@
               </a:defRPr>
             </a:pPr>
             <a:r>
-              <a:t>by Engineering Teams</a:t>
-            </a:r>
-          </a:p>
-        </p:txBody>
-      </p:sp>
-      <p:sp>
-        <p:nvSpPr>
-          <p:cNvPr id="8" name="TextBox 7"/>
-          <p:cNvSpPr txBox="1"/>
-          <p:nvPr/>
-        </p:nvSpPr>
-        <p:spPr>
-          <a:xfrm>
-            <a:off x="1097280" y="3840480"/>
-            <a:ext cx="9966960" cy="457200"/>
-          </a:xfrm>
-          <a:prstGeom prst="rect">
-            <a:avLst/>
-          </a:prstGeom>
-          <a:noFill/>
-        </p:spPr>
-        <p:txBody>
-          <a:bodyPr wrap="square">
-            <a:spAutoFit/>
-          </a:bodyPr>
-          <a:lstStyle/>
-          <a:p>
-            <a:pPr algn="l">
-              <a:defRPr sz="1800" b="1" i="0">
-                <a:solidFill>
-                  <a:srgbClr val="FFFFFF"/>
-                </a:solidFill>
-                <a:latin typeface="Calibri"/>
-              </a:defRPr>
-            </a:pPr>
-            <a:r>
-              <a:t>AI-Powered OKR Auditor Live</a:t>
-            </a:r>
-          </a:p>
-        </p:txBody>
-      </p:sp>
-      <p:sp>
-        <p:nvSpPr>
-          <p:cNvPr id="9" name="TextBox 8"/>
-          <p:cNvSpPr txBox="1"/>
-          <p:nvPr/>
-        </p:nvSpPr>
-        <p:spPr>
-          <a:xfrm>
-            <a:off x="1097280" y="4389120"/>
-            <a:ext cx="9966960" cy="914400"/>
-          </a:xfrm>
-          <a:prstGeom prst="rect">
-            <a:avLst/>
-          </a:prstGeom>
-          <a:noFill/>
-        </p:spPr>
-        <p:txBody>
-          <a:bodyPr wrap="square">
-            <a:spAutoFit/>
-          </a:bodyPr>
-          <a:lstStyle/>
-          <a:p>
-            <a:pPr algn="l">
-              <a:defRPr sz="1400" b="0" i="0">
-                <a:solidFill>
-                  <a:srgbClr val="E2E2EA"/>
-                </a:solidFill>
-                <a:latin typeface="Calibri"/>
-              </a:defRPr>
-            </a:pPr>
-            <a:r>
-              <a:t>Every employee will manage 5-10 AI agents within 3-6 months</a:t>
-            </a:r>
-          </a:p>
-        </p:txBody>
-      </p:sp>
-      <p:sp>
-        <p:nvSpPr>
-          <p:cNvPr id="10" name="TextBox 9"/>
-          <p:cNvSpPr txBox="1"/>
-          <p:nvPr/>
-        </p:nvSpPr>
-        <p:spPr>
-          <a:xfrm>
-            <a:off x="1097280" y="5486400"/>
-            <a:ext cx="9966960" cy="457200"/>
-          </a:xfrm>
-          <a:prstGeom prst="rect">
-            <a:avLst/>
-          </a:prstGeom>
-          <a:noFill/>
-        </p:spPr>
-        <p:txBody>
-          <a:bodyPr wrap="square">
-            <a:spAutoFit/>
-          </a:bodyPr>
-          <a:lstStyle/>
-          <a:p>
-            <a:pPr algn="l">
-              <a:defRPr sz="1300" b="0" i="1">
-                <a:solidFill>
-                  <a:srgbClr val="8F95A3"/>
-                </a:solidFill>
-                <a:latin typeface="Calibri"/>
-              </a:defRPr>
-            </a:pPr>
-            <a:r>
-              <a:t>💬 "Automation is transforming how we work and scale"</a:t>
+              <a:t>Appodeal continues its impressive trajectory with $100M gross profit and $20M EBITDA, positioning us for our ambitious $50B vision.</a:t>
             </a:r>
           </a:p>
         </p:txBody>
@@ -4267,7 +4232,7 @@
             <a:avLst/>
           </a:prstGeom>
           <a:solidFill>
-            <a:srgbClr val="4CAF50"/>
+            <a:srgbClr val="E74C3C"/>
           </a:solidFill>
           <a:ln>
             <a:noFill/>
@@ -4320,7 +4285,7 @@
             <a:pPr algn="l">
               <a:defRPr sz="1000" b="1">
                 <a:solidFill>
-                  <a:srgbClr val="4CAF50"/>
+                  <a:srgbClr val="E74C3C"/>
                 </a:solidFill>
                 <a:latin typeface="Calibri"/>
               </a:defRPr>
@@ -4356,7 +4321,7 @@
             <a:pPr algn="l">
               <a:defRPr sz="3200" b="1" i="0">
                 <a:solidFill>
-                  <a:srgbClr val="4CAF50"/>
+                  <a:srgbClr val="E74C3C"/>
                 </a:solidFill>
                 <a:latin typeface="Calibri"/>
               </a:defRPr>
@@ -4392,7 +4357,7 @@
             <a:pPr algn="l">
               <a:defRPr sz="4800" b="1" i="0">
                 <a:solidFill>
-                  <a:srgbClr val="4CAF50"/>
+                  <a:srgbClr val="E74C3C"/>
                 </a:solidFill>
                 <a:latin typeface="Calibri"/>
               </a:defRPr>
@@ -4470,7 +4435,7 @@
               </a:defRPr>
             </a:pPr>
             <a:r>
-              <a:t>by Gaming Division</a:t>
+              <a:t>by Gaming Team</a:t>
             </a:r>
           </a:p>
         </p:txBody>
@@ -4506,7 +4471,7 @@
               </a:defRPr>
             </a:pPr>
             <a:r>
-              <a:t>Infinite Minesweeper Exceeds Benchmarks</a:t>
+              <a:t>Infinite Minesweeper Success</a:t>
             </a:r>
           </a:p>
         </p:txBody>
@@ -4542,7 +4507,7 @@
               </a:defRPr>
             </a:pPr>
             <a:r>
-              <a:t>Apple ERA benchmark: 151-160%, we're crushing expectations</a:t>
+              <a:t>Achieved 61% retention rate, placing us in Apple's benchmark ERA 151-160% category for exceptional performance.</a:t>
             </a:r>
           </a:p>
         </p:txBody>
@@ -4578,7 +4543,7 @@
               </a:defRPr>
             </a:pPr>
             <a:r>
-              <a:t>💬 "Gaming division officially profitable in 2025!"</a:t>
+              <a:t>💬 "Gaming division turned profitable in 2025!"</a:t>
             </a:r>
           </a:p>
         </p:txBody>
@@ -4624,7 +4589,7 @@
             <a:avLst/>
           </a:prstGeom>
           <a:solidFill>
-            <a:srgbClr val="2196F3"/>
+            <a:srgbClr val="17A2B8"/>
           </a:solidFill>
           <a:ln>
             <a:noFill/>
@@ -4677,7 +4642,7 @@
             <a:pPr algn="l">
               <a:defRPr sz="1000" b="1">
                 <a:solidFill>
-                  <a:srgbClr val="2196F3"/>
+                  <a:srgbClr val="17A2B8"/>
                 </a:solidFill>
                 <a:latin typeface="Calibri"/>
               </a:defRPr>
@@ -4713,13 +4678,13 @@
             <a:pPr algn="l">
               <a:defRPr sz="3200" b="1" i="0">
                 <a:solidFill>
-                  <a:srgbClr val="2196F3"/>
-                </a:solidFill>
-                <a:latin typeface="Calibri"/>
-              </a:defRPr>
-            </a:pPr>
-            <a:r>
-              <a:t>Security Achievement</a:t>
+                  <a:srgbClr val="17A2B8"/>
+                </a:solidFill>
+                <a:latin typeface="Calibri"/>
+              </a:defRPr>
+            </a:pPr>
+            <a:r>
+              <a:t>Security Victory</a:t>
             </a:r>
           </a:p>
         </p:txBody>
@@ -4749,7 +4714,7 @@
             <a:pPr algn="l">
               <a:defRPr sz="4800" b="1" i="0">
                 <a:solidFill>
-                  <a:srgbClr val="2196F3"/>
+                  <a:srgbClr val="17A2B8"/>
                 </a:solidFill>
                 <a:latin typeface="Calibri"/>
               </a:defRPr>
@@ -4827,7 +4792,7 @@
               </a:defRPr>
             </a:pPr>
             <a:r>
-              <a:t>by Anti-Fraud Team</a:t>
+              <a:t>by Security Team</a:t>
             </a:r>
           </a:p>
         </p:txBody>
@@ -4863,7 +4828,7 @@
               </a:defRPr>
             </a:pPr>
             <a:r>
-              <a:t>Fraud Reduced from 22% to Under 4%</a:t>
+              <a:t>Fraud Prevention Success</a:t>
             </a:r>
           </a:p>
         </p:txBody>
@@ -4899,7 +4864,7 @@
               </a:defRPr>
             </a:pPr>
             <a:r>
-              <a:t>Dynamic SDK signatures proving highly effective</a:t>
+              <a:t>Reduced fraud from 22% to under 4% using dynamic SDK signatures and advanced detection algorithms.</a:t>
             </a:r>
           </a:p>
         </p:txBody>
@@ -4935,7 +4900,7 @@
               </a:defRPr>
             </a:pPr>
             <a:r>
-              <a:t>💬 "Protecting our ecosystem and partners"</a:t>
+              <a:t>💬 "Our platform is now significantly more secure"</a:t>
             </a:r>
           </a:p>
         </p:txBody>
@@ -4981,7 +4946,7 @@
             <a:avLst/>
           </a:prstGeom>
           <a:solidFill>
-            <a:srgbClr val="FF9800"/>
+            <a:srgbClr val="6C5CE7"/>
           </a:solidFill>
           <a:ln>
             <a:noFill/>
@@ -5034,13 +4999,13 @@
             <a:pPr algn="l">
               <a:defRPr sz="1000" b="1">
                 <a:solidFill>
-                  <a:srgbClr val="FF9800"/>
-                </a:solidFill>
-                <a:latin typeface="Calibri"/>
-              </a:defRPr>
-            </a:pPr>
-            <a:r>
-              <a:t>💰  WIN</a:t>
+                  <a:srgbClr val="6C5CE7"/>
+                </a:solidFill>
+                <a:latin typeface="Calibri"/>
+              </a:defRPr>
+            </a:pPr>
+            <a:r>
+              <a:t>🤖  WIN</a:t>
             </a:r>
           </a:p>
         </p:txBody>
@@ -5070,13 +5035,13 @@
             <a:pPr algn="l">
               <a:defRPr sz="3200" b="1" i="0">
                 <a:solidFill>
-                  <a:srgbClr val="FF9800"/>
-                </a:solidFill>
-                <a:latin typeface="Calibri"/>
-              </a:defRPr>
-            </a:pPr>
-            <a:r>
-              <a:t>Sales Excellence</a:t>
+                  <a:srgbClr val="6C5CE7"/>
+                </a:solidFill>
+                <a:latin typeface="Calibri"/>
+              </a:defRPr>
+            </a:pPr>
+            <a:r>
+              <a:t>AI Transformation</a:t>
             </a:r>
           </a:p>
         </p:txBody>
@@ -5106,13 +5071,13 @@
             <a:pPr algn="l">
               <a:defRPr sz="4800" b="1" i="0">
                 <a:solidFill>
-                  <a:srgbClr val="FF9800"/>
-                </a:solidFill>
-                <a:latin typeface="Calibri"/>
-              </a:defRPr>
-            </a:pPr>
-            <a:r>
-              <a:t>$390K</a:t>
+                  <a:srgbClr val="6C5CE7"/>
+                </a:solidFill>
+                <a:latin typeface="Calibri"/>
+              </a:defRPr>
+            </a:pPr>
+            <a:r>
+              <a:t>1,000+</a:t>
             </a:r>
           </a:p>
         </p:txBody>
@@ -5148,7 +5113,7 @@
               </a:defRPr>
             </a:pPr>
             <a:r>
-              <a:t>net revenue</a:t>
+              <a:t>OKRs daily</a:t>
             </a:r>
           </a:p>
         </p:txBody>
@@ -5184,7 +5149,7 @@
               </a:defRPr>
             </a:pPr>
             <a:r>
-              <a:t>by Sales Team</a:t>
+              <a:t>by AI Team</a:t>
             </a:r>
           </a:p>
         </p:txBody>
@@ -5220,7 +5185,7 @@
               </a:defRPr>
             </a:pPr>
             <a:r>
-              <a:t>8 Deals Closed in One Week</a:t>
+              <a:t>OKR Auditor AI Success</a:t>
             </a:r>
           </a:p>
         </p:txBody>
@@ -5256,7 +5221,7 @@
               </a:defRPr>
             </a:pPr>
             <a:r>
-              <a:t>Outstanding performance driving company growth</a:t>
+              <a:t>Our AI auditor now checks over 1,000 individual OKRs daily, ensuring alignment and progress tracking.</a:t>
             </a:r>
           </a:p>
         </p:txBody>
@@ -5292,7 +5257,7 @@
               </a:defRPr>
             </a:pPr>
             <a:r>
-              <a:t>💬 "Momentum building across all verticals"</a:t>
+              <a:t>💬 "Every employee will manage 5-10 AI agents within 3-6 months"</a:t>
             </a:r>
           </a:p>
         </p:txBody>
@@ -5338,7 +5303,7 @@
             <a:avLst/>
           </a:prstGeom>
           <a:solidFill>
-            <a:srgbClr val="8BC34A"/>
+            <a:srgbClr val="D63031"/>
           </a:solidFill>
           <a:ln>
             <a:noFill/>
@@ -5391,13 +5356,13 @@
             <a:pPr algn="l">
               <a:defRPr sz="1000" b="1">
                 <a:solidFill>
-                  <a:srgbClr val="8BC34A"/>
-                </a:solidFill>
-                <a:latin typeface="Calibri"/>
-              </a:defRPr>
-            </a:pPr>
-            <a:r>
-              <a:t>🧘  OFFICE LIFE</a:t>
+                  <a:srgbClr val="D63031"/>
+                </a:solidFill>
+                <a:latin typeface="Calibri"/>
+              </a:defRPr>
+            </a:pPr>
+            <a:r>
+              <a:t>📖  RECOMMENDED</a:t>
             </a:r>
           </a:p>
         </p:txBody>
@@ -5427,13 +5392,13 @@
             <a:pPr algn="l">
               <a:defRPr sz="3200" b="1" i="0">
                 <a:solidFill>
-                  <a:srgbClr val="8BC34A"/>
-                </a:solidFill>
-                <a:latin typeface="Calibri"/>
-              </a:defRPr>
-            </a:pPr>
-            <a:r>
-              <a:t>Office Wellness</a:t>
+                  <a:srgbClr val="D63031"/>
+                </a:solidFill>
+                <a:latin typeface="Calibri"/>
+              </a:defRPr>
+            </a:pPr>
+            <a:r>
+              <a:t>Recommended Reading</a:t>
             </a:r>
           </a:p>
         </p:txBody>
@@ -5447,21 +5412,57 @@
         <p:spPr>
           <a:xfrm>
             <a:off x="1097280" y="2103120"/>
-            <a:ext cx="9966960" cy="457200"/>
-          </a:xfrm>
-          <a:prstGeom prst="rect">
-            <a:avLst/>
-          </a:prstGeom>
-          <a:noFill/>
-        </p:spPr>
-        <p:txBody>
-          <a:bodyPr wrap="square">
-            <a:spAutoFit/>
-          </a:bodyPr>
-          <a:lstStyle/>
-          <a:p>
-            <a:pPr algn="l">
-              <a:defRPr sz="1800" b="1" i="0">
+            <a:ext cx="457200" cy="365760"/>
+          </a:xfrm>
+          <a:prstGeom prst="rect">
+            <a:avLst/>
+          </a:prstGeom>
+          <a:noFill/>
+        </p:spPr>
+        <p:txBody>
+          <a:bodyPr wrap="square">
+            <a:spAutoFit/>
+          </a:bodyPr>
+          <a:lstStyle/>
+          <a:p>
+            <a:pPr algn="l">
+              <a:defRPr sz="2200" b="1" i="0">
+                <a:solidFill>
+                  <a:srgbClr val="D63031"/>
+                </a:solidFill>
+                <a:latin typeface="Calibri"/>
+              </a:defRPr>
+            </a:pPr>
+            <a:r>
+              <a:t>01</a:t>
+            </a:r>
+          </a:p>
+        </p:txBody>
+      </p:sp>
+      <p:sp>
+        <p:nvSpPr>
+          <p:cNvPr id="6" name="TextBox 5"/>
+          <p:cNvSpPr txBox="1"/>
+          <p:nvPr/>
+        </p:nvSpPr>
+        <p:spPr>
+          <a:xfrm>
+            <a:off x="1737360" y="2103120"/>
+            <a:ext cx="9326880" cy="365760"/>
+          </a:xfrm>
+          <a:prstGeom prst="rect">
+            <a:avLst/>
+          </a:prstGeom>
+          <a:noFill/>
+        </p:spPr>
+        <p:txBody>
+          <a:bodyPr wrap="square">
+            <a:spAutoFit/>
+          </a:bodyPr>
+          <a:lstStyle/>
+          <a:p>
+            <a:pPr algn="l">
+              <a:defRPr sz="1600" b="1" i="0">
                 <a:solidFill>
                   <a:srgbClr val="FFFFFF"/>
                 </a:solidFill>
@@ -5469,35 +5470,35 @@
               </a:defRPr>
             </a:pPr>
             <a:r>
-              <a:t>Daily Yoga Sessions</a:t>
-            </a:r>
-          </a:p>
-        </p:txBody>
-      </p:sp>
-      <p:sp>
-        <p:nvSpPr>
-          <p:cNvPr id="6" name="TextBox 5"/>
-          <p:cNvSpPr txBox="1"/>
-          <p:nvPr/>
-        </p:nvSpPr>
-        <p:spPr>
-          <a:xfrm>
-            <a:off x="1371600" y="2743200"/>
-            <a:ext cx="9692640" cy="1828800"/>
-          </a:xfrm>
-          <a:prstGeom prst="rect">
-            <a:avLst/>
-          </a:prstGeom>
-          <a:noFill/>
-        </p:spPr>
-        <p:txBody>
-          <a:bodyPr wrap="square">
-            <a:spAutoFit/>
-          </a:bodyPr>
-          <a:lstStyle/>
-          <a:p>
-            <a:pPr algn="l">
-              <a:defRPr sz="1500" b="0" i="1">
+              <a:t>The Speaking Coach: Stop Saying This Word</a:t>
+            </a:r>
+          </a:p>
+        </p:txBody>
+      </p:sp>
+      <p:sp>
+        <p:nvSpPr>
+          <p:cNvPr id="7" name="TextBox 6"/>
+          <p:cNvSpPr txBox="1"/>
+          <p:nvPr/>
+        </p:nvSpPr>
+        <p:spPr>
+          <a:xfrm>
+            <a:off x="1737360" y="2423160"/>
+            <a:ext cx="9326880" cy="365760"/>
+          </a:xfrm>
+          <a:prstGeom prst="rect">
+            <a:avLst/>
+          </a:prstGeom>
+          <a:noFill/>
+        </p:spPr>
+        <p:txBody>
+          <a:bodyPr wrap="square">
+            <a:spAutoFit/>
+          </a:bodyPr>
+          <a:lstStyle/>
+          <a:p>
+            <a:pPr algn="l">
+              <a:defRPr sz="1200" b="0" i="0">
                 <a:solidFill>
                   <a:srgbClr val="E2E2EA"/>
                 </a:solidFill>
@@ -5505,35 +5506,35 @@
               </a:defRPr>
             </a:pPr>
             <a:r>
-              <a:t>"Namaste! Join us every day at 13:10 CET"</a:t>
-            </a:r>
-          </a:p>
-        </p:txBody>
-      </p:sp>
-      <p:sp>
-        <p:nvSpPr>
-          <p:cNvPr id="7" name="TextBox 6"/>
-          <p:cNvSpPr txBox="1"/>
-          <p:nvPr/>
-        </p:nvSpPr>
-        <p:spPr>
-          <a:xfrm>
-            <a:off x="1097280" y="4754880"/>
-            <a:ext cx="9966960" cy="365760"/>
-          </a:xfrm>
-          <a:prstGeom prst="rect">
-            <a:avLst/>
-          </a:prstGeom>
-          <a:noFill/>
-        </p:spPr>
-        <p:txBody>
-          <a:bodyPr wrap="square">
-            <a:spAutoFit/>
-          </a:bodyPr>
-          <a:lstStyle/>
-          <a:p>
-            <a:pPr algn="l">
-              <a:defRPr sz="1400" b="0" i="0">
+              <a:t>Great insights on communication skills - highly recommended listening despite the clickbait title</a:t>
+            </a:r>
+          </a:p>
+        </p:txBody>
+      </p:sp>
+      <p:sp>
+        <p:nvSpPr>
+          <p:cNvPr id="8" name="TextBox 7"/>
+          <p:cNvSpPr txBox="1"/>
+          <p:nvPr/>
+        </p:nvSpPr>
+        <p:spPr>
+          <a:xfrm>
+            <a:off x="1737360" y="2743200"/>
+            <a:ext cx="9326880" cy="274320"/>
+          </a:xfrm>
+          <a:prstGeom prst="rect">
+            <a:avLst/>
+          </a:prstGeom>
+          <a:noFill/>
+        </p:spPr>
+        <p:txBody>
+          <a:bodyPr wrap="square">
+            <a:spAutoFit/>
+          </a:bodyPr>
+          <a:lstStyle/>
+          <a:p>
+            <a:pPr algn="l">
+              <a:defRPr sz="1100" b="0" i="0">
                 <a:solidFill>
                   <a:srgbClr val="8F95A3"/>
                 </a:solidFill>
@@ -5541,43 +5542,7 @@
               </a:defRPr>
             </a:pPr>
             <a:r>
-              <a:t>— Anna Kolyada</a:t>
-            </a:r>
-          </a:p>
-        </p:txBody>
-      </p:sp>
-      <p:sp>
-        <p:nvSpPr>
-          <p:cNvPr id="8" name="TextBox 7"/>
-          <p:cNvSpPr txBox="1"/>
-          <p:nvPr/>
-        </p:nvSpPr>
-        <p:spPr>
-          <a:xfrm>
-            <a:off x="1097280" y="5212080"/>
-            <a:ext cx="9966960" cy="365760"/>
-          </a:xfrm>
-          <a:prstGeom prst="rect">
-            <a:avLst/>
-          </a:prstGeom>
-          <a:noFill/>
-        </p:spPr>
-        <p:txBody>
-          <a:bodyPr wrap="square">
-            <a:spAutoFit/>
-          </a:bodyPr>
-          <a:lstStyle/>
-          <a:p>
-            <a:pPr algn="l">
-              <a:defRPr sz="1400" b="1" i="0">
-                <a:solidFill>
-                  <a:srgbClr val="8BC34A"/>
-                </a:solidFill>
-                <a:latin typeface="Calibri"/>
-              </a:defRPr>
-            </a:pPr>
-            <a:r>
-              <a:t>🧘 ×15</a:t>
+              <a:t>Shared by Maria Plendukova · 2</a:t>
             </a:r>
           </a:p>
         </p:txBody>
@@ -5590,7 +5555,7 @@
         </p:nvSpPr>
         <p:spPr>
           <a:xfrm>
-            <a:off x="1097280" y="5760720"/>
+            <a:off x="1097280" y="5943600"/>
             <a:ext cx="9966960" cy="274320"/>
           </a:xfrm>
           <a:prstGeom prst="rect">
@@ -5613,7 +5578,7 @@
               </a:defRPr>
             </a:pPr>
             <a:r>
-              <a:t>Office Culture</a:t>
+              <a:t>#general-chat</a:t>
             </a:r>
           </a:p>
         </p:txBody>
@@ -5659,7 +5624,7 @@
             <a:avLst/>
           </a:prstGeom>
           <a:solidFill>
-            <a:srgbClr val="FF6B35"/>
+            <a:srgbClr val="FD79A8"/>
           </a:solidFill>
           <a:ln>
             <a:noFill/>
@@ -5712,13 +5677,13 @@
             <a:pPr algn="l">
               <a:defRPr sz="1000" b="1">
                 <a:solidFill>
-                  <a:srgbClr val="FF6B35"/>
-                </a:solidFill>
-                <a:latin typeface="Calibri"/>
-              </a:defRPr>
-            </a:pPr>
-            <a:r>
-              <a:t>🏆  WEEKLY RITUAL</a:t>
+                  <a:srgbClr val="FD79A8"/>
+                </a:solidFill>
+                <a:latin typeface="Calibri"/>
+              </a:defRPr>
+            </a:pPr>
+            <a:r>
+              <a:t>💫  OFFICE LIFE</a:t>
             </a:r>
           </a:p>
         </p:txBody>
@@ -5748,13 +5713,13 @@
             <a:pPr algn="l">
               <a:defRPr sz="3200" b="1" i="0">
                 <a:solidFill>
-                  <a:srgbClr val="FF6B35"/>
-                </a:solidFill>
-                <a:latin typeface="Calibri"/>
-              </a:defRPr>
-            </a:pPr>
-            <a:r>
-              <a:t>Weekly Pulse Check</a:t>
+                  <a:srgbClr val="FD79A8"/>
+                </a:solidFill>
+                <a:latin typeface="Calibri"/>
+              </a:defRPr>
+            </a:pPr>
+            <a:r>
+              <a:t>Gratitude Moment</a:t>
             </a:r>
           </a:p>
         </p:txBody>
@@ -5790,7 +5755,7 @@
               </a:defRPr>
             </a:pPr>
             <a:r>
-              <a:t>Build. Ship. Improve.</a:t>
+              <a:t>Heartfelt Thanks</a:t>
             </a:r>
           </a:p>
         </p:txBody>
@@ -5803,8 +5768,44 @@
         </p:nvSpPr>
         <p:spPr>
           <a:xfrm>
-            <a:off x="1371600" y="2926080"/>
-            <a:ext cx="9418320" cy="548640"/>
+            <a:off x="1371600" y="2743200"/>
+            <a:ext cx="9692640" cy="1828800"/>
+          </a:xfrm>
+          <a:prstGeom prst="rect">
+            <a:avLst/>
+          </a:prstGeom>
+          <a:noFill/>
+        </p:spPr>
+        <p:txBody>
+          <a:bodyPr wrap="square">
+            <a:spAutoFit/>
+          </a:bodyPr>
+          <a:lstStyle/>
+          <a:p>
+            <a:pPr algn="l">
+              <a:defRPr sz="1500" b="0" i="1">
+                <a:solidFill>
+                  <a:srgbClr val="E2E2EA"/>
+                </a:solidFill>
+                <a:latin typeface="Calibri"/>
+              </a:defRPr>
+            </a:pPr>
+            <a:r>
+              <a:t>"Thanks guys, all of you, for the warm wishes! 💕"</a:t>
+            </a:r>
+          </a:p>
+        </p:txBody>
+      </p:sp>
+      <p:sp>
+        <p:nvSpPr>
+          <p:cNvPr id="7" name="TextBox 6"/>
+          <p:cNvSpPr txBox="1"/>
+          <p:nvPr/>
+        </p:nvSpPr>
+        <p:spPr>
+          <a:xfrm>
+            <a:off x="1097280" y="4754880"/>
+            <a:ext cx="9966960" cy="365760"/>
           </a:xfrm>
           <a:prstGeom prst="rect">
             <a:avLst/>
@@ -5820,49 +5821,13 @@
             <a:pPr algn="l">
               <a:defRPr sz="1400" b="0" i="0">
                 <a:solidFill>
-                  <a:srgbClr val="E2E2EA"/>
-                </a:solidFill>
-                <a:latin typeface="Calibri"/>
-              </a:defRPr>
-            </a:pPr>
-            <a:r>
-              <a:t>What did you ship this week?</a:t>
-            </a:r>
-          </a:p>
-        </p:txBody>
-      </p:sp>
-      <p:sp>
-        <p:nvSpPr>
-          <p:cNvPr id="7" name="TextBox 6"/>
-          <p:cNvSpPr txBox="1"/>
-          <p:nvPr/>
-        </p:nvSpPr>
-        <p:spPr>
-          <a:xfrm>
-            <a:off x="1371600" y="3657600"/>
-            <a:ext cx="9418320" cy="548640"/>
-          </a:xfrm>
-          <a:prstGeom prst="rect">
-            <a:avLst/>
-          </a:prstGeom>
-          <a:noFill/>
-        </p:spPr>
-        <p:txBody>
-          <a:bodyPr wrap="square">
-            <a:spAutoFit/>
-          </a:bodyPr>
-          <a:lstStyle/>
-          <a:p>
-            <a:pPr algn="l">
-              <a:defRPr sz="1400" b="0" i="0">
-                <a:solidFill>
-                  <a:srgbClr val="E2E2EA"/>
-                </a:solidFill>
-                <a:latin typeface="Calibri"/>
-              </a:defRPr>
-            </a:pPr>
-            <a:r>
-              <a:t>How will you improve next week?</a:t>
+                  <a:srgbClr val="8F95A3"/>
+                </a:solidFill>
+                <a:latin typeface="Calibri"/>
+              </a:defRPr>
+            </a:pPr>
+            <a:r>
+              <a:t>— Alexandr Sikorsky</a:t>
             </a:r>
           </a:p>
         </p:txBody>
@@ -5875,30 +5840,30 @@
         </p:nvSpPr>
         <p:spPr>
           <a:xfrm>
-            <a:off x="1097280" y="4754880"/>
-            <a:ext cx="9966960" cy="731520"/>
-          </a:xfrm>
-          <a:prstGeom prst="rect">
-            <a:avLst/>
-          </a:prstGeom>
-          <a:noFill/>
-        </p:spPr>
-        <p:txBody>
-          <a:bodyPr wrap="square">
-            <a:spAutoFit/>
-          </a:bodyPr>
-          <a:lstStyle/>
-          <a:p>
-            <a:pPr algn="l">
-              <a:defRPr sz="1500" b="0" i="1">
-                <a:solidFill>
-                  <a:srgbClr val="E2E2EA"/>
-                </a:solidFill>
-                <a:latin typeface="Calibri"/>
-              </a:defRPr>
-            </a:pPr>
-            <a:r>
-              <a:t>From requirements to pull requests mentality</a:t>
+            <a:off x="1097280" y="5212080"/>
+            <a:ext cx="9966960" cy="365760"/>
+          </a:xfrm>
+          <a:prstGeom prst="rect">
+            <a:avLst/>
+          </a:prstGeom>
+          <a:noFill/>
+        </p:spPr>
+        <p:txBody>
+          <a:bodyPr wrap="square">
+            <a:spAutoFit/>
+          </a:bodyPr>
+          <a:lstStyle/>
+          <a:p>
+            <a:pPr algn="l">
+              <a:defRPr sz="1400" b="1" i="0">
+                <a:solidFill>
+                  <a:srgbClr val="FD79A8"/>
+                </a:solidFill>
+                <a:latin typeface="Calibri"/>
+              </a:defRPr>
+            </a:pPr>
+            <a:r>
+              <a:t>Multiple hearts</a:t>
             </a:r>
           </a:p>
         </p:txBody>
@@ -5934,7 +5899,292 @@
               </a:defRPr>
             </a:pPr>
             <a:r>
-              <a:t>Company Culture</a:t>
+              <a:t>#birthdays</a:t>
+            </a:r>
+          </a:p>
+        </p:txBody>
+      </p:sp>
+    </p:spTree>
+  </p:cSld>
+  <p:clrMapOvr>
+    <a:masterClrMapping/>
+  </p:clrMapOvr>
+</p:sld>
+</file>
+
+<file path=ppt/slides/slide18.xml><?xml version="1.0" encoding="utf-8"?>
+<p:sld xmlns:a="http://schemas.openxmlformats.org/drawingml/2006/main" xmlns:p="http://schemas.openxmlformats.org/presentationml/2006/main" xmlns:r="http://schemas.openxmlformats.org/officeDocument/2006/relationships">
+  <p:cSld>
+    <p:bg>
+      <p:bgPr>
+        <a:solidFill>
+          <a:srgbClr val="08080C"/>
+        </a:solidFill>
+        <a:effectLst/>
+      </p:bgPr>
+    </p:bg>
+    <p:spTree>
+      <p:nvGrpSpPr>
+        <p:cNvPr id="1" name=""/>
+        <p:cNvGrpSpPr/>
+        <p:nvPr/>
+      </p:nvGrpSpPr>
+      <p:grpSpPr/>
+      <p:sp>
+        <p:nvSpPr>
+          <p:cNvPr id="2" name="Rectangle 1"/>
+          <p:cNvSpPr/>
+          <p:nvPr/>
+        </p:nvSpPr>
+        <p:spPr>
+          <a:xfrm>
+            <a:off x="0" y="365760"/>
+            <a:ext cx="12191695" cy="54864"/>
+          </a:xfrm>
+          <a:prstGeom prst="rect">
+            <a:avLst/>
+          </a:prstGeom>
+          <a:solidFill>
+            <a:srgbClr val="00B894"/>
+          </a:solidFill>
+          <a:ln>
+            <a:noFill/>
+          </a:ln>
+        </p:spPr>
+        <p:style>
+          <a:lnRef idx="1">
+            <a:schemeClr val="accent1"/>
+          </a:lnRef>
+          <a:fillRef idx="3">
+            <a:schemeClr val="accent1"/>
+          </a:fillRef>
+          <a:effectRef idx="2">
+            <a:schemeClr val="accent1"/>
+          </a:effectRef>
+          <a:fontRef idx="minor">
+            <a:schemeClr val="lt1"/>
+          </a:fontRef>
+        </p:style>
+        <p:txBody>
+          <a:bodyPr rtlCol="0" anchor="ctr"/>
+          <a:lstStyle/>
+          <a:p>
+            <a:pPr algn="ctr"/>
+          </a:p>
+        </p:txBody>
+      </p:sp>
+      <p:sp>
+        <p:nvSpPr>
+          <p:cNvPr id="3" name="TextBox 2"/>
+          <p:cNvSpPr txBox="1"/>
+          <p:nvPr/>
+        </p:nvSpPr>
+        <p:spPr>
+          <a:xfrm>
+            <a:off x="1097280" y="731520"/>
+            <a:ext cx="3657600" cy="365760"/>
+          </a:xfrm>
+          <a:prstGeom prst="rect">
+            <a:avLst/>
+          </a:prstGeom>
+          <a:noFill/>
+        </p:spPr>
+        <p:txBody>
+          <a:bodyPr wrap="none">
+            <a:spAutoFit/>
+          </a:bodyPr>
+          <a:lstStyle/>
+          <a:p>
+            <a:pPr algn="l">
+              <a:defRPr sz="1000" b="1">
+                <a:solidFill>
+                  <a:srgbClr val="00B894"/>
+                </a:solidFill>
+                <a:latin typeface="Calibri"/>
+              </a:defRPr>
+            </a:pPr>
+            <a:r>
+              <a:t>💰  MILESTONE</a:t>
+            </a:r>
+          </a:p>
+        </p:txBody>
+      </p:sp>
+      <p:sp>
+        <p:nvSpPr>
+          <p:cNvPr id="4" name="TextBox 3"/>
+          <p:cNvSpPr txBox="1"/>
+          <p:nvPr/>
+        </p:nvSpPr>
+        <p:spPr>
+          <a:xfrm>
+            <a:off x="1097280" y="1188720"/>
+            <a:ext cx="9966960" cy="731520"/>
+          </a:xfrm>
+          <a:prstGeom prst="rect">
+            <a:avLst/>
+          </a:prstGeom>
+          <a:noFill/>
+        </p:spPr>
+        <p:txBody>
+          <a:bodyPr wrap="square">
+            <a:spAutoFit/>
+          </a:bodyPr>
+          <a:lstStyle/>
+          <a:p>
+            <a:pPr algn="l">
+              <a:defRPr sz="3200" b="1" i="0">
+                <a:solidFill>
+                  <a:srgbClr val="00B894"/>
+                </a:solidFill>
+                <a:latin typeface="Calibri"/>
+              </a:defRPr>
+            </a:pPr>
+            <a:r>
+              <a:t>Sales Excellence</a:t>
+            </a:r>
+          </a:p>
+        </p:txBody>
+      </p:sp>
+      <p:sp>
+        <p:nvSpPr>
+          <p:cNvPr id="5" name="TextBox 4"/>
+          <p:cNvSpPr txBox="1"/>
+          <p:nvPr/>
+        </p:nvSpPr>
+        <p:spPr>
+          <a:xfrm>
+            <a:off x="1097280" y="2103120"/>
+            <a:ext cx="4572000" cy="822960"/>
+          </a:xfrm>
+          <a:prstGeom prst="rect">
+            <a:avLst/>
+          </a:prstGeom>
+          <a:noFill/>
+        </p:spPr>
+        <p:txBody>
+          <a:bodyPr wrap="square">
+            <a:spAutoFit/>
+          </a:bodyPr>
+          <a:lstStyle/>
+          <a:p>
+            <a:pPr algn="l">
+              <a:defRPr sz="5200" b="1" i="0">
+                <a:solidFill>
+                  <a:srgbClr val="00B894"/>
+                </a:solidFill>
+                <a:latin typeface="Calibri"/>
+              </a:defRPr>
+            </a:pPr>
+            <a:r>
+              <a:t>$390k</a:t>
+            </a:r>
+          </a:p>
+        </p:txBody>
+      </p:sp>
+      <p:sp>
+        <p:nvSpPr>
+          <p:cNvPr id="6" name="TextBox 5"/>
+          <p:cNvSpPr txBox="1"/>
+          <p:nvPr/>
+        </p:nvSpPr>
+        <p:spPr>
+          <a:xfrm>
+            <a:off x="1097280" y="2926080"/>
+            <a:ext cx="4572000" cy="365760"/>
+          </a:xfrm>
+          <a:prstGeom prst="rect">
+            <a:avLst/>
+          </a:prstGeom>
+          <a:noFill/>
+        </p:spPr>
+        <p:txBody>
+          <a:bodyPr wrap="square">
+            <a:spAutoFit/>
+          </a:bodyPr>
+          <a:lstStyle/>
+          <a:p>
+            <a:pPr algn="l">
+              <a:defRPr sz="1100" b="0" i="0">
+                <a:solidFill>
+                  <a:srgbClr val="8F95A3"/>
+                </a:solidFill>
+                <a:latin typeface="Calibri"/>
+              </a:defRPr>
+            </a:pPr>
+            <a:r>
+              <a:t>Weekly Revenue</a:t>
+            </a:r>
+          </a:p>
+        </p:txBody>
+      </p:sp>
+      <p:sp>
+        <p:nvSpPr>
+          <p:cNvPr id="7" name="TextBox 6"/>
+          <p:cNvSpPr txBox="1"/>
+          <p:nvPr/>
+        </p:nvSpPr>
+        <p:spPr>
+          <a:xfrm>
+            <a:off x="1097280" y="3566160"/>
+            <a:ext cx="9966960" cy="457200"/>
+          </a:xfrm>
+          <a:prstGeom prst="rect">
+            <a:avLst/>
+          </a:prstGeom>
+          <a:noFill/>
+        </p:spPr>
+        <p:txBody>
+          <a:bodyPr wrap="square">
+            <a:spAutoFit/>
+          </a:bodyPr>
+          <a:lstStyle/>
+          <a:p>
+            <a:pPr algn="l">
+              <a:defRPr sz="1800" b="1" i="0">
+                <a:solidFill>
+                  <a:srgbClr val="FFFFFF"/>
+                </a:solidFill>
+                <a:latin typeface="Calibri"/>
+              </a:defRPr>
+            </a:pPr>
+            <a:r>
+              <a:t>Weekly Sales Victory</a:t>
+            </a:r>
+          </a:p>
+        </p:txBody>
+      </p:sp>
+      <p:sp>
+        <p:nvSpPr>
+          <p:cNvPr id="8" name="TextBox 7"/>
+          <p:cNvSpPr txBox="1"/>
+          <p:nvPr/>
+        </p:nvSpPr>
+        <p:spPr>
+          <a:xfrm>
+            <a:off x="1097280" y="4206240"/>
+            <a:ext cx="9966960" cy="1371600"/>
+          </a:xfrm>
+          <a:prstGeom prst="rect">
+            <a:avLst/>
+          </a:prstGeom>
+          <a:noFill/>
+        </p:spPr>
+        <p:txBody>
+          <a:bodyPr wrap="square">
+            <a:spAutoFit/>
+          </a:bodyPr>
+          <a:lstStyle/>
+          <a:p>
+            <a:pPr algn="l">
+              <a:defRPr sz="1500" b="0" i="0">
+                <a:solidFill>
+                  <a:srgbClr val="E2E2EA"/>
+                </a:solidFill>
+                <a:latin typeface="Calibri"/>
+              </a:defRPr>
+            </a:pPr>
+            <a:r>
+              <a:t>Sales team closed 8 deals generating $390k net revenue in a single week, demonstrating our strong market position.</a:t>
             </a:r>
           </a:p>
         </p:txBody>
@@ -6039,7 +6289,7 @@
               </a:defRPr>
             </a:pPr>
             <a:r>
-              <a:t>🎉  CELEBRATION</a:t>
+              <a:t>🎂  CELEBRATION</a:t>
             </a:r>
           </a:p>
         </p:txBody>
@@ -6075,7 +6325,7 @@
               </a:defRPr>
             </a:pPr>
             <a:r>
-              <a:t>Birthday Celebrations!</a:t>
+              <a:t>Birthday Stars</a:t>
             </a:r>
           </a:p>
         </p:txBody>
@@ -6147,7 +6397,7 @@
               </a:defRPr>
             </a:pPr>
             <a:r>
-              <a:t>March 12, 2026</a:t>
+              <a:t>March 12th</a:t>
             </a:r>
           </a:p>
         </p:txBody>
@@ -6219,7 +6469,7 @@
               </a:defRPr>
             </a:pPr>
             <a:r>
-              <a:t>Our team showered Alexandr with birthday love and warm wishes!</a:t>
+              <a:t>Our amazing team member is celebrating today!</a:t>
             </a:r>
           </a:p>
         </p:txBody>
@@ -6265,7 +6515,7 @@
             <a:avLst/>
           </a:prstGeom>
           <a:solidFill>
-            <a:srgbClr val="4CAF50"/>
+            <a:srgbClr val="4A90E2"/>
           </a:solidFill>
           <a:ln>
             <a:noFill/>
@@ -6318,7 +6568,7 @@
             <a:pPr algn="l">
               <a:defRPr sz="1000" b="1">
                 <a:solidFill>
-                  <a:srgbClr val="4CAF50"/>
+                  <a:srgbClr val="4A90E2"/>
                 </a:solidFill>
                 <a:latin typeface="Calibri"/>
               </a:defRPr>
@@ -6354,7 +6604,7 @@
             <a:pPr algn="l">
               <a:defRPr sz="3200" b="1" i="0">
                 <a:solidFill>
-                  <a:srgbClr val="4CAF50"/>
+                  <a:srgbClr val="4A90E2"/>
                 </a:solidFill>
                 <a:latin typeface="Calibri"/>
               </a:defRPr>
@@ -6390,7 +6640,7 @@
             <a:pPr algn="l">
               <a:defRPr sz="4800" b="1" i="0">
                 <a:solidFill>
-                  <a:srgbClr val="4CAF50"/>
+                  <a:srgbClr val="4A90E2"/>
                 </a:solidFill>
                 <a:latin typeface="Calibri"/>
               </a:defRPr>
@@ -6468,7 +6718,7 @@
               </a:defRPr>
             </a:pPr>
             <a:r>
-              <a:t>by Gleb Krahotkin &amp; DevOps Team</a:t>
+              <a:t>by Gleb Krahotkin</a:t>
             </a:r>
           </a:p>
         </p:txBody>
@@ -6504,7 +6754,7 @@
               </a:defRPr>
             </a:pPr>
             <a:r>
-              <a:t>Coolify Deployment Platform Launched</a:t>
+              <a:t>Coolify Launch Success</a:t>
             </a:r>
           </a:p>
         </p:txBody>
@@ -6540,7 +6790,7 @@
               </a:defRPr>
             </a:pPr>
             <a:r>
-              <a:t>One-click application deployment service now live for all teams</a:t>
+              <a:t>Introduced Coolify - a service that allows you to deploy your applications in just a few clicks, complete with comprehensive documentation.</a:t>
             </a:r>
           </a:p>
         </p:txBody>
@@ -6576,7 +6826,7 @@
               </a:defRPr>
             </a:pPr>
             <a:r>
-              <a:t>💬 "Making development faster and more accessible for everyone"</a:t>
+              <a:t>💬 "Making deployment accessible to everyone with one-click simplicity"</a:t>
             </a:r>
           </a:p>
         </p:txBody>
@@ -6622,7 +6872,7 @@
             <a:avLst/>
           </a:prstGeom>
           <a:solidFill>
-            <a:srgbClr val="2196F3"/>
+            <a:srgbClr val="9B59B6"/>
           </a:solidFill>
           <a:ln>
             <a:noFill/>
@@ -6675,13 +6925,13 @@
             <a:pPr algn="l">
               <a:defRPr sz="1000" b="1">
                 <a:solidFill>
-                  <a:srgbClr val="2196F3"/>
-                </a:solidFill>
-                <a:latin typeface="Calibri"/>
-              </a:defRPr>
-            </a:pPr>
-            <a:r>
-              <a:t>🧠  EVENT</a:t>
+                  <a:srgbClr val="9B59B6"/>
+                </a:solidFill>
+                <a:latin typeface="Calibri"/>
+              </a:defRPr>
+            </a:pPr>
+            <a:r>
+              <a:t>📚  EVENT</a:t>
             </a:r>
           </a:p>
         </p:txBody>
@@ -6711,13 +6961,13 @@
             <a:pPr algn="l">
               <a:defRPr sz="3200" b="1" i="0">
                 <a:solidFill>
-                  <a:srgbClr val="2196F3"/>
-                </a:solidFill>
-                <a:latin typeface="Calibri"/>
-              </a:defRPr>
-            </a:pPr>
-            <a:r>
-              <a:t>Learning &amp; Development</a:t>
+                  <a:srgbClr val="9B59B6"/>
+                </a:solidFill>
+                <a:latin typeface="Calibri"/>
+              </a:defRPr>
+            </a:pPr>
+            <a:r>
+              <a:t>Learning Initiative</a:t>
             </a:r>
           </a:p>
         </p:txBody>
@@ -6753,7 +7003,7 @@
               </a:defRPr>
             </a:pPr>
             <a:r>
-              <a:t>11th Lunch &amp; Learn Session</a:t>
+              <a:t>The 4 Disciplines of Execution Book Club</a:t>
             </a:r>
           </a:p>
         </p:txBody>
@@ -6783,13 +7033,13 @@
             <a:pPr algn="l">
               <a:defRPr sz="1400" b="1" i="0">
                 <a:solidFill>
-                  <a:srgbClr val="2196F3"/>
-                </a:solidFill>
-                <a:latin typeface="Calibri"/>
-              </a:defRPr>
-            </a:pPr>
-            <a:r>
-              <a:t>Recent session</a:t>
+                  <a:srgbClr val="9B59B6"/>
+                </a:solidFill>
+                <a:latin typeface="Calibri"/>
+              </a:defRPr>
+            </a:pPr>
+            <a:r>
+              <a:t>Starting Now</a:t>
             </a:r>
           </a:p>
         </p:txBody>
@@ -6825,7 +7075,7 @@
               </a:defRPr>
             </a:pPr>
             <a:r>
-              <a:t>Timofey Levanov presented on fraud traffic detection - fascinating insights!</a:t>
+              <a:t>Anna is leading a reading club focused on Wildly Important Goals (WIGs), Leading and Lagging Metrics, Scorecards, and Follow-through execution discipline.</a:t>
             </a:r>
           </a:p>
         </p:txBody>
@@ -6861,7 +7111,7 @@
               </a:defRPr>
             </a:pPr>
             <a:r>
-              <a:t>Organized by Katarzyna Raniszewska</a:t>
+              <a:t>Organized by Anna &amp; Pavel Golubev</a:t>
             </a:r>
           </a:p>
         </p:txBody>
@@ -6907,7 +7157,7 @@
             <a:avLst/>
           </a:prstGeom>
           <a:solidFill>
-            <a:srgbClr val="9C27B0"/>
+            <a:srgbClr val="E67E22"/>
           </a:solidFill>
           <a:ln>
             <a:noFill/>
@@ -6960,13 +7210,13 @@
             <a:pPr algn="l">
               <a:defRPr sz="1000" b="1">
                 <a:solidFill>
-                  <a:srgbClr val="9C27B0"/>
-                </a:solidFill>
-                <a:latin typeface="Calibri"/>
-              </a:defRPr>
-            </a:pPr>
-            <a:r>
-              <a:t>📚  RECOMMENDED</a:t>
+                  <a:srgbClr val="E67E22"/>
+                </a:solidFill>
+                <a:latin typeface="Calibri"/>
+              </a:defRPr>
+            </a:pPr>
+            <a:r>
+              <a:t>🎓  WEEKLY RITUAL</a:t>
             </a:r>
           </a:p>
         </p:txBody>
@@ -6996,13 +7246,13 @@
             <a:pPr algn="l">
               <a:defRPr sz="3200" b="1" i="0">
                 <a:solidFill>
-                  <a:srgbClr val="9C27B0"/>
-                </a:solidFill>
-                <a:latin typeface="Calibri"/>
-              </a:defRPr>
-            </a:pPr>
-            <a:r>
-              <a:t>Book Club Launch</a:t>
+                  <a:srgbClr val="E67E22"/>
+                </a:solidFill>
+                <a:latin typeface="Calibri"/>
+              </a:defRPr>
+            </a:pPr>
+            <a:r>
+              <a:t>Knowledge Sharing</a:t>
             </a:r>
           </a:p>
         </p:txBody>
@@ -7016,29 +7266,29 @@
         <p:spPr>
           <a:xfrm>
             <a:off x="1097280" y="2103120"/>
-            <a:ext cx="457200" cy="365760"/>
-          </a:xfrm>
-          <a:prstGeom prst="rect">
-            <a:avLst/>
-          </a:prstGeom>
-          <a:noFill/>
-        </p:spPr>
-        <p:txBody>
-          <a:bodyPr wrap="square">
-            <a:spAutoFit/>
-          </a:bodyPr>
-          <a:lstStyle/>
-          <a:p>
-            <a:pPr algn="l">
-              <a:defRPr sz="2200" b="1" i="0">
-                <a:solidFill>
-                  <a:srgbClr val="9C27B0"/>
-                </a:solidFill>
-                <a:latin typeface="Calibri"/>
-              </a:defRPr>
-            </a:pPr>
-            <a:r>
-              <a:t>01</a:t>
+            <a:ext cx="9966960" cy="457200"/>
+          </a:xfrm>
+          <a:prstGeom prst="rect">
+            <a:avLst/>
+          </a:prstGeom>
+          <a:noFill/>
+        </p:spPr>
+        <p:txBody>
+          <a:bodyPr wrap="square">
+            <a:spAutoFit/>
+          </a:bodyPr>
+          <a:lstStyle/>
+          <a:p>
+            <a:pPr algn="l">
+              <a:defRPr sz="1800" b="1" i="0">
+                <a:solidFill>
+                  <a:srgbClr val="FFFFFF"/>
+                </a:solidFill>
+                <a:latin typeface="Calibri"/>
+              </a:defRPr>
+            </a:pPr>
+            <a:r>
+              <a:t>11th Lunch &amp; Learn Complete!</a:t>
             </a:r>
           </a:p>
         </p:txBody>
@@ -7051,30 +7301,30 @@
         </p:nvSpPr>
         <p:spPr>
           <a:xfrm>
-            <a:off x="1737360" y="2103120"/>
-            <a:ext cx="9326880" cy="365760"/>
-          </a:xfrm>
-          <a:prstGeom prst="rect">
-            <a:avLst/>
-          </a:prstGeom>
-          <a:noFill/>
-        </p:spPr>
-        <p:txBody>
-          <a:bodyPr wrap="square">
-            <a:spAutoFit/>
-          </a:bodyPr>
-          <a:lstStyle/>
-          <a:p>
-            <a:pPr algn="l">
-              <a:defRPr sz="1600" b="1" i="0">
-                <a:solidFill>
-                  <a:srgbClr val="FFFFFF"/>
-                </a:solidFill>
-                <a:latin typeface="Calibri"/>
-              </a:defRPr>
-            </a:pPr>
-            <a:r>
-              <a:t>The 4 Disciplines of Execution</a:t>
+            <a:off x="1371600" y="2926080"/>
+            <a:ext cx="9418320" cy="548640"/>
+          </a:xfrm>
+          <a:prstGeom prst="rect">
+            <a:avLst/>
+          </a:prstGeom>
+          <a:noFill/>
+        </p:spPr>
+        <p:txBody>
+          <a:bodyPr wrap="square">
+            <a:spAutoFit/>
+          </a:bodyPr>
+          <a:lstStyle/>
+          <a:p>
+            <a:pPr algn="l">
+              <a:defRPr sz="1400" b="0" i="0">
+                <a:solidFill>
+                  <a:srgbClr val="E2E2EA"/>
+                </a:solidFill>
+                <a:latin typeface="Calibri"/>
+              </a:defRPr>
+            </a:pPr>
+            <a:r>
+              <a:t>Big thank you to Timofey Levanov for his presentation on fraud traffic detection</a:t>
             </a:r>
           </a:p>
         </p:txBody>
@@ -7087,22 +7337,22 @@
         </p:nvSpPr>
         <p:spPr>
           <a:xfrm>
-            <a:off x="1737360" y="2423160"/>
-            <a:ext cx="9326880" cy="365760"/>
-          </a:xfrm>
-          <a:prstGeom prst="rect">
-            <a:avLst/>
-          </a:prstGeom>
-          <a:noFill/>
-        </p:spPr>
-        <p:txBody>
-          <a:bodyPr wrap="square">
-            <a:spAutoFit/>
-          </a:bodyPr>
-          <a:lstStyle/>
-          <a:p>
-            <a:pPr algn="l">
-              <a:defRPr sz="1200" b="0" i="0">
+            <a:off x="1371600" y="3657600"/>
+            <a:ext cx="9418320" cy="548640"/>
+          </a:xfrm>
+          <a:prstGeom prst="rect">
+            <a:avLst/>
+          </a:prstGeom>
+          <a:noFill/>
+        </p:spPr>
+        <p:txBody>
+          <a:bodyPr wrap="square">
+            <a:spAutoFit/>
+          </a:bodyPr>
+          <a:lstStyle/>
+          <a:p>
+            <a:pPr algn="l">
+              <a:defRPr sz="1400" b="0" i="0">
                 <a:solidFill>
                   <a:srgbClr val="E2E2EA"/>
                 </a:solidFill>
@@ -7110,7 +7360,7 @@
               </a:defRPr>
             </a:pPr>
             <a:r>
-              <a:t>Focus on WIGs, Leading/Lagging Metrics, Scorecards &amp; Follow-through</a:t>
+              <a:t>Recording and materials now available for the whole team</a:t>
             </a:r>
           </a:p>
         </p:txBody>
@@ -7123,30 +7373,30 @@
         </p:nvSpPr>
         <p:spPr>
           <a:xfrm>
-            <a:off x="1737360" y="2743200"/>
-            <a:ext cx="9326880" cy="274320"/>
-          </a:xfrm>
-          <a:prstGeom prst="rect">
-            <a:avLst/>
-          </a:prstGeom>
-          <a:noFill/>
-        </p:spPr>
-        <p:txBody>
-          <a:bodyPr wrap="square">
-            <a:spAutoFit/>
-          </a:bodyPr>
-          <a:lstStyle/>
-          <a:p>
-            <a:pPr algn="l">
-              <a:defRPr sz="1100" b="0" i="0">
-                <a:solidFill>
-                  <a:srgbClr val="8F95A3"/>
-                </a:solidFill>
-                <a:latin typeface="Calibri"/>
-              </a:defRPr>
-            </a:pPr>
-            <a:r>
-              <a:t>Shared by Pavel Golubev · 🧠 ×7</a:t>
+            <a:off x="1097280" y="4754880"/>
+            <a:ext cx="9966960" cy="731520"/>
+          </a:xfrm>
+          <a:prstGeom prst="rect">
+            <a:avLst/>
+          </a:prstGeom>
+          <a:noFill/>
+        </p:spPr>
+        <p:txBody>
+          <a:bodyPr wrap="square">
+            <a:spAutoFit/>
+          </a:bodyPr>
+          <a:lstStyle/>
+          <a:p>
+            <a:pPr algn="l">
+              <a:defRPr sz="1500" b="0" i="1">
+                <a:solidFill>
+                  <a:srgbClr val="E2E2EA"/>
+                </a:solidFill>
+                <a:latin typeface="Calibri"/>
+              </a:defRPr>
+            </a:pPr>
+            <a:r>
+              <a:t>Continuous learning and knowledge sharing</a:t>
             </a:r>
           </a:p>
         </p:txBody>
@@ -7159,151 +7409,7 @@
         </p:nvSpPr>
         <p:spPr>
           <a:xfrm>
-            <a:off x="1097280" y="3291839"/>
-            <a:ext cx="457200" cy="365760"/>
-          </a:xfrm>
-          <a:prstGeom prst="rect">
-            <a:avLst/>
-          </a:prstGeom>
-          <a:noFill/>
-        </p:spPr>
-        <p:txBody>
-          <a:bodyPr wrap="square">
-            <a:spAutoFit/>
-          </a:bodyPr>
-          <a:lstStyle/>
-          <a:p>
-            <a:pPr algn="l">
-              <a:defRPr sz="2200" b="1" i="0">
-                <a:solidFill>
-                  <a:srgbClr val="9C27B0"/>
-                </a:solidFill>
-                <a:latin typeface="Calibri"/>
-              </a:defRPr>
-            </a:pPr>
-            <a:r>
-              <a:t>02</a:t>
-            </a:r>
-          </a:p>
-        </p:txBody>
-      </p:sp>
-      <p:sp>
-        <p:nvSpPr>
-          <p:cNvPr id="10" name="TextBox 9"/>
-          <p:cNvSpPr txBox="1"/>
-          <p:nvPr/>
-        </p:nvSpPr>
-        <p:spPr>
-          <a:xfrm>
-            <a:off x="1737360" y="3291839"/>
-            <a:ext cx="9326880" cy="365760"/>
-          </a:xfrm>
-          <a:prstGeom prst="rect">
-            <a:avLst/>
-          </a:prstGeom>
-          <a:noFill/>
-        </p:spPr>
-        <p:txBody>
-          <a:bodyPr wrap="square">
-            <a:spAutoFit/>
-          </a:bodyPr>
-          <a:lstStyle/>
-          <a:p>
-            <a:pPr algn="l">
-              <a:defRPr sz="1600" b="1" i="0">
-                <a:solidFill>
-                  <a:srgbClr val="FFFFFF"/>
-                </a:solidFill>
-                <a:latin typeface="Calibri"/>
-              </a:defRPr>
-            </a:pPr>
-            <a:r>
-              <a:t>The Speaking Coach: Stop Saying This Word</a:t>
-            </a:r>
-          </a:p>
-        </p:txBody>
-      </p:sp>
-      <p:sp>
-        <p:nvSpPr>
-          <p:cNvPr id="11" name="TextBox 10"/>
-          <p:cNvSpPr txBox="1"/>
-          <p:nvPr/>
-        </p:nvSpPr>
-        <p:spPr>
-          <a:xfrm>
-            <a:off x="1737360" y="3611879"/>
-            <a:ext cx="9326880" cy="365760"/>
-          </a:xfrm>
-          <a:prstGeom prst="rect">
-            <a:avLst/>
-          </a:prstGeom>
-          <a:noFill/>
-        </p:spPr>
-        <p:txBody>
-          <a:bodyPr wrap="square">
-            <a:spAutoFit/>
-          </a:bodyPr>
-          <a:lstStyle/>
-          <a:p>
-            <a:pPr algn="l">
-              <a:defRPr sz="1200" b="0" i="0">
-                <a:solidFill>
-                  <a:srgbClr val="E2E2EA"/>
-                </a:solidFill>
-                <a:latin typeface="Calibri"/>
-              </a:defRPr>
-            </a:pPr>
-            <a:r>
-              <a:t>Communication insights - clickbait title but genuinely great content</a:t>
-            </a:r>
-          </a:p>
-        </p:txBody>
-      </p:sp>
-      <p:sp>
-        <p:nvSpPr>
-          <p:cNvPr id="12" name="TextBox 11"/>
-          <p:cNvSpPr txBox="1"/>
-          <p:nvPr/>
-        </p:nvSpPr>
-        <p:spPr>
-          <a:xfrm>
-            <a:off x="1737360" y="3931920"/>
-            <a:ext cx="9326880" cy="274320"/>
-          </a:xfrm>
-          <a:prstGeom prst="rect">
-            <a:avLst/>
-          </a:prstGeom>
-          <a:noFill/>
-        </p:spPr>
-        <p:txBody>
-          <a:bodyPr wrap="square">
-            <a:spAutoFit/>
-          </a:bodyPr>
-          <a:lstStyle/>
-          <a:p>
-            <a:pPr algn="l">
-              <a:defRPr sz="1100" b="0" i="0">
-                <a:solidFill>
-                  <a:srgbClr val="8F95A3"/>
-                </a:solidFill>
-                <a:latin typeface="Calibri"/>
-              </a:defRPr>
-            </a:pPr>
-            <a:r>
-              <a:t>Shared by Maria Plendukova · ❤️ ×2</a:t>
-            </a:r>
-          </a:p>
-        </p:txBody>
-      </p:sp>
-      <p:sp>
-        <p:nvSpPr>
-          <p:cNvPr id="13" name="TextBox 12"/>
-          <p:cNvSpPr txBox="1"/>
-          <p:nvPr/>
-        </p:nvSpPr>
-        <p:spPr>
-          <a:xfrm>
-            <a:off x="1097280" y="5943600"/>
+            <a:off x="1097280" y="5760720"/>
             <a:ext cx="9966960" cy="274320"/>
           </a:xfrm>
           <a:prstGeom prst="rect">
@@ -7372,7 +7478,7 @@
             <a:avLst/>
           </a:prstGeom>
           <a:solidFill>
-            <a:srgbClr val="FF9800"/>
+            <a:srgbClr val="27AE60"/>
           </a:solidFill>
           <a:ln>
             <a:noFill/>
@@ -7425,7 +7531,7 @@
             <a:pPr algn="l">
               <a:defRPr sz="1000" b="1">
                 <a:solidFill>
-                  <a:srgbClr val="FF9800"/>
+                  <a:srgbClr val="27AE60"/>
                 </a:solidFill>
                 <a:latin typeface="Calibri"/>
               </a:defRPr>
@@ -7461,13 +7567,13 @@
             <a:pPr algn="l">
               <a:defRPr sz="3200" b="1" i="0">
                 <a:solidFill>
-                  <a:srgbClr val="FF9800"/>
-                </a:solidFill>
-                <a:latin typeface="Calibri"/>
-              </a:defRPr>
-            </a:pPr>
-            <a:r>
-              <a:t>Recognition Round-Up</a:t>
+                  <a:srgbClr val="27AE60"/>
+                </a:solidFill>
+                <a:latin typeface="Calibri"/>
+              </a:defRPr>
+            </a:pPr>
+            <a:r>
+              <a:t>Team Recognition</a:t>
             </a:r>
           </a:p>
         </p:txBody>
@@ -7497,7 +7603,7 @@
             <a:pPr algn="l">
               <a:defRPr sz="2800" b="1" i="0">
                 <a:solidFill>
-                  <a:srgbClr val="FF9800"/>
+                  <a:srgbClr val="27AE60"/>
                 </a:solidFill>
                 <a:latin typeface="Calibri"/>
               </a:defRPr>
@@ -7611,7 +7717,7 @@
               </a:defRPr>
             </a:pPr>
             <a:r>
-              <a:t>"Outstanding design work and creativity"</a:t>
+              <a:t>"Outstanding design work that made a real impact"</a:t>
             </a:r>
           </a:p>
         </p:txBody>
@@ -7641,13 +7747,13 @@
             <a:pPr algn="l">
               <a:defRPr sz="1200" b="1" i="0">
                 <a:solidFill>
-                  <a:srgbClr val="FF9800"/>
-                </a:solidFill>
-                <a:latin typeface="Calibri"/>
-              </a:defRPr>
-            </a:pPr>
-            <a:r>
-              <a:t>SERVE OTHERS · WORK TOGETHER</a:t>
+                  <a:srgbClr val="27AE60"/>
+                </a:solidFill>
+                <a:latin typeface="Calibri"/>
+              </a:defRPr>
+            </a:pPr>
+            <a:r>
+              <a:t>Excellence · Creativity</a:t>
             </a:r>
           </a:p>
         </p:txBody>
@@ -7693,7 +7799,7 @@
             <a:avLst/>
           </a:prstGeom>
           <a:solidFill>
-            <a:srgbClr val="E91E63"/>
+            <a:srgbClr val="27AE60"/>
           </a:solidFill>
           <a:ln>
             <a:noFill/>
@@ -7746,13 +7852,13 @@
             <a:pPr algn="l">
               <a:defRPr sz="1000" b="1">
                 <a:solidFill>
-                  <a:srgbClr val="E91E63"/>
-                </a:solidFill>
-                <a:latin typeface="Calibri"/>
-              </a:defRPr>
-            </a:pPr>
-            <a:r>
-              <a:t>🌟  CLAPS</a:t>
+                  <a:srgbClr val="27AE60"/>
+                </a:solidFill>
+                <a:latin typeface="Calibri"/>
+              </a:defRPr>
+            </a:pPr>
+            <a:r>
+              <a:t>🙌  CLAPS</a:t>
             </a:r>
           </a:p>
         </p:txBody>
@@ -7782,13 +7888,13 @@
             <a:pPr algn="l">
               <a:defRPr sz="3200" b="1" i="0">
                 <a:solidFill>
-                  <a:srgbClr val="E91E63"/>
-                </a:solidFill>
-                <a:latin typeface="Calibri"/>
-              </a:defRPr>
-            </a:pPr>
-            <a:r>
-              <a:t>Team Excellence</a:t>
+                  <a:srgbClr val="27AE60"/>
+                </a:solidFill>
+                <a:latin typeface="Calibri"/>
+              </a:defRPr>
+            </a:pPr>
+            <a:r>
+              <a:t>Technical Excellence</a:t>
             </a:r>
           </a:p>
         </p:txBody>
@@ -7818,7 +7924,7 @@
             <a:pPr algn="l">
               <a:defRPr sz="2800" b="1" i="0">
                 <a:solidFill>
-                  <a:srgbClr val="E91E63"/>
+                  <a:srgbClr val="27AE60"/>
                 </a:solidFill>
                 <a:latin typeface="Calibri"/>
               </a:defRPr>
@@ -7962,13 +8068,13 @@
             <a:pPr algn="l">
               <a:defRPr sz="1200" b="1" i="0">
                 <a:solidFill>
-                  <a:srgbClr val="E91E63"/>
-                </a:solidFill>
-                <a:latin typeface="Calibri"/>
-              </a:defRPr>
-            </a:pPr>
-            <a:r>
-              <a:t>EXTREME OWNERSHIP · SERVE OTHERS</a:t>
+                  <a:srgbClr val="27AE60"/>
+                </a:solidFill>
+                <a:latin typeface="Calibri"/>
+              </a:defRPr>
+            </a:pPr>
+            <a:r>
+              <a:t>Technical Excellence · Innovation</a:t>
             </a:r>
           </a:p>
         </p:txBody>
@@ -8014,7 +8120,7 @@
             <a:avLst/>
           </a:prstGeom>
           <a:solidFill>
-            <a:srgbClr val="3F51B5"/>
+            <a:srgbClr val="27AE60"/>
           </a:solidFill>
           <a:ln>
             <a:noFill/>
@@ -8067,13 +8173,13 @@
             <a:pPr algn="l">
               <a:defRPr sz="1000" b="1">
                 <a:solidFill>
-                  <a:srgbClr val="3F51B5"/>
-                </a:solidFill>
-                <a:latin typeface="Calibri"/>
-              </a:defRPr>
-            </a:pPr>
-            <a:r>
-              <a:t>⚡  CLAPS</a:t>
+                  <a:srgbClr val="27AE60"/>
+                </a:solidFill>
+                <a:latin typeface="Calibri"/>
+              </a:defRPr>
+            </a:pPr>
+            <a:r>
+              <a:t>🎯  CLAPS</a:t>
             </a:r>
           </a:p>
         </p:txBody>
@@ -8103,13 +8209,13 @@
             <a:pPr algn="l">
               <a:defRPr sz="3200" b="1" i="0">
                 <a:solidFill>
-                  <a:srgbClr val="3F51B5"/>
-                </a:solidFill>
-                <a:latin typeface="Calibri"/>
-              </a:defRPr>
-            </a:pPr>
-            <a:r>
-              <a:t>DevOps Recognition</a:t>
+                  <a:srgbClr val="27AE60"/>
+                </a:solidFill>
+                <a:latin typeface="Calibri"/>
+              </a:defRPr>
+            </a:pPr>
+            <a:r>
+              <a:t>Leadership Impact</a:t>
             </a:r>
           </a:p>
         </p:txBody>
@@ -8139,13 +8245,13 @@
             <a:pPr algn="l">
               <a:defRPr sz="2800" b="1" i="0">
                 <a:solidFill>
-                  <a:srgbClr val="3F51B5"/>
-                </a:solidFill>
-                <a:latin typeface="Calibri"/>
-              </a:defRPr>
-            </a:pPr>
-            <a:r>
-              <a:t>30</a:t>
+                  <a:srgbClr val="27AE60"/>
+                </a:solidFill>
+                <a:latin typeface="Calibri"/>
+              </a:defRPr>
+            </a:pPr>
+            <a:r>
+              <a:t>40</a:t>
             </a:r>
           </a:p>
         </p:txBody>
@@ -8181,7 +8287,7 @@
               </a:defRPr>
             </a:pPr>
             <a:r>
-              <a:t>from Gleb Krahotkin</a:t>
+              <a:t>from Anastasia Sokolova</a:t>
             </a:r>
           </a:p>
         </p:txBody>
@@ -8217,7 +8323,7 @@
               </a:defRPr>
             </a:pPr>
             <a:r>
-              <a:t>to: Hierman Pelekh</a:t>
+              <a:t>to: Sasha Sakovich</a:t>
             </a:r>
           </a:p>
         </p:txBody>
@@ -8253,7 +8359,7 @@
               </a:defRPr>
             </a:pPr>
             <a:r>
-              <a:t>"Infrastructure improvements and system reliability"</a:t>
+              <a:t>"Strong leadership and team guidance"</a:t>
             </a:r>
           </a:p>
         </p:txBody>
@@ -8283,13 +8389,13 @@
             <a:pPr algn="l">
               <a:defRPr sz="1200" b="1" i="0">
                 <a:solidFill>
-                  <a:srgbClr val="3F51B5"/>
-                </a:solidFill>
-                <a:latin typeface="Calibri"/>
-              </a:defRPr>
-            </a:pPr>
-            <a:r>
-              <a:t>BUILD BETTER · WORK TOGETHER</a:t>
+                  <a:srgbClr val="27AE60"/>
+                </a:solidFill>
+                <a:latin typeface="Calibri"/>
+              </a:defRPr>
+            </a:pPr>
+            <a:r>
+              <a:t>Leadership · Mentorship</a:t>
             </a:r>
           </a:p>
         </p:txBody>
@@ -8335,7 +8441,7 @@
             <a:avLst/>
           </a:prstGeom>
           <a:solidFill>
-            <a:srgbClr val="607D8B"/>
+            <a:srgbClr val="27AE60"/>
           </a:solidFill>
           <a:ln>
             <a:noFill/>
@@ -8388,13 +8494,13 @@
             <a:pPr algn="l">
               <a:defRPr sz="1000" b="1">
                 <a:solidFill>
-                  <a:srgbClr val="607D8B"/>
-                </a:solidFill>
-                <a:latin typeface="Calibri"/>
-              </a:defRPr>
-            </a:pPr>
-            <a:r>
-              <a:t>🎯  CLAPS</a:t>
+                  <a:srgbClr val="27AE60"/>
+                </a:solidFill>
+                <a:latin typeface="Calibri"/>
+              </a:defRPr>
+            </a:pPr>
+            <a:r>
+              <a:t>🔧  CLAPS</a:t>
             </a:r>
           </a:p>
         </p:txBody>
@@ -8424,13 +8530,13 @@
             <a:pPr algn="l">
               <a:defRPr sz="3200" b="1" i="0">
                 <a:solidFill>
-                  <a:srgbClr val="607D8B"/>
-                </a:solidFill>
-                <a:latin typeface="Calibri"/>
-              </a:defRPr>
-            </a:pPr>
-            <a:r>
-              <a:t>Multi-Team Collaboration</a:t>
+                  <a:srgbClr val="27AE60"/>
+                </a:solidFill>
+                <a:latin typeface="Calibri"/>
+              </a:defRPr>
+            </a:pPr>
+            <a:r>
+              <a:t>DevOps Recognition</a:t>
             </a:r>
           </a:p>
         </p:txBody>
@@ -8460,13 +8566,13 @@
             <a:pPr algn="l">
               <a:defRPr sz="2800" b="1" i="0">
                 <a:solidFill>
-                  <a:srgbClr val="607D8B"/>
-                </a:solidFill>
-                <a:latin typeface="Calibri"/>
-              </a:defRPr>
-            </a:pPr>
-            <a:r>
-              <a:t>40</a:t>
+                  <a:srgbClr val="27AE60"/>
+                </a:solidFill>
+                <a:latin typeface="Calibri"/>
+              </a:defRPr>
+            </a:pPr>
+            <a:r>
+              <a:t>30</a:t>
             </a:r>
           </a:p>
         </p:txBody>
@@ -8502,7 +8608,7 @@
               </a:defRPr>
             </a:pPr>
             <a:r>
-              <a:t>from Anastasia Sokolova</a:t>
+              <a:t>from Gleb Krahotkin</a:t>
             </a:r>
           </a:p>
         </p:txBody>
@@ -8538,7 +8644,7 @@
               </a:defRPr>
             </a:pPr>
             <a:r>
-              <a:t>to: Sasha Sakovich</a:t>
+              <a:t>to: Hierman Pelekh</a:t>
             </a:r>
           </a:p>
         </p:txBody>
@@ -8574,7 +8680,7 @@
               </a:defRPr>
             </a:pPr>
             <a:r>
-              <a:t>"Cross-functional project leadership and execution"</a:t>
+              <a:t>"Excellent infrastructure and deployment solutions"</a:t>
             </a:r>
           </a:p>
         </p:txBody>
@@ -8604,13 +8710,13 @@
             <a:pPr algn="l">
               <a:defRPr sz="1200" b="1" i="0">
                 <a:solidFill>
-                  <a:srgbClr val="607D8B"/>
-                </a:solidFill>
-                <a:latin typeface="Calibri"/>
-              </a:defRPr>
-            </a:pPr>
-            <a:r>
-              <a:t>WORK TOGETHER · EXTREME OWNERSHIP</a:t>
+                  <a:srgbClr val="27AE60"/>
+                </a:solidFill>
+                <a:latin typeface="Calibri"/>
+              </a:defRPr>
+            </a:pPr>
+            <a:r>
+              <a:t>Technical Excellence · Reliability</a:t>
             </a:r>
           </a:p>
         </p:txBody>

--- a/data/archive/pulse_2026-03-12.pptx
+++ b/data/archive/pulse_2026-03-12.pptx
@@ -23,6 +23,8 @@
     <p:sldId id="271" r:id="rId22"/>
     <p:sldId id="272" r:id="rId23"/>
     <p:sldId id="273" r:id="rId24"/>
+    <p:sldId id="274" r:id="rId25"/>
+    <p:sldId id="275" r:id="rId26"/>
   </p:sldIdLst>
   <p:sldSz cx="12191695" cy="6858000" type="screen4x3"/>
   <p:notesSz cx="6858000" cy="9144000"/>
@@ -3305,7 +3307,7 @@
             <a:avLst/>
           </a:prstGeom>
           <a:solidFill>
-            <a:srgbClr val="27AE60"/>
+            <a:srgbClr val="FF6B6B"/>
           </a:solidFill>
           <a:ln>
             <a:noFill/>
@@ -3358,13 +3360,13 @@
             <a:pPr algn="l">
               <a:defRPr sz="1000" b="1">
                 <a:solidFill>
-                  <a:srgbClr val="27AE60"/>
-                </a:solidFill>
-                <a:latin typeface="Calibri"/>
-              </a:defRPr>
-            </a:pPr>
-            <a:r>
-              <a:t>💪  CLAPS</a:t>
+                  <a:srgbClr val="FF6B6B"/>
+                </a:solidFill>
+                <a:latin typeface="Calibri"/>
+              </a:defRPr>
+            </a:pPr>
+            <a:r>
+              <a:t>🔥  CLAPS</a:t>
             </a:r>
           </a:p>
         </p:txBody>
@@ -3394,13 +3396,13 @@
             <a:pPr algn="l">
               <a:defRPr sz="3200" b="1" i="0">
                 <a:solidFill>
-                  <a:srgbClr val="27AE60"/>
-                </a:solidFill>
-                <a:latin typeface="Calibri"/>
-              </a:defRPr>
-            </a:pPr>
-            <a:r>
-              <a:t>Quality Focus</a:t>
+                  <a:srgbClr val="FF6B6B"/>
+                </a:solidFill>
+                <a:latin typeface="Calibri"/>
+              </a:defRPr>
+            </a:pPr>
+            <a:r>
+              <a:t>DevOps Excellence</a:t>
             </a:r>
           </a:p>
         </p:txBody>
@@ -3430,13 +3432,13 @@
             <a:pPr algn="l">
               <a:defRPr sz="2800" b="1" i="0">
                 <a:solidFill>
-                  <a:srgbClr val="27AE60"/>
-                </a:solidFill>
-                <a:latin typeface="Calibri"/>
-              </a:defRPr>
-            </a:pPr>
-            <a:r>
-              <a:t>25</a:t>
+                  <a:srgbClr val="FF6B6B"/>
+                </a:solidFill>
+                <a:latin typeface="Calibri"/>
+              </a:defRPr>
+            </a:pPr>
+            <a:r>
+              <a:t>30</a:t>
             </a:r>
           </a:p>
         </p:txBody>
@@ -3472,7 +3474,7 @@
               </a:defRPr>
             </a:pPr>
             <a:r>
-              <a:t>from Dima</a:t>
+              <a:t>from Gleb Krahotkin</a:t>
             </a:r>
           </a:p>
         </p:txBody>
@@ -3508,7 +3510,7 @@
               </a:defRPr>
             </a:pPr>
             <a:r>
-              <a:t>to: Irina Koval</a:t>
+              <a:t>to: Hierman Pelekh</a:t>
             </a:r>
           </a:p>
         </p:txBody>
@@ -3544,7 +3546,7 @@
               </a:defRPr>
             </a:pPr>
             <a:r>
-              <a:t>"Exceptional attention to detail and quality assurance"</a:t>
+              <a:t>"Outstanding technical contribution and innovation"</a:t>
             </a:r>
           </a:p>
         </p:txBody>
@@ -3574,13 +3576,13 @@
             <a:pPr algn="l">
               <a:defRPr sz="1200" b="1" i="0">
                 <a:solidFill>
-                  <a:srgbClr val="27AE60"/>
-                </a:solidFill>
-                <a:latin typeface="Calibri"/>
-              </a:defRPr>
-            </a:pPr>
-            <a:r>
-              <a:t>Quality · Excellence</a:t>
+                  <a:srgbClr val="FF6B6B"/>
+                </a:solidFill>
+                <a:latin typeface="Calibri"/>
+              </a:defRPr>
+            </a:pPr>
+            <a:r>
+              <a:t>TECHNICAL EXCELLENCE</a:t>
             </a:r>
           </a:p>
         </p:txBody>
@@ -3626,7 +3628,7 @@
             <a:avLst/>
           </a:prstGeom>
           <a:solidFill>
-            <a:srgbClr val="27AE60"/>
+            <a:srgbClr val="4CAF50"/>
           </a:solidFill>
           <a:ln>
             <a:noFill/>
@@ -3679,13 +3681,13 @@
             <a:pPr algn="l">
               <a:defRPr sz="1000" b="1">
                 <a:solidFill>
-                  <a:srgbClr val="27AE60"/>
-                </a:solidFill>
-                <a:latin typeface="Calibri"/>
-              </a:defRPr>
-            </a:pPr>
-            <a:r>
-              <a:t>🎨  CLAPS</a:t>
+                  <a:srgbClr val="4CAF50"/>
+                </a:solidFill>
+                <a:latin typeface="Calibri"/>
+              </a:defRPr>
+            </a:pPr>
+            <a:r>
+              <a:t>💪  CLAPS</a:t>
             </a:r>
           </a:p>
         </p:txBody>
@@ -3715,13 +3717,13 @@
             <a:pPr algn="l">
               <a:defRPr sz="3200" b="1" i="0">
                 <a:solidFill>
-                  <a:srgbClr val="27AE60"/>
-                </a:solidFill>
-                <a:latin typeface="Calibri"/>
-              </a:defRPr>
-            </a:pPr>
-            <a:r>
-              <a:t>Creative Team</a:t>
+                  <a:srgbClr val="4CAF50"/>
+                </a:solidFill>
+                <a:latin typeface="Calibri"/>
+              </a:defRPr>
+            </a:pPr>
+            <a:r>
+              <a:t>Cross-Team Support</a:t>
             </a:r>
           </a:p>
         </p:txBody>
@@ -3751,7 +3753,7 @@
             <a:pPr algn="l">
               <a:defRPr sz="2800" b="1" i="0">
                 <a:solidFill>
-                  <a:srgbClr val="27AE60"/>
+                  <a:srgbClr val="4CAF50"/>
                 </a:solidFill>
                 <a:latin typeface="Calibri"/>
               </a:defRPr>
@@ -3865,7 +3867,7 @@
               </a:defRPr>
             </a:pPr>
             <a:r>
-              <a:t>"Outstanding creative solutions and collaboration"</a:t>
+              <a:t>"Exceptional support and collaboration across teams"</a:t>
             </a:r>
           </a:p>
         </p:txBody>
@@ -3895,13 +3897,13 @@
             <a:pPr algn="l">
               <a:defRPr sz="1200" b="1" i="0">
                 <a:solidFill>
-                  <a:srgbClr val="27AE60"/>
-                </a:solidFill>
-                <a:latin typeface="Calibri"/>
-              </a:defRPr>
-            </a:pPr>
-            <a:r>
-              <a:t>Creativity · Teamwork</a:t>
+                  <a:srgbClr val="4CAF50"/>
+                </a:solidFill>
+                <a:latin typeface="Calibri"/>
+              </a:defRPr>
+            </a:pPr>
+            <a:r>
+              <a:t>SERVE OTHERS · TEAMWORK</a:t>
             </a:r>
           </a:p>
         </p:txBody>
@@ -3947,7 +3949,7 @@
             <a:avLst/>
           </a:prstGeom>
           <a:solidFill>
-            <a:srgbClr val="8E44AD"/>
+            <a:srgbClr val="FF9500"/>
           </a:solidFill>
           <a:ln>
             <a:noFill/>
@@ -4000,13 +4002,13 @@
             <a:pPr algn="l">
               <a:defRPr sz="1000" b="1">
                 <a:solidFill>
-                  <a:srgbClr val="8E44AD"/>
-                </a:solidFill>
-                <a:latin typeface="Calibri"/>
-              </a:defRPr>
-            </a:pPr>
-            <a:r>
-              <a:t>📈  MILESTONE</a:t>
+                  <a:srgbClr val="FF9500"/>
+                </a:solidFill>
+                <a:latin typeface="Calibri"/>
+              </a:defRPr>
+            </a:pPr>
+            <a:r>
+              <a:t>🎯  CLAPS</a:t>
             </a:r>
           </a:p>
         </p:txBody>
@@ -4036,13 +4038,13 @@
             <a:pPr algn="l">
               <a:defRPr sz="3200" b="1" i="0">
                 <a:solidFill>
-                  <a:srgbClr val="8E44AD"/>
-                </a:solidFill>
-                <a:latin typeface="Calibri"/>
-              </a:defRPr>
-            </a:pPr>
-            <a:r>
-              <a:t>Company Growth</a:t>
+                  <a:srgbClr val="FF9500"/>
+                </a:solidFill>
+                <a:latin typeface="Calibri"/>
+              </a:defRPr>
+            </a:pPr>
+            <a:r>
+              <a:t>Quality Focus</a:t>
             </a:r>
           </a:p>
         </p:txBody>
@@ -4056,29 +4058,29 @@
         <p:spPr>
           <a:xfrm>
             <a:off x="1097280" y="2103120"/>
-            <a:ext cx="4572000" cy="822960"/>
-          </a:xfrm>
-          <a:prstGeom prst="rect">
-            <a:avLst/>
-          </a:prstGeom>
-          <a:noFill/>
-        </p:spPr>
-        <p:txBody>
-          <a:bodyPr wrap="square">
-            <a:spAutoFit/>
-          </a:bodyPr>
-          <a:lstStyle/>
-          <a:p>
-            <a:pPr algn="l">
-              <a:defRPr sz="5200" b="1" i="0">
-                <a:solidFill>
-                  <a:srgbClr val="8E44AD"/>
-                </a:solidFill>
-                <a:latin typeface="Calibri"/>
-              </a:defRPr>
-            </a:pPr>
-            <a:r>
-              <a:t>40%</a:t>
+            <a:ext cx="2743200" cy="548640"/>
+          </a:xfrm>
+          <a:prstGeom prst="rect">
+            <a:avLst/>
+          </a:prstGeom>
+          <a:noFill/>
+        </p:spPr>
+        <p:txBody>
+          <a:bodyPr wrap="square">
+            <a:spAutoFit/>
+          </a:bodyPr>
+          <a:lstStyle/>
+          <a:p>
+            <a:pPr algn="l">
+              <a:defRPr sz="2800" b="1" i="0">
+                <a:solidFill>
+                  <a:srgbClr val="FF9500"/>
+                </a:solidFill>
+                <a:latin typeface="Calibri"/>
+              </a:defRPr>
+            </a:pPr>
+            <a:r>
+              <a:t>25</a:t>
             </a:r>
           </a:p>
         </p:txBody>
@@ -4091,30 +4093,30 @@
         </p:nvSpPr>
         <p:spPr>
           <a:xfrm>
-            <a:off x="1097280" y="2926080"/>
-            <a:ext cx="4572000" cy="365760"/>
-          </a:xfrm>
-          <a:prstGeom prst="rect">
-            <a:avLst/>
-          </a:prstGeom>
-          <a:noFill/>
-        </p:spPr>
-        <p:txBody>
-          <a:bodyPr wrap="square">
-            <a:spAutoFit/>
-          </a:bodyPr>
-          <a:lstStyle/>
-          <a:p>
-            <a:pPr algn="l">
-              <a:defRPr sz="1100" b="0" i="0">
-                <a:solidFill>
-                  <a:srgbClr val="8F95A3"/>
-                </a:solidFill>
-                <a:latin typeface="Calibri"/>
-              </a:defRPr>
-            </a:pPr>
-            <a:r>
-              <a:t>YoY Growth</a:t>
+            <a:off x="1097280" y="2651760"/>
+            <a:ext cx="9966960" cy="365760"/>
+          </a:xfrm>
+          <a:prstGeom prst="rect">
+            <a:avLst/>
+          </a:prstGeom>
+          <a:noFill/>
+        </p:spPr>
+        <p:txBody>
+          <a:bodyPr wrap="square">
+            <a:spAutoFit/>
+          </a:bodyPr>
+          <a:lstStyle/>
+          <a:p>
+            <a:pPr algn="l">
+              <a:defRPr sz="1400" b="0" i="0">
+                <a:solidFill>
+                  <a:srgbClr val="E2E2EA"/>
+                </a:solidFill>
+                <a:latin typeface="Calibri"/>
+              </a:defRPr>
+            </a:pPr>
+            <a:r>
+              <a:t>from Dima</a:t>
             </a:r>
           </a:p>
         </p:txBody>
@@ -4127,7 +4129,79 @@
         </p:nvSpPr>
         <p:spPr>
           <a:xfrm>
-            <a:off x="1097280" y="3566160"/>
+            <a:off x="1097280" y="3108960"/>
+            <a:ext cx="9966960" cy="365760"/>
+          </a:xfrm>
+          <a:prstGeom prst="rect">
+            <a:avLst/>
+          </a:prstGeom>
+          <a:noFill/>
+        </p:spPr>
+        <p:txBody>
+          <a:bodyPr wrap="square">
+            <a:spAutoFit/>
+          </a:bodyPr>
+          <a:lstStyle/>
+          <a:p>
+            <a:pPr algn="l">
+              <a:defRPr sz="1400" b="1" i="0">
+                <a:solidFill>
+                  <a:srgbClr val="FFFFFF"/>
+                </a:solidFill>
+                <a:latin typeface="Calibri"/>
+              </a:defRPr>
+            </a:pPr>
+            <a:r>
+              <a:t>to: Irina Koval</a:t>
+            </a:r>
+          </a:p>
+        </p:txBody>
+      </p:sp>
+      <p:sp>
+        <p:nvSpPr>
+          <p:cNvPr id="8" name="TextBox 7"/>
+          <p:cNvSpPr txBox="1"/>
+          <p:nvPr/>
+        </p:nvSpPr>
+        <p:spPr>
+          <a:xfrm>
+            <a:off x="1097280" y="3749039"/>
+            <a:ext cx="9966960" cy="1097280"/>
+          </a:xfrm>
+          <a:prstGeom prst="rect">
+            <a:avLst/>
+          </a:prstGeom>
+          <a:noFill/>
+        </p:spPr>
+        <p:txBody>
+          <a:bodyPr wrap="square">
+            <a:spAutoFit/>
+          </a:bodyPr>
+          <a:lstStyle/>
+          <a:p>
+            <a:pPr algn="l">
+              <a:defRPr sz="1500" b="0" i="1">
+                <a:solidFill>
+                  <a:srgbClr val="E2E2EA"/>
+                </a:solidFill>
+                <a:latin typeface="Calibri"/>
+              </a:defRPr>
+            </a:pPr>
+            <a:r>
+              <a:t>"Exceptional attention to quality and detail"</a:t>
+            </a:r>
+          </a:p>
+        </p:txBody>
+      </p:sp>
+      <p:sp>
+        <p:nvSpPr>
+          <p:cNvPr id="9" name="TextBox 8"/>
+          <p:cNvSpPr txBox="1"/>
+          <p:nvPr/>
+        </p:nvSpPr>
+        <p:spPr>
+          <a:xfrm>
+            <a:off x="1097280" y="5120640"/>
             <a:ext cx="9966960" cy="457200"/>
           </a:xfrm>
           <a:prstGeom prst="rect">
@@ -4142,51 +4216,15 @@
           <a:lstStyle/>
           <a:p>
             <a:pPr algn="l">
-              <a:defRPr sz="1800" b="1" i="0">
-                <a:solidFill>
-                  <a:srgbClr val="FFFFFF"/>
-                </a:solidFill>
-                <a:latin typeface="Calibri"/>
-              </a:defRPr>
-            </a:pPr>
-            <a:r>
-              <a:t>40% Year-over-Year Growth</a:t>
-            </a:r>
-          </a:p>
-        </p:txBody>
-      </p:sp>
-      <p:sp>
-        <p:nvSpPr>
-          <p:cNvPr id="8" name="TextBox 7"/>
-          <p:cNvSpPr txBox="1"/>
-          <p:nvPr/>
-        </p:nvSpPr>
-        <p:spPr>
-          <a:xfrm>
-            <a:off x="1097280" y="4206240"/>
-            <a:ext cx="9966960" cy="1371600"/>
-          </a:xfrm>
-          <a:prstGeom prst="rect">
-            <a:avLst/>
-          </a:prstGeom>
-          <a:noFill/>
-        </p:spPr>
-        <p:txBody>
-          <a:bodyPr wrap="square">
-            <a:spAutoFit/>
-          </a:bodyPr>
-          <a:lstStyle/>
-          <a:p>
-            <a:pPr algn="l">
-              <a:defRPr sz="1500" b="0" i="0">
-                <a:solidFill>
-                  <a:srgbClr val="E2E2EA"/>
-                </a:solidFill>
-                <a:latin typeface="Calibri"/>
-              </a:defRPr>
-            </a:pPr>
-            <a:r>
-              <a:t>Appodeal continues its impressive trajectory with $100M gross profit and $20M EBITDA, positioning us for our ambitious $50B vision.</a:t>
+              <a:defRPr sz="1200" b="1" i="0">
+                <a:solidFill>
+                  <a:srgbClr val="FF9500"/>
+                </a:solidFill>
+                <a:latin typeface="Calibri"/>
+              </a:defRPr>
+            </a:pPr>
+            <a:r>
+              <a:t>EXCELLENCE · DEDICATION</a:t>
             </a:r>
           </a:p>
         </p:txBody>
@@ -4232,7 +4270,7 @@
             <a:avLst/>
           </a:prstGeom>
           <a:solidFill>
-            <a:srgbClr val="E74C3C"/>
+            <a:srgbClr val="4CAF50"/>
           </a:solidFill>
           <a:ln>
             <a:noFill/>
@@ -4285,13 +4323,13 @@
             <a:pPr algn="l">
               <a:defRPr sz="1000" b="1">
                 <a:solidFill>
-                  <a:srgbClr val="E74C3C"/>
-                </a:solidFill>
-                <a:latin typeface="Calibri"/>
-              </a:defRPr>
-            </a:pPr>
-            <a:r>
-              <a:t>🎮  WIN</a:t>
+                  <a:srgbClr val="4CAF50"/>
+                </a:solidFill>
+                <a:latin typeface="Calibri"/>
+              </a:defRPr>
+            </a:pPr>
+            <a:r>
+              <a:t>📈  MILESTONE</a:t>
             </a:r>
           </a:p>
         </p:txBody>
@@ -4321,13 +4359,13 @@
             <a:pPr algn="l">
               <a:defRPr sz="3200" b="1" i="0">
                 <a:solidFill>
-                  <a:srgbClr val="E74C3C"/>
-                </a:solidFill>
-                <a:latin typeface="Calibri"/>
-              </a:defRPr>
-            </a:pPr>
-            <a:r>
-              <a:t>Gaming Milestone</a:t>
+                  <a:srgbClr val="4CAF50"/>
+                </a:solidFill>
+                <a:latin typeface="Calibri"/>
+              </a:defRPr>
+            </a:pPr>
+            <a:r>
+              <a:t>Growth Trajectory</a:t>
             </a:r>
           </a:p>
         </p:txBody>
@@ -4355,15 +4393,15 @@
           <a:lstStyle/>
           <a:p>
             <a:pPr algn="l">
-              <a:defRPr sz="4800" b="1" i="0">
-                <a:solidFill>
-                  <a:srgbClr val="E74C3C"/>
-                </a:solidFill>
-                <a:latin typeface="Calibri"/>
-              </a:defRPr>
-            </a:pPr>
-            <a:r>
-              <a:t>61%</a:t>
+              <a:defRPr sz="5200" b="1" i="0">
+                <a:solidFill>
+                  <a:srgbClr val="4CAF50"/>
+                </a:solidFill>
+                <a:latin typeface="Calibri"/>
+              </a:defRPr>
+            </a:pPr>
+            <a:r>
+              <a:t>40%</a:t>
             </a:r>
           </a:p>
         </p:txBody>
@@ -4376,7 +4414,7 @@
         </p:nvSpPr>
         <p:spPr>
           <a:xfrm>
-            <a:off x="1097280" y="2834640"/>
+            <a:off x="1097280" y="2926080"/>
             <a:ext cx="4572000" cy="365760"/>
           </a:xfrm>
           <a:prstGeom prst="rect">
@@ -4391,7 +4429,7 @@
           <a:lstStyle/>
           <a:p>
             <a:pPr algn="l">
-              <a:defRPr sz="1200" b="0" i="0">
+              <a:defRPr sz="1100" b="0" i="0">
                 <a:solidFill>
                   <a:srgbClr val="8F95A3"/>
                 </a:solidFill>
@@ -4399,7 +4437,7 @@
               </a:defRPr>
             </a:pPr>
             <a:r>
-              <a:t>retention rate</a:t>
+              <a:t>YoY Growth Projected</a:t>
             </a:r>
           </a:p>
         </p:txBody>
@@ -4412,22 +4450,58 @@
         </p:nvSpPr>
         <p:spPr>
           <a:xfrm>
-            <a:off x="1097280" y="3291840"/>
-            <a:ext cx="9966960" cy="365760"/>
-          </a:xfrm>
-          <a:prstGeom prst="rect">
-            <a:avLst/>
-          </a:prstGeom>
-          <a:noFill/>
-        </p:spPr>
-        <p:txBody>
-          <a:bodyPr wrap="square">
-            <a:spAutoFit/>
-          </a:bodyPr>
-          <a:lstStyle/>
-          <a:p>
-            <a:pPr algn="l">
-              <a:defRPr sz="1400" b="0" i="0">
+            <a:off x="1097280" y="3566160"/>
+            <a:ext cx="9966960" cy="457200"/>
+          </a:xfrm>
+          <a:prstGeom prst="rect">
+            <a:avLst/>
+          </a:prstGeom>
+          <a:noFill/>
+        </p:spPr>
+        <p:txBody>
+          <a:bodyPr wrap="square">
+            <a:spAutoFit/>
+          </a:bodyPr>
+          <a:lstStyle/>
+          <a:p>
+            <a:pPr algn="l">
+              <a:defRPr sz="1800" b="1" i="0">
+                <a:solidFill>
+                  <a:srgbClr val="FFFFFF"/>
+                </a:solidFill>
+                <a:latin typeface="Calibri"/>
+              </a:defRPr>
+            </a:pPr>
+            <a:r>
+              <a:t>40% Year-over-Year Growth</a:t>
+            </a:r>
+          </a:p>
+        </p:txBody>
+      </p:sp>
+      <p:sp>
+        <p:nvSpPr>
+          <p:cNvPr id="8" name="TextBox 7"/>
+          <p:cNvSpPr txBox="1"/>
+          <p:nvPr/>
+        </p:nvSpPr>
+        <p:spPr>
+          <a:xfrm>
+            <a:off x="1097280" y="4206240"/>
+            <a:ext cx="9966960" cy="1371600"/>
+          </a:xfrm>
+          <a:prstGeom prst="rect">
+            <a:avLst/>
+          </a:prstGeom>
+          <a:noFill/>
+        </p:spPr>
+        <p:txBody>
+          <a:bodyPr wrap="square">
+            <a:spAutoFit/>
+          </a:bodyPr>
+          <a:lstStyle/>
+          <a:p>
+            <a:pPr algn="l">
+              <a:defRPr sz="1500" b="0" i="0">
                 <a:solidFill>
                   <a:srgbClr val="E2E2EA"/>
                 </a:solidFill>
@@ -4435,115 +4509,7 @@
               </a:defRPr>
             </a:pPr>
             <a:r>
-              <a:t>by Gaming Team</a:t>
-            </a:r>
-          </a:p>
-        </p:txBody>
-      </p:sp>
-      <p:sp>
-        <p:nvSpPr>
-          <p:cNvPr id="8" name="TextBox 7"/>
-          <p:cNvSpPr txBox="1"/>
-          <p:nvPr/>
-        </p:nvSpPr>
-        <p:spPr>
-          <a:xfrm>
-            <a:off x="1097280" y="3840480"/>
-            <a:ext cx="9966960" cy="457200"/>
-          </a:xfrm>
-          <a:prstGeom prst="rect">
-            <a:avLst/>
-          </a:prstGeom>
-          <a:noFill/>
-        </p:spPr>
-        <p:txBody>
-          <a:bodyPr wrap="square">
-            <a:spAutoFit/>
-          </a:bodyPr>
-          <a:lstStyle/>
-          <a:p>
-            <a:pPr algn="l">
-              <a:defRPr sz="1800" b="1" i="0">
-                <a:solidFill>
-                  <a:srgbClr val="FFFFFF"/>
-                </a:solidFill>
-                <a:latin typeface="Calibri"/>
-              </a:defRPr>
-            </a:pPr>
-            <a:r>
-              <a:t>Infinite Minesweeper Success</a:t>
-            </a:r>
-          </a:p>
-        </p:txBody>
-      </p:sp>
-      <p:sp>
-        <p:nvSpPr>
-          <p:cNvPr id="9" name="TextBox 8"/>
-          <p:cNvSpPr txBox="1"/>
-          <p:nvPr/>
-        </p:nvSpPr>
-        <p:spPr>
-          <a:xfrm>
-            <a:off x="1097280" y="4389120"/>
-            <a:ext cx="9966960" cy="914400"/>
-          </a:xfrm>
-          <a:prstGeom prst="rect">
-            <a:avLst/>
-          </a:prstGeom>
-          <a:noFill/>
-        </p:spPr>
-        <p:txBody>
-          <a:bodyPr wrap="square">
-            <a:spAutoFit/>
-          </a:bodyPr>
-          <a:lstStyle/>
-          <a:p>
-            <a:pPr algn="l">
-              <a:defRPr sz="1400" b="0" i="0">
-                <a:solidFill>
-                  <a:srgbClr val="E2E2EA"/>
-                </a:solidFill>
-                <a:latin typeface="Calibri"/>
-              </a:defRPr>
-            </a:pPr>
-            <a:r>
-              <a:t>Achieved 61% retention rate, placing us in Apple's benchmark ERA 151-160% category for exceptional performance.</a:t>
-            </a:r>
-          </a:p>
-        </p:txBody>
-      </p:sp>
-      <p:sp>
-        <p:nvSpPr>
-          <p:cNvPr id="10" name="TextBox 9"/>
-          <p:cNvSpPr txBox="1"/>
-          <p:nvPr/>
-        </p:nvSpPr>
-        <p:spPr>
-          <a:xfrm>
-            <a:off x="1097280" y="5486400"/>
-            <a:ext cx="9966960" cy="457200"/>
-          </a:xfrm>
-          <a:prstGeom prst="rect">
-            <a:avLst/>
-          </a:prstGeom>
-          <a:noFill/>
-        </p:spPr>
-        <p:txBody>
-          <a:bodyPr wrap="square">
-            <a:spAutoFit/>
-          </a:bodyPr>
-          <a:lstStyle/>
-          <a:p>
-            <a:pPr algn="l">
-              <a:defRPr sz="1300" b="0" i="1">
-                <a:solidFill>
-                  <a:srgbClr val="8F95A3"/>
-                </a:solidFill>
-                <a:latin typeface="Calibri"/>
-              </a:defRPr>
-            </a:pPr>
-            <a:r>
-              <a:t>💬 "Gaming division turned profitable in 2025!"</a:t>
+              <a:t>Company continues strong growth momentum toward ambitious targets</a:t>
             </a:r>
           </a:p>
         </p:txBody>
@@ -4589,7 +4555,7 @@
             <a:avLst/>
           </a:prstGeom>
           <a:solidFill>
-            <a:srgbClr val="17A2B8"/>
+            <a:srgbClr val="9C27B0"/>
           </a:solidFill>
           <a:ln>
             <a:noFill/>
@@ -4642,13 +4608,13 @@
             <a:pPr algn="l">
               <a:defRPr sz="1000" b="1">
                 <a:solidFill>
-                  <a:srgbClr val="17A2B8"/>
-                </a:solidFill>
-                <a:latin typeface="Calibri"/>
-              </a:defRPr>
-            </a:pPr>
-            <a:r>
-              <a:t>🛡️  WIN</a:t>
+                  <a:srgbClr val="9C27B0"/>
+                </a:solidFill>
+                <a:latin typeface="Calibri"/>
+              </a:defRPr>
+            </a:pPr>
+            <a:r>
+              <a:t>🎮  WIN</a:t>
             </a:r>
           </a:p>
         </p:txBody>
@@ -4678,13 +4644,13 @@
             <a:pPr algn="l">
               <a:defRPr sz="3200" b="1" i="0">
                 <a:solidFill>
-                  <a:srgbClr val="17A2B8"/>
-                </a:solidFill>
-                <a:latin typeface="Calibri"/>
-              </a:defRPr>
-            </a:pPr>
-            <a:r>
-              <a:t>Security Victory</a:t>
+                  <a:srgbClr val="9C27B0"/>
+                </a:solidFill>
+                <a:latin typeface="Calibri"/>
+              </a:defRPr>
+            </a:pPr>
+            <a:r>
+              <a:t>Gaming Milestone</a:t>
             </a:r>
           </a:p>
         </p:txBody>
@@ -4714,13 +4680,13 @@
             <a:pPr algn="l">
               <a:defRPr sz="4800" b="1" i="0">
                 <a:solidFill>
-                  <a:srgbClr val="17A2B8"/>
-                </a:solidFill>
-                <a:latin typeface="Calibri"/>
-              </a:defRPr>
-            </a:pPr>
-            <a:r>
-              <a:t>4%</a:t>
+                  <a:srgbClr val="9C27B0"/>
+                </a:solidFill>
+                <a:latin typeface="Calibri"/>
+              </a:defRPr>
+            </a:pPr>
+            <a:r>
+              <a:t>61%</a:t>
             </a:r>
           </a:p>
         </p:txBody>
@@ -4756,7 +4722,7 @@
               </a:defRPr>
             </a:pPr>
             <a:r>
-              <a:t>fraud rate</a:t>
+              <a:t>retention</a:t>
             </a:r>
           </a:p>
         </p:txBody>
@@ -4792,7 +4758,7 @@
               </a:defRPr>
             </a:pPr>
             <a:r>
-              <a:t>by Security Team</a:t>
+              <a:t>by Gaming Division</a:t>
             </a:r>
           </a:p>
         </p:txBody>
@@ -4828,7 +4794,7 @@
               </a:defRPr>
             </a:pPr>
             <a:r>
-              <a:t>Fraud Prevention Success</a:t>
+              <a:t>Infinite Minesweeper Success</a:t>
             </a:r>
           </a:p>
         </p:txBody>
@@ -4864,7 +4830,7 @@
               </a:defRPr>
             </a:pPr>
             <a:r>
-              <a:t>Reduced fraud from 22% to under 4% using dynamic SDK signatures and advanced detection algorithms.</a:t>
+              <a:t>Achieved 61% retention rate, outperforming Apple benchmarks (ERA: 151-160%)</a:t>
             </a:r>
           </a:p>
         </p:txBody>
@@ -4900,7 +4866,7 @@
               </a:defRPr>
             </a:pPr>
             <a:r>
-              <a:t>💬 "Our platform is now significantly more secure"</a:t>
+              <a:t>💬 "Gaming division reaches profitability in 2025"</a:t>
             </a:r>
           </a:p>
         </p:txBody>
@@ -4946,7 +4912,7 @@
             <a:avLst/>
           </a:prstGeom>
           <a:solidFill>
-            <a:srgbClr val="6C5CE7"/>
+            <a:srgbClr val="FF5722"/>
           </a:solidFill>
           <a:ln>
             <a:noFill/>
@@ -4999,13 +4965,13 @@
             <a:pPr algn="l">
               <a:defRPr sz="1000" b="1">
                 <a:solidFill>
-                  <a:srgbClr val="6C5CE7"/>
-                </a:solidFill>
-                <a:latin typeface="Calibri"/>
-              </a:defRPr>
-            </a:pPr>
-            <a:r>
-              <a:t>🤖  WIN</a:t>
+                  <a:srgbClr val="FF5722"/>
+                </a:solidFill>
+                <a:latin typeface="Calibri"/>
+              </a:defRPr>
+            </a:pPr>
+            <a:r>
+              <a:t>🛡️  WIN</a:t>
             </a:r>
           </a:p>
         </p:txBody>
@@ -5035,13 +5001,13 @@
             <a:pPr algn="l">
               <a:defRPr sz="3200" b="1" i="0">
                 <a:solidFill>
-                  <a:srgbClr val="6C5CE7"/>
-                </a:solidFill>
-                <a:latin typeface="Calibri"/>
-              </a:defRPr>
-            </a:pPr>
-            <a:r>
-              <a:t>AI Transformation</a:t>
+                  <a:srgbClr val="FF5722"/>
+                </a:solidFill>
+                <a:latin typeface="Calibri"/>
+              </a:defRPr>
+            </a:pPr>
+            <a:r>
+              <a:t>Security Achievement</a:t>
             </a:r>
           </a:p>
         </p:txBody>
@@ -5071,13 +5037,13 @@
             <a:pPr algn="l">
               <a:defRPr sz="4800" b="1" i="0">
                 <a:solidFill>
-                  <a:srgbClr val="6C5CE7"/>
-                </a:solidFill>
-                <a:latin typeface="Calibri"/>
-              </a:defRPr>
-            </a:pPr>
-            <a:r>
-              <a:t>1,000+</a:t>
+                  <a:srgbClr val="FF5722"/>
+                </a:solidFill>
+                <a:latin typeface="Calibri"/>
+              </a:defRPr>
+            </a:pPr>
+            <a:r>
+              <a:t>4%</a:t>
             </a:r>
           </a:p>
         </p:txBody>
@@ -5113,7 +5079,7 @@
               </a:defRPr>
             </a:pPr>
             <a:r>
-              <a:t>OKRs daily</a:t>
+              <a:t>fraud rate</a:t>
             </a:r>
           </a:p>
         </p:txBody>
@@ -5149,7 +5115,7 @@
               </a:defRPr>
             </a:pPr>
             <a:r>
-              <a:t>by AI Team</a:t>
+              <a:t>by Fraud Detection Team</a:t>
             </a:r>
           </a:p>
         </p:txBody>
@@ -5185,7 +5151,7 @@
               </a:defRPr>
             </a:pPr>
             <a:r>
-              <a:t>OKR Auditor AI Success</a:t>
+              <a:t>Fraud Dramatically Reduced</a:t>
             </a:r>
           </a:p>
         </p:txBody>
@@ -5221,7 +5187,7 @@
               </a:defRPr>
             </a:pPr>
             <a:r>
-              <a:t>Our AI auditor now checks over 1,000 individual OKRs daily, ensuring alignment and progress tracking.</a:t>
+              <a:t>Dynamic SDK signatures reduced fraud from 22% to under 4%</a:t>
             </a:r>
           </a:p>
         </p:txBody>
@@ -5257,7 +5223,7 @@
               </a:defRPr>
             </a:pPr>
             <a:r>
-              <a:t>💬 "Every employee will manage 5-10 AI agents within 3-6 months"</a:t>
+              <a:t>💬 "Protecting revenue through advanced security measures"</a:t>
             </a:r>
           </a:p>
         </p:txBody>
@@ -5303,7 +5269,7 @@
             <a:avLst/>
           </a:prstGeom>
           <a:solidFill>
-            <a:srgbClr val="D63031"/>
+            <a:srgbClr val="2196F3"/>
           </a:solidFill>
           <a:ln>
             <a:noFill/>
@@ -5356,13 +5322,13 @@
             <a:pPr algn="l">
               <a:defRPr sz="1000" b="1">
                 <a:solidFill>
-                  <a:srgbClr val="D63031"/>
-                </a:solidFill>
-                <a:latin typeface="Calibri"/>
-              </a:defRPr>
-            </a:pPr>
-            <a:r>
-              <a:t>📖  RECOMMENDED</a:t>
+                  <a:srgbClr val="2196F3"/>
+                </a:solidFill>
+                <a:latin typeface="Calibri"/>
+              </a:defRPr>
+            </a:pPr>
+            <a:r>
+              <a:t>🤖  MILESTONE</a:t>
             </a:r>
           </a:p>
         </p:txBody>
@@ -5392,13 +5358,13 @@
             <a:pPr algn="l">
               <a:defRPr sz="3200" b="1" i="0">
                 <a:solidFill>
-                  <a:srgbClr val="D63031"/>
-                </a:solidFill>
-                <a:latin typeface="Calibri"/>
-              </a:defRPr>
-            </a:pPr>
-            <a:r>
-              <a:t>Recommended Reading</a:t>
+                  <a:srgbClr val="2196F3"/>
+                </a:solidFill>
+                <a:latin typeface="Calibri"/>
+              </a:defRPr>
+            </a:pPr>
+            <a:r>
+              <a:t>AI Revolution</a:t>
             </a:r>
           </a:p>
         </p:txBody>
@@ -5412,29 +5378,29 @@
         <p:spPr>
           <a:xfrm>
             <a:off x="1097280" y="2103120"/>
-            <a:ext cx="457200" cy="365760"/>
-          </a:xfrm>
-          <a:prstGeom prst="rect">
-            <a:avLst/>
-          </a:prstGeom>
-          <a:noFill/>
-        </p:spPr>
-        <p:txBody>
-          <a:bodyPr wrap="square">
-            <a:spAutoFit/>
-          </a:bodyPr>
-          <a:lstStyle/>
-          <a:p>
-            <a:pPr algn="l">
-              <a:defRPr sz="2200" b="1" i="0">
-                <a:solidFill>
-                  <a:srgbClr val="D63031"/>
-                </a:solidFill>
-                <a:latin typeface="Calibri"/>
-              </a:defRPr>
-            </a:pPr>
-            <a:r>
-              <a:t>01</a:t>
+            <a:ext cx="4572000" cy="822960"/>
+          </a:xfrm>
+          <a:prstGeom prst="rect">
+            <a:avLst/>
+          </a:prstGeom>
+          <a:noFill/>
+        </p:spPr>
+        <p:txBody>
+          <a:bodyPr wrap="square">
+            <a:spAutoFit/>
+          </a:bodyPr>
+          <a:lstStyle/>
+          <a:p>
+            <a:pPr algn="l">
+              <a:defRPr sz="5200" b="1" i="0">
+                <a:solidFill>
+                  <a:srgbClr val="2196F3"/>
+                </a:solidFill>
+                <a:latin typeface="Calibri"/>
+              </a:defRPr>
+            </a:pPr>
+            <a:r>
+              <a:t>1000+</a:t>
             </a:r>
           </a:p>
         </p:txBody>
@@ -5447,22 +5413,58 @@
         </p:nvSpPr>
         <p:spPr>
           <a:xfrm>
-            <a:off x="1737360" y="2103120"/>
-            <a:ext cx="9326880" cy="365760"/>
-          </a:xfrm>
-          <a:prstGeom prst="rect">
-            <a:avLst/>
-          </a:prstGeom>
-          <a:noFill/>
-        </p:spPr>
-        <p:txBody>
-          <a:bodyPr wrap="square">
-            <a:spAutoFit/>
-          </a:bodyPr>
-          <a:lstStyle/>
-          <a:p>
-            <a:pPr algn="l">
-              <a:defRPr sz="1600" b="1" i="0">
+            <a:off x="1097280" y="2926080"/>
+            <a:ext cx="4572000" cy="365760"/>
+          </a:xfrm>
+          <a:prstGeom prst="rect">
+            <a:avLst/>
+          </a:prstGeom>
+          <a:noFill/>
+        </p:spPr>
+        <p:txBody>
+          <a:bodyPr wrap="square">
+            <a:spAutoFit/>
+          </a:bodyPr>
+          <a:lstStyle/>
+          <a:p>
+            <a:pPr algn="l">
+              <a:defRPr sz="1100" b="0" i="0">
+                <a:solidFill>
+                  <a:srgbClr val="8F95A3"/>
+                </a:solidFill>
+                <a:latin typeface="Calibri"/>
+              </a:defRPr>
+            </a:pPr>
+            <a:r>
+              <a:t>OKRs checked daily by AI</a:t>
+            </a:r>
+          </a:p>
+        </p:txBody>
+      </p:sp>
+      <p:sp>
+        <p:nvSpPr>
+          <p:cNvPr id="7" name="TextBox 6"/>
+          <p:cNvSpPr txBox="1"/>
+          <p:nvPr/>
+        </p:nvSpPr>
+        <p:spPr>
+          <a:xfrm>
+            <a:off x="1097280" y="3566160"/>
+            <a:ext cx="9966960" cy="457200"/>
+          </a:xfrm>
+          <a:prstGeom prst="rect">
+            <a:avLst/>
+          </a:prstGeom>
+          <a:noFill/>
+        </p:spPr>
+        <p:txBody>
+          <a:bodyPr wrap="square">
+            <a:spAutoFit/>
+          </a:bodyPr>
+          <a:lstStyle/>
+          <a:p>
+            <a:pPr algn="l">
+              <a:defRPr sz="1800" b="1" i="0">
                 <a:solidFill>
                   <a:srgbClr val="FFFFFF"/>
                 </a:solidFill>
@@ -5470,35 +5472,35 @@
               </a:defRPr>
             </a:pPr>
             <a:r>
-              <a:t>The Speaking Coach: Stop Saying This Word</a:t>
-            </a:r>
-          </a:p>
-        </p:txBody>
-      </p:sp>
-      <p:sp>
-        <p:nvSpPr>
-          <p:cNvPr id="7" name="TextBox 6"/>
-          <p:cNvSpPr txBox="1"/>
-          <p:nvPr/>
-        </p:nvSpPr>
-        <p:spPr>
-          <a:xfrm>
-            <a:off x="1737360" y="2423160"/>
-            <a:ext cx="9326880" cy="365760"/>
-          </a:xfrm>
-          <a:prstGeom prst="rect">
-            <a:avLst/>
-          </a:prstGeom>
-          <a:noFill/>
-        </p:spPr>
-        <p:txBody>
-          <a:bodyPr wrap="square">
-            <a:spAutoFit/>
-          </a:bodyPr>
-          <a:lstStyle/>
-          <a:p>
-            <a:pPr algn="l">
-              <a:defRPr sz="1200" b="0" i="0">
+              <a:t>AI-Powered Future</a:t>
+            </a:r>
+          </a:p>
+        </p:txBody>
+      </p:sp>
+      <p:sp>
+        <p:nvSpPr>
+          <p:cNvPr id="8" name="TextBox 7"/>
+          <p:cNvSpPr txBox="1"/>
+          <p:nvPr/>
+        </p:nvSpPr>
+        <p:spPr>
+          <a:xfrm>
+            <a:off x="1097280" y="4206240"/>
+            <a:ext cx="9966960" cy="1371600"/>
+          </a:xfrm>
+          <a:prstGeom prst="rect">
+            <a:avLst/>
+          </a:prstGeom>
+          <a:noFill/>
+        </p:spPr>
+        <p:txBody>
+          <a:bodyPr wrap="square">
+            <a:spAutoFit/>
+          </a:bodyPr>
+          <a:lstStyle/>
+          <a:p>
+            <a:pPr algn="l">
+              <a:defRPr sz="1500" b="0" i="0">
                 <a:solidFill>
                   <a:srgbClr val="E2E2EA"/>
                 </a:solidFill>
@@ -5506,79 +5508,7 @@
               </a:defRPr>
             </a:pPr>
             <a:r>
-              <a:t>Great insights on communication skills - highly recommended listening despite the clickbait title</a:t>
-            </a:r>
-          </a:p>
-        </p:txBody>
-      </p:sp>
-      <p:sp>
-        <p:nvSpPr>
-          <p:cNvPr id="8" name="TextBox 7"/>
-          <p:cNvSpPr txBox="1"/>
-          <p:nvPr/>
-        </p:nvSpPr>
-        <p:spPr>
-          <a:xfrm>
-            <a:off x="1737360" y="2743200"/>
-            <a:ext cx="9326880" cy="274320"/>
-          </a:xfrm>
-          <a:prstGeom prst="rect">
-            <a:avLst/>
-          </a:prstGeom>
-          <a:noFill/>
-        </p:spPr>
-        <p:txBody>
-          <a:bodyPr wrap="square">
-            <a:spAutoFit/>
-          </a:bodyPr>
-          <a:lstStyle/>
-          <a:p>
-            <a:pPr algn="l">
-              <a:defRPr sz="1100" b="0" i="0">
-                <a:solidFill>
-                  <a:srgbClr val="8F95A3"/>
-                </a:solidFill>
-                <a:latin typeface="Calibri"/>
-              </a:defRPr>
-            </a:pPr>
-            <a:r>
-              <a:t>Shared by Maria Plendukova · 2</a:t>
-            </a:r>
-          </a:p>
-        </p:txBody>
-      </p:sp>
-      <p:sp>
-        <p:nvSpPr>
-          <p:cNvPr id="9" name="TextBox 8"/>
-          <p:cNvSpPr txBox="1"/>
-          <p:nvPr/>
-        </p:nvSpPr>
-        <p:spPr>
-          <a:xfrm>
-            <a:off x="1097280" y="5943600"/>
-            <a:ext cx="9966960" cy="274320"/>
-          </a:xfrm>
-          <a:prstGeom prst="rect">
-            <a:avLst/>
-          </a:prstGeom>
-          <a:noFill/>
-        </p:spPr>
-        <p:txBody>
-          <a:bodyPr wrap="square">
-            <a:spAutoFit/>
-          </a:bodyPr>
-          <a:lstStyle/>
-          <a:p>
-            <a:pPr algn="l">
-              <a:defRPr sz="1100" b="0" i="0">
-                <a:solidFill>
-                  <a:srgbClr val="5C6270"/>
-                </a:solidFill>
-                <a:latin typeface="Calibri"/>
-              </a:defRPr>
-            </a:pPr>
-            <a:r>
-              <a:t>#general-chat</a:t>
+              <a:t>Every employee will manage 5-10 AI agents within 3-6 months</a:t>
             </a:r>
           </a:p>
         </p:txBody>
@@ -5624,7 +5554,7 @@
             <a:avLst/>
           </a:prstGeom>
           <a:solidFill>
-            <a:srgbClr val="FD79A8"/>
+            <a:srgbClr val="4CAF50"/>
           </a:solidFill>
           <a:ln>
             <a:noFill/>
@@ -5677,13 +5607,13 @@
             <a:pPr algn="l">
               <a:defRPr sz="1000" b="1">
                 <a:solidFill>
-                  <a:srgbClr val="FD79A8"/>
-                </a:solidFill>
-                <a:latin typeface="Calibri"/>
-              </a:defRPr>
-            </a:pPr>
-            <a:r>
-              <a:t>💫  OFFICE LIFE</a:t>
+                  <a:srgbClr val="4CAF50"/>
+                </a:solidFill>
+                <a:latin typeface="Calibri"/>
+              </a:defRPr>
+            </a:pPr>
+            <a:r>
+              <a:t>💰  WIN</a:t>
             </a:r>
           </a:p>
         </p:txBody>
@@ -5713,13 +5643,13 @@
             <a:pPr algn="l">
               <a:defRPr sz="3200" b="1" i="0">
                 <a:solidFill>
-                  <a:srgbClr val="FD79A8"/>
-                </a:solidFill>
-                <a:latin typeface="Calibri"/>
-              </a:defRPr>
-            </a:pPr>
-            <a:r>
-              <a:t>Gratitude Moment</a:t>
+                  <a:srgbClr val="4CAF50"/>
+                </a:solidFill>
+                <a:latin typeface="Calibri"/>
+              </a:defRPr>
+            </a:pPr>
+            <a:r>
+              <a:t>Sales Excellence</a:t>
             </a:r>
           </a:p>
         </p:txBody>
@@ -5733,6 +5663,114 @@
         <p:spPr>
           <a:xfrm>
             <a:off x="1097280" y="2103120"/>
+            <a:ext cx="4572000" cy="822960"/>
+          </a:xfrm>
+          <a:prstGeom prst="rect">
+            <a:avLst/>
+          </a:prstGeom>
+          <a:noFill/>
+        </p:spPr>
+        <p:txBody>
+          <a:bodyPr wrap="square">
+            <a:spAutoFit/>
+          </a:bodyPr>
+          <a:lstStyle/>
+          <a:p>
+            <a:pPr algn="l">
+              <a:defRPr sz="4800" b="1" i="0">
+                <a:solidFill>
+                  <a:srgbClr val="4CAF50"/>
+                </a:solidFill>
+                <a:latin typeface="Calibri"/>
+              </a:defRPr>
+            </a:pPr>
+            <a:r>
+              <a:t>$390K</a:t>
+            </a:r>
+          </a:p>
+        </p:txBody>
+      </p:sp>
+      <p:sp>
+        <p:nvSpPr>
+          <p:cNvPr id="6" name="TextBox 5"/>
+          <p:cNvSpPr txBox="1"/>
+          <p:nvPr/>
+        </p:nvSpPr>
+        <p:spPr>
+          <a:xfrm>
+            <a:off x="1097280" y="2834640"/>
+            <a:ext cx="4572000" cy="365760"/>
+          </a:xfrm>
+          <a:prstGeom prst="rect">
+            <a:avLst/>
+          </a:prstGeom>
+          <a:noFill/>
+        </p:spPr>
+        <p:txBody>
+          <a:bodyPr wrap="square">
+            <a:spAutoFit/>
+          </a:bodyPr>
+          <a:lstStyle/>
+          <a:p>
+            <a:pPr algn="l">
+              <a:defRPr sz="1200" b="0" i="0">
+                <a:solidFill>
+                  <a:srgbClr val="8F95A3"/>
+                </a:solidFill>
+                <a:latin typeface="Calibri"/>
+              </a:defRPr>
+            </a:pPr>
+            <a:r>
+              <a:t>net revenue</a:t>
+            </a:r>
+          </a:p>
+        </p:txBody>
+      </p:sp>
+      <p:sp>
+        <p:nvSpPr>
+          <p:cNvPr id="7" name="TextBox 6"/>
+          <p:cNvSpPr txBox="1"/>
+          <p:nvPr/>
+        </p:nvSpPr>
+        <p:spPr>
+          <a:xfrm>
+            <a:off x="1097280" y="3291840"/>
+            <a:ext cx="9966960" cy="365760"/>
+          </a:xfrm>
+          <a:prstGeom prst="rect">
+            <a:avLst/>
+          </a:prstGeom>
+          <a:noFill/>
+        </p:spPr>
+        <p:txBody>
+          <a:bodyPr wrap="square">
+            <a:spAutoFit/>
+          </a:bodyPr>
+          <a:lstStyle/>
+          <a:p>
+            <a:pPr algn="l">
+              <a:defRPr sz="1400" b="0" i="0">
+                <a:solidFill>
+                  <a:srgbClr val="E2E2EA"/>
+                </a:solidFill>
+                <a:latin typeface="Calibri"/>
+              </a:defRPr>
+            </a:pPr>
+            <a:r>
+              <a:t>by Sales Team</a:t>
+            </a:r>
+          </a:p>
+        </p:txBody>
+      </p:sp>
+      <p:sp>
+        <p:nvSpPr>
+          <p:cNvPr id="8" name="TextBox 7"/>
+          <p:cNvSpPr txBox="1"/>
+          <p:nvPr/>
+        </p:nvSpPr>
+        <p:spPr>
+          <a:xfrm>
+            <a:off x="1097280" y="3840480"/>
             <a:ext cx="9966960" cy="457200"/>
           </a:xfrm>
           <a:prstGeom prst="rect">
@@ -5755,35 +5793,35 @@
               </a:defRPr>
             </a:pPr>
             <a:r>
-              <a:t>Heartfelt Thanks</a:t>
-            </a:r>
-          </a:p>
-        </p:txBody>
-      </p:sp>
-      <p:sp>
-        <p:nvSpPr>
-          <p:cNvPr id="6" name="TextBox 5"/>
-          <p:cNvSpPr txBox="1"/>
-          <p:nvPr/>
-        </p:nvSpPr>
-        <p:spPr>
-          <a:xfrm>
-            <a:off x="1371600" y="2743200"/>
-            <a:ext cx="9692640" cy="1828800"/>
-          </a:xfrm>
-          <a:prstGeom prst="rect">
-            <a:avLst/>
-          </a:prstGeom>
-          <a:noFill/>
-        </p:spPr>
-        <p:txBody>
-          <a:bodyPr wrap="square">
-            <a:spAutoFit/>
-          </a:bodyPr>
-          <a:lstStyle/>
-          <a:p>
-            <a:pPr algn="l">
-              <a:defRPr sz="1500" b="0" i="1">
+              <a:t>Outstanding Sales Week</a:t>
+            </a:r>
+          </a:p>
+        </p:txBody>
+      </p:sp>
+      <p:sp>
+        <p:nvSpPr>
+          <p:cNvPr id="9" name="TextBox 8"/>
+          <p:cNvSpPr txBox="1"/>
+          <p:nvPr/>
+        </p:nvSpPr>
+        <p:spPr>
+          <a:xfrm>
+            <a:off x="1097280" y="4389120"/>
+            <a:ext cx="9966960" cy="914400"/>
+          </a:xfrm>
+          <a:prstGeom prst="rect">
+            <a:avLst/>
+          </a:prstGeom>
+          <a:noFill/>
+        </p:spPr>
+        <p:txBody>
+          <a:bodyPr wrap="square">
+            <a:spAutoFit/>
+          </a:bodyPr>
+          <a:lstStyle/>
+          <a:p>
+            <a:pPr algn="l">
+              <a:defRPr sz="1400" b="0" i="0">
                 <a:solidFill>
                   <a:srgbClr val="E2E2EA"/>
                 </a:solidFill>
@@ -5791,35 +5829,35 @@
               </a:defRPr>
             </a:pPr>
             <a:r>
-              <a:t>"Thanks guys, all of you, for the warm wishes! 💕"</a:t>
-            </a:r>
-          </a:p>
-        </p:txBody>
-      </p:sp>
-      <p:sp>
-        <p:nvSpPr>
-          <p:cNvPr id="7" name="TextBox 6"/>
-          <p:cNvSpPr txBox="1"/>
-          <p:nvPr/>
-        </p:nvSpPr>
-        <p:spPr>
-          <a:xfrm>
-            <a:off x="1097280" y="4754880"/>
-            <a:ext cx="9966960" cy="365760"/>
-          </a:xfrm>
-          <a:prstGeom prst="rect">
-            <a:avLst/>
-          </a:prstGeom>
-          <a:noFill/>
-        </p:spPr>
-        <p:txBody>
-          <a:bodyPr wrap="square">
-            <a:spAutoFit/>
-          </a:bodyPr>
-          <a:lstStyle/>
-          <a:p>
-            <a:pPr algn="l">
-              <a:defRPr sz="1400" b="0" i="0">
+              <a:t>8 deals closed generating $390k net revenue in one week</a:t>
+            </a:r>
+          </a:p>
+        </p:txBody>
+      </p:sp>
+      <p:sp>
+        <p:nvSpPr>
+          <p:cNvPr id="10" name="TextBox 9"/>
+          <p:cNvSpPr txBox="1"/>
+          <p:nvPr/>
+        </p:nvSpPr>
+        <p:spPr>
+          <a:xfrm>
+            <a:off x="1097280" y="5486400"/>
+            <a:ext cx="9966960" cy="457200"/>
+          </a:xfrm>
+          <a:prstGeom prst="rect">
+            <a:avLst/>
+          </a:prstGeom>
+          <a:noFill/>
+        </p:spPr>
+        <p:txBody>
+          <a:bodyPr wrap="square">
+            <a:spAutoFit/>
+          </a:bodyPr>
+          <a:lstStyle/>
+          <a:p>
+            <a:pPr algn="l">
+              <a:defRPr sz="1300" b="0" i="1">
                 <a:solidFill>
                   <a:srgbClr val="8F95A3"/>
                 </a:solidFill>
@@ -5827,79 +5865,7 @@
               </a:defRPr>
             </a:pPr>
             <a:r>
-              <a:t>— Alexandr Sikorsky</a:t>
-            </a:r>
-          </a:p>
-        </p:txBody>
-      </p:sp>
-      <p:sp>
-        <p:nvSpPr>
-          <p:cNvPr id="8" name="TextBox 7"/>
-          <p:cNvSpPr txBox="1"/>
-          <p:nvPr/>
-        </p:nvSpPr>
-        <p:spPr>
-          <a:xfrm>
-            <a:off x="1097280" y="5212080"/>
-            <a:ext cx="9966960" cy="365760"/>
-          </a:xfrm>
-          <a:prstGeom prst="rect">
-            <a:avLst/>
-          </a:prstGeom>
-          <a:noFill/>
-        </p:spPr>
-        <p:txBody>
-          <a:bodyPr wrap="square">
-            <a:spAutoFit/>
-          </a:bodyPr>
-          <a:lstStyle/>
-          <a:p>
-            <a:pPr algn="l">
-              <a:defRPr sz="1400" b="1" i="0">
-                <a:solidFill>
-                  <a:srgbClr val="FD79A8"/>
-                </a:solidFill>
-                <a:latin typeface="Calibri"/>
-              </a:defRPr>
-            </a:pPr>
-            <a:r>
-              <a:t>Multiple hearts</a:t>
-            </a:r>
-          </a:p>
-        </p:txBody>
-      </p:sp>
-      <p:sp>
-        <p:nvSpPr>
-          <p:cNvPr id="9" name="TextBox 8"/>
-          <p:cNvSpPr txBox="1"/>
-          <p:nvPr/>
-        </p:nvSpPr>
-        <p:spPr>
-          <a:xfrm>
-            <a:off x="1097280" y="5760720"/>
-            <a:ext cx="9966960" cy="274320"/>
-          </a:xfrm>
-          <a:prstGeom prst="rect">
-            <a:avLst/>
-          </a:prstGeom>
-          <a:noFill/>
-        </p:spPr>
-        <p:txBody>
-          <a:bodyPr wrap="square">
-            <a:spAutoFit/>
-          </a:bodyPr>
-          <a:lstStyle/>
-          <a:p>
-            <a:pPr algn="l">
-              <a:defRPr sz="1100" b="0" i="0">
-                <a:solidFill>
-                  <a:srgbClr val="5C6270"/>
-                </a:solidFill>
-                <a:latin typeface="Calibri"/>
-              </a:defRPr>
-            </a:pPr>
-            <a:r>
-              <a:t>#birthdays</a:t>
+              <a:t>💬 "Momentum building toward ambitious revenue targets"</a:t>
             </a:r>
           </a:p>
         </p:txBody>
@@ -5945,7 +5911,7 @@
             <a:avLst/>
           </a:prstGeom>
           <a:solidFill>
-            <a:srgbClr val="00B894"/>
+            <a:srgbClr val="FF6B6B"/>
           </a:solidFill>
           <a:ln>
             <a:noFill/>
@@ -5998,13 +5964,13 @@
             <a:pPr algn="l">
               <a:defRPr sz="1000" b="1">
                 <a:solidFill>
-                  <a:srgbClr val="00B894"/>
-                </a:solidFill>
-                <a:latin typeface="Calibri"/>
-              </a:defRPr>
-            </a:pPr>
-            <a:r>
-              <a:t>💰  MILESTONE</a:t>
+                  <a:srgbClr val="FF6B6B"/>
+                </a:solidFill>
+                <a:latin typeface="Calibri"/>
+              </a:defRPr>
+            </a:pPr>
+            <a:r>
+              <a:t>📚  RECOMMENDED</a:t>
             </a:r>
           </a:p>
         </p:txBody>
@@ -6034,13 +6000,13 @@
             <a:pPr algn="l">
               <a:defRPr sz="3200" b="1" i="0">
                 <a:solidFill>
-                  <a:srgbClr val="00B894"/>
-                </a:solidFill>
-                <a:latin typeface="Calibri"/>
-              </a:defRPr>
-            </a:pPr>
-            <a:r>
-              <a:t>Sales Excellence</a:t>
+                  <a:srgbClr val="FF6B6B"/>
+                </a:solidFill>
+                <a:latin typeface="Calibri"/>
+              </a:defRPr>
+            </a:pPr>
+            <a:r>
+              <a:t>Recommended Reading</a:t>
             </a:r>
           </a:p>
         </p:txBody>
@@ -6054,29 +6020,29 @@
         <p:spPr>
           <a:xfrm>
             <a:off x="1097280" y="2103120"/>
-            <a:ext cx="4572000" cy="822960"/>
-          </a:xfrm>
-          <a:prstGeom prst="rect">
-            <a:avLst/>
-          </a:prstGeom>
-          <a:noFill/>
-        </p:spPr>
-        <p:txBody>
-          <a:bodyPr wrap="square">
-            <a:spAutoFit/>
-          </a:bodyPr>
-          <a:lstStyle/>
-          <a:p>
-            <a:pPr algn="l">
-              <a:defRPr sz="5200" b="1" i="0">
-                <a:solidFill>
-                  <a:srgbClr val="00B894"/>
-                </a:solidFill>
-                <a:latin typeface="Calibri"/>
-              </a:defRPr>
-            </a:pPr>
-            <a:r>
-              <a:t>$390k</a:t>
+            <a:ext cx="457200" cy="365760"/>
+          </a:xfrm>
+          <a:prstGeom prst="rect">
+            <a:avLst/>
+          </a:prstGeom>
+          <a:noFill/>
+        </p:spPr>
+        <p:txBody>
+          <a:bodyPr wrap="square">
+            <a:spAutoFit/>
+          </a:bodyPr>
+          <a:lstStyle/>
+          <a:p>
+            <a:pPr algn="l">
+              <a:defRPr sz="2200" b="1" i="0">
+                <a:solidFill>
+                  <a:srgbClr val="FF6B6B"/>
+                </a:solidFill>
+                <a:latin typeface="Calibri"/>
+              </a:defRPr>
+            </a:pPr>
+            <a:r>
+              <a:t>01</a:t>
             </a:r>
           </a:p>
         </p:txBody>
@@ -6089,8 +6055,80 @@
         </p:nvSpPr>
         <p:spPr>
           <a:xfrm>
-            <a:off x="1097280" y="2926080"/>
-            <a:ext cx="4572000" cy="365760"/>
+            <a:off x="1737360" y="2103120"/>
+            <a:ext cx="9326880" cy="365760"/>
+          </a:xfrm>
+          <a:prstGeom prst="rect">
+            <a:avLst/>
+          </a:prstGeom>
+          <a:noFill/>
+        </p:spPr>
+        <p:txBody>
+          <a:bodyPr wrap="square">
+            <a:spAutoFit/>
+          </a:bodyPr>
+          <a:lstStyle/>
+          <a:p>
+            <a:pPr algn="l">
+              <a:defRPr sz="1600" b="1" i="0">
+                <a:solidFill>
+                  <a:srgbClr val="FFFFFF"/>
+                </a:solidFill>
+                <a:latin typeface="Calibri"/>
+              </a:defRPr>
+            </a:pPr>
+            <a:r>
+              <a:t>The Speaking Coach: Communication Excellence</a:t>
+            </a:r>
+          </a:p>
+        </p:txBody>
+      </p:sp>
+      <p:sp>
+        <p:nvSpPr>
+          <p:cNvPr id="7" name="TextBox 6"/>
+          <p:cNvSpPr txBox="1"/>
+          <p:nvPr/>
+        </p:nvSpPr>
+        <p:spPr>
+          <a:xfrm>
+            <a:off x="1737360" y="2423160"/>
+            <a:ext cx="9326880" cy="365760"/>
+          </a:xfrm>
+          <a:prstGeom prst="rect">
+            <a:avLst/>
+          </a:prstGeom>
+          <a:noFill/>
+        </p:spPr>
+        <p:txBody>
+          <a:bodyPr wrap="square">
+            <a:spAutoFit/>
+          </a:bodyPr>
+          <a:lstStyle/>
+          <a:p>
+            <a:pPr algn="l">
+              <a:defRPr sz="1200" b="0" i="0">
+                <a:solidFill>
+                  <a:srgbClr val="E2E2EA"/>
+                </a:solidFill>
+                <a:latin typeface="Calibri"/>
+              </a:defRPr>
+            </a:pPr>
+            <a:r>
+              <a:t>Insights on improving communication skills and avoiding weak language patterns</a:t>
+            </a:r>
+          </a:p>
+        </p:txBody>
+      </p:sp>
+      <p:sp>
+        <p:nvSpPr>
+          <p:cNvPr id="8" name="TextBox 7"/>
+          <p:cNvSpPr txBox="1"/>
+          <p:nvPr/>
+        </p:nvSpPr>
+        <p:spPr>
+          <a:xfrm>
+            <a:off x="1737360" y="2743200"/>
+            <a:ext cx="9326880" cy="274320"/>
           </a:xfrm>
           <a:prstGeom prst="rect">
             <a:avLst/>
@@ -6112,7 +6150,256 @@
               </a:defRPr>
             </a:pPr>
             <a:r>
-              <a:t>Weekly Revenue</a:t>
+              <a:t>Shared by Maria Plendukova · 2</a:t>
+            </a:r>
+          </a:p>
+        </p:txBody>
+      </p:sp>
+      <p:sp>
+        <p:nvSpPr>
+          <p:cNvPr id="9" name="TextBox 8"/>
+          <p:cNvSpPr txBox="1"/>
+          <p:nvPr/>
+        </p:nvSpPr>
+        <p:spPr>
+          <a:xfrm>
+            <a:off x="1097280" y="5943600"/>
+            <a:ext cx="9966960" cy="274320"/>
+          </a:xfrm>
+          <a:prstGeom prst="rect">
+            <a:avLst/>
+          </a:prstGeom>
+          <a:noFill/>
+        </p:spPr>
+        <p:txBody>
+          <a:bodyPr wrap="square">
+            <a:spAutoFit/>
+          </a:bodyPr>
+          <a:lstStyle/>
+          <a:p>
+            <a:pPr algn="l">
+              <a:defRPr sz="1100" b="0" i="0">
+                <a:solidFill>
+                  <a:srgbClr val="5C6270"/>
+                </a:solidFill>
+                <a:latin typeface="Calibri"/>
+              </a:defRPr>
+            </a:pPr>
+            <a:r>
+              <a:t>general-chat</a:t>
+            </a:r>
+          </a:p>
+        </p:txBody>
+      </p:sp>
+    </p:spTree>
+  </p:cSld>
+  <p:clrMapOvr>
+    <a:masterClrMapping/>
+  </p:clrMapOvr>
+</p:sld>
+</file>
+
+<file path=ppt/slides/slide19.xml><?xml version="1.0" encoding="utf-8"?>
+<p:sld xmlns:a="http://schemas.openxmlformats.org/drawingml/2006/main" xmlns:p="http://schemas.openxmlformats.org/presentationml/2006/main" xmlns:r="http://schemas.openxmlformats.org/officeDocument/2006/relationships">
+  <p:cSld>
+    <p:bg>
+      <p:bgPr>
+        <a:solidFill>
+          <a:srgbClr val="08080C"/>
+        </a:solidFill>
+        <a:effectLst/>
+      </p:bgPr>
+    </p:bg>
+    <p:spTree>
+      <p:nvGrpSpPr>
+        <p:cNvPr id="1" name=""/>
+        <p:cNvGrpSpPr/>
+        <p:nvPr/>
+      </p:nvGrpSpPr>
+      <p:grpSpPr/>
+      <p:sp>
+        <p:nvSpPr>
+          <p:cNvPr id="2" name="Rectangle 1"/>
+          <p:cNvSpPr/>
+          <p:nvPr/>
+        </p:nvSpPr>
+        <p:spPr>
+          <a:xfrm>
+            <a:off x="0" y="365760"/>
+            <a:ext cx="12191695" cy="54864"/>
+          </a:xfrm>
+          <a:prstGeom prst="rect">
+            <a:avLst/>
+          </a:prstGeom>
+          <a:solidFill>
+            <a:srgbClr val="9C27B0"/>
+          </a:solidFill>
+          <a:ln>
+            <a:noFill/>
+          </a:ln>
+        </p:spPr>
+        <p:style>
+          <a:lnRef idx="1">
+            <a:schemeClr val="accent1"/>
+          </a:lnRef>
+          <a:fillRef idx="3">
+            <a:schemeClr val="accent1"/>
+          </a:fillRef>
+          <a:effectRef idx="2">
+            <a:schemeClr val="accent1"/>
+          </a:effectRef>
+          <a:fontRef idx="minor">
+            <a:schemeClr val="lt1"/>
+          </a:fontRef>
+        </p:style>
+        <p:txBody>
+          <a:bodyPr rtlCol="0" anchor="ctr"/>
+          <a:lstStyle/>
+          <a:p>
+            <a:pPr algn="ctr"/>
+          </a:p>
+        </p:txBody>
+      </p:sp>
+      <p:sp>
+        <p:nvSpPr>
+          <p:cNvPr id="3" name="TextBox 2"/>
+          <p:cNvSpPr txBox="1"/>
+          <p:nvPr/>
+        </p:nvSpPr>
+        <p:spPr>
+          <a:xfrm>
+            <a:off x="1097280" y="731520"/>
+            <a:ext cx="3657600" cy="365760"/>
+          </a:xfrm>
+          <a:prstGeom prst="rect">
+            <a:avLst/>
+          </a:prstGeom>
+          <a:noFill/>
+        </p:spPr>
+        <p:txBody>
+          <a:bodyPr wrap="none">
+            <a:spAutoFit/>
+          </a:bodyPr>
+          <a:lstStyle/>
+          <a:p>
+            <a:pPr algn="l">
+              <a:defRPr sz="1000" b="1">
+                <a:solidFill>
+                  <a:srgbClr val="9C27B0"/>
+                </a:solidFill>
+                <a:latin typeface="Calibri"/>
+              </a:defRPr>
+            </a:pPr>
+            <a:r>
+              <a:t>🧘  WEEKLY RITUAL</a:t>
+            </a:r>
+          </a:p>
+        </p:txBody>
+      </p:sp>
+      <p:sp>
+        <p:nvSpPr>
+          <p:cNvPr id="4" name="TextBox 3"/>
+          <p:cNvSpPr txBox="1"/>
+          <p:nvPr/>
+        </p:nvSpPr>
+        <p:spPr>
+          <a:xfrm>
+            <a:off x="1097280" y="1188720"/>
+            <a:ext cx="9966960" cy="731520"/>
+          </a:xfrm>
+          <a:prstGeom prst="rect">
+            <a:avLst/>
+          </a:prstGeom>
+          <a:noFill/>
+        </p:spPr>
+        <p:txBody>
+          <a:bodyPr wrap="square">
+            <a:spAutoFit/>
+          </a:bodyPr>
+          <a:lstStyle/>
+          <a:p>
+            <a:pPr algn="l">
+              <a:defRPr sz="3200" b="1" i="0">
+                <a:solidFill>
+                  <a:srgbClr val="9C27B0"/>
+                </a:solidFill>
+                <a:latin typeface="Calibri"/>
+              </a:defRPr>
+            </a:pPr>
+            <a:r>
+              <a:t>Daily Wellness</a:t>
+            </a:r>
+          </a:p>
+        </p:txBody>
+      </p:sp>
+      <p:sp>
+        <p:nvSpPr>
+          <p:cNvPr id="5" name="TextBox 4"/>
+          <p:cNvSpPr txBox="1"/>
+          <p:nvPr/>
+        </p:nvSpPr>
+        <p:spPr>
+          <a:xfrm>
+            <a:off x="1097280" y="2103120"/>
+            <a:ext cx="9966960" cy="457200"/>
+          </a:xfrm>
+          <a:prstGeom prst="rect">
+            <a:avLst/>
+          </a:prstGeom>
+          <a:noFill/>
+        </p:spPr>
+        <p:txBody>
+          <a:bodyPr wrap="square">
+            <a:spAutoFit/>
+          </a:bodyPr>
+          <a:lstStyle/>
+          <a:p>
+            <a:pPr algn="l">
+              <a:defRPr sz="1800" b="1" i="0">
+                <a:solidFill>
+                  <a:srgbClr val="FFFFFF"/>
+                </a:solidFill>
+                <a:latin typeface="Calibri"/>
+              </a:defRPr>
+            </a:pPr>
+            <a:r>
+              <a:t>Daily Yoga Sessions</a:t>
+            </a:r>
+          </a:p>
+        </p:txBody>
+      </p:sp>
+      <p:sp>
+        <p:nvSpPr>
+          <p:cNvPr id="6" name="TextBox 5"/>
+          <p:cNvSpPr txBox="1"/>
+          <p:nvPr/>
+        </p:nvSpPr>
+        <p:spPr>
+          <a:xfrm>
+            <a:off x="1371600" y="2926080"/>
+            <a:ext cx="9418320" cy="548640"/>
+          </a:xfrm>
+          <a:prstGeom prst="rect">
+            <a:avLst/>
+          </a:prstGeom>
+          <a:noFill/>
+        </p:spPr>
+        <p:txBody>
+          <a:bodyPr wrap="square">
+            <a:spAutoFit/>
+          </a:bodyPr>
+          <a:lstStyle/>
+          <a:p>
+            <a:pPr algn="l">
+              <a:defRPr sz="1400" b="0" i="0">
+                <a:solidFill>
+                  <a:srgbClr val="E2E2EA"/>
+                </a:solidFill>
+                <a:latin typeface="Calibri"/>
+              </a:defRPr>
+            </a:pPr>
+            <a:r>
+              <a:t>Join Anna Kolyada for daily yoga</a:t>
             </a:r>
           </a:p>
         </p:txBody>
@@ -6125,30 +6412,30 @@
         </p:nvSpPr>
         <p:spPr>
           <a:xfrm>
-            <a:off x="1097280" y="3566160"/>
-            <a:ext cx="9966960" cy="457200"/>
-          </a:xfrm>
-          <a:prstGeom prst="rect">
-            <a:avLst/>
-          </a:prstGeom>
-          <a:noFill/>
-        </p:spPr>
-        <p:txBody>
-          <a:bodyPr wrap="square">
-            <a:spAutoFit/>
-          </a:bodyPr>
-          <a:lstStyle/>
-          <a:p>
-            <a:pPr algn="l">
-              <a:defRPr sz="1800" b="1" i="0">
-                <a:solidFill>
-                  <a:srgbClr val="FFFFFF"/>
-                </a:solidFill>
-                <a:latin typeface="Calibri"/>
-              </a:defRPr>
-            </a:pPr>
-            <a:r>
-              <a:t>Weekly Sales Victory</a:t>
+            <a:off x="1371600" y="3657600"/>
+            <a:ext cx="9418320" cy="548640"/>
+          </a:xfrm>
+          <a:prstGeom prst="rect">
+            <a:avLst/>
+          </a:prstGeom>
+          <a:noFill/>
+        </p:spPr>
+        <p:txBody>
+          <a:bodyPr wrap="square">
+            <a:spAutoFit/>
+          </a:bodyPr>
+          <a:lstStyle/>
+          <a:p>
+            <a:pPr algn="l">
+              <a:defRPr sz="1400" b="0" i="0">
+                <a:solidFill>
+                  <a:srgbClr val="E2E2EA"/>
+                </a:solidFill>
+                <a:latin typeface="Calibri"/>
+              </a:defRPr>
+            </a:pPr>
+            <a:r>
+              <a:t>13:10 CET - office &amp; online streaming</a:t>
             </a:r>
           </a:p>
         </p:txBody>
@@ -6161,22 +6448,22 @@
         </p:nvSpPr>
         <p:spPr>
           <a:xfrm>
-            <a:off x="1097280" y="4206240"/>
-            <a:ext cx="9966960" cy="1371600"/>
-          </a:xfrm>
-          <a:prstGeom prst="rect">
-            <a:avLst/>
-          </a:prstGeom>
-          <a:noFill/>
-        </p:spPr>
-        <p:txBody>
-          <a:bodyPr wrap="square">
-            <a:spAutoFit/>
-          </a:bodyPr>
-          <a:lstStyle/>
-          <a:p>
-            <a:pPr algn="l">
-              <a:defRPr sz="1500" b="0" i="0">
+            <a:off x="1097280" y="4754880"/>
+            <a:ext cx="9966960" cy="731520"/>
+          </a:xfrm>
+          <a:prstGeom prst="rect">
+            <a:avLst/>
+          </a:prstGeom>
+          <a:noFill/>
+        </p:spPr>
+        <p:txBody>
+          <a:bodyPr wrap="square">
+            <a:spAutoFit/>
+          </a:bodyPr>
+          <a:lstStyle/>
+          <a:p>
+            <a:pPr algn="l">
+              <a:defRPr sz="1500" b="0" i="1">
                 <a:solidFill>
                   <a:srgbClr val="E2E2EA"/>
                 </a:solidFill>
@@ -6184,7 +6471,43 @@
               </a:defRPr>
             </a:pPr>
             <a:r>
-              <a:t>Sales team closed 8 deals generating $390k net revenue in a single week, demonstrating our strong market position.</a:t>
+              <a:t>WORK-LIFE BALANCE</a:t>
+            </a:r>
+          </a:p>
+        </p:txBody>
+      </p:sp>
+      <p:sp>
+        <p:nvSpPr>
+          <p:cNvPr id="9" name="TextBox 8"/>
+          <p:cNvSpPr txBox="1"/>
+          <p:nvPr/>
+        </p:nvSpPr>
+        <p:spPr>
+          <a:xfrm>
+            <a:off x="1097280" y="5760720"/>
+            <a:ext cx="9966960" cy="274320"/>
+          </a:xfrm>
+          <a:prstGeom prst="rect">
+            <a:avLst/>
+          </a:prstGeom>
+          <a:noFill/>
+        </p:spPr>
+        <p:txBody>
+          <a:bodyPr wrap="square">
+            <a:spAutoFit/>
+          </a:bodyPr>
+          <a:lstStyle/>
+          <a:p>
+            <a:pPr algn="l">
+              <a:defRPr sz="1100" b="0" i="0">
+                <a:solidFill>
+                  <a:srgbClr val="5C6270"/>
+                </a:solidFill>
+                <a:latin typeface="Calibri"/>
+              </a:defRPr>
+            </a:pPr>
+            <a:r>
+              <a:t>wellness</a:t>
             </a:r>
           </a:p>
         </p:txBody>
@@ -6230,7 +6553,7 @@
             <a:avLst/>
           </a:prstGeom>
           <a:solidFill>
-            <a:srgbClr val="FF6B9D"/>
+            <a:srgbClr val="FF6B6B"/>
           </a:solidFill>
           <a:ln>
             <a:noFill/>
@@ -6283,7 +6606,7 @@
             <a:pPr algn="l">
               <a:defRPr sz="1000" b="1">
                 <a:solidFill>
-                  <a:srgbClr val="FF6B9D"/>
+                  <a:srgbClr val="FF6B6B"/>
                 </a:solidFill>
                 <a:latin typeface="Calibri"/>
               </a:defRPr>
@@ -6319,13 +6642,13 @@
             <a:pPr algn="l">
               <a:defRPr sz="3200" b="1" i="0">
                 <a:solidFill>
-                  <a:srgbClr val="FF6B9D"/>
-                </a:solidFill>
-                <a:latin typeface="Calibri"/>
-              </a:defRPr>
-            </a:pPr>
-            <a:r>
-              <a:t>Birthday Stars</a:t>
+                  <a:srgbClr val="FF6B6B"/>
+                </a:solidFill>
+                <a:latin typeface="Calibri"/>
+              </a:defRPr>
+            </a:pPr>
+            <a:r>
+              <a:t>Birthday Celebration</a:t>
             </a:r>
           </a:p>
         </p:txBody>
@@ -6397,7 +6720,7 @@
               </a:defRPr>
             </a:pPr>
             <a:r>
-              <a:t>March 12th</a:t>
+              <a:t>March 10th</a:t>
             </a:r>
           </a:p>
         </p:txBody>
@@ -6433,7 +6756,7 @@
               </a:defRPr>
             </a:pPr>
             <a:r>
-              <a:t>Thanks guys, all of you, for the warm wishes! 💕</a:t>
+              <a:t>Wishing you an amazing year ahead filled with growth, success, and happiness! 🎉</a:t>
             </a:r>
           </a:p>
         </p:txBody>
@@ -6463,13 +6786,334 @@
             <a:pPr algn="l">
               <a:defRPr sz="1400" b="0" i="1">
                 <a:solidFill>
-                  <a:srgbClr val="FF6B9D"/>
-                </a:solidFill>
-                <a:latin typeface="Calibri"/>
-              </a:defRPr>
-            </a:pPr>
-            <a:r>
-              <a:t>Our amazing team member is celebrating today!</a:t>
+                  <a:srgbClr val="FF6B6B"/>
+                </a:solidFill>
+                <a:latin typeface="Calibri"/>
+              </a:defRPr>
+            </a:pPr>
+            <a:r>
+              <a:t>Thanks for all the warm birthday wishes from the team!</a:t>
+            </a:r>
+          </a:p>
+        </p:txBody>
+      </p:sp>
+    </p:spTree>
+  </p:cSld>
+  <p:clrMapOvr>
+    <a:masterClrMapping/>
+  </p:clrMapOvr>
+</p:sld>
+</file>
+
+<file path=ppt/slides/slide20.xml><?xml version="1.0" encoding="utf-8"?>
+<p:sld xmlns:a="http://schemas.openxmlformats.org/drawingml/2006/main" xmlns:p="http://schemas.openxmlformats.org/presentationml/2006/main" xmlns:r="http://schemas.openxmlformats.org/officeDocument/2006/relationships">
+  <p:cSld>
+    <p:bg>
+      <p:bgPr>
+        <a:solidFill>
+          <a:srgbClr val="08080C"/>
+        </a:solidFill>
+        <a:effectLst/>
+      </p:bgPr>
+    </p:bg>
+    <p:spTree>
+      <p:nvGrpSpPr>
+        <p:cNvPr id="1" name=""/>
+        <p:cNvGrpSpPr/>
+        <p:nvPr/>
+      </p:nvGrpSpPr>
+      <p:grpSpPr/>
+      <p:sp>
+        <p:nvSpPr>
+          <p:cNvPr id="2" name="Rectangle 1"/>
+          <p:cNvSpPr/>
+          <p:nvPr/>
+        </p:nvSpPr>
+        <p:spPr>
+          <a:xfrm>
+            <a:off x="0" y="365760"/>
+            <a:ext cx="12191695" cy="54864"/>
+          </a:xfrm>
+          <a:prstGeom prst="rect">
+            <a:avLst/>
+          </a:prstGeom>
+          <a:solidFill>
+            <a:srgbClr val="FF9500"/>
+          </a:solidFill>
+          <a:ln>
+            <a:noFill/>
+          </a:ln>
+        </p:spPr>
+        <p:style>
+          <a:lnRef idx="1">
+            <a:schemeClr val="accent1"/>
+          </a:lnRef>
+          <a:fillRef idx="3">
+            <a:schemeClr val="accent1"/>
+          </a:fillRef>
+          <a:effectRef idx="2">
+            <a:schemeClr val="accent1"/>
+          </a:effectRef>
+          <a:fontRef idx="minor">
+            <a:schemeClr val="lt1"/>
+          </a:fontRef>
+        </p:style>
+        <p:txBody>
+          <a:bodyPr rtlCol="0" anchor="ctr"/>
+          <a:lstStyle/>
+          <a:p>
+            <a:pPr algn="ctr"/>
+          </a:p>
+        </p:txBody>
+      </p:sp>
+      <p:sp>
+        <p:nvSpPr>
+          <p:cNvPr id="3" name="TextBox 2"/>
+          <p:cNvSpPr txBox="1"/>
+          <p:nvPr/>
+        </p:nvSpPr>
+        <p:spPr>
+          <a:xfrm>
+            <a:off x="1097280" y="731520"/>
+            <a:ext cx="3657600" cy="365760"/>
+          </a:xfrm>
+          <a:prstGeom prst="rect">
+            <a:avLst/>
+          </a:prstGeom>
+          <a:noFill/>
+        </p:spPr>
+        <p:txBody>
+          <a:bodyPr wrap="none">
+            <a:spAutoFit/>
+          </a:bodyPr>
+          <a:lstStyle/>
+          <a:p>
+            <a:pPr algn="l">
+              <a:defRPr sz="1000" b="1">
+                <a:solidFill>
+                  <a:srgbClr val="FF9500"/>
+                </a:solidFill>
+                <a:latin typeface="Calibri"/>
+              </a:defRPr>
+            </a:pPr>
+            <a:r>
+              <a:t>💡  OFFICE LIFE</a:t>
+            </a:r>
+          </a:p>
+        </p:txBody>
+      </p:sp>
+      <p:sp>
+        <p:nvSpPr>
+          <p:cNvPr id="4" name="TextBox 3"/>
+          <p:cNvSpPr txBox="1"/>
+          <p:nvPr/>
+        </p:nvSpPr>
+        <p:spPr>
+          <a:xfrm>
+            <a:off x="1097280" y="1188720"/>
+            <a:ext cx="9966960" cy="731520"/>
+          </a:xfrm>
+          <a:prstGeom prst="rect">
+            <a:avLst/>
+          </a:prstGeom>
+          <a:noFill/>
+        </p:spPr>
+        <p:txBody>
+          <a:bodyPr wrap="square">
+            <a:spAutoFit/>
+          </a:bodyPr>
+          <a:lstStyle/>
+          <a:p>
+            <a:pPr algn="l">
+              <a:defRPr sz="3200" b="1" i="0">
+                <a:solidFill>
+                  <a:srgbClr val="FF9500"/>
+                </a:solidFill>
+                <a:latin typeface="Calibri"/>
+              </a:defRPr>
+            </a:pPr>
+            <a:r>
+              <a:t>Leadership Vision</a:t>
+            </a:r>
+          </a:p>
+        </p:txBody>
+      </p:sp>
+      <p:sp>
+        <p:nvSpPr>
+          <p:cNvPr id="5" name="TextBox 4"/>
+          <p:cNvSpPr txBox="1"/>
+          <p:nvPr/>
+        </p:nvSpPr>
+        <p:spPr>
+          <a:xfrm>
+            <a:off x="1097280" y="2103120"/>
+            <a:ext cx="9966960" cy="457200"/>
+          </a:xfrm>
+          <a:prstGeom prst="rect">
+            <a:avLst/>
+          </a:prstGeom>
+          <a:noFill/>
+        </p:spPr>
+        <p:txBody>
+          <a:bodyPr wrap="square">
+            <a:spAutoFit/>
+          </a:bodyPr>
+          <a:lstStyle/>
+          <a:p>
+            <a:pPr algn="l">
+              <a:defRPr sz="1800" b="1" i="0">
+                <a:solidFill>
+                  <a:srgbClr val="FFFFFF"/>
+                </a:solidFill>
+                <a:latin typeface="Calibri"/>
+              </a:defRPr>
+            </a:pPr>
+            <a:r>
+              <a:t>Build. Ship. Improve.</a:t>
+            </a:r>
+          </a:p>
+        </p:txBody>
+      </p:sp>
+      <p:sp>
+        <p:nvSpPr>
+          <p:cNvPr id="6" name="TextBox 5"/>
+          <p:cNvSpPr txBox="1"/>
+          <p:nvPr/>
+        </p:nvSpPr>
+        <p:spPr>
+          <a:xfrm>
+            <a:off x="1371600" y="2743200"/>
+            <a:ext cx="9692640" cy="1828800"/>
+          </a:xfrm>
+          <a:prstGeom prst="rect">
+            <a:avLst/>
+          </a:prstGeom>
+          <a:noFill/>
+        </p:spPr>
+        <p:txBody>
+          <a:bodyPr wrap="square">
+            <a:spAutoFit/>
+          </a:bodyPr>
+          <a:lstStyle/>
+          <a:p>
+            <a:pPr algn="l">
+              <a:defRPr sz="1500" b="0" i="1">
+                <a:solidFill>
+                  <a:srgbClr val="E2E2EA"/>
+                </a:solidFill>
+                <a:latin typeface="Calibri"/>
+              </a:defRPr>
+            </a:pPr>
+            <a:r>
+              <a:t>"Shift from requirements to pull request mentality - focus on execution and continuous improvement"</a:t>
+            </a:r>
+          </a:p>
+        </p:txBody>
+      </p:sp>
+      <p:sp>
+        <p:nvSpPr>
+          <p:cNvPr id="7" name="TextBox 6"/>
+          <p:cNvSpPr txBox="1"/>
+          <p:nvPr/>
+        </p:nvSpPr>
+        <p:spPr>
+          <a:xfrm>
+            <a:off x="1097280" y="4754880"/>
+            <a:ext cx="9966960" cy="365760"/>
+          </a:xfrm>
+          <a:prstGeom prst="rect">
+            <a:avLst/>
+          </a:prstGeom>
+          <a:noFill/>
+        </p:spPr>
+        <p:txBody>
+          <a:bodyPr wrap="square">
+            <a:spAutoFit/>
+          </a:bodyPr>
+          <a:lstStyle/>
+          <a:p>
+            <a:pPr algn="l">
+              <a:defRPr sz="1400" b="0" i="0">
+                <a:solidFill>
+                  <a:srgbClr val="8F95A3"/>
+                </a:solidFill>
+                <a:latin typeface="Calibri"/>
+              </a:defRPr>
+            </a:pPr>
+            <a:r>
+              <a:t>— CEO Mandate</a:t>
+            </a:r>
+          </a:p>
+        </p:txBody>
+      </p:sp>
+      <p:sp>
+        <p:nvSpPr>
+          <p:cNvPr id="8" name="TextBox 7"/>
+          <p:cNvSpPr txBox="1"/>
+          <p:nvPr/>
+        </p:nvSpPr>
+        <p:spPr>
+          <a:xfrm>
+            <a:off x="1097280" y="5212080"/>
+            <a:ext cx="9966960" cy="365760"/>
+          </a:xfrm>
+          <a:prstGeom prst="rect">
+            <a:avLst/>
+          </a:prstGeom>
+          <a:noFill/>
+        </p:spPr>
+        <p:txBody>
+          <a:bodyPr wrap="square">
+            <a:spAutoFit/>
+          </a:bodyPr>
+          <a:lstStyle/>
+          <a:p>
+            <a:pPr algn="l">
+              <a:defRPr sz="1400" b="1" i="0">
+                <a:solidFill>
+                  <a:srgbClr val="FF9500"/>
+                </a:solidFill>
+                <a:latin typeface="Calibri"/>
+              </a:defRPr>
+            </a:pPr>
+            <a:r>
+              <a:t>🚀</a:t>
+            </a:r>
+          </a:p>
+        </p:txBody>
+      </p:sp>
+      <p:sp>
+        <p:nvSpPr>
+          <p:cNvPr id="9" name="TextBox 8"/>
+          <p:cNvSpPr txBox="1"/>
+          <p:nvPr/>
+        </p:nvSpPr>
+        <p:spPr>
+          <a:xfrm>
+            <a:off x="1097280" y="5760720"/>
+            <a:ext cx="9966960" cy="274320"/>
+          </a:xfrm>
+          <a:prstGeom prst="rect">
+            <a:avLst/>
+          </a:prstGeom>
+          <a:noFill/>
+        </p:spPr>
+        <p:txBody>
+          <a:bodyPr wrap="square">
+            <a:spAutoFit/>
+          </a:bodyPr>
+          <a:lstStyle/>
+          <a:p>
+            <a:pPr algn="l">
+              <a:defRPr sz="1100" b="0" i="0">
+                <a:solidFill>
+                  <a:srgbClr val="5C6270"/>
+                </a:solidFill>
+                <a:latin typeface="Calibri"/>
+              </a:defRPr>
+            </a:pPr>
+            <a:r>
+              <a:t>leadership</a:t>
             </a:r>
           </a:p>
         </p:txBody>
@@ -6515,7 +7159,7 @@
             <a:avLst/>
           </a:prstGeom>
           <a:solidFill>
-            <a:srgbClr val="4A90E2"/>
+            <a:srgbClr val="45B7D1"/>
           </a:solidFill>
           <a:ln>
             <a:noFill/>
@@ -6568,13 +7212,13 @@
             <a:pPr algn="l">
               <a:defRPr sz="1000" b="1">
                 <a:solidFill>
-                  <a:srgbClr val="4A90E2"/>
-                </a:solidFill>
-                <a:latin typeface="Calibri"/>
-              </a:defRPr>
-            </a:pPr>
-            <a:r>
-              <a:t>🚀  WIN</a:t>
+                  <a:srgbClr val="45B7D1"/>
+                </a:solidFill>
+                <a:latin typeface="Calibri"/>
+              </a:defRPr>
+            </a:pPr>
+            <a:r>
+              <a:t>🎉  CELEBRATION</a:t>
             </a:r>
           </a:p>
         </p:txBody>
@@ -6604,13 +7248,13 @@
             <a:pPr algn="l">
               <a:defRPr sz="3200" b="1" i="0">
                 <a:solidFill>
-                  <a:srgbClr val="4A90E2"/>
-                </a:solidFill>
-                <a:latin typeface="Calibri"/>
-              </a:defRPr>
-            </a:pPr>
-            <a:r>
-              <a:t>DevOps Innovation</a:t>
+                  <a:srgbClr val="45B7D1"/>
+                </a:solidFill>
+                <a:latin typeface="Calibri"/>
+              </a:defRPr>
+            </a:pPr>
+            <a:r>
+              <a:t>Birthday Celebration</a:t>
             </a:r>
           </a:p>
         </p:txBody>
@@ -6624,29 +7268,29 @@
         <p:spPr>
           <a:xfrm>
             <a:off x="1097280" y="2103120"/>
-            <a:ext cx="4572000" cy="822960"/>
-          </a:xfrm>
-          <a:prstGeom prst="rect">
-            <a:avLst/>
-          </a:prstGeom>
-          <a:noFill/>
-        </p:spPr>
-        <p:txBody>
-          <a:bodyPr wrap="square">
-            <a:spAutoFit/>
-          </a:bodyPr>
-          <a:lstStyle/>
-          <a:p>
-            <a:pPr algn="l">
-              <a:defRPr sz="4800" b="1" i="0">
-                <a:solidFill>
-                  <a:srgbClr val="4A90E2"/>
-                </a:solidFill>
-                <a:latin typeface="Calibri"/>
-              </a:defRPr>
-            </a:pPr>
-            <a:r>
-              <a:t>36</a:t>
+            <a:ext cx="9966960" cy="640080"/>
+          </a:xfrm>
+          <a:prstGeom prst="rect">
+            <a:avLst/>
+          </a:prstGeom>
+          <a:noFill/>
+        </p:spPr>
+        <p:txBody>
+          <a:bodyPr wrap="square">
+            <a:spAutoFit/>
+          </a:bodyPr>
+          <a:lstStyle/>
+          <a:p>
+            <a:pPr algn="l">
+              <a:defRPr sz="2800" b="1" i="0">
+                <a:solidFill>
+                  <a:srgbClr val="FFFFFF"/>
+                </a:solidFill>
+                <a:latin typeface="Calibri"/>
+              </a:defRPr>
+            </a:pPr>
+            <a:r>
+              <a:t>Yurii Ivanovskyi</a:t>
             </a:r>
           </a:p>
         </p:txBody>
@@ -6659,22 +7303,22 @@
         </p:nvSpPr>
         <p:spPr>
           <a:xfrm>
-            <a:off x="1097280" y="2834640"/>
-            <a:ext cx="4572000" cy="365760"/>
-          </a:xfrm>
-          <a:prstGeom prst="rect">
-            <a:avLst/>
-          </a:prstGeom>
-          <a:noFill/>
-        </p:spPr>
-        <p:txBody>
-          <a:bodyPr wrap="square">
-            <a:spAutoFit/>
-          </a:bodyPr>
-          <a:lstStyle/>
-          <a:p>
-            <a:pPr algn="l">
-              <a:defRPr sz="1200" b="0" i="0">
+            <a:off x="1097280" y="2743200"/>
+            <a:ext cx="9966960" cy="365760"/>
+          </a:xfrm>
+          <a:prstGeom prst="rect">
+            <a:avLst/>
+          </a:prstGeom>
+          <a:noFill/>
+        </p:spPr>
+        <p:txBody>
+          <a:bodyPr wrap="square">
+            <a:spAutoFit/>
+          </a:bodyPr>
+          <a:lstStyle/>
+          <a:p>
+            <a:pPr algn="l">
+              <a:defRPr sz="1400" b="0" i="0">
                 <a:solidFill>
                   <a:srgbClr val="8F95A3"/>
                 </a:solidFill>
@@ -6682,7 +7326,7 @@
               </a:defRPr>
             </a:pPr>
             <a:r>
-              <a:t>rocket reactions</a:t>
+              <a:t>March 10th</a:t>
             </a:r>
           </a:p>
         </p:txBody>
@@ -6696,21 +7340,21 @@
         <p:spPr>
           <a:xfrm>
             <a:off x="1097280" y="3291840"/>
-            <a:ext cx="9966960" cy="365760"/>
-          </a:xfrm>
-          <a:prstGeom prst="rect">
-            <a:avLst/>
-          </a:prstGeom>
-          <a:noFill/>
-        </p:spPr>
-        <p:txBody>
-          <a:bodyPr wrap="square">
-            <a:spAutoFit/>
-          </a:bodyPr>
-          <a:lstStyle/>
-          <a:p>
-            <a:pPr algn="l">
-              <a:defRPr sz="1400" b="0" i="0">
+            <a:ext cx="9966960" cy="914400"/>
+          </a:xfrm>
+          <a:prstGeom prst="rect">
+            <a:avLst/>
+          </a:prstGeom>
+          <a:noFill/>
+        </p:spPr>
+        <p:txBody>
+          <a:bodyPr wrap="square">
+            <a:spAutoFit/>
+          </a:bodyPr>
+          <a:lstStyle/>
+          <a:p>
+            <a:pPr algn="l">
+              <a:defRPr sz="1600" b="0" i="0">
                 <a:solidFill>
                   <a:srgbClr val="E2E2EA"/>
                 </a:solidFill>
@@ -6718,7 +7362,7 @@
               </a:defRPr>
             </a:pPr>
             <a:r>
-              <a:t>by Gleb Krahotkin</a:t>
+              <a:t>Hope you had the most wonderful birthday celebration! Here's to another year of amazing achievements! 🥳</a:t>
             </a:r>
           </a:p>
         </p:txBody>
@@ -6731,7 +7375,7 @@
         </p:nvSpPr>
         <p:spPr>
           <a:xfrm>
-            <a:off x="1097280" y="3840480"/>
+            <a:off x="1097280" y="4572000"/>
             <a:ext cx="9966960" cy="457200"/>
           </a:xfrm>
           <a:prstGeom prst="rect">
@@ -6746,87 +7390,15 @@
           <a:lstStyle/>
           <a:p>
             <a:pPr algn="l">
-              <a:defRPr sz="1800" b="1" i="0">
-                <a:solidFill>
-                  <a:srgbClr val="FFFFFF"/>
-                </a:solidFill>
-                <a:latin typeface="Calibri"/>
-              </a:defRPr>
-            </a:pPr>
-            <a:r>
-              <a:t>Coolify Launch Success</a:t>
-            </a:r>
-          </a:p>
-        </p:txBody>
-      </p:sp>
-      <p:sp>
-        <p:nvSpPr>
-          <p:cNvPr id="9" name="TextBox 8"/>
-          <p:cNvSpPr txBox="1"/>
-          <p:nvPr/>
-        </p:nvSpPr>
-        <p:spPr>
-          <a:xfrm>
-            <a:off x="1097280" y="4389120"/>
-            <a:ext cx="9966960" cy="914400"/>
-          </a:xfrm>
-          <a:prstGeom prst="rect">
-            <a:avLst/>
-          </a:prstGeom>
-          <a:noFill/>
-        </p:spPr>
-        <p:txBody>
-          <a:bodyPr wrap="square">
-            <a:spAutoFit/>
-          </a:bodyPr>
-          <a:lstStyle/>
-          <a:p>
-            <a:pPr algn="l">
-              <a:defRPr sz="1400" b="0" i="0">
-                <a:solidFill>
-                  <a:srgbClr val="E2E2EA"/>
-                </a:solidFill>
-                <a:latin typeface="Calibri"/>
-              </a:defRPr>
-            </a:pPr>
-            <a:r>
-              <a:t>Introduced Coolify - a service that allows you to deploy your applications in just a few clicks, complete with comprehensive documentation.</a:t>
-            </a:r>
-          </a:p>
-        </p:txBody>
-      </p:sp>
-      <p:sp>
-        <p:nvSpPr>
-          <p:cNvPr id="10" name="TextBox 9"/>
-          <p:cNvSpPr txBox="1"/>
-          <p:nvPr/>
-        </p:nvSpPr>
-        <p:spPr>
-          <a:xfrm>
-            <a:off x="1097280" y="5486400"/>
-            <a:ext cx="9966960" cy="457200"/>
-          </a:xfrm>
-          <a:prstGeom prst="rect">
-            <a:avLst/>
-          </a:prstGeom>
-          <a:noFill/>
-        </p:spPr>
-        <p:txBody>
-          <a:bodyPr wrap="square">
-            <a:spAutoFit/>
-          </a:bodyPr>
-          <a:lstStyle/>
-          <a:p>
-            <a:pPr algn="l">
-              <a:defRPr sz="1300" b="0" i="1">
-                <a:solidFill>
-                  <a:srgbClr val="8F95A3"/>
-                </a:solidFill>
-                <a:latin typeface="Calibri"/>
-              </a:defRPr>
-            </a:pPr>
-            <a:r>
-              <a:t>💬 "Making deployment accessible to everyone with one-click simplicity"</a:t>
+              <a:defRPr sz="1400" b="0" i="1">
+                <a:solidFill>
+                  <a:srgbClr val="45B7D1"/>
+                </a:solidFill>
+                <a:latin typeface="Calibri"/>
+              </a:defRPr>
+            </a:pPr>
+            <a:r>
+              <a:t>The whole team joined in celebrating with heartfelt wishes!</a:t>
             </a:r>
           </a:p>
         </p:txBody>
@@ -6872,7 +7444,7 @@
             <a:avLst/>
           </a:prstGeom>
           <a:solidFill>
-            <a:srgbClr val="9B59B6"/>
+            <a:srgbClr val="FF9500"/>
           </a:solidFill>
           <a:ln>
             <a:noFill/>
@@ -6925,13 +7497,13 @@
             <a:pPr algn="l">
               <a:defRPr sz="1000" b="1">
                 <a:solidFill>
-                  <a:srgbClr val="9B59B6"/>
-                </a:solidFill>
-                <a:latin typeface="Calibri"/>
-              </a:defRPr>
-            </a:pPr>
-            <a:r>
-              <a:t>📚  EVENT</a:t>
+                  <a:srgbClr val="FF9500"/>
+                </a:solidFill>
+                <a:latin typeface="Calibri"/>
+              </a:defRPr>
+            </a:pPr>
+            <a:r>
+              <a:t>🚀  WIN</a:t>
             </a:r>
           </a:p>
         </p:txBody>
@@ -6961,13 +7533,13 @@
             <a:pPr algn="l">
               <a:defRPr sz="3200" b="1" i="0">
                 <a:solidFill>
-                  <a:srgbClr val="9B59B6"/>
-                </a:solidFill>
-                <a:latin typeface="Calibri"/>
-              </a:defRPr>
-            </a:pPr>
-            <a:r>
-              <a:t>Learning Initiative</a:t>
+                  <a:srgbClr val="FF9500"/>
+                </a:solidFill>
+                <a:latin typeface="Calibri"/>
+              </a:defRPr>
+            </a:pPr>
+            <a:r>
+              <a:t>DevOps Innovation</a:t>
             </a:r>
           </a:p>
         </p:txBody>
@@ -6981,21 +7553,129 @@
         <p:spPr>
           <a:xfrm>
             <a:off x="1097280" y="2103120"/>
-            <a:ext cx="9966960" cy="548640"/>
-          </a:xfrm>
-          <a:prstGeom prst="rect">
-            <a:avLst/>
-          </a:prstGeom>
-          <a:noFill/>
-        </p:spPr>
-        <p:txBody>
-          <a:bodyPr wrap="square">
-            <a:spAutoFit/>
-          </a:bodyPr>
-          <a:lstStyle/>
-          <a:p>
-            <a:pPr algn="l">
-              <a:defRPr sz="2200" b="1" i="0">
+            <a:ext cx="4572000" cy="822960"/>
+          </a:xfrm>
+          <a:prstGeom prst="rect">
+            <a:avLst/>
+          </a:prstGeom>
+          <a:noFill/>
+        </p:spPr>
+        <p:txBody>
+          <a:bodyPr wrap="square">
+            <a:spAutoFit/>
+          </a:bodyPr>
+          <a:lstStyle/>
+          <a:p>
+            <a:pPr algn="l">
+              <a:defRPr sz="4800" b="1" i="0">
+                <a:solidFill>
+                  <a:srgbClr val="FF9500"/>
+                </a:solidFill>
+                <a:latin typeface="Calibri"/>
+              </a:defRPr>
+            </a:pPr>
+            <a:r>
+              <a:t>26+</a:t>
+            </a:r>
+          </a:p>
+        </p:txBody>
+      </p:sp>
+      <p:sp>
+        <p:nvSpPr>
+          <p:cNvPr id="6" name="TextBox 5"/>
+          <p:cNvSpPr txBox="1"/>
+          <p:nvPr/>
+        </p:nvSpPr>
+        <p:spPr>
+          <a:xfrm>
+            <a:off x="1097280" y="2834640"/>
+            <a:ext cx="4572000" cy="365760"/>
+          </a:xfrm>
+          <a:prstGeom prst="rect">
+            <a:avLst/>
+          </a:prstGeom>
+          <a:noFill/>
+        </p:spPr>
+        <p:txBody>
+          <a:bodyPr wrap="square">
+            <a:spAutoFit/>
+          </a:bodyPr>
+          <a:lstStyle/>
+          <a:p>
+            <a:pPr algn="l">
+              <a:defRPr sz="1200" b="0" i="0">
+                <a:solidFill>
+                  <a:srgbClr val="8F95A3"/>
+                </a:solidFill>
+                <a:latin typeface="Calibri"/>
+              </a:defRPr>
+            </a:pPr>
+            <a:r>
+              <a:t>reactions</a:t>
+            </a:r>
+          </a:p>
+        </p:txBody>
+      </p:sp>
+      <p:sp>
+        <p:nvSpPr>
+          <p:cNvPr id="7" name="TextBox 6"/>
+          <p:cNvSpPr txBox="1"/>
+          <p:nvPr/>
+        </p:nvSpPr>
+        <p:spPr>
+          <a:xfrm>
+            <a:off x="1097280" y="3291840"/>
+            <a:ext cx="9966960" cy="365760"/>
+          </a:xfrm>
+          <a:prstGeom prst="rect">
+            <a:avLst/>
+          </a:prstGeom>
+          <a:noFill/>
+        </p:spPr>
+        <p:txBody>
+          <a:bodyPr wrap="square">
+            <a:spAutoFit/>
+          </a:bodyPr>
+          <a:lstStyle/>
+          <a:p>
+            <a:pPr algn="l">
+              <a:defRPr sz="1400" b="0" i="0">
+                <a:solidFill>
+                  <a:srgbClr val="E2E2EA"/>
+                </a:solidFill>
+                <a:latin typeface="Calibri"/>
+              </a:defRPr>
+            </a:pPr>
+            <a:r>
+              <a:t>by Gleb Krahotkin</a:t>
+            </a:r>
+          </a:p>
+        </p:txBody>
+      </p:sp>
+      <p:sp>
+        <p:nvSpPr>
+          <p:cNvPr id="8" name="TextBox 7"/>
+          <p:cNvSpPr txBox="1"/>
+          <p:nvPr/>
+        </p:nvSpPr>
+        <p:spPr>
+          <a:xfrm>
+            <a:off x="1097280" y="3840480"/>
+            <a:ext cx="9966960" cy="457200"/>
+          </a:xfrm>
+          <a:prstGeom prst="rect">
+            <a:avLst/>
+          </a:prstGeom>
+          <a:noFill/>
+        </p:spPr>
+        <p:txBody>
+          <a:bodyPr wrap="square">
+            <a:spAutoFit/>
+          </a:bodyPr>
+          <a:lstStyle/>
+          <a:p>
+            <a:pPr algn="l">
+              <a:defRPr sz="1800" b="1" i="0">
                 <a:solidFill>
                   <a:srgbClr val="FFFFFF"/>
                 </a:solidFill>
@@ -7003,71 +7683,35 @@
               </a:defRPr>
             </a:pPr>
             <a:r>
-              <a:t>The 4 Disciplines of Execution Book Club</a:t>
-            </a:r>
-          </a:p>
-        </p:txBody>
-      </p:sp>
-      <p:sp>
-        <p:nvSpPr>
-          <p:cNvPr id="6" name="TextBox 5"/>
-          <p:cNvSpPr txBox="1"/>
-          <p:nvPr/>
-        </p:nvSpPr>
-        <p:spPr>
-          <a:xfrm>
-            <a:off x="1097280" y="2743200"/>
-            <a:ext cx="9966960" cy="365760"/>
-          </a:xfrm>
-          <a:prstGeom prst="rect">
-            <a:avLst/>
-          </a:prstGeom>
-          <a:noFill/>
-        </p:spPr>
-        <p:txBody>
-          <a:bodyPr wrap="square">
-            <a:spAutoFit/>
-          </a:bodyPr>
-          <a:lstStyle/>
-          <a:p>
-            <a:pPr algn="l">
-              <a:defRPr sz="1400" b="1" i="0">
-                <a:solidFill>
-                  <a:srgbClr val="9B59B6"/>
-                </a:solidFill>
-                <a:latin typeface="Calibri"/>
-              </a:defRPr>
-            </a:pPr>
-            <a:r>
-              <a:t>Starting Now</a:t>
-            </a:r>
-          </a:p>
-        </p:txBody>
-      </p:sp>
-      <p:sp>
-        <p:nvSpPr>
-          <p:cNvPr id="7" name="TextBox 6"/>
-          <p:cNvSpPr txBox="1"/>
-          <p:nvPr/>
-        </p:nvSpPr>
-        <p:spPr>
-          <a:xfrm>
-            <a:off x="1097280" y="3291840"/>
-            <a:ext cx="9966960" cy="1371600"/>
-          </a:xfrm>
-          <a:prstGeom prst="rect">
-            <a:avLst/>
-          </a:prstGeom>
-          <a:noFill/>
-        </p:spPr>
-        <p:txBody>
-          <a:bodyPr wrap="square">
-            <a:spAutoFit/>
-          </a:bodyPr>
-          <a:lstStyle/>
-          <a:p>
-            <a:pPr algn="l">
-              <a:defRPr sz="1500" b="0" i="0">
+              <a:t>Coolify Deployment Platform Launch</a:t>
+            </a:r>
+          </a:p>
+        </p:txBody>
+      </p:sp>
+      <p:sp>
+        <p:nvSpPr>
+          <p:cNvPr id="9" name="TextBox 8"/>
+          <p:cNvSpPr txBox="1"/>
+          <p:nvPr/>
+        </p:nvSpPr>
+        <p:spPr>
+          <a:xfrm>
+            <a:off x="1097280" y="4389120"/>
+            <a:ext cx="9966960" cy="914400"/>
+          </a:xfrm>
+          <a:prstGeom prst="rect">
+            <a:avLst/>
+          </a:prstGeom>
+          <a:noFill/>
+        </p:spPr>
+        <p:txBody>
+          <a:bodyPr wrap="square">
+            <a:spAutoFit/>
+          </a:bodyPr>
+          <a:lstStyle/>
+          <a:p>
+            <a:pPr algn="l">
+              <a:defRPr sz="1400" b="0" i="0">
                 <a:solidFill>
                   <a:srgbClr val="E2E2EA"/>
                 </a:solidFill>
@@ -7075,35 +7719,35 @@
               </a:defRPr>
             </a:pPr>
             <a:r>
-              <a:t>Anna is leading a reading club focused on Wildly Important Goals (WIGs), Leading and Lagging Metrics, Scorecards, and Follow-through execution discipline.</a:t>
-            </a:r>
-          </a:p>
-        </p:txBody>
-      </p:sp>
-      <p:sp>
-        <p:nvSpPr>
-          <p:cNvPr id="8" name="TextBox 7"/>
-          <p:cNvSpPr txBox="1"/>
-          <p:nvPr/>
-        </p:nvSpPr>
-        <p:spPr>
-          <a:xfrm>
-            <a:off x="1097280" y="5029200"/>
-            <a:ext cx="9966960" cy="365760"/>
-          </a:xfrm>
-          <a:prstGeom prst="rect">
-            <a:avLst/>
-          </a:prstGeom>
-          <a:noFill/>
-        </p:spPr>
-        <p:txBody>
-          <a:bodyPr wrap="square">
-            <a:spAutoFit/>
-          </a:bodyPr>
-          <a:lstStyle/>
-          <a:p>
-            <a:pPr algn="l">
-              <a:defRPr sz="1300" b="0" i="0">
+              <a:t>Introduced Coolify service for one-click app deployment with comprehensive documentation</a:t>
+            </a:r>
+          </a:p>
+        </p:txBody>
+      </p:sp>
+      <p:sp>
+        <p:nvSpPr>
+          <p:cNvPr id="10" name="TextBox 9"/>
+          <p:cNvSpPr txBox="1"/>
+          <p:nvPr/>
+        </p:nvSpPr>
+        <p:spPr>
+          <a:xfrm>
+            <a:off x="1097280" y="5486400"/>
+            <a:ext cx="9966960" cy="457200"/>
+          </a:xfrm>
+          <a:prstGeom prst="rect">
+            <a:avLst/>
+          </a:prstGeom>
+          <a:noFill/>
+        </p:spPr>
+        <p:txBody>
+          <a:bodyPr wrap="square">
+            <a:spAutoFit/>
+          </a:bodyPr>
+          <a:lstStyle/>
+          <a:p>
+            <a:pPr algn="l">
+              <a:defRPr sz="1300" b="0" i="1">
                 <a:solidFill>
                   <a:srgbClr val="8F95A3"/>
                 </a:solidFill>
@@ -7111,7 +7755,7 @@
               </a:defRPr>
             </a:pPr>
             <a:r>
-              <a:t>Organized by Anna &amp; Pavel Golubev</a:t>
+              <a:t>💬 "Empowering teams with streamlined deployment workflows"</a:t>
             </a:r>
           </a:p>
         </p:txBody>
@@ -7157,7 +7801,7 @@
             <a:avLst/>
           </a:prstGeom>
           <a:solidFill>
-            <a:srgbClr val="E67E22"/>
+            <a:srgbClr val="9C27B0"/>
           </a:solidFill>
           <a:ln>
             <a:noFill/>
@@ -7210,13 +7854,13 @@
             <a:pPr algn="l">
               <a:defRPr sz="1000" b="1">
                 <a:solidFill>
-                  <a:srgbClr val="E67E22"/>
-                </a:solidFill>
-                <a:latin typeface="Calibri"/>
-              </a:defRPr>
-            </a:pPr>
-            <a:r>
-              <a:t>🎓  WEEKLY RITUAL</a:t>
+                  <a:srgbClr val="9C27B0"/>
+                </a:solidFill>
+                <a:latin typeface="Calibri"/>
+              </a:defRPr>
+            </a:pPr>
+            <a:r>
+              <a:t>🧠  EVENT</a:t>
             </a:r>
           </a:p>
         </p:txBody>
@@ -7246,13 +7890,13 @@
             <a:pPr algn="l">
               <a:defRPr sz="3200" b="1" i="0">
                 <a:solidFill>
-                  <a:srgbClr val="E67E22"/>
-                </a:solidFill>
-                <a:latin typeface="Calibri"/>
-              </a:defRPr>
-            </a:pPr>
-            <a:r>
-              <a:t>Knowledge Sharing</a:t>
+                  <a:srgbClr val="9C27B0"/>
+                </a:solidFill>
+                <a:latin typeface="Calibri"/>
+              </a:defRPr>
+            </a:pPr>
+            <a:r>
+              <a:t>Book Club Launch</a:t>
             </a:r>
           </a:p>
         </p:txBody>
@@ -7266,21 +7910,21 @@
         <p:spPr>
           <a:xfrm>
             <a:off x="1097280" y="2103120"/>
-            <a:ext cx="9966960" cy="457200"/>
-          </a:xfrm>
-          <a:prstGeom prst="rect">
-            <a:avLst/>
-          </a:prstGeom>
-          <a:noFill/>
-        </p:spPr>
-        <p:txBody>
-          <a:bodyPr wrap="square">
-            <a:spAutoFit/>
-          </a:bodyPr>
-          <a:lstStyle/>
-          <a:p>
-            <a:pPr algn="l">
-              <a:defRPr sz="1800" b="1" i="0">
+            <a:ext cx="9966960" cy="548640"/>
+          </a:xfrm>
+          <a:prstGeom prst="rect">
+            <a:avLst/>
+          </a:prstGeom>
+          <a:noFill/>
+        </p:spPr>
+        <p:txBody>
+          <a:bodyPr wrap="square">
+            <a:spAutoFit/>
+          </a:bodyPr>
+          <a:lstStyle/>
+          <a:p>
+            <a:pPr algn="l">
+              <a:defRPr sz="2200" b="1" i="0">
                 <a:solidFill>
                   <a:srgbClr val="FFFFFF"/>
                 </a:solidFill>
@@ -7288,7 +7932,7 @@
               </a:defRPr>
             </a:pPr>
             <a:r>
-              <a:t>11th Lunch &amp; Learn Complete!</a:t>
+              <a:t>The 4 Disciplines of Execution Reading Club</a:t>
             </a:r>
           </a:p>
         </p:txBody>
@@ -7301,22 +7945,58 @@
         </p:nvSpPr>
         <p:spPr>
           <a:xfrm>
-            <a:off x="1371600" y="2926080"/>
-            <a:ext cx="9418320" cy="548640"/>
-          </a:xfrm>
-          <a:prstGeom prst="rect">
-            <a:avLst/>
-          </a:prstGeom>
-          <a:noFill/>
-        </p:spPr>
-        <p:txBody>
-          <a:bodyPr wrap="square">
-            <a:spAutoFit/>
-          </a:bodyPr>
-          <a:lstStyle/>
-          <a:p>
-            <a:pPr algn="l">
-              <a:defRPr sz="1400" b="0" i="0">
+            <a:off x="1097280" y="2743200"/>
+            <a:ext cx="9966960" cy="365760"/>
+          </a:xfrm>
+          <a:prstGeom prst="rect">
+            <a:avLst/>
+          </a:prstGeom>
+          <a:noFill/>
+        </p:spPr>
+        <p:txBody>
+          <a:bodyPr wrap="square">
+            <a:spAutoFit/>
+          </a:bodyPr>
+          <a:lstStyle/>
+          <a:p>
+            <a:pPr algn="l">
+              <a:defRPr sz="1400" b="1" i="0">
+                <a:solidFill>
+                  <a:srgbClr val="9C27B0"/>
+                </a:solidFill>
+                <a:latin typeface="Calibri"/>
+              </a:defRPr>
+            </a:pPr>
+            <a:r>
+              <a:t>Starting Now</a:t>
+            </a:r>
+          </a:p>
+        </p:txBody>
+      </p:sp>
+      <p:sp>
+        <p:nvSpPr>
+          <p:cNvPr id="7" name="TextBox 6"/>
+          <p:cNvSpPr txBox="1"/>
+          <p:nvPr/>
+        </p:nvSpPr>
+        <p:spPr>
+          <a:xfrm>
+            <a:off x="1097280" y="3291840"/>
+            <a:ext cx="9966960" cy="1371600"/>
+          </a:xfrm>
+          <a:prstGeom prst="rect">
+            <a:avLst/>
+          </a:prstGeom>
+          <a:noFill/>
+        </p:spPr>
+        <p:txBody>
+          <a:bodyPr wrap="square">
+            <a:spAutoFit/>
+          </a:bodyPr>
+          <a:lstStyle/>
+          <a:p>
+            <a:pPr algn="l">
+              <a:defRPr sz="1500" b="0" i="0">
                 <a:solidFill>
                   <a:srgbClr val="E2E2EA"/>
                 </a:solidFill>
@@ -7324,43 +8004,7 @@
               </a:defRPr>
             </a:pPr>
             <a:r>
-              <a:t>Big thank you to Timofey Levanov for his presentation on fraud traffic detection</a:t>
-            </a:r>
-          </a:p>
-        </p:txBody>
-      </p:sp>
-      <p:sp>
-        <p:nvSpPr>
-          <p:cNvPr id="7" name="TextBox 6"/>
-          <p:cNvSpPr txBox="1"/>
-          <p:nvPr/>
-        </p:nvSpPr>
-        <p:spPr>
-          <a:xfrm>
-            <a:off x="1371600" y="3657600"/>
-            <a:ext cx="9418320" cy="548640"/>
-          </a:xfrm>
-          <a:prstGeom prst="rect">
-            <a:avLst/>
-          </a:prstGeom>
-          <a:noFill/>
-        </p:spPr>
-        <p:txBody>
-          <a:bodyPr wrap="square">
-            <a:spAutoFit/>
-          </a:bodyPr>
-          <a:lstStyle/>
-          <a:p>
-            <a:pPr algn="l">
-              <a:defRPr sz="1400" b="0" i="0">
-                <a:solidFill>
-                  <a:srgbClr val="E2E2EA"/>
-                </a:solidFill>
-                <a:latin typeface="Calibri"/>
-              </a:defRPr>
-            </a:pPr>
-            <a:r>
-              <a:t>Recording and materials now available for the whole team</a:t>
+              <a:t>Focusing on Wildly Important Goals, Leading/Lagging Metrics, Scorecards, and Execution Discipline</a:t>
             </a:r>
           </a:p>
         </p:txBody>
@@ -7373,66 +8017,30 @@
         </p:nvSpPr>
         <p:spPr>
           <a:xfrm>
-            <a:off x="1097280" y="4754880"/>
-            <a:ext cx="9966960" cy="731520"/>
-          </a:xfrm>
-          <a:prstGeom prst="rect">
-            <a:avLst/>
-          </a:prstGeom>
-          <a:noFill/>
-        </p:spPr>
-        <p:txBody>
-          <a:bodyPr wrap="square">
-            <a:spAutoFit/>
-          </a:bodyPr>
-          <a:lstStyle/>
-          <a:p>
-            <a:pPr algn="l">
-              <a:defRPr sz="1500" b="0" i="1">
-                <a:solidFill>
-                  <a:srgbClr val="E2E2EA"/>
-                </a:solidFill>
-                <a:latin typeface="Calibri"/>
-              </a:defRPr>
-            </a:pPr>
-            <a:r>
-              <a:t>Continuous learning and knowledge sharing</a:t>
-            </a:r>
-          </a:p>
-        </p:txBody>
-      </p:sp>
-      <p:sp>
-        <p:nvSpPr>
-          <p:cNvPr id="9" name="TextBox 8"/>
-          <p:cNvSpPr txBox="1"/>
-          <p:nvPr/>
-        </p:nvSpPr>
-        <p:spPr>
-          <a:xfrm>
-            <a:off x="1097280" y="5760720"/>
-            <a:ext cx="9966960" cy="274320"/>
-          </a:xfrm>
-          <a:prstGeom prst="rect">
-            <a:avLst/>
-          </a:prstGeom>
-          <a:noFill/>
-        </p:spPr>
-        <p:txBody>
-          <a:bodyPr wrap="square">
-            <a:spAutoFit/>
-          </a:bodyPr>
-          <a:lstStyle/>
-          <a:p>
-            <a:pPr algn="l">
-              <a:defRPr sz="1100" b="0" i="0">
-                <a:solidFill>
-                  <a:srgbClr val="5C6270"/>
-                </a:solidFill>
-                <a:latin typeface="Calibri"/>
-              </a:defRPr>
-            </a:pPr>
-            <a:r>
-              <a:t>#general</a:t>
+            <a:off x="1097280" y="5029200"/>
+            <a:ext cx="9966960" cy="365760"/>
+          </a:xfrm>
+          <a:prstGeom prst="rect">
+            <a:avLst/>
+          </a:prstGeom>
+          <a:noFill/>
+        </p:spPr>
+        <p:txBody>
+          <a:bodyPr wrap="square">
+            <a:spAutoFit/>
+          </a:bodyPr>
+          <a:lstStyle/>
+          <a:p>
+            <a:pPr algn="l">
+              <a:defRPr sz="1300" b="0" i="0">
+                <a:solidFill>
+                  <a:srgbClr val="8F95A3"/>
+                </a:solidFill>
+                <a:latin typeface="Calibri"/>
+              </a:defRPr>
+            </a:pPr>
+            <a:r>
+              <a:t>Organized by Anna &amp; Pavel Golubev</a:t>
             </a:r>
           </a:p>
         </p:txBody>
@@ -7478,7 +8086,7 @@
             <a:avLst/>
           </a:prstGeom>
           <a:solidFill>
-            <a:srgbClr val="27AE60"/>
+            <a:srgbClr val="4CAF50"/>
           </a:solidFill>
           <a:ln>
             <a:noFill/>
@@ -7531,13 +8139,13 @@
             <a:pPr algn="l">
               <a:defRPr sz="1000" b="1">
                 <a:solidFill>
-                  <a:srgbClr val="27AE60"/>
-                </a:solidFill>
-                <a:latin typeface="Calibri"/>
-              </a:defRPr>
-            </a:pPr>
-            <a:r>
-              <a:t>👏  CLAPS</a:t>
+                  <a:srgbClr val="4CAF50"/>
+                </a:solidFill>
+                <a:latin typeface="Calibri"/>
+              </a:defRPr>
+            </a:pPr>
+            <a:r>
+              <a:t>🎯  WIN</a:t>
             </a:r>
           </a:p>
         </p:txBody>
@@ -7567,13 +8175,13 @@
             <a:pPr algn="l">
               <a:defRPr sz="3200" b="1" i="0">
                 <a:solidFill>
-                  <a:srgbClr val="27AE60"/>
-                </a:solidFill>
-                <a:latin typeface="Calibri"/>
-              </a:defRPr>
-            </a:pPr>
-            <a:r>
-              <a:t>Team Recognition</a:t>
+                  <a:srgbClr val="4CAF50"/>
+                </a:solidFill>
+                <a:latin typeface="Calibri"/>
+              </a:defRPr>
+            </a:pPr>
+            <a:r>
+              <a:t>Lunch &amp; Learn Success</a:t>
             </a:r>
           </a:p>
         </p:txBody>
@@ -7587,29 +8195,29 @@
         <p:spPr>
           <a:xfrm>
             <a:off x="1097280" y="2103120"/>
-            <a:ext cx="2743200" cy="548640"/>
-          </a:xfrm>
-          <a:prstGeom prst="rect">
-            <a:avLst/>
-          </a:prstGeom>
-          <a:noFill/>
-        </p:spPr>
-        <p:txBody>
-          <a:bodyPr wrap="square">
-            <a:spAutoFit/>
-          </a:bodyPr>
-          <a:lstStyle/>
-          <a:p>
-            <a:pPr algn="l">
-              <a:defRPr sz="2800" b="1" i="0">
-                <a:solidFill>
-                  <a:srgbClr val="27AE60"/>
-                </a:solidFill>
-                <a:latin typeface="Calibri"/>
-              </a:defRPr>
-            </a:pPr>
-            <a:r>
-              <a:t>50</a:t>
+            <a:ext cx="4572000" cy="822960"/>
+          </a:xfrm>
+          <a:prstGeom prst="rect">
+            <a:avLst/>
+          </a:prstGeom>
+          <a:noFill/>
+        </p:spPr>
+        <p:txBody>
+          <a:bodyPr wrap="square">
+            <a:spAutoFit/>
+          </a:bodyPr>
+          <a:lstStyle/>
+          <a:p>
+            <a:pPr algn="l">
+              <a:defRPr sz="4800" b="1" i="0">
+                <a:solidFill>
+                  <a:srgbClr val="4CAF50"/>
+                </a:solidFill>
+                <a:latin typeface="Calibri"/>
+              </a:defRPr>
+            </a:pPr>
+            <a:r>
+              <a:t>11th</a:t>
             </a:r>
           </a:p>
         </p:txBody>
@@ -7622,7 +8230,43 @@
         </p:nvSpPr>
         <p:spPr>
           <a:xfrm>
-            <a:off x="1097280" y="2651760"/>
+            <a:off x="1097280" y="2834640"/>
+            <a:ext cx="4572000" cy="365760"/>
+          </a:xfrm>
+          <a:prstGeom prst="rect">
+            <a:avLst/>
+          </a:prstGeom>
+          <a:noFill/>
+        </p:spPr>
+        <p:txBody>
+          <a:bodyPr wrap="square">
+            <a:spAutoFit/>
+          </a:bodyPr>
+          <a:lstStyle/>
+          <a:p>
+            <a:pPr algn="l">
+              <a:defRPr sz="1200" b="0" i="0">
+                <a:solidFill>
+                  <a:srgbClr val="8F95A3"/>
+                </a:solidFill>
+                <a:latin typeface="Calibri"/>
+              </a:defRPr>
+            </a:pPr>
+            <a:r>
+              <a:t>session</a:t>
+            </a:r>
+          </a:p>
+        </p:txBody>
+      </p:sp>
+      <p:sp>
+        <p:nvSpPr>
+          <p:cNvPr id="7" name="TextBox 6"/>
+          <p:cNvSpPr txBox="1"/>
+          <p:nvPr/>
+        </p:nvSpPr>
+        <p:spPr>
+          <a:xfrm>
+            <a:off x="1097280" y="3291840"/>
             <a:ext cx="9966960" cy="365760"/>
           </a:xfrm>
           <a:prstGeom prst="rect">
@@ -7645,35 +8289,35 @@
               </a:defRPr>
             </a:pPr>
             <a:r>
-              <a:t>from pavel.savinskiy</a:t>
-            </a:r>
-          </a:p>
-        </p:txBody>
-      </p:sp>
-      <p:sp>
-        <p:nvSpPr>
-          <p:cNvPr id="7" name="TextBox 6"/>
-          <p:cNvSpPr txBox="1"/>
-          <p:nvPr/>
-        </p:nvSpPr>
-        <p:spPr>
-          <a:xfrm>
-            <a:off x="1097280" y="3108960"/>
-            <a:ext cx="9966960" cy="365760"/>
-          </a:xfrm>
-          <a:prstGeom prst="rect">
-            <a:avLst/>
-          </a:prstGeom>
-          <a:noFill/>
-        </p:spPr>
-        <p:txBody>
-          <a:bodyPr wrap="square">
-            <a:spAutoFit/>
-          </a:bodyPr>
-          <a:lstStyle/>
-          <a:p>
-            <a:pPr algn="l">
-              <a:defRPr sz="1400" b="1" i="0">
+              <a:t>by Katarzyna &amp; Timofey</a:t>
+            </a:r>
+          </a:p>
+        </p:txBody>
+      </p:sp>
+      <p:sp>
+        <p:nvSpPr>
+          <p:cNvPr id="8" name="TextBox 7"/>
+          <p:cNvSpPr txBox="1"/>
+          <p:nvPr/>
+        </p:nvSpPr>
+        <p:spPr>
+          <a:xfrm>
+            <a:off x="1097280" y="3840480"/>
+            <a:ext cx="9966960" cy="457200"/>
+          </a:xfrm>
+          <a:prstGeom prst="rect">
+            <a:avLst/>
+          </a:prstGeom>
+          <a:noFill/>
+        </p:spPr>
+        <p:txBody>
+          <a:bodyPr wrap="square">
+            <a:spAutoFit/>
+          </a:bodyPr>
+          <a:lstStyle/>
+          <a:p>
+            <a:pPr algn="l">
+              <a:defRPr sz="1800" b="1" i="0">
                 <a:solidFill>
                   <a:srgbClr val="FFFFFF"/>
                 </a:solidFill>
@@ -7681,35 +8325,35 @@
               </a:defRPr>
             </a:pPr>
             <a:r>
-              <a:t>to: sergeydesigner</a:t>
-            </a:r>
-          </a:p>
-        </p:txBody>
-      </p:sp>
-      <p:sp>
-        <p:nvSpPr>
-          <p:cNvPr id="8" name="TextBox 7"/>
-          <p:cNvSpPr txBox="1"/>
-          <p:nvPr/>
-        </p:nvSpPr>
-        <p:spPr>
-          <a:xfrm>
-            <a:off x="1097280" y="3749039"/>
-            <a:ext cx="9966960" cy="1097280"/>
-          </a:xfrm>
-          <a:prstGeom prst="rect">
-            <a:avLst/>
-          </a:prstGeom>
-          <a:noFill/>
-        </p:spPr>
-        <p:txBody>
-          <a:bodyPr wrap="square">
-            <a:spAutoFit/>
-          </a:bodyPr>
-          <a:lstStyle/>
-          <a:p>
-            <a:pPr algn="l">
-              <a:defRPr sz="1500" b="0" i="1">
+              <a:t>Fraud Detection Presentation</a:t>
+            </a:r>
+          </a:p>
+        </p:txBody>
+      </p:sp>
+      <p:sp>
+        <p:nvSpPr>
+          <p:cNvPr id="9" name="TextBox 8"/>
+          <p:cNvSpPr txBox="1"/>
+          <p:nvPr/>
+        </p:nvSpPr>
+        <p:spPr>
+          <a:xfrm>
+            <a:off x="1097280" y="4389120"/>
+            <a:ext cx="9966960" cy="914400"/>
+          </a:xfrm>
+          <a:prstGeom prst="rect">
+            <a:avLst/>
+          </a:prstGeom>
+          <a:noFill/>
+        </p:spPr>
+        <p:txBody>
+          <a:bodyPr wrap="square">
+            <a:spAutoFit/>
+          </a:bodyPr>
+          <a:lstStyle/>
+          <a:p>
+            <a:pPr algn="l">
+              <a:defRPr sz="1400" b="0" i="0">
                 <a:solidFill>
                   <a:srgbClr val="E2E2EA"/>
                 </a:solidFill>
@@ -7717,20 +8361,20 @@
               </a:defRPr>
             </a:pPr>
             <a:r>
-              <a:t>"Outstanding design work that made a real impact"</a:t>
-            </a:r>
-          </a:p>
-        </p:txBody>
-      </p:sp>
-      <p:sp>
-        <p:nvSpPr>
-          <p:cNvPr id="9" name="TextBox 8"/>
-          <p:cNvSpPr txBox="1"/>
-          <p:nvPr/>
-        </p:nvSpPr>
-        <p:spPr>
-          <a:xfrm>
-            <a:off x="1097280" y="5120640"/>
+              <a:t>Timofey delivered an insightful presentation on traffic fraud detection with recording available</a:t>
+            </a:r>
+          </a:p>
+        </p:txBody>
+      </p:sp>
+      <p:sp>
+        <p:nvSpPr>
+          <p:cNvPr id="10" name="TextBox 9"/>
+          <p:cNvSpPr txBox="1"/>
+          <p:nvPr/>
+        </p:nvSpPr>
+        <p:spPr>
+          <a:xfrm>
+            <a:off x="1097280" y="5486400"/>
             <a:ext cx="9966960" cy="457200"/>
           </a:xfrm>
           <a:prstGeom prst="rect">
@@ -7745,15 +8389,15 @@
           <a:lstStyle/>
           <a:p>
             <a:pPr algn="l">
-              <a:defRPr sz="1200" b="1" i="0">
-                <a:solidFill>
-                  <a:srgbClr val="27AE60"/>
-                </a:solidFill>
-                <a:latin typeface="Calibri"/>
-              </a:defRPr>
-            </a:pPr>
-            <a:r>
-              <a:t>Excellence · Creativity</a:t>
+              <a:defRPr sz="1300" b="0" i="1">
+                <a:solidFill>
+                  <a:srgbClr val="8F95A3"/>
+                </a:solidFill>
+                <a:latin typeface="Calibri"/>
+              </a:defRPr>
+            </a:pPr>
+            <a:r>
+              <a:t>💬 "Knowledge sharing continues to strengthen our technical expertise"</a:t>
             </a:r>
           </a:p>
         </p:txBody>
@@ -7799,7 +8443,7 @@
             <a:avLst/>
           </a:prstGeom>
           <a:solidFill>
-            <a:srgbClr val="27AE60"/>
+            <a:srgbClr val="FF5722"/>
           </a:solidFill>
           <a:ln>
             <a:noFill/>
@@ -7852,13 +8496,13 @@
             <a:pPr algn="l">
               <a:defRPr sz="1000" b="1">
                 <a:solidFill>
-                  <a:srgbClr val="27AE60"/>
-                </a:solidFill>
-                <a:latin typeface="Calibri"/>
-              </a:defRPr>
-            </a:pPr>
-            <a:r>
-              <a:t>🙌  CLAPS</a:t>
+                  <a:srgbClr val="FF5722"/>
+                </a:solidFill>
+                <a:latin typeface="Calibri"/>
+              </a:defRPr>
+            </a:pPr>
+            <a:r>
+              <a:t>👏  CLAPS</a:t>
             </a:r>
           </a:p>
         </p:txBody>
@@ -7888,13 +8532,13 @@
             <a:pPr algn="l">
               <a:defRPr sz="3200" b="1" i="0">
                 <a:solidFill>
-                  <a:srgbClr val="27AE60"/>
-                </a:solidFill>
-                <a:latin typeface="Calibri"/>
-              </a:defRPr>
-            </a:pPr>
-            <a:r>
-              <a:t>Technical Excellence</a:t>
+                  <a:srgbClr val="FF5722"/>
+                </a:solidFill>
+                <a:latin typeface="Calibri"/>
+              </a:defRPr>
+            </a:pPr>
+            <a:r>
+              <a:t>Team Recognition</a:t>
             </a:r>
           </a:p>
         </p:txBody>
@@ -7924,7 +8568,7 @@
             <a:pPr algn="l">
               <a:defRPr sz="2800" b="1" i="0">
                 <a:solidFill>
-                  <a:srgbClr val="27AE60"/>
+                  <a:srgbClr val="FF5722"/>
                 </a:solidFill>
                 <a:latin typeface="Calibri"/>
               </a:defRPr>
@@ -7966,7 +8610,7 @@
               </a:defRPr>
             </a:pPr>
             <a:r>
-              <a:t>from Sem Sinchenko</a:t>
+              <a:t>from Pavel Savinskiy</a:t>
             </a:r>
           </a:p>
         </p:txBody>
@@ -8002,7 +8646,7 @@
               </a:defRPr>
             </a:pPr>
             <a:r>
-              <a:t>to: Ildar Fatykhov</a:t>
+              <a:t>to: sergeydesigner</a:t>
             </a:r>
           </a:p>
         </p:txBody>
@@ -8038,7 +8682,7 @@
               </a:defRPr>
             </a:pPr>
             <a:r>
-              <a:t>"Exceptional technical contribution and problem-solving"</a:t>
+              <a:t>"Outstanding design work and dedication"</a:t>
             </a:r>
           </a:p>
         </p:txBody>
@@ -8068,13 +8712,13 @@
             <a:pPr algn="l">
               <a:defRPr sz="1200" b="1" i="0">
                 <a:solidFill>
-                  <a:srgbClr val="27AE60"/>
-                </a:solidFill>
-                <a:latin typeface="Calibri"/>
-              </a:defRPr>
-            </a:pPr>
-            <a:r>
-              <a:t>Technical Excellence · Innovation</a:t>
+                  <a:srgbClr val="FF5722"/>
+                </a:solidFill>
+                <a:latin typeface="Calibri"/>
+              </a:defRPr>
+            </a:pPr>
+            <a:r>
+              <a:t>EXTREME TEAMWORK</a:t>
             </a:r>
           </a:p>
         </p:txBody>
@@ -8120,7 +8764,7 @@
             <a:avLst/>
           </a:prstGeom>
           <a:solidFill>
-            <a:srgbClr val="27AE60"/>
+            <a:srgbClr val="2196F3"/>
           </a:solidFill>
           <a:ln>
             <a:noFill/>
@@ -8173,13 +8817,13 @@
             <a:pPr algn="l">
               <a:defRPr sz="1000" b="1">
                 <a:solidFill>
-                  <a:srgbClr val="27AE60"/>
-                </a:solidFill>
-                <a:latin typeface="Calibri"/>
-              </a:defRPr>
-            </a:pPr>
-            <a:r>
-              <a:t>🎯  CLAPS</a:t>
+                  <a:srgbClr val="2196F3"/>
+                </a:solidFill>
+                <a:latin typeface="Calibri"/>
+              </a:defRPr>
+            </a:pPr>
+            <a:r>
+              <a:t>⭐  CLAPS</a:t>
             </a:r>
           </a:p>
         </p:txBody>
@@ -8209,13 +8853,13 @@
             <a:pPr algn="l">
               <a:defRPr sz="3200" b="1" i="0">
                 <a:solidFill>
-                  <a:srgbClr val="27AE60"/>
-                </a:solidFill>
-                <a:latin typeface="Calibri"/>
-              </a:defRPr>
-            </a:pPr>
-            <a:r>
-              <a:t>Leadership Impact</a:t>
+                  <a:srgbClr val="2196F3"/>
+                </a:solidFill>
+                <a:latin typeface="Calibri"/>
+              </a:defRPr>
+            </a:pPr>
+            <a:r>
+              <a:t>Excellence Recognized</a:t>
             </a:r>
           </a:p>
         </p:txBody>
@@ -8245,13 +8889,13 @@
             <a:pPr algn="l">
               <a:defRPr sz="2800" b="1" i="0">
                 <a:solidFill>
-                  <a:srgbClr val="27AE60"/>
-                </a:solidFill>
-                <a:latin typeface="Calibri"/>
-              </a:defRPr>
-            </a:pPr>
-            <a:r>
-              <a:t>40</a:t>
+                  <a:srgbClr val="2196F3"/>
+                </a:solidFill>
+                <a:latin typeface="Calibri"/>
+              </a:defRPr>
+            </a:pPr>
+            <a:r>
+              <a:t>50</a:t>
             </a:r>
           </a:p>
         </p:txBody>
@@ -8287,7 +8931,7 @@
               </a:defRPr>
             </a:pPr>
             <a:r>
-              <a:t>from Anastasia Sokolova</a:t>
+              <a:t>from Sem Sinchenko</a:t>
             </a:r>
           </a:p>
         </p:txBody>
@@ -8323,7 +8967,7 @@
               </a:defRPr>
             </a:pPr>
             <a:r>
-              <a:t>to: Sasha Sakovich</a:t>
+              <a:t>to: Ildar Fatykhov</a:t>
             </a:r>
           </a:p>
         </p:txBody>
@@ -8359,7 +9003,7 @@
               </a:defRPr>
             </a:pPr>
             <a:r>
-              <a:t>"Strong leadership and team guidance"</a:t>
+              <a:t>"Exceptional performance and technical excellence"</a:t>
             </a:r>
           </a:p>
         </p:txBody>
@@ -8389,13 +9033,13 @@
             <a:pPr algn="l">
               <a:defRPr sz="1200" b="1" i="0">
                 <a:solidFill>
-                  <a:srgbClr val="27AE60"/>
-                </a:solidFill>
-                <a:latin typeface="Calibri"/>
-              </a:defRPr>
-            </a:pPr>
-            <a:r>
-              <a:t>Leadership · Mentorship</a:t>
+                  <a:srgbClr val="2196F3"/>
+                </a:solidFill>
+                <a:latin typeface="Calibri"/>
+              </a:defRPr>
+            </a:pPr>
+            <a:r>
+              <a:t>BRAIN · EXCELLENCE</a:t>
             </a:r>
           </a:p>
         </p:txBody>
@@ -8441,7 +9085,7 @@
             <a:avLst/>
           </a:prstGeom>
           <a:solidFill>
-            <a:srgbClr val="27AE60"/>
+            <a:srgbClr val="9C27B0"/>
           </a:solidFill>
           <a:ln>
             <a:noFill/>
@@ -8494,13 +9138,13 @@
             <a:pPr algn="l">
               <a:defRPr sz="1000" b="1">
                 <a:solidFill>
-                  <a:srgbClr val="27AE60"/>
-                </a:solidFill>
-                <a:latin typeface="Calibri"/>
-              </a:defRPr>
-            </a:pPr>
-            <a:r>
-              <a:t>🔧  CLAPS</a:t>
+                  <a:srgbClr val="9C27B0"/>
+                </a:solidFill>
+                <a:latin typeface="Calibri"/>
+              </a:defRPr>
+            </a:pPr>
+            <a:r>
+              <a:t>🚀  CLAPS</a:t>
             </a:r>
           </a:p>
         </p:txBody>
@@ -8530,13 +9174,13 @@
             <a:pPr algn="l">
               <a:defRPr sz="3200" b="1" i="0">
                 <a:solidFill>
-                  <a:srgbClr val="27AE60"/>
-                </a:solidFill>
-                <a:latin typeface="Calibri"/>
-              </a:defRPr>
-            </a:pPr>
-            <a:r>
-              <a:t>DevOps Recognition</a:t>
+                  <a:srgbClr val="9C27B0"/>
+                </a:solidFill>
+                <a:latin typeface="Calibri"/>
+              </a:defRPr>
+            </a:pPr>
+            <a:r>
+              <a:t>Team Collaboration</a:t>
             </a:r>
           </a:p>
         </p:txBody>
@@ -8566,13 +9210,13 @@
             <a:pPr algn="l">
               <a:defRPr sz="2800" b="1" i="0">
                 <a:solidFill>
-                  <a:srgbClr val="27AE60"/>
-                </a:solidFill>
-                <a:latin typeface="Calibri"/>
-              </a:defRPr>
-            </a:pPr>
-            <a:r>
-              <a:t>30</a:t>
+                  <a:srgbClr val="9C27B0"/>
+                </a:solidFill>
+                <a:latin typeface="Calibri"/>
+              </a:defRPr>
+            </a:pPr>
+            <a:r>
+              <a:t>40</a:t>
             </a:r>
           </a:p>
         </p:txBody>
@@ -8608,7 +9252,7 @@
               </a:defRPr>
             </a:pPr>
             <a:r>
-              <a:t>from Gleb Krahotkin</a:t>
+              <a:t>from Anastasia Sokolova</a:t>
             </a:r>
           </a:p>
         </p:txBody>
@@ -8644,7 +9288,7 @@
               </a:defRPr>
             </a:pPr>
             <a:r>
-              <a:t>to: Hierman Pelekh</a:t>
+              <a:t>to: Sasha Sakovich</a:t>
             </a:r>
           </a:p>
         </p:txBody>
@@ -8680,7 +9324,7 @@
               </a:defRPr>
             </a:pPr>
             <a:r>
-              <a:t>"Excellent infrastructure and deployment solutions"</a:t>
+              <a:t>"Amazing teamwork and project delivery"</a:t>
             </a:r>
           </a:p>
         </p:txBody>
@@ -8710,13 +9354,13 @@
             <a:pPr algn="l">
               <a:defRPr sz="1200" b="1" i="0">
                 <a:solidFill>
-                  <a:srgbClr val="27AE60"/>
-                </a:solidFill>
-                <a:latin typeface="Calibri"/>
-              </a:defRPr>
-            </a:pPr>
-            <a:r>
-              <a:t>Technical Excellence · Reliability</a:t>
+                  <a:srgbClr val="9C27B0"/>
+                </a:solidFill>
+                <a:latin typeface="Calibri"/>
+              </a:defRPr>
+            </a:pPr>
+            <a:r>
+              <a:t>TEAMWORK · EXCELLENCE</a:t>
             </a:r>
           </a:p>
         </p:txBody>
